--- a/SE202526/Management/Scrum Board.pptx
+++ b/SE202526/Management/Scrum Board.pptx
@@ -19,6 +19,7 @@
     <p:sldId id="267" r:id="rId14"/>
     <p:sldId id="268" r:id="rId15"/>
     <p:sldId id="269" r:id="rId16"/>
+    <p:sldId id="270" r:id="rId17"/>
   </p:sldIdLst>
   <p:sldSz cx="21599525" cy="10799763"/>
   <p:notesSz cx="7559675" cy="10691813"/>
@@ -26,6 +27,1942 @@
 </file>
 
 <file path=ppt/slideLayouts/slideLayout1.xml><?xml version="1.0" encoding="utf-8"?>
+<p:sldLayout xmlns:a="http://schemas.openxmlformats.org/drawingml/2006/main" xmlns:p="http://schemas.openxmlformats.org/presentationml/2006/main" xmlns:r="http://schemas.openxmlformats.org/officeDocument/2006/relationships" xmlns:p14="http://schemas.microsoft.com/office/powerpoint/2010/main" xmlns:p15="http://schemas.microsoft.com/office/powerpoint/2012/main" xmlns:mc="http://schemas.openxmlformats.org/markup-compatibility/2006" type="twoObj" preserve="1">
+  <p:cSld name="TITLE_AND_TWO_COLUMNS">
+    <p:bg>
+      <p:bgPr>
+        <a:solidFill>
+          <a:schemeClr val="lt1"/>
+        </a:solidFill>
+      </p:bgPr>
+    </p:bg>
+    <p:spTree>
+      <p:nvGrpSpPr>
+        <p:cNvPr id="1" name=""/>
+        <p:cNvGrpSpPr/>
+        <p:nvPr/>
+      </p:nvGrpSpPr>
+      <p:grpSpPr>
+        <a:xfrm>
+          <a:off x="0" y="0"/>
+          <a:ext cx="0" cy="0"/>
+          <a:chOff x="0" y="0"/>
+          <a:chExt cx="0" cy="0"/>
+        </a:xfrm>
+      </p:grpSpPr>
+      <p:sp>
+        <p:nvSpPr>
+          <p:cNvPr id="0" name="PlaceHolder 1"/>
+          <p:cNvSpPr>
+            <a:spLocks noGrp="1"/>
+          </p:cNvSpPr>
+          <p:nvPr>
+            <p:ph type="title"/>
+          </p:nvPr>
+        </p:nvSpPr>
+        <p:spPr>
+          <a:xfrm>
+            <a:off x="736200" y="934560"/>
+            <a:ext cx="20126520" cy="1201320"/>
+          </a:xfrm>
+          <a:prstGeom prst="rect">
+            <a:avLst/>
+          </a:prstGeom>
+          <a:noFill/>
+          <a:ln w="0">
+            <a:noFill/>
+          </a:ln>
+        </p:spPr>
+        <p:txBody>
+          <a:bodyPr lIns="91440" rIns="91440" tIns="91440" bIns="91440" anchor="t">
+            <a:normAutofit/>
+          </a:bodyPr>
+          <a:p>
+            <a:pPr indent="0">
+              <a:lnSpc>
+                <a:spcPct val="100000"/>
+              </a:lnSpc>
+              <a:buNone/>
+              <a:tabLst>
+                <a:tab algn="l" pos="0"/>
+              </a:tabLst>
+            </a:pPr>
+            <a:r>
+              <a:rPr b="0" lang="pt-PT" sz="2800" strike="noStrike" u="none">
+                <a:solidFill>
+                  <a:srgbClr val="000000"/>
+                </a:solidFill>
+                <a:effectLst/>
+                <a:uFillTx/>
+                <a:latin typeface="Arial"/>
+              </a:rPr>
+              <a:t>Click to edit the title text format</a:t>
+            </a:r>
+            <a:endParaRPr b="0" lang="pt-PT" sz="2800" strike="noStrike" u="none">
+              <a:solidFill>
+                <a:srgbClr val="000000"/>
+              </a:solidFill>
+              <a:effectLst/>
+              <a:uFillTx/>
+              <a:latin typeface="Arial"/>
+            </a:endParaRPr>
+          </a:p>
+        </p:txBody>
+      </p:sp>
+      <p:sp>
+        <p:nvSpPr>
+          <p:cNvPr id="1" name="PlaceHolder 2"/>
+          <p:cNvSpPr>
+            <a:spLocks noGrp="1"/>
+          </p:cNvSpPr>
+          <p:nvPr>
+            <p:ph type="body"/>
+          </p:nvPr>
+        </p:nvSpPr>
+        <p:spPr>
+          <a:xfrm>
+            <a:off x="736200" y="2419920"/>
+            <a:ext cx="9447480" cy="7172640"/>
+          </a:xfrm>
+          <a:prstGeom prst="rect">
+            <a:avLst/>
+          </a:prstGeom>
+          <a:noFill/>
+          <a:ln w="0">
+            <a:noFill/>
+          </a:ln>
+        </p:spPr>
+        <p:txBody>
+          <a:bodyPr lIns="91440" rIns="91440" tIns="91440" bIns="91440" anchor="t">
+            <a:normAutofit/>
+          </a:bodyPr>
+          <a:p>
+            <a:pPr marL="432000" indent="-324000">
+              <a:lnSpc>
+                <a:spcPct val="100000"/>
+              </a:lnSpc>
+              <a:spcBef>
+                <a:spcPts val="1417"/>
+              </a:spcBef>
+              <a:buClr>
+                <a:srgbClr val="000000"/>
+              </a:buClr>
+              <a:buSzPct val="45000"/>
+              <a:buFont typeface="Wingdings" charset="2"/>
+              <a:buChar char=""/>
+            </a:pPr>
+            <a:r>
+              <a:rPr b="0" lang="pt-PT" sz="1400" strike="noStrike" u="none">
+                <a:solidFill>
+                  <a:srgbClr val="000000"/>
+                </a:solidFill>
+                <a:effectLst/>
+                <a:uFillTx/>
+                <a:latin typeface="Arial"/>
+              </a:rPr>
+              <a:t>Click to edit the outline text format</a:t>
+            </a:r>
+            <a:endParaRPr b="0" lang="pt-PT" sz="1400" strike="noStrike" u="none">
+              <a:solidFill>
+                <a:srgbClr val="000000"/>
+              </a:solidFill>
+              <a:effectLst/>
+              <a:uFillTx/>
+              <a:latin typeface="Arial"/>
+            </a:endParaRPr>
+          </a:p>
+          <a:p>
+            <a:pPr lvl="1" marL="864000" indent="-324000">
+              <a:lnSpc>
+                <a:spcPct val="100000"/>
+              </a:lnSpc>
+              <a:spcBef>
+                <a:spcPts val="1134"/>
+              </a:spcBef>
+              <a:buClr>
+                <a:srgbClr val="000000"/>
+              </a:buClr>
+              <a:buSzPct val="75000"/>
+              <a:buFont typeface="Symbol" charset="2"/>
+              <a:buChar char=""/>
+            </a:pPr>
+            <a:r>
+              <a:rPr b="0" lang="pt-PT" sz="1400" strike="noStrike" u="none">
+                <a:solidFill>
+                  <a:srgbClr val="000000"/>
+                </a:solidFill>
+                <a:effectLst/>
+                <a:uFillTx/>
+                <a:latin typeface="Arial"/>
+              </a:rPr>
+              <a:t>Second Outline Level</a:t>
+            </a:r>
+            <a:endParaRPr b="0" lang="pt-PT" sz="1400" strike="noStrike" u="none">
+              <a:solidFill>
+                <a:srgbClr val="000000"/>
+              </a:solidFill>
+              <a:effectLst/>
+              <a:uFillTx/>
+              <a:latin typeface="Arial"/>
+            </a:endParaRPr>
+          </a:p>
+          <a:p>
+            <a:pPr lvl="2" marL="1296000" indent="-288000">
+              <a:lnSpc>
+                <a:spcPct val="100000"/>
+              </a:lnSpc>
+              <a:spcBef>
+                <a:spcPts val="850"/>
+              </a:spcBef>
+              <a:buClr>
+                <a:srgbClr val="000000"/>
+              </a:buClr>
+              <a:buSzPct val="45000"/>
+              <a:buFont typeface="Wingdings" charset="2"/>
+              <a:buChar char=""/>
+            </a:pPr>
+            <a:r>
+              <a:rPr b="0" lang="pt-PT" sz="1400" strike="noStrike" u="none">
+                <a:solidFill>
+                  <a:srgbClr val="000000"/>
+                </a:solidFill>
+                <a:effectLst/>
+                <a:uFillTx/>
+                <a:latin typeface="Arial"/>
+              </a:rPr>
+              <a:t>Third Outline Level</a:t>
+            </a:r>
+            <a:endParaRPr b="0" lang="pt-PT" sz="1400" strike="noStrike" u="none">
+              <a:solidFill>
+                <a:srgbClr val="000000"/>
+              </a:solidFill>
+              <a:effectLst/>
+              <a:uFillTx/>
+              <a:latin typeface="Arial"/>
+            </a:endParaRPr>
+          </a:p>
+          <a:p>
+            <a:pPr lvl="3" marL="1728000" indent="-216000">
+              <a:lnSpc>
+                <a:spcPct val="100000"/>
+              </a:lnSpc>
+              <a:spcBef>
+                <a:spcPts val="567"/>
+              </a:spcBef>
+              <a:buClr>
+                <a:srgbClr val="000000"/>
+              </a:buClr>
+              <a:buSzPct val="75000"/>
+              <a:buFont typeface="Symbol" charset="2"/>
+              <a:buChar char=""/>
+            </a:pPr>
+            <a:r>
+              <a:rPr b="0" lang="pt-PT" sz="1400" strike="noStrike" u="none">
+                <a:solidFill>
+                  <a:srgbClr val="000000"/>
+                </a:solidFill>
+                <a:effectLst/>
+                <a:uFillTx/>
+                <a:latin typeface="Arial"/>
+              </a:rPr>
+              <a:t>Fourth Outline Level</a:t>
+            </a:r>
+            <a:endParaRPr b="0" lang="pt-PT" sz="1400" strike="noStrike" u="none">
+              <a:solidFill>
+                <a:srgbClr val="000000"/>
+              </a:solidFill>
+              <a:effectLst/>
+              <a:uFillTx/>
+              <a:latin typeface="Arial"/>
+            </a:endParaRPr>
+          </a:p>
+          <a:p>
+            <a:pPr lvl="4" marL="2160000" indent="-216000">
+              <a:lnSpc>
+                <a:spcPct val="100000"/>
+              </a:lnSpc>
+              <a:spcBef>
+                <a:spcPts val="283"/>
+              </a:spcBef>
+              <a:buClr>
+                <a:srgbClr val="000000"/>
+              </a:buClr>
+              <a:buSzPct val="45000"/>
+              <a:buFont typeface="Wingdings" charset="2"/>
+              <a:buChar char=""/>
+            </a:pPr>
+            <a:r>
+              <a:rPr b="0" lang="pt-PT" sz="1400" strike="noStrike" u="none">
+                <a:solidFill>
+                  <a:srgbClr val="000000"/>
+                </a:solidFill>
+                <a:effectLst/>
+                <a:uFillTx/>
+                <a:latin typeface="Arial"/>
+              </a:rPr>
+              <a:t>Fifth Outline Level</a:t>
+            </a:r>
+            <a:endParaRPr b="0" lang="pt-PT" sz="1400" strike="noStrike" u="none">
+              <a:solidFill>
+                <a:srgbClr val="000000"/>
+              </a:solidFill>
+              <a:effectLst/>
+              <a:uFillTx/>
+              <a:latin typeface="Arial"/>
+            </a:endParaRPr>
+          </a:p>
+          <a:p>
+            <a:pPr lvl="5" marL="2592000" indent="-216000">
+              <a:lnSpc>
+                <a:spcPct val="100000"/>
+              </a:lnSpc>
+              <a:spcBef>
+                <a:spcPts val="283"/>
+              </a:spcBef>
+              <a:buClr>
+                <a:srgbClr val="000000"/>
+              </a:buClr>
+              <a:buSzPct val="45000"/>
+              <a:buFont typeface="Wingdings" charset="2"/>
+              <a:buChar char=""/>
+            </a:pPr>
+            <a:r>
+              <a:rPr b="0" lang="pt-PT" sz="1400" strike="noStrike" u="none">
+                <a:solidFill>
+                  <a:srgbClr val="000000"/>
+                </a:solidFill>
+                <a:effectLst/>
+                <a:uFillTx/>
+                <a:latin typeface="Arial"/>
+              </a:rPr>
+              <a:t>Sixth Outline Level</a:t>
+            </a:r>
+            <a:endParaRPr b="0" lang="pt-PT" sz="1400" strike="noStrike" u="none">
+              <a:solidFill>
+                <a:srgbClr val="000000"/>
+              </a:solidFill>
+              <a:effectLst/>
+              <a:uFillTx/>
+              <a:latin typeface="Arial"/>
+            </a:endParaRPr>
+          </a:p>
+          <a:p>
+            <a:pPr lvl="6" marL="3024000" indent="-216000">
+              <a:lnSpc>
+                <a:spcPct val="100000"/>
+              </a:lnSpc>
+              <a:spcBef>
+                <a:spcPts val="283"/>
+              </a:spcBef>
+              <a:buClr>
+                <a:srgbClr val="000000"/>
+              </a:buClr>
+              <a:buSzPct val="45000"/>
+              <a:buFont typeface="Wingdings" charset="2"/>
+              <a:buChar char=""/>
+            </a:pPr>
+            <a:r>
+              <a:rPr b="0" lang="pt-PT" sz="1400" strike="noStrike" u="none">
+                <a:solidFill>
+                  <a:srgbClr val="000000"/>
+                </a:solidFill>
+                <a:effectLst/>
+                <a:uFillTx/>
+                <a:latin typeface="Arial"/>
+              </a:rPr>
+              <a:t>Seventh Outline Level</a:t>
+            </a:r>
+            <a:endParaRPr b="0" lang="pt-PT" sz="1400" strike="noStrike" u="none">
+              <a:solidFill>
+                <a:srgbClr val="000000"/>
+              </a:solidFill>
+              <a:effectLst/>
+              <a:uFillTx/>
+              <a:latin typeface="Arial"/>
+            </a:endParaRPr>
+          </a:p>
+        </p:txBody>
+      </p:sp>
+      <p:sp>
+        <p:nvSpPr>
+          <p:cNvPr id="2" name="PlaceHolder 3"/>
+          <p:cNvSpPr>
+            <a:spLocks noGrp="1"/>
+          </p:cNvSpPr>
+          <p:nvPr>
+            <p:ph type="body"/>
+          </p:nvPr>
+        </p:nvSpPr>
+        <p:spPr>
+          <a:xfrm>
+            <a:off x="11415240" y="2419920"/>
+            <a:ext cx="9447480" cy="7172640"/>
+          </a:xfrm>
+          <a:prstGeom prst="rect">
+            <a:avLst/>
+          </a:prstGeom>
+          <a:noFill/>
+          <a:ln w="0">
+            <a:noFill/>
+          </a:ln>
+        </p:spPr>
+        <p:txBody>
+          <a:bodyPr lIns="91440" rIns="91440" tIns="91440" bIns="91440" anchor="t">
+            <a:normAutofit/>
+          </a:bodyPr>
+          <a:p>
+            <a:pPr marL="432000" indent="-324000">
+              <a:lnSpc>
+                <a:spcPct val="100000"/>
+              </a:lnSpc>
+              <a:spcBef>
+                <a:spcPts val="1417"/>
+              </a:spcBef>
+              <a:buClr>
+                <a:srgbClr val="000000"/>
+              </a:buClr>
+              <a:buSzPct val="45000"/>
+              <a:buFont typeface="Wingdings" charset="2"/>
+              <a:buChar char=""/>
+            </a:pPr>
+            <a:r>
+              <a:rPr b="0" lang="pt-PT" sz="1400" strike="noStrike" u="none">
+                <a:solidFill>
+                  <a:srgbClr val="000000"/>
+                </a:solidFill>
+                <a:effectLst/>
+                <a:uFillTx/>
+                <a:latin typeface="Arial"/>
+              </a:rPr>
+              <a:t>Click to edit the outline text format</a:t>
+            </a:r>
+            <a:endParaRPr b="0" lang="pt-PT" sz="1400" strike="noStrike" u="none">
+              <a:solidFill>
+                <a:srgbClr val="000000"/>
+              </a:solidFill>
+              <a:effectLst/>
+              <a:uFillTx/>
+              <a:latin typeface="Arial"/>
+            </a:endParaRPr>
+          </a:p>
+          <a:p>
+            <a:pPr lvl="1" marL="864000" indent="-324000">
+              <a:lnSpc>
+                <a:spcPct val="100000"/>
+              </a:lnSpc>
+              <a:spcBef>
+                <a:spcPts val="1134"/>
+              </a:spcBef>
+              <a:buClr>
+                <a:srgbClr val="000000"/>
+              </a:buClr>
+              <a:buSzPct val="75000"/>
+              <a:buFont typeface="Symbol" charset="2"/>
+              <a:buChar char=""/>
+            </a:pPr>
+            <a:r>
+              <a:rPr b="0" lang="pt-PT" sz="1400" strike="noStrike" u="none">
+                <a:solidFill>
+                  <a:srgbClr val="000000"/>
+                </a:solidFill>
+                <a:effectLst/>
+                <a:uFillTx/>
+                <a:latin typeface="Arial"/>
+              </a:rPr>
+              <a:t>Second Outline Level</a:t>
+            </a:r>
+            <a:endParaRPr b="0" lang="pt-PT" sz="1400" strike="noStrike" u="none">
+              <a:solidFill>
+                <a:srgbClr val="000000"/>
+              </a:solidFill>
+              <a:effectLst/>
+              <a:uFillTx/>
+              <a:latin typeface="Arial"/>
+            </a:endParaRPr>
+          </a:p>
+          <a:p>
+            <a:pPr lvl="2" marL="1296000" indent="-288000">
+              <a:lnSpc>
+                <a:spcPct val="100000"/>
+              </a:lnSpc>
+              <a:spcBef>
+                <a:spcPts val="850"/>
+              </a:spcBef>
+              <a:buClr>
+                <a:srgbClr val="000000"/>
+              </a:buClr>
+              <a:buSzPct val="45000"/>
+              <a:buFont typeface="Wingdings" charset="2"/>
+              <a:buChar char=""/>
+            </a:pPr>
+            <a:r>
+              <a:rPr b="0" lang="pt-PT" sz="1400" strike="noStrike" u="none">
+                <a:solidFill>
+                  <a:srgbClr val="000000"/>
+                </a:solidFill>
+                <a:effectLst/>
+                <a:uFillTx/>
+                <a:latin typeface="Arial"/>
+              </a:rPr>
+              <a:t>Third Outline Level</a:t>
+            </a:r>
+            <a:endParaRPr b="0" lang="pt-PT" sz="1400" strike="noStrike" u="none">
+              <a:solidFill>
+                <a:srgbClr val="000000"/>
+              </a:solidFill>
+              <a:effectLst/>
+              <a:uFillTx/>
+              <a:latin typeface="Arial"/>
+            </a:endParaRPr>
+          </a:p>
+          <a:p>
+            <a:pPr lvl="3" marL="1728000" indent="-216000">
+              <a:lnSpc>
+                <a:spcPct val="100000"/>
+              </a:lnSpc>
+              <a:spcBef>
+                <a:spcPts val="567"/>
+              </a:spcBef>
+              <a:buClr>
+                <a:srgbClr val="000000"/>
+              </a:buClr>
+              <a:buSzPct val="75000"/>
+              <a:buFont typeface="Symbol" charset="2"/>
+              <a:buChar char=""/>
+            </a:pPr>
+            <a:r>
+              <a:rPr b="0" lang="pt-PT" sz="1400" strike="noStrike" u="none">
+                <a:solidFill>
+                  <a:srgbClr val="000000"/>
+                </a:solidFill>
+                <a:effectLst/>
+                <a:uFillTx/>
+                <a:latin typeface="Arial"/>
+              </a:rPr>
+              <a:t>Fourth Outline Level</a:t>
+            </a:r>
+            <a:endParaRPr b="0" lang="pt-PT" sz="1400" strike="noStrike" u="none">
+              <a:solidFill>
+                <a:srgbClr val="000000"/>
+              </a:solidFill>
+              <a:effectLst/>
+              <a:uFillTx/>
+              <a:latin typeface="Arial"/>
+            </a:endParaRPr>
+          </a:p>
+          <a:p>
+            <a:pPr lvl="4" marL="2160000" indent="-216000">
+              <a:lnSpc>
+                <a:spcPct val="100000"/>
+              </a:lnSpc>
+              <a:spcBef>
+                <a:spcPts val="283"/>
+              </a:spcBef>
+              <a:buClr>
+                <a:srgbClr val="000000"/>
+              </a:buClr>
+              <a:buSzPct val="45000"/>
+              <a:buFont typeface="Wingdings" charset="2"/>
+              <a:buChar char=""/>
+            </a:pPr>
+            <a:r>
+              <a:rPr b="0" lang="pt-PT" sz="1400" strike="noStrike" u="none">
+                <a:solidFill>
+                  <a:srgbClr val="000000"/>
+                </a:solidFill>
+                <a:effectLst/>
+                <a:uFillTx/>
+                <a:latin typeface="Arial"/>
+              </a:rPr>
+              <a:t>Fifth Outline Level</a:t>
+            </a:r>
+            <a:endParaRPr b="0" lang="pt-PT" sz="1400" strike="noStrike" u="none">
+              <a:solidFill>
+                <a:srgbClr val="000000"/>
+              </a:solidFill>
+              <a:effectLst/>
+              <a:uFillTx/>
+              <a:latin typeface="Arial"/>
+            </a:endParaRPr>
+          </a:p>
+          <a:p>
+            <a:pPr lvl="5" marL="2592000" indent="-216000">
+              <a:lnSpc>
+                <a:spcPct val="100000"/>
+              </a:lnSpc>
+              <a:spcBef>
+                <a:spcPts val="283"/>
+              </a:spcBef>
+              <a:buClr>
+                <a:srgbClr val="000000"/>
+              </a:buClr>
+              <a:buSzPct val="45000"/>
+              <a:buFont typeface="Wingdings" charset="2"/>
+              <a:buChar char=""/>
+            </a:pPr>
+            <a:r>
+              <a:rPr b="0" lang="pt-PT" sz="1400" strike="noStrike" u="none">
+                <a:solidFill>
+                  <a:srgbClr val="000000"/>
+                </a:solidFill>
+                <a:effectLst/>
+                <a:uFillTx/>
+                <a:latin typeface="Arial"/>
+              </a:rPr>
+              <a:t>Sixth Outline Level</a:t>
+            </a:r>
+            <a:endParaRPr b="0" lang="pt-PT" sz="1400" strike="noStrike" u="none">
+              <a:solidFill>
+                <a:srgbClr val="000000"/>
+              </a:solidFill>
+              <a:effectLst/>
+              <a:uFillTx/>
+              <a:latin typeface="Arial"/>
+            </a:endParaRPr>
+          </a:p>
+          <a:p>
+            <a:pPr lvl="6" marL="3024000" indent="-216000">
+              <a:lnSpc>
+                <a:spcPct val="100000"/>
+              </a:lnSpc>
+              <a:spcBef>
+                <a:spcPts val="283"/>
+              </a:spcBef>
+              <a:buClr>
+                <a:srgbClr val="000000"/>
+              </a:buClr>
+              <a:buSzPct val="45000"/>
+              <a:buFont typeface="Wingdings" charset="2"/>
+              <a:buChar char=""/>
+            </a:pPr>
+            <a:r>
+              <a:rPr b="0" lang="pt-PT" sz="1400" strike="noStrike" u="none">
+                <a:solidFill>
+                  <a:srgbClr val="000000"/>
+                </a:solidFill>
+                <a:effectLst/>
+                <a:uFillTx/>
+                <a:latin typeface="Arial"/>
+              </a:rPr>
+              <a:t>Seventh Outline Level</a:t>
+            </a:r>
+            <a:endParaRPr b="0" lang="pt-PT" sz="1400" strike="noStrike" u="none">
+              <a:solidFill>
+                <a:srgbClr val="000000"/>
+              </a:solidFill>
+              <a:effectLst/>
+              <a:uFillTx/>
+              <a:latin typeface="Arial"/>
+            </a:endParaRPr>
+          </a:p>
+        </p:txBody>
+      </p:sp>
+      <p:sp>
+        <p:nvSpPr>
+          <p:cNvPr id="3" name="PlaceHolder 4"/>
+          <p:cNvSpPr>
+            <a:spLocks noGrp="1"/>
+          </p:cNvSpPr>
+          <p:nvPr>
+            <p:ph type="sldNum" idx="1"/>
+          </p:nvPr>
+        </p:nvSpPr>
+        <p:spPr>
+          <a:xfrm>
+            <a:off x="20013840" y="9791640"/>
+            <a:ext cx="1294920" cy="825840"/>
+          </a:xfrm>
+          <a:prstGeom prst="rect">
+            <a:avLst/>
+          </a:prstGeom>
+          <a:noFill/>
+          <a:ln w="0">
+            <a:noFill/>
+          </a:ln>
+        </p:spPr>
+        <p:txBody>
+          <a:bodyPr lIns="91440" rIns="91440" tIns="91440" bIns="91440" anchor="ctr">
+            <a:normAutofit/>
+          </a:bodyPr>
+          <a:lstStyle>
+            <a:lvl1pPr indent="0" algn="r">
+              <a:lnSpc>
+                <a:spcPct val="100000"/>
+              </a:lnSpc>
+              <a:buNone/>
+              <a:tabLst>
+                <a:tab algn="l" pos="0"/>
+              </a:tabLst>
+              <a:defRPr b="0" lang="en-GB" sz="1000" strike="noStrike" u="none">
+                <a:solidFill>
+                  <a:schemeClr val="dk2"/>
+                </a:solidFill>
+                <a:effectLst/>
+                <a:uFillTx/>
+                <a:latin typeface="Arial"/>
+                <a:ea typeface="Arial"/>
+              </a:defRPr>
+            </a:lvl1pPr>
+          </a:lstStyle>
+          <a:p>
+            <a:pPr indent="0" algn="r">
+              <a:lnSpc>
+                <a:spcPct val="100000"/>
+              </a:lnSpc>
+              <a:buNone/>
+              <a:tabLst>
+                <a:tab algn="l" pos="0"/>
+              </a:tabLst>
+            </a:pPr>
+            <a:fld id="{DF2B2160-2332-4633-9D1D-7580B4A1DC51}" type="slidenum">
+              <a:rPr b="0" lang="en-GB" sz="1000" strike="noStrike" u="none">
+                <a:solidFill>
+                  <a:schemeClr val="dk2"/>
+                </a:solidFill>
+                <a:effectLst/>
+                <a:uFillTx/>
+                <a:latin typeface="Arial"/>
+                <a:ea typeface="Arial"/>
+              </a:rPr>
+              <a:t>&lt;number&gt;</a:t>
+            </a:fld>
+            <a:endParaRPr b="0" lang="pt-PT" sz="1000" strike="noStrike" u="none">
+              <a:solidFill>
+                <a:srgbClr val="000000"/>
+              </a:solidFill>
+              <a:effectLst/>
+              <a:uFillTx/>
+              <a:latin typeface="Times New Roman"/>
+            </a:endParaRPr>
+          </a:p>
+        </p:txBody>
+      </p:sp>
+    </p:spTree>
+  </p:cSld>
+</p:sldLayout>
+</file>
+
+<file path=ppt/slideLayouts/slideLayout10.xml><?xml version="1.0" encoding="utf-8"?>
+<p:sldLayout xmlns:a="http://schemas.openxmlformats.org/drawingml/2006/main" xmlns:p="http://schemas.openxmlformats.org/presentationml/2006/main" xmlns:r="http://schemas.openxmlformats.org/officeDocument/2006/relationships" xmlns:p14="http://schemas.microsoft.com/office/powerpoint/2010/main" xmlns:p15="http://schemas.microsoft.com/office/powerpoint/2012/main" xmlns:mc="http://schemas.openxmlformats.org/markup-compatibility/2006" type="blank" preserve="1">
+  <p:cSld name="SECTION_HEADER">
+    <p:bg>
+      <p:bgPr>
+        <a:solidFill>
+          <a:schemeClr val="lt1"/>
+        </a:solidFill>
+      </p:bgPr>
+    </p:bg>
+    <p:spTree>
+      <p:nvGrpSpPr>
+        <p:cNvPr id="1" name=""/>
+        <p:cNvGrpSpPr/>
+        <p:nvPr/>
+      </p:nvGrpSpPr>
+      <p:grpSpPr>
+        <a:xfrm>
+          <a:off x="0" y="0"/>
+          <a:ext cx="0" cy="0"/>
+          <a:chOff x="0" y="0"/>
+          <a:chExt cx="0" cy="0"/>
+        </a:xfrm>
+      </p:grpSpPr>
+      <p:sp>
+        <p:nvSpPr>
+          <p:cNvPr id="24" name="PlaceHolder 1"/>
+          <p:cNvSpPr>
+            <a:spLocks noGrp="1"/>
+          </p:cNvSpPr>
+          <p:nvPr>
+            <p:ph type="title"/>
+          </p:nvPr>
+        </p:nvSpPr>
+        <p:spPr>
+          <a:xfrm>
+            <a:off x="736200" y="4516200"/>
+            <a:ext cx="20126520" cy="1766520"/>
+          </a:xfrm>
+          <a:prstGeom prst="rect">
+            <a:avLst/>
+          </a:prstGeom>
+          <a:noFill/>
+          <a:ln w="0">
+            <a:noFill/>
+          </a:ln>
+        </p:spPr>
+        <p:txBody>
+          <a:bodyPr lIns="91440" rIns="91440" tIns="91440" bIns="91440" anchor="ctr">
+            <a:normAutofit/>
+          </a:bodyPr>
+          <a:p>
+            <a:pPr indent="0">
+              <a:lnSpc>
+                <a:spcPct val="100000"/>
+              </a:lnSpc>
+              <a:buNone/>
+              <a:tabLst>
+                <a:tab algn="l" pos="0"/>
+              </a:tabLst>
+            </a:pPr>
+            <a:r>
+              <a:rPr b="0" lang="pt-PT" sz="3600" strike="noStrike" u="none">
+                <a:solidFill>
+                  <a:srgbClr val="000000"/>
+                </a:solidFill>
+                <a:effectLst/>
+                <a:uFillTx/>
+                <a:latin typeface="Arial"/>
+              </a:rPr>
+              <a:t>Click to edit the title text format</a:t>
+            </a:r>
+            <a:endParaRPr b="0" lang="pt-PT" sz="3600" strike="noStrike" u="none">
+              <a:solidFill>
+                <a:srgbClr val="000000"/>
+              </a:solidFill>
+              <a:effectLst/>
+              <a:uFillTx/>
+              <a:latin typeface="Arial"/>
+            </a:endParaRPr>
+          </a:p>
+        </p:txBody>
+      </p:sp>
+      <p:sp>
+        <p:nvSpPr>
+          <p:cNvPr id="25" name="PlaceHolder 2"/>
+          <p:cNvSpPr>
+            <a:spLocks noGrp="1"/>
+          </p:cNvSpPr>
+          <p:nvPr>
+            <p:ph type="sldNum" idx="10"/>
+          </p:nvPr>
+        </p:nvSpPr>
+        <p:spPr>
+          <a:xfrm>
+            <a:off x="20013840" y="9791640"/>
+            <a:ext cx="1294920" cy="825840"/>
+          </a:xfrm>
+          <a:prstGeom prst="rect">
+            <a:avLst/>
+          </a:prstGeom>
+          <a:noFill/>
+          <a:ln w="0">
+            <a:noFill/>
+          </a:ln>
+        </p:spPr>
+        <p:txBody>
+          <a:bodyPr lIns="91440" rIns="91440" tIns="91440" bIns="91440" anchor="ctr">
+            <a:normAutofit/>
+          </a:bodyPr>
+          <a:lstStyle>
+            <a:lvl1pPr indent="0" algn="r">
+              <a:lnSpc>
+                <a:spcPct val="100000"/>
+              </a:lnSpc>
+              <a:buNone/>
+              <a:tabLst>
+                <a:tab algn="l" pos="0"/>
+              </a:tabLst>
+              <a:defRPr b="0" lang="en-GB" sz="1000" strike="noStrike" u="none">
+                <a:solidFill>
+                  <a:schemeClr val="dk2"/>
+                </a:solidFill>
+                <a:effectLst/>
+                <a:uFillTx/>
+                <a:latin typeface="Arial"/>
+                <a:ea typeface="Arial"/>
+              </a:defRPr>
+            </a:lvl1pPr>
+          </a:lstStyle>
+          <a:p>
+            <a:pPr indent="0" algn="r">
+              <a:lnSpc>
+                <a:spcPct val="100000"/>
+              </a:lnSpc>
+              <a:buNone/>
+              <a:tabLst>
+                <a:tab algn="l" pos="0"/>
+              </a:tabLst>
+            </a:pPr>
+            <a:fld id="{E22F9B64-883D-4250-AD13-3F0EE906167D}" type="slidenum">
+              <a:rPr b="0" lang="en-GB" sz="1000" strike="noStrike" u="none">
+                <a:solidFill>
+                  <a:schemeClr val="dk2"/>
+                </a:solidFill>
+                <a:effectLst/>
+                <a:uFillTx/>
+                <a:latin typeface="Arial"/>
+                <a:ea typeface="Arial"/>
+              </a:rPr>
+              <a:t>&lt;number&gt;</a:t>
+            </a:fld>
+            <a:endParaRPr b="0" lang="pt-PT" sz="1000" strike="noStrike" u="none">
+              <a:solidFill>
+                <a:srgbClr val="000000"/>
+              </a:solidFill>
+              <a:effectLst/>
+              <a:uFillTx/>
+              <a:latin typeface="Times New Roman"/>
+            </a:endParaRPr>
+          </a:p>
+        </p:txBody>
+      </p:sp>
+    </p:spTree>
+  </p:cSld>
+</p:sldLayout>
+</file>
+
+<file path=ppt/slideLayouts/slideLayout11.xml><?xml version="1.0" encoding="utf-8"?>
+<p:sldLayout xmlns:a="http://schemas.openxmlformats.org/drawingml/2006/main" xmlns:p="http://schemas.openxmlformats.org/presentationml/2006/main" xmlns:r="http://schemas.openxmlformats.org/officeDocument/2006/relationships" xmlns:p14="http://schemas.microsoft.com/office/powerpoint/2010/main" xmlns:p15="http://schemas.microsoft.com/office/powerpoint/2012/main" xmlns:mc="http://schemas.openxmlformats.org/markup-compatibility/2006" type="tx" preserve="1">
+  <p:cSld name="TITLE_AND_BODY">
+    <p:bg>
+      <p:bgPr>
+        <a:solidFill>
+          <a:schemeClr val="lt1"/>
+        </a:solidFill>
+      </p:bgPr>
+    </p:bg>
+    <p:spTree>
+      <p:nvGrpSpPr>
+        <p:cNvPr id="1" name=""/>
+        <p:cNvGrpSpPr/>
+        <p:nvPr/>
+      </p:nvGrpSpPr>
+      <p:grpSpPr>
+        <a:xfrm>
+          <a:off x="0" y="0"/>
+          <a:ext cx="0" cy="0"/>
+          <a:chOff x="0" y="0"/>
+          <a:chExt cx="0" cy="0"/>
+        </a:xfrm>
+      </p:grpSpPr>
+      <p:sp>
+        <p:nvSpPr>
+          <p:cNvPr id="26" name="PlaceHolder 1"/>
+          <p:cNvSpPr>
+            <a:spLocks noGrp="1"/>
+          </p:cNvSpPr>
+          <p:nvPr>
+            <p:ph type="title"/>
+          </p:nvPr>
+        </p:nvSpPr>
+        <p:spPr>
+          <a:xfrm>
+            <a:off x="736200" y="934560"/>
+            <a:ext cx="20126520" cy="1201320"/>
+          </a:xfrm>
+          <a:prstGeom prst="rect">
+            <a:avLst/>
+          </a:prstGeom>
+          <a:noFill/>
+          <a:ln w="0">
+            <a:noFill/>
+          </a:ln>
+        </p:spPr>
+        <p:txBody>
+          <a:bodyPr lIns="91440" rIns="91440" tIns="91440" bIns="91440" anchor="t">
+            <a:normAutofit/>
+          </a:bodyPr>
+          <a:p>
+            <a:pPr indent="0">
+              <a:lnSpc>
+                <a:spcPct val="100000"/>
+              </a:lnSpc>
+              <a:buNone/>
+              <a:tabLst>
+                <a:tab algn="l" pos="0"/>
+              </a:tabLst>
+            </a:pPr>
+            <a:r>
+              <a:rPr b="0" lang="pt-PT" sz="2800" strike="noStrike" u="none">
+                <a:solidFill>
+                  <a:srgbClr val="000000"/>
+                </a:solidFill>
+                <a:effectLst/>
+                <a:uFillTx/>
+                <a:latin typeface="Arial"/>
+              </a:rPr>
+              <a:t>Click to edit the title text format</a:t>
+            </a:r>
+            <a:endParaRPr b="0" lang="pt-PT" sz="2800" strike="noStrike" u="none">
+              <a:solidFill>
+                <a:srgbClr val="000000"/>
+              </a:solidFill>
+              <a:effectLst/>
+              <a:uFillTx/>
+              <a:latin typeface="Arial"/>
+            </a:endParaRPr>
+          </a:p>
+        </p:txBody>
+      </p:sp>
+      <p:sp>
+        <p:nvSpPr>
+          <p:cNvPr id="27" name="PlaceHolder 2"/>
+          <p:cNvSpPr>
+            <a:spLocks noGrp="1"/>
+          </p:cNvSpPr>
+          <p:nvPr>
+            <p:ph type="body"/>
+          </p:nvPr>
+        </p:nvSpPr>
+        <p:spPr>
+          <a:xfrm>
+            <a:off x="736200" y="2419920"/>
+            <a:ext cx="20126520" cy="7172640"/>
+          </a:xfrm>
+          <a:prstGeom prst="rect">
+            <a:avLst/>
+          </a:prstGeom>
+          <a:noFill/>
+          <a:ln w="0">
+            <a:noFill/>
+          </a:ln>
+        </p:spPr>
+        <p:txBody>
+          <a:bodyPr lIns="91440" rIns="91440" tIns="91440" bIns="91440" anchor="t">
+            <a:normAutofit/>
+          </a:bodyPr>
+          <a:p>
+            <a:pPr marL="432000" indent="-324000">
+              <a:lnSpc>
+                <a:spcPct val="100000"/>
+              </a:lnSpc>
+              <a:spcBef>
+                <a:spcPts val="1417"/>
+              </a:spcBef>
+              <a:buClr>
+                <a:srgbClr val="000000"/>
+              </a:buClr>
+              <a:buSzPct val="45000"/>
+              <a:buFont typeface="Wingdings" charset="2"/>
+              <a:buChar char=""/>
+            </a:pPr>
+            <a:r>
+              <a:rPr b="0" lang="pt-PT" sz="1800" strike="noStrike" u="none">
+                <a:solidFill>
+                  <a:srgbClr val="000000"/>
+                </a:solidFill>
+                <a:effectLst/>
+                <a:uFillTx/>
+                <a:latin typeface="Arial"/>
+              </a:rPr>
+              <a:t>Click to edit the outline text format</a:t>
+            </a:r>
+            <a:endParaRPr b="0" lang="pt-PT" sz="1800" strike="noStrike" u="none">
+              <a:solidFill>
+                <a:srgbClr val="000000"/>
+              </a:solidFill>
+              <a:effectLst/>
+              <a:uFillTx/>
+              <a:latin typeface="Arial"/>
+            </a:endParaRPr>
+          </a:p>
+          <a:p>
+            <a:pPr lvl="1" marL="864000" indent="-324000">
+              <a:lnSpc>
+                <a:spcPct val="100000"/>
+              </a:lnSpc>
+              <a:spcBef>
+                <a:spcPts val="1134"/>
+              </a:spcBef>
+              <a:buClr>
+                <a:srgbClr val="000000"/>
+              </a:buClr>
+              <a:buSzPct val="75000"/>
+              <a:buFont typeface="Symbol" charset="2"/>
+              <a:buChar char=""/>
+            </a:pPr>
+            <a:r>
+              <a:rPr b="0" lang="pt-PT" sz="1800" strike="noStrike" u="none">
+                <a:solidFill>
+                  <a:srgbClr val="000000"/>
+                </a:solidFill>
+                <a:effectLst/>
+                <a:uFillTx/>
+                <a:latin typeface="Arial"/>
+              </a:rPr>
+              <a:t>Second Outline Level</a:t>
+            </a:r>
+            <a:endParaRPr b="0" lang="pt-PT" sz="1800" strike="noStrike" u="none">
+              <a:solidFill>
+                <a:srgbClr val="000000"/>
+              </a:solidFill>
+              <a:effectLst/>
+              <a:uFillTx/>
+              <a:latin typeface="Arial"/>
+            </a:endParaRPr>
+          </a:p>
+          <a:p>
+            <a:pPr lvl="2" marL="1296000" indent="-288000">
+              <a:lnSpc>
+                <a:spcPct val="100000"/>
+              </a:lnSpc>
+              <a:spcBef>
+                <a:spcPts val="850"/>
+              </a:spcBef>
+              <a:buClr>
+                <a:srgbClr val="000000"/>
+              </a:buClr>
+              <a:buSzPct val="45000"/>
+              <a:buFont typeface="Wingdings" charset="2"/>
+              <a:buChar char=""/>
+            </a:pPr>
+            <a:r>
+              <a:rPr b="0" lang="pt-PT" sz="1800" strike="noStrike" u="none">
+                <a:solidFill>
+                  <a:srgbClr val="000000"/>
+                </a:solidFill>
+                <a:effectLst/>
+                <a:uFillTx/>
+                <a:latin typeface="Arial"/>
+              </a:rPr>
+              <a:t>Third Outline Level</a:t>
+            </a:r>
+            <a:endParaRPr b="0" lang="pt-PT" sz="1800" strike="noStrike" u="none">
+              <a:solidFill>
+                <a:srgbClr val="000000"/>
+              </a:solidFill>
+              <a:effectLst/>
+              <a:uFillTx/>
+              <a:latin typeface="Arial"/>
+            </a:endParaRPr>
+          </a:p>
+          <a:p>
+            <a:pPr lvl="3" marL="1728000" indent="-216000">
+              <a:lnSpc>
+                <a:spcPct val="100000"/>
+              </a:lnSpc>
+              <a:spcBef>
+                <a:spcPts val="567"/>
+              </a:spcBef>
+              <a:buClr>
+                <a:srgbClr val="000000"/>
+              </a:buClr>
+              <a:buSzPct val="75000"/>
+              <a:buFont typeface="Symbol" charset="2"/>
+              <a:buChar char=""/>
+            </a:pPr>
+            <a:r>
+              <a:rPr b="0" lang="pt-PT" sz="1800" strike="noStrike" u="none">
+                <a:solidFill>
+                  <a:srgbClr val="000000"/>
+                </a:solidFill>
+                <a:effectLst/>
+                <a:uFillTx/>
+                <a:latin typeface="Arial"/>
+              </a:rPr>
+              <a:t>Fourth Outline Level</a:t>
+            </a:r>
+            <a:endParaRPr b="0" lang="pt-PT" sz="1800" strike="noStrike" u="none">
+              <a:solidFill>
+                <a:srgbClr val="000000"/>
+              </a:solidFill>
+              <a:effectLst/>
+              <a:uFillTx/>
+              <a:latin typeface="Arial"/>
+            </a:endParaRPr>
+          </a:p>
+          <a:p>
+            <a:pPr lvl="4" marL="2160000" indent="-216000">
+              <a:lnSpc>
+                <a:spcPct val="100000"/>
+              </a:lnSpc>
+              <a:spcBef>
+                <a:spcPts val="283"/>
+              </a:spcBef>
+              <a:buClr>
+                <a:srgbClr val="000000"/>
+              </a:buClr>
+              <a:buSzPct val="45000"/>
+              <a:buFont typeface="Wingdings" charset="2"/>
+              <a:buChar char=""/>
+            </a:pPr>
+            <a:r>
+              <a:rPr b="0" lang="pt-PT" sz="1800" strike="noStrike" u="none">
+                <a:solidFill>
+                  <a:srgbClr val="000000"/>
+                </a:solidFill>
+                <a:effectLst/>
+                <a:uFillTx/>
+                <a:latin typeface="Arial"/>
+              </a:rPr>
+              <a:t>Fifth Outline Level</a:t>
+            </a:r>
+            <a:endParaRPr b="0" lang="pt-PT" sz="1800" strike="noStrike" u="none">
+              <a:solidFill>
+                <a:srgbClr val="000000"/>
+              </a:solidFill>
+              <a:effectLst/>
+              <a:uFillTx/>
+              <a:latin typeface="Arial"/>
+            </a:endParaRPr>
+          </a:p>
+          <a:p>
+            <a:pPr lvl="5" marL="2592000" indent="-216000">
+              <a:lnSpc>
+                <a:spcPct val="100000"/>
+              </a:lnSpc>
+              <a:spcBef>
+                <a:spcPts val="283"/>
+              </a:spcBef>
+              <a:buClr>
+                <a:srgbClr val="000000"/>
+              </a:buClr>
+              <a:buSzPct val="45000"/>
+              <a:buFont typeface="Wingdings" charset="2"/>
+              <a:buChar char=""/>
+            </a:pPr>
+            <a:r>
+              <a:rPr b="0" lang="pt-PT" sz="1800" strike="noStrike" u="none">
+                <a:solidFill>
+                  <a:srgbClr val="000000"/>
+                </a:solidFill>
+                <a:effectLst/>
+                <a:uFillTx/>
+                <a:latin typeface="Arial"/>
+              </a:rPr>
+              <a:t>Sixth Outline Level</a:t>
+            </a:r>
+            <a:endParaRPr b="0" lang="pt-PT" sz="1800" strike="noStrike" u="none">
+              <a:solidFill>
+                <a:srgbClr val="000000"/>
+              </a:solidFill>
+              <a:effectLst/>
+              <a:uFillTx/>
+              <a:latin typeface="Arial"/>
+            </a:endParaRPr>
+          </a:p>
+          <a:p>
+            <a:pPr lvl="6" marL="3024000" indent="-216000">
+              <a:lnSpc>
+                <a:spcPct val="100000"/>
+              </a:lnSpc>
+              <a:spcBef>
+                <a:spcPts val="283"/>
+              </a:spcBef>
+              <a:buClr>
+                <a:srgbClr val="000000"/>
+              </a:buClr>
+              <a:buSzPct val="45000"/>
+              <a:buFont typeface="Wingdings" charset="2"/>
+              <a:buChar char=""/>
+            </a:pPr>
+            <a:r>
+              <a:rPr b="0" lang="pt-PT" sz="1800" strike="noStrike" u="none">
+                <a:solidFill>
+                  <a:srgbClr val="000000"/>
+                </a:solidFill>
+                <a:effectLst/>
+                <a:uFillTx/>
+                <a:latin typeface="Arial"/>
+              </a:rPr>
+              <a:t>Seventh Outline Level</a:t>
+            </a:r>
+            <a:endParaRPr b="0" lang="pt-PT" sz="1800" strike="noStrike" u="none">
+              <a:solidFill>
+                <a:srgbClr val="000000"/>
+              </a:solidFill>
+              <a:effectLst/>
+              <a:uFillTx/>
+              <a:latin typeface="Arial"/>
+            </a:endParaRPr>
+          </a:p>
+        </p:txBody>
+      </p:sp>
+      <p:sp>
+        <p:nvSpPr>
+          <p:cNvPr id="28" name="PlaceHolder 3"/>
+          <p:cNvSpPr>
+            <a:spLocks noGrp="1"/>
+          </p:cNvSpPr>
+          <p:nvPr>
+            <p:ph type="sldNum" idx="11"/>
+          </p:nvPr>
+        </p:nvSpPr>
+        <p:spPr>
+          <a:xfrm>
+            <a:off x="20013840" y="9791640"/>
+            <a:ext cx="1294920" cy="825840"/>
+          </a:xfrm>
+          <a:prstGeom prst="rect">
+            <a:avLst/>
+          </a:prstGeom>
+          <a:noFill/>
+          <a:ln w="0">
+            <a:noFill/>
+          </a:ln>
+        </p:spPr>
+        <p:txBody>
+          <a:bodyPr lIns="91440" rIns="91440" tIns="91440" bIns="91440" anchor="ctr">
+            <a:normAutofit/>
+          </a:bodyPr>
+          <a:lstStyle>
+            <a:lvl1pPr indent="0" algn="r">
+              <a:lnSpc>
+                <a:spcPct val="100000"/>
+              </a:lnSpc>
+              <a:buNone/>
+              <a:tabLst>
+                <a:tab algn="l" pos="0"/>
+              </a:tabLst>
+              <a:defRPr b="0" lang="en-GB" sz="1000" strike="noStrike" u="none">
+                <a:solidFill>
+                  <a:schemeClr val="dk2"/>
+                </a:solidFill>
+                <a:effectLst/>
+                <a:uFillTx/>
+                <a:latin typeface="Arial"/>
+                <a:ea typeface="Arial"/>
+              </a:defRPr>
+            </a:lvl1pPr>
+          </a:lstStyle>
+          <a:p>
+            <a:pPr indent="0" algn="r">
+              <a:lnSpc>
+                <a:spcPct val="100000"/>
+              </a:lnSpc>
+              <a:buNone/>
+              <a:tabLst>
+                <a:tab algn="l" pos="0"/>
+              </a:tabLst>
+            </a:pPr>
+            <a:fld id="{DA04AA69-5DDA-47D3-B0E4-8E06EA9FBBE4}" type="slidenum">
+              <a:rPr b="0" lang="en-GB" sz="1000" strike="noStrike" u="none">
+                <a:solidFill>
+                  <a:schemeClr val="dk2"/>
+                </a:solidFill>
+                <a:effectLst/>
+                <a:uFillTx/>
+                <a:latin typeface="Arial"/>
+                <a:ea typeface="Arial"/>
+              </a:rPr>
+              <a:t>&lt;number&gt;</a:t>
+            </a:fld>
+            <a:endParaRPr b="0" lang="pt-PT" sz="1000" strike="noStrike" u="none">
+              <a:solidFill>
+                <a:srgbClr val="000000"/>
+              </a:solidFill>
+              <a:effectLst/>
+              <a:uFillTx/>
+              <a:latin typeface="Times New Roman"/>
+            </a:endParaRPr>
+          </a:p>
+        </p:txBody>
+      </p:sp>
+    </p:spTree>
+  </p:cSld>
+</p:sldLayout>
+</file>
+
+<file path=ppt/slideLayouts/slideLayout2.xml><?xml version="1.0" encoding="utf-8"?>
+<p:sldLayout xmlns:a="http://schemas.openxmlformats.org/drawingml/2006/main" xmlns:p="http://schemas.openxmlformats.org/presentationml/2006/main" xmlns:r="http://schemas.openxmlformats.org/officeDocument/2006/relationships" xmlns:p14="http://schemas.microsoft.com/office/powerpoint/2010/main" xmlns:p15="http://schemas.microsoft.com/office/powerpoint/2012/main" xmlns:mc="http://schemas.openxmlformats.org/markup-compatibility/2006" type="titleOnly" preserve="1">
+  <p:cSld name="TITLE_ONLY">
+    <p:bg>
+      <p:bgPr>
+        <a:solidFill>
+          <a:schemeClr val="lt1"/>
+        </a:solidFill>
+      </p:bgPr>
+    </p:bg>
+    <p:spTree>
+      <p:nvGrpSpPr>
+        <p:cNvPr id="1" name=""/>
+        <p:cNvGrpSpPr/>
+        <p:nvPr/>
+      </p:nvGrpSpPr>
+      <p:grpSpPr>
+        <a:xfrm>
+          <a:off x="0" y="0"/>
+          <a:ext cx="0" cy="0"/>
+          <a:chOff x="0" y="0"/>
+          <a:chExt cx="0" cy="0"/>
+        </a:xfrm>
+      </p:grpSpPr>
+      <p:sp>
+        <p:nvSpPr>
+          <p:cNvPr id="4" name="PlaceHolder 1"/>
+          <p:cNvSpPr>
+            <a:spLocks noGrp="1"/>
+          </p:cNvSpPr>
+          <p:nvPr>
+            <p:ph type="title"/>
+          </p:nvPr>
+        </p:nvSpPr>
+        <p:spPr>
+          <a:xfrm>
+            <a:off x="736200" y="934560"/>
+            <a:ext cx="20126520" cy="1201320"/>
+          </a:xfrm>
+          <a:prstGeom prst="rect">
+            <a:avLst/>
+          </a:prstGeom>
+          <a:noFill/>
+          <a:ln w="0">
+            <a:noFill/>
+          </a:ln>
+        </p:spPr>
+        <p:txBody>
+          <a:bodyPr lIns="91440" rIns="91440" tIns="91440" bIns="91440" anchor="t">
+            <a:normAutofit/>
+          </a:bodyPr>
+          <a:p>
+            <a:pPr indent="0">
+              <a:lnSpc>
+                <a:spcPct val="100000"/>
+              </a:lnSpc>
+              <a:buNone/>
+              <a:tabLst>
+                <a:tab algn="l" pos="0"/>
+              </a:tabLst>
+            </a:pPr>
+            <a:r>
+              <a:rPr b="0" lang="pt-PT" sz="2800" strike="noStrike" u="none">
+                <a:solidFill>
+                  <a:srgbClr val="000000"/>
+                </a:solidFill>
+                <a:effectLst/>
+                <a:uFillTx/>
+                <a:latin typeface="Arial"/>
+              </a:rPr>
+              <a:t>Click to edit the title text format</a:t>
+            </a:r>
+            <a:endParaRPr b="0" lang="pt-PT" sz="2800" strike="noStrike" u="none">
+              <a:solidFill>
+                <a:srgbClr val="000000"/>
+              </a:solidFill>
+              <a:effectLst/>
+              <a:uFillTx/>
+              <a:latin typeface="Arial"/>
+            </a:endParaRPr>
+          </a:p>
+        </p:txBody>
+      </p:sp>
+      <p:sp>
+        <p:nvSpPr>
+          <p:cNvPr id="5" name="PlaceHolder 2"/>
+          <p:cNvSpPr>
+            <a:spLocks noGrp="1"/>
+          </p:cNvSpPr>
+          <p:nvPr>
+            <p:ph type="sldNum" idx="2"/>
+          </p:nvPr>
+        </p:nvSpPr>
+        <p:spPr>
+          <a:xfrm>
+            <a:off x="20013840" y="9791640"/>
+            <a:ext cx="1294920" cy="825840"/>
+          </a:xfrm>
+          <a:prstGeom prst="rect">
+            <a:avLst/>
+          </a:prstGeom>
+          <a:noFill/>
+          <a:ln w="0">
+            <a:noFill/>
+          </a:ln>
+        </p:spPr>
+        <p:txBody>
+          <a:bodyPr lIns="91440" rIns="91440" tIns="91440" bIns="91440" anchor="ctr">
+            <a:normAutofit/>
+          </a:bodyPr>
+          <a:lstStyle>
+            <a:lvl1pPr indent="0" algn="r">
+              <a:lnSpc>
+                <a:spcPct val="100000"/>
+              </a:lnSpc>
+              <a:buNone/>
+              <a:tabLst>
+                <a:tab algn="l" pos="0"/>
+              </a:tabLst>
+              <a:defRPr b="0" lang="en-GB" sz="1000" strike="noStrike" u="none">
+                <a:solidFill>
+                  <a:schemeClr val="dk2"/>
+                </a:solidFill>
+                <a:effectLst/>
+                <a:uFillTx/>
+                <a:latin typeface="Arial"/>
+                <a:ea typeface="Arial"/>
+              </a:defRPr>
+            </a:lvl1pPr>
+          </a:lstStyle>
+          <a:p>
+            <a:pPr indent="0" algn="r">
+              <a:lnSpc>
+                <a:spcPct val="100000"/>
+              </a:lnSpc>
+              <a:buNone/>
+              <a:tabLst>
+                <a:tab algn="l" pos="0"/>
+              </a:tabLst>
+            </a:pPr>
+            <a:fld id="{CFBC4947-59AA-4228-AE83-ECC939950763}" type="slidenum">
+              <a:rPr b="0" lang="en-GB" sz="1000" strike="noStrike" u="none">
+                <a:solidFill>
+                  <a:schemeClr val="dk2"/>
+                </a:solidFill>
+                <a:effectLst/>
+                <a:uFillTx/>
+                <a:latin typeface="Arial"/>
+                <a:ea typeface="Arial"/>
+              </a:rPr>
+              <a:t>&lt;number&gt;</a:t>
+            </a:fld>
+            <a:endParaRPr b="0" lang="pt-PT" sz="1000" strike="noStrike" u="none">
+              <a:solidFill>
+                <a:srgbClr val="000000"/>
+              </a:solidFill>
+              <a:effectLst/>
+              <a:uFillTx/>
+              <a:latin typeface="Times New Roman"/>
+            </a:endParaRPr>
+          </a:p>
+        </p:txBody>
+      </p:sp>
+    </p:spTree>
+  </p:cSld>
+</p:sldLayout>
+</file>
+
+<file path=ppt/slideLayouts/slideLayout3.xml><?xml version="1.0" encoding="utf-8"?>
+<p:sldLayout xmlns:a="http://schemas.openxmlformats.org/drawingml/2006/main" xmlns:p="http://schemas.openxmlformats.org/presentationml/2006/main" xmlns:r="http://schemas.openxmlformats.org/officeDocument/2006/relationships" xmlns:p14="http://schemas.microsoft.com/office/powerpoint/2010/main" xmlns:p15="http://schemas.microsoft.com/office/powerpoint/2012/main" xmlns:mc="http://schemas.openxmlformats.org/markup-compatibility/2006" type="blank" preserve="1">
+  <p:cSld name="ONE_COLUMN_TEXT">
+    <p:bg>
+      <p:bgPr>
+        <a:solidFill>
+          <a:schemeClr val="lt1"/>
+        </a:solidFill>
+      </p:bgPr>
+    </p:bg>
+    <p:spTree>
+      <p:nvGrpSpPr>
+        <p:cNvPr id="1" name=""/>
+        <p:cNvGrpSpPr/>
+        <p:nvPr/>
+      </p:nvGrpSpPr>
+      <p:grpSpPr>
+        <a:xfrm>
+          <a:off x="0" y="0"/>
+          <a:ext cx="0" cy="0"/>
+          <a:chOff x="0" y="0"/>
+          <a:chExt cx="0" cy="0"/>
+        </a:xfrm>
+      </p:grpSpPr>
+      <p:sp>
+        <p:nvSpPr>
+          <p:cNvPr id="6" name="PlaceHolder 1"/>
+          <p:cNvSpPr>
+            <a:spLocks noGrp="1"/>
+          </p:cNvSpPr>
+          <p:nvPr>
+            <p:ph type="title"/>
+          </p:nvPr>
+        </p:nvSpPr>
+        <p:spPr>
+          <a:xfrm>
+            <a:off x="736200" y="1166760"/>
+            <a:ext cx="6631920" cy="1585800"/>
+          </a:xfrm>
+          <a:prstGeom prst="rect">
+            <a:avLst/>
+          </a:prstGeom>
+          <a:noFill/>
+          <a:ln w="0">
+            <a:noFill/>
+          </a:ln>
+        </p:spPr>
+        <p:txBody>
+          <a:bodyPr lIns="91440" rIns="91440" tIns="91440" bIns="91440" anchor="b">
+            <a:normAutofit/>
+          </a:bodyPr>
+          <a:p>
+            <a:pPr indent="0">
+              <a:lnSpc>
+                <a:spcPct val="100000"/>
+              </a:lnSpc>
+              <a:buNone/>
+              <a:tabLst>
+                <a:tab algn="l" pos="0"/>
+              </a:tabLst>
+            </a:pPr>
+            <a:r>
+              <a:rPr b="0" lang="pt-PT" sz="2400" strike="noStrike" u="none">
+                <a:solidFill>
+                  <a:srgbClr val="000000"/>
+                </a:solidFill>
+                <a:effectLst/>
+                <a:uFillTx/>
+                <a:latin typeface="Arial"/>
+              </a:rPr>
+              <a:t>Click to edit the title text format</a:t>
+            </a:r>
+            <a:endParaRPr b="0" lang="pt-PT" sz="2400" strike="noStrike" u="none">
+              <a:solidFill>
+                <a:srgbClr val="000000"/>
+              </a:solidFill>
+              <a:effectLst/>
+              <a:uFillTx/>
+              <a:latin typeface="Arial"/>
+            </a:endParaRPr>
+          </a:p>
+        </p:txBody>
+      </p:sp>
+      <p:sp>
+        <p:nvSpPr>
+          <p:cNvPr id="7" name="PlaceHolder 2"/>
+          <p:cNvSpPr>
+            <a:spLocks noGrp="1"/>
+          </p:cNvSpPr>
+          <p:nvPr>
+            <p:ph type="body"/>
+          </p:nvPr>
+        </p:nvSpPr>
+        <p:spPr>
+          <a:xfrm>
+            <a:off x="736200" y="2917800"/>
+            <a:ext cx="6631920" cy="6674760"/>
+          </a:xfrm>
+          <a:prstGeom prst="rect">
+            <a:avLst/>
+          </a:prstGeom>
+          <a:noFill/>
+          <a:ln w="0">
+            <a:noFill/>
+          </a:ln>
+        </p:spPr>
+        <p:txBody>
+          <a:bodyPr lIns="91440" rIns="91440" tIns="91440" bIns="91440" anchor="t">
+            <a:normAutofit/>
+          </a:bodyPr>
+          <a:p>
+            <a:pPr marL="432000" indent="-324000">
+              <a:lnSpc>
+                <a:spcPct val="100000"/>
+              </a:lnSpc>
+              <a:spcBef>
+                <a:spcPts val="1417"/>
+              </a:spcBef>
+              <a:buClr>
+                <a:srgbClr val="000000"/>
+              </a:buClr>
+              <a:buSzPct val="45000"/>
+              <a:buFont typeface="Wingdings" charset="2"/>
+              <a:buChar char=""/>
+            </a:pPr>
+            <a:r>
+              <a:rPr b="0" lang="pt-PT" sz="1200" strike="noStrike" u="none">
+                <a:solidFill>
+                  <a:srgbClr val="000000"/>
+                </a:solidFill>
+                <a:effectLst/>
+                <a:uFillTx/>
+                <a:latin typeface="Arial"/>
+              </a:rPr>
+              <a:t>Click to edit the outline text format</a:t>
+            </a:r>
+            <a:endParaRPr b="0" lang="pt-PT" sz="1200" strike="noStrike" u="none">
+              <a:solidFill>
+                <a:srgbClr val="000000"/>
+              </a:solidFill>
+              <a:effectLst/>
+              <a:uFillTx/>
+              <a:latin typeface="Arial"/>
+            </a:endParaRPr>
+          </a:p>
+          <a:p>
+            <a:pPr lvl="1" marL="864000" indent="-324000">
+              <a:lnSpc>
+                <a:spcPct val="100000"/>
+              </a:lnSpc>
+              <a:spcBef>
+                <a:spcPts val="1134"/>
+              </a:spcBef>
+              <a:buClr>
+                <a:srgbClr val="000000"/>
+              </a:buClr>
+              <a:buSzPct val="75000"/>
+              <a:buFont typeface="Symbol" charset="2"/>
+              <a:buChar char=""/>
+            </a:pPr>
+            <a:r>
+              <a:rPr b="0" lang="pt-PT" sz="1200" strike="noStrike" u="none">
+                <a:solidFill>
+                  <a:srgbClr val="000000"/>
+                </a:solidFill>
+                <a:effectLst/>
+                <a:uFillTx/>
+                <a:latin typeface="Arial"/>
+              </a:rPr>
+              <a:t>Second Outline Level</a:t>
+            </a:r>
+            <a:endParaRPr b="0" lang="pt-PT" sz="1200" strike="noStrike" u="none">
+              <a:solidFill>
+                <a:srgbClr val="000000"/>
+              </a:solidFill>
+              <a:effectLst/>
+              <a:uFillTx/>
+              <a:latin typeface="Arial"/>
+            </a:endParaRPr>
+          </a:p>
+          <a:p>
+            <a:pPr lvl="2" marL="1296000" indent="-288000">
+              <a:lnSpc>
+                <a:spcPct val="100000"/>
+              </a:lnSpc>
+              <a:spcBef>
+                <a:spcPts val="850"/>
+              </a:spcBef>
+              <a:buClr>
+                <a:srgbClr val="000000"/>
+              </a:buClr>
+              <a:buSzPct val="45000"/>
+              <a:buFont typeface="Wingdings" charset="2"/>
+              <a:buChar char=""/>
+            </a:pPr>
+            <a:r>
+              <a:rPr b="0" lang="pt-PT" sz="1200" strike="noStrike" u="none">
+                <a:solidFill>
+                  <a:srgbClr val="000000"/>
+                </a:solidFill>
+                <a:effectLst/>
+                <a:uFillTx/>
+                <a:latin typeface="Arial"/>
+              </a:rPr>
+              <a:t>Third Outline Level</a:t>
+            </a:r>
+            <a:endParaRPr b="0" lang="pt-PT" sz="1200" strike="noStrike" u="none">
+              <a:solidFill>
+                <a:srgbClr val="000000"/>
+              </a:solidFill>
+              <a:effectLst/>
+              <a:uFillTx/>
+              <a:latin typeface="Arial"/>
+            </a:endParaRPr>
+          </a:p>
+          <a:p>
+            <a:pPr lvl="3" marL="1728000" indent="-216000">
+              <a:lnSpc>
+                <a:spcPct val="100000"/>
+              </a:lnSpc>
+              <a:spcBef>
+                <a:spcPts val="567"/>
+              </a:spcBef>
+              <a:buClr>
+                <a:srgbClr val="000000"/>
+              </a:buClr>
+              <a:buSzPct val="75000"/>
+              <a:buFont typeface="Symbol" charset="2"/>
+              <a:buChar char=""/>
+            </a:pPr>
+            <a:r>
+              <a:rPr b="0" lang="pt-PT" sz="1200" strike="noStrike" u="none">
+                <a:solidFill>
+                  <a:srgbClr val="000000"/>
+                </a:solidFill>
+                <a:effectLst/>
+                <a:uFillTx/>
+                <a:latin typeface="Arial"/>
+              </a:rPr>
+              <a:t>Fourth Outline Level</a:t>
+            </a:r>
+            <a:endParaRPr b="0" lang="pt-PT" sz="1200" strike="noStrike" u="none">
+              <a:solidFill>
+                <a:srgbClr val="000000"/>
+              </a:solidFill>
+              <a:effectLst/>
+              <a:uFillTx/>
+              <a:latin typeface="Arial"/>
+            </a:endParaRPr>
+          </a:p>
+          <a:p>
+            <a:pPr lvl="4" marL="2160000" indent="-216000">
+              <a:lnSpc>
+                <a:spcPct val="100000"/>
+              </a:lnSpc>
+              <a:spcBef>
+                <a:spcPts val="283"/>
+              </a:spcBef>
+              <a:buClr>
+                <a:srgbClr val="000000"/>
+              </a:buClr>
+              <a:buSzPct val="45000"/>
+              <a:buFont typeface="Wingdings" charset="2"/>
+              <a:buChar char=""/>
+            </a:pPr>
+            <a:r>
+              <a:rPr b="0" lang="pt-PT" sz="1200" strike="noStrike" u="none">
+                <a:solidFill>
+                  <a:srgbClr val="000000"/>
+                </a:solidFill>
+                <a:effectLst/>
+                <a:uFillTx/>
+                <a:latin typeface="Arial"/>
+              </a:rPr>
+              <a:t>Fifth Outline Level</a:t>
+            </a:r>
+            <a:endParaRPr b="0" lang="pt-PT" sz="1200" strike="noStrike" u="none">
+              <a:solidFill>
+                <a:srgbClr val="000000"/>
+              </a:solidFill>
+              <a:effectLst/>
+              <a:uFillTx/>
+              <a:latin typeface="Arial"/>
+            </a:endParaRPr>
+          </a:p>
+          <a:p>
+            <a:pPr lvl="5" marL="2592000" indent="-216000">
+              <a:lnSpc>
+                <a:spcPct val="100000"/>
+              </a:lnSpc>
+              <a:spcBef>
+                <a:spcPts val="283"/>
+              </a:spcBef>
+              <a:buClr>
+                <a:srgbClr val="000000"/>
+              </a:buClr>
+              <a:buSzPct val="45000"/>
+              <a:buFont typeface="Wingdings" charset="2"/>
+              <a:buChar char=""/>
+            </a:pPr>
+            <a:r>
+              <a:rPr b="0" lang="pt-PT" sz="1200" strike="noStrike" u="none">
+                <a:solidFill>
+                  <a:srgbClr val="000000"/>
+                </a:solidFill>
+                <a:effectLst/>
+                <a:uFillTx/>
+                <a:latin typeface="Arial"/>
+              </a:rPr>
+              <a:t>Sixth Outline Level</a:t>
+            </a:r>
+            <a:endParaRPr b="0" lang="pt-PT" sz="1200" strike="noStrike" u="none">
+              <a:solidFill>
+                <a:srgbClr val="000000"/>
+              </a:solidFill>
+              <a:effectLst/>
+              <a:uFillTx/>
+              <a:latin typeface="Arial"/>
+            </a:endParaRPr>
+          </a:p>
+          <a:p>
+            <a:pPr lvl="6" marL="3024000" indent="-216000">
+              <a:lnSpc>
+                <a:spcPct val="100000"/>
+              </a:lnSpc>
+              <a:spcBef>
+                <a:spcPts val="283"/>
+              </a:spcBef>
+              <a:buClr>
+                <a:srgbClr val="000000"/>
+              </a:buClr>
+              <a:buSzPct val="45000"/>
+              <a:buFont typeface="Wingdings" charset="2"/>
+              <a:buChar char=""/>
+            </a:pPr>
+            <a:r>
+              <a:rPr b="0" lang="pt-PT" sz="1200" strike="noStrike" u="none">
+                <a:solidFill>
+                  <a:srgbClr val="000000"/>
+                </a:solidFill>
+                <a:effectLst/>
+                <a:uFillTx/>
+                <a:latin typeface="Arial"/>
+              </a:rPr>
+              <a:t>Seventh Outline Level</a:t>
+            </a:r>
+            <a:endParaRPr b="0" lang="pt-PT" sz="1200" strike="noStrike" u="none">
+              <a:solidFill>
+                <a:srgbClr val="000000"/>
+              </a:solidFill>
+              <a:effectLst/>
+              <a:uFillTx/>
+              <a:latin typeface="Arial"/>
+            </a:endParaRPr>
+          </a:p>
+        </p:txBody>
+      </p:sp>
+      <p:sp>
+        <p:nvSpPr>
+          <p:cNvPr id="8" name="PlaceHolder 3"/>
+          <p:cNvSpPr>
+            <a:spLocks noGrp="1"/>
+          </p:cNvSpPr>
+          <p:nvPr>
+            <p:ph type="sldNum" idx="3"/>
+          </p:nvPr>
+        </p:nvSpPr>
+        <p:spPr>
+          <a:xfrm>
+            <a:off x="20013840" y="9791640"/>
+            <a:ext cx="1294920" cy="825840"/>
+          </a:xfrm>
+          <a:prstGeom prst="rect">
+            <a:avLst/>
+          </a:prstGeom>
+          <a:noFill/>
+          <a:ln w="0">
+            <a:noFill/>
+          </a:ln>
+        </p:spPr>
+        <p:txBody>
+          <a:bodyPr lIns="91440" rIns="91440" tIns="91440" bIns="91440" anchor="ctr">
+            <a:normAutofit/>
+          </a:bodyPr>
+          <a:lstStyle>
+            <a:lvl1pPr indent="0" algn="r">
+              <a:lnSpc>
+                <a:spcPct val="100000"/>
+              </a:lnSpc>
+              <a:buNone/>
+              <a:tabLst>
+                <a:tab algn="l" pos="0"/>
+              </a:tabLst>
+              <a:defRPr b="0" lang="en-GB" sz="1000" strike="noStrike" u="none">
+                <a:solidFill>
+                  <a:schemeClr val="dk2"/>
+                </a:solidFill>
+                <a:effectLst/>
+                <a:uFillTx/>
+                <a:latin typeface="Arial"/>
+                <a:ea typeface="Arial"/>
+              </a:defRPr>
+            </a:lvl1pPr>
+          </a:lstStyle>
+          <a:p>
+            <a:pPr indent="0" algn="r">
+              <a:lnSpc>
+                <a:spcPct val="100000"/>
+              </a:lnSpc>
+              <a:buNone/>
+              <a:tabLst>
+                <a:tab algn="l" pos="0"/>
+              </a:tabLst>
+            </a:pPr>
+            <a:fld id="{E278F95D-60FA-4E66-BB44-A8083B0CA86B}" type="slidenum">
+              <a:rPr b="0" lang="en-GB" sz="1000" strike="noStrike" u="none">
+                <a:solidFill>
+                  <a:schemeClr val="dk2"/>
+                </a:solidFill>
+                <a:effectLst/>
+                <a:uFillTx/>
+                <a:latin typeface="Arial"/>
+                <a:ea typeface="Arial"/>
+              </a:rPr>
+              <a:t>&lt;number&gt;</a:t>
+            </a:fld>
+            <a:endParaRPr b="0" lang="pt-PT" sz="1000" strike="noStrike" u="none">
+              <a:solidFill>
+                <a:srgbClr val="000000"/>
+              </a:solidFill>
+              <a:effectLst/>
+              <a:uFillTx/>
+              <a:latin typeface="Times New Roman"/>
+            </a:endParaRPr>
+          </a:p>
+        </p:txBody>
+      </p:sp>
+    </p:spTree>
+  </p:cSld>
+</p:sldLayout>
+</file>
+
+<file path=ppt/slideLayouts/slideLayout4.xml><?xml version="1.0" encoding="utf-8"?>
 <p:sldLayout xmlns:a="http://schemas.openxmlformats.org/drawingml/2006/main" xmlns:p="http://schemas.openxmlformats.org/presentationml/2006/main" xmlns:r="http://schemas.openxmlformats.org/officeDocument/2006/relationships" xmlns:p14="http://schemas.microsoft.com/office/powerpoint/2010/main" xmlns:p15="http://schemas.microsoft.com/office/powerpoint/2012/main" xmlns:mc="http://schemas.openxmlformats.org/markup-compatibility/2006" type="blank" preserve="1">
   <p:cSld name="MAIN_POINT">
     <p:bg>
@@ -51,7 +1988,7 @@
       </p:grpSpPr>
       <p:sp>
         <p:nvSpPr>
-          <p:cNvPr id="0" name="PlaceHolder 1"/>
+          <p:cNvPr id="9" name="PlaceHolder 1"/>
           <p:cNvSpPr>
             <a:spLocks noGrp="1"/>
           </p:cNvSpPr>
@@ -62,7 +1999,7 @@
         <p:spPr>
           <a:xfrm>
             <a:off x="1158120" y="945360"/>
-            <a:ext cx="15041160" cy="8588880"/>
+            <a:ext cx="15040800" cy="8588520"/>
           </a:xfrm>
           <a:prstGeom prst="rect">
             <a:avLst/>
@@ -110,18 +2047,18 @@
       </p:sp>
       <p:sp>
         <p:nvSpPr>
-          <p:cNvPr id="1" name="PlaceHolder 2"/>
+          <p:cNvPr id="10" name="PlaceHolder 2"/>
           <p:cNvSpPr>
             <a:spLocks noGrp="1"/>
           </p:cNvSpPr>
           <p:nvPr>
-            <p:ph type="sldNum" idx="1"/>
+            <p:ph type="sldNum" idx="4"/>
           </p:nvPr>
         </p:nvSpPr>
         <p:spPr>
           <a:xfrm>
             <a:off x="20013840" y="9791640"/>
-            <a:ext cx="1295280" cy="826200"/>
+            <a:ext cx="1294920" cy="825840"/>
           </a:xfrm>
           <a:prstGeom prst="rect">
             <a:avLst/>
@@ -165,7 +2102,7 @@
                 <a:tab algn="l" pos="0"/>
               </a:tabLst>
             </a:pPr>
-            <a:fld id="{C3E3493B-DA12-4BEB-AB76-7D77B11C9A81}" type="slidenum">
+            <a:fld id="{0E541938-2F81-4986-9F67-CB81A2BC0D66}" type="slidenum">
               <a:rPr b="0" lang="en-GB" sz="1000" strike="noStrike" u="none">
                 <a:solidFill>
                   <a:schemeClr val="dk2"/>
@@ -193,617 +2130,7 @@
 </p:sldLayout>
 </file>
 
-<file path=ppt/slideLayouts/slideLayout10.xml><?xml version="1.0" encoding="utf-8"?>
-<p:sldLayout xmlns:a="http://schemas.openxmlformats.org/drawingml/2006/main" xmlns:p="http://schemas.openxmlformats.org/presentationml/2006/main" xmlns:r="http://schemas.openxmlformats.org/officeDocument/2006/relationships" xmlns:p14="http://schemas.microsoft.com/office/powerpoint/2010/main" xmlns:p15="http://schemas.microsoft.com/office/powerpoint/2012/main" xmlns:mc="http://schemas.openxmlformats.org/markup-compatibility/2006" type="titleOnly" preserve="1">
-  <p:cSld name="TITLE_ONLY">
-    <p:bg>
-      <p:bgPr>
-        <a:solidFill>
-          <a:schemeClr val="lt1"/>
-        </a:solidFill>
-      </p:bgPr>
-    </p:bg>
-    <p:spTree>
-      <p:nvGrpSpPr>
-        <p:cNvPr id="1" name=""/>
-        <p:cNvGrpSpPr/>
-        <p:nvPr/>
-      </p:nvGrpSpPr>
-      <p:grpSpPr>
-        <a:xfrm>
-          <a:off x="0" y="0"/>
-          <a:ext cx="0" cy="0"/>
-          <a:chOff x="0" y="0"/>
-          <a:chExt cx="0" cy="0"/>
-        </a:xfrm>
-      </p:grpSpPr>
-      <p:sp>
-        <p:nvSpPr>
-          <p:cNvPr id="24" name="PlaceHolder 1"/>
-          <p:cNvSpPr>
-            <a:spLocks noGrp="1"/>
-          </p:cNvSpPr>
-          <p:nvPr>
-            <p:ph type="title"/>
-          </p:nvPr>
-        </p:nvSpPr>
-        <p:spPr>
-          <a:xfrm>
-            <a:off x="736200" y="934560"/>
-            <a:ext cx="20126880" cy="1201680"/>
-          </a:xfrm>
-          <a:prstGeom prst="rect">
-            <a:avLst/>
-          </a:prstGeom>
-          <a:noFill/>
-          <a:ln w="0">
-            <a:noFill/>
-          </a:ln>
-        </p:spPr>
-        <p:txBody>
-          <a:bodyPr lIns="91440" rIns="91440" tIns="91440" bIns="91440" anchor="t">
-            <a:normAutofit/>
-          </a:bodyPr>
-          <a:p>
-            <a:pPr indent="0">
-              <a:lnSpc>
-                <a:spcPct val="100000"/>
-              </a:lnSpc>
-              <a:buNone/>
-              <a:tabLst>
-                <a:tab algn="l" pos="0"/>
-              </a:tabLst>
-            </a:pPr>
-            <a:r>
-              <a:rPr b="0" lang="pt-PT" sz="2800" strike="noStrike" u="none">
-                <a:solidFill>
-                  <a:srgbClr val="000000"/>
-                </a:solidFill>
-                <a:effectLst/>
-                <a:uFillTx/>
-                <a:latin typeface="Arial"/>
-              </a:rPr>
-              <a:t>Click to edit the title text format</a:t>
-            </a:r>
-            <a:endParaRPr b="0" lang="pt-PT" sz="2800" strike="noStrike" u="none">
-              <a:solidFill>
-                <a:srgbClr val="000000"/>
-              </a:solidFill>
-              <a:effectLst/>
-              <a:uFillTx/>
-              <a:latin typeface="Arial"/>
-            </a:endParaRPr>
-          </a:p>
-        </p:txBody>
-      </p:sp>
-      <p:sp>
-        <p:nvSpPr>
-          <p:cNvPr id="25" name="PlaceHolder 2"/>
-          <p:cNvSpPr>
-            <a:spLocks noGrp="1"/>
-          </p:cNvSpPr>
-          <p:nvPr>
-            <p:ph type="sldNum" idx="10"/>
-          </p:nvPr>
-        </p:nvSpPr>
-        <p:spPr>
-          <a:xfrm>
-            <a:off x="20013840" y="9791640"/>
-            <a:ext cx="1295280" cy="826200"/>
-          </a:xfrm>
-          <a:prstGeom prst="rect">
-            <a:avLst/>
-          </a:prstGeom>
-          <a:noFill/>
-          <a:ln w="0">
-            <a:noFill/>
-          </a:ln>
-        </p:spPr>
-        <p:txBody>
-          <a:bodyPr lIns="91440" rIns="91440" tIns="91440" bIns="91440" anchor="ctr">
-            <a:normAutofit/>
-          </a:bodyPr>
-          <a:lstStyle>
-            <a:lvl1pPr indent="0" algn="r">
-              <a:lnSpc>
-                <a:spcPct val="100000"/>
-              </a:lnSpc>
-              <a:buNone/>
-              <a:tabLst>
-                <a:tab algn="l" pos="0"/>
-              </a:tabLst>
-              <a:defRPr b="0" lang="en-GB" sz="1000" strike="noStrike" u="none">
-                <a:solidFill>
-                  <a:schemeClr val="dk2"/>
-                </a:solidFill>
-                <a:effectLst/>
-                <a:uFillTx/>
-                <a:latin typeface="Arial"/>
-                <a:ea typeface="Arial"/>
-              </a:defRPr>
-            </a:lvl1pPr>
-          </a:lstStyle>
-          <a:p>
-            <a:pPr indent="0" algn="r">
-              <a:lnSpc>
-                <a:spcPct val="100000"/>
-              </a:lnSpc>
-              <a:buNone/>
-              <a:tabLst>
-                <a:tab algn="l" pos="0"/>
-              </a:tabLst>
-            </a:pPr>
-            <a:fld id="{EE220264-414C-4DB6-A933-4D404EDDBA2E}" type="slidenum">
-              <a:rPr b="0" lang="en-GB" sz="1000" strike="noStrike" u="none">
-                <a:solidFill>
-                  <a:schemeClr val="dk2"/>
-                </a:solidFill>
-                <a:effectLst/>
-                <a:uFillTx/>
-                <a:latin typeface="Arial"/>
-                <a:ea typeface="Arial"/>
-              </a:rPr>
-              <a:t>&lt;number&gt;</a:t>
-            </a:fld>
-            <a:endParaRPr b="0" lang="pt-PT" sz="1000" strike="noStrike" u="none">
-              <a:solidFill>
-                <a:srgbClr val="000000"/>
-              </a:solidFill>
-              <a:effectLst/>
-              <a:uFillTx/>
-              <a:latin typeface="Times New Roman"/>
-            </a:endParaRPr>
-          </a:p>
-        </p:txBody>
-      </p:sp>
-    </p:spTree>
-  </p:cSld>
-</p:sldLayout>
-</file>
-
-<file path=ppt/slideLayouts/slideLayout11.xml><?xml version="1.0" encoding="utf-8"?>
-<p:sldLayout xmlns:a="http://schemas.openxmlformats.org/drawingml/2006/main" xmlns:p="http://schemas.openxmlformats.org/presentationml/2006/main" xmlns:r="http://schemas.openxmlformats.org/officeDocument/2006/relationships" xmlns:p14="http://schemas.microsoft.com/office/powerpoint/2010/main" xmlns:p15="http://schemas.microsoft.com/office/powerpoint/2012/main" xmlns:mc="http://schemas.openxmlformats.org/markup-compatibility/2006" type="blank" preserve="1">
-  <p:cSld name="ONE_COLUMN_TEXT">
-    <p:bg>
-      <p:bgPr>
-        <a:solidFill>
-          <a:schemeClr val="lt1"/>
-        </a:solidFill>
-      </p:bgPr>
-    </p:bg>
-    <p:spTree>
-      <p:nvGrpSpPr>
-        <p:cNvPr id="1" name=""/>
-        <p:cNvGrpSpPr/>
-        <p:nvPr/>
-      </p:nvGrpSpPr>
-      <p:grpSpPr>
-        <a:xfrm>
-          <a:off x="0" y="0"/>
-          <a:ext cx="0" cy="0"/>
-          <a:chOff x="0" y="0"/>
-          <a:chExt cx="0" cy="0"/>
-        </a:xfrm>
-      </p:grpSpPr>
-      <p:sp>
-        <p:nvSpPr>
-          <p:cNvPr id="26" name="PlaceHolder 1"/>
-          <p:cNvSpPr>
-            <a:spLocks noGrp="1"/>
-          </p:cNvSpPr>
-          <p:nvPr>
-            <p:ph type="title"/>
-          </p:nvPr>
-        </p:nvSpPr>
-        <p:spPr>
-          <a:xfrm>
-            <a:off x="736200" y="1166760"/>
-            <a:ext cx="6632280" cy="1586160"/>
-          </a:xfrm>
-          <a:prstGeom prst="rect">
-            <a:avLst/>
-          </a:prstGeom>
-          <a:noFill/>
-          <a:ln w="0">
-            <a:noFill/>
-          </a:ln>
-        </p:spPr>
-        <p:txBody>
-          <a:bodyPr lIns="91440" rIns="91440" tIns="91440" bIns="91440" anchor="b">
-            <a:normAutofit/>
-          </a:bodyPr>
-          <a:p>
-            <a:pPr indent="0">
-              <a:lnSpc>
-                <a:spcPct val="100000"/>
-              </a:lnSpc>
-              <a:buNone/>
-              <a:tabLst>
-                <a:tab algn="l" pos="0"/>
-              </a:tabLst>
-            </a:pPr>
-            <a:r>
-              <a:rPr b="0" lang="pt-PT" sz="2400" strike="noStrike" u="none">
-                <a:solidFill>
-                  <a:srgbClr val="000000"/>
-                </a:solidFill>
-                <a:effectLst/>
-                <a:uFillTx/>
-                <a:latin typeface="Arial"/>
-              </a:rPr>
-              <a:t>Click to edit the title text format</a:t>
-            </a:r>
-            <a:endParaRPr b="0" lang="pt-PT" sz="2400" strike="noStrike" u="none">
-              <a:solidFill>
-                <a:srgbClr val="000000"/>
-              </a:solidFill>
-              <a:effectLst/>
-              <a:uFillTx/>
-              <a:latin typeface="Arial"/>
-            </a:endParaRPr>
-          </a:p>
-        </p:txBody>
-      </p:sp>
-      <p:sp>
-        <p:nvSpPr>
-          <p:cNvPr id="27" name="PlaceHolder 2"/>
-          <p:cNvSpPr>
-            <a:spLocks noGrp="1"/>
-          </p:cNvSpPr>
-          <p:nvPr>
-            <p:ph type="body"/>
-          </p:nvPr>
-        </p:nvSpPr>
-        <p:spPr>
-          <a:xfrm>
-            <a:off x="736200" y="2917800"/>
-            <a:ext cx="6632280" cy="6675120"/>
-          </a:xfrm>
-          <a:prstGeom prst="rect">
-            <a:avLst/>
-          </a:prstGeom>
-          <a:noFill/>
-          <a:ln w="0">
-            <a:noFill/>
-          </a:ln>
-        </p:spPr>
-        <p:txBody>
-          <a:bodyPr lIns="91440" rIns="91440" tIns="91440" bIns="91440" anchor="t">
-            <a:normAutofit/>
-          </a:bodyPr>
-          <a:p>
-            <a:pPr marL="432000" indent="-324000">
-              <a:lnSpc>
-                <a:spcPct val="100000"/>
-              </a:lnSpc>
-              <a:spcBef>
-                <a:spcPts val="1417"/>
-              </a:spcBef>
-              <a:buClr>
-                <a:srgbClr val="000000"/>
-              </a:buClr>
-              <a:buSzPct val="45000"/>
-              <a:buFont typeface="Wingdings" charset="2"/>
-              <a:buChar char=""/>
-            </a:pPr>
-            <a:r>
-              <a:rPr b="0" lang="pt-PT" sz="1200" strike="noStrike" u="none">
-                <a:solidFill>
-                  <a:srgbClr val="000000"/>
-                </a:solidFill>
-                <a:effectLst/>
-                <a:uFillTx/>
-                <a:latin typeface="Arial"/>
-              </a:rPr>
-              <a:t>Click to edit the outline text format</a:t>
-            </a:r>
-            <a:endParaRPr b="0" lang="pt-PT" sz="1200" strike="noStrike" u="none">
-              <a:solidFill>
-                <a:srgbClr val="000000"/>
-              </a:solidFill>
-              <a:effectLst/>
-              <a:uFillTx/>
-              <a:latin typeface="Arial"/>
-            </a:endParaRPr>
-          </a:p>
-          <a:p>
-            <a:pPr lvl="1" marL="864000" indent="-324000">
-              <a:lnSpc>
-                <a:spcPct val="100000"/>
-              </a:lnSpc>
-              <a:spcBef>
-                <a:spcPts val="1134"/>
-              </a:spcBef>
-              <a:buClr>
-                <a:srgbClr val="000000"/>
-              </a:buClr>
-              <a:buSzPct val="75000"/>
-              <a:buFont typeface="Symbol" charset="2"/>
-              <a:buChar char=""/>
-            </a:pPr>
-            <a:r>
-              <a:rPr b="0" lang="pt-PT" sz="1200" strike="noStrike" u="none">
-                <a:solidFill>
-                  <a:srgbClr val="000000"/>
-                </a:solidFill>
-                <a:effectLst/>
-                <a:uFillTx/>
-                <a:latin typeface="Arial"/>
-              </a:rPr>
-              <a:t>Second Outline Level</a:t>
-            </a:r>
-            <a:endParaRPr b="0" lang="pt-PT" sz="1200" strike="noStrike" u="none">
-              <a:solidFill>
-                <a:srgbClr val="000000"/>
-              </a:solidFill>
-              <a:effectLst/>
-              <a:uFillTx/>
-              <a:latin typeface="Arial"/>
-            </a:endParaRPr>
-          </a:p>
-          <a:p>
-            <a:pPr lvl="2" marL="1296000" indent="-288000">
-              <a:lnSpc>
-                <a:spcPct val="100000"/>
-              </a:lnSpc>
-              <a:spcBef>
-                <a:spcPts val="850"/>
-              </a:spcBef>
-              <a:buClr>
-                <a:srgbClr val="000000"/>
-              </a:buClr>
-              <a:buSzPct val="45000"/>
-              <a:buFont typeface="Wingdings" charset="2"/>
-              <a:buChar char=""/>
-            </a:pPr>
-            <a:r>
-              <a:rPr b="0" lang="pt-PT" sz="1200" strike="noStrike" u="none">
-                <a:solidFill>
-                  <a:srgbClr val="000000"/>
-                </a:solidFill>
-                <a:effectLst/>
-                <a:uFillTx/>
-                <a:latin typeface="Arial"/>
-              </a:rPr>
-              <a:t>Third Outline Level</a:t>
-            </a:r>
-            <a:endParaRPr b="0" lang="pt-PT" sz="1200" strike="noStrike" u="none">
-              <a:solidFill>
-                <a:srgbClr val="000000"/>
-              </a:solidFill>
-              <a:effectLst/>
-              <a:uFillTx/>
-              <a:latin typeface="Arial"/>
-            </a:endParaRPr>
-          </a:p>
-          <a:p>
-            <a:pPr lvl="3" marL="1728000" indent="-216000">
-              <a:lnSpc>
-                <a:spcPct val="100000"/>
-              </a:lnSpc>
-              <a:spcBef>
-                <a:spcPts val="567"/>
-              </a:spcBef>
-              <a:buClr>
-                <a:srgbClr val="000000"/>
-              </a:buClr>
-              <a:buSzPct val="75000"/>
-              <a:buFont typeface="Symbol" charset="2"/>
-              <a:buChar char=""/>
-            </a:pPr>
-            <a:r>
-              <a:rPr b="0" lang="pt-PT" sz="1200" strike="noStrike" u="none">
-                <a:solidFill>
-                  <a:srgbClr val="000000"/>
-                </a:solidFill>
-                <a:effectLst/>
-                <a:uFillTx/>
-                <a:latin typeface="Arial"/>
-              </a:rPr>
-              <a:t>Fourth Outline Level</a:t>
-            </a:r>
-            <a:endParaRPr b="0" lang="pt-PT" sz="1200" strike="noStrike" u="none">
-              <a:solidFill>
-                <a:srgbClr val="000000"/>
-              </a:solidFill>
-              <a:effectLst/>
-              <a:uFillTx/>
-              <a:latin typeface="Arial"/>
-            </a:endParaRPr>
-          </a:p>
-          <a:p>
-            <a:pPr lvl="4" marL="2160000" indent="-216000">
-              <a:lnSpc>
-                <a:spcPct val="100000"/>
-              </a:lnSpc>
-              <a:spcBef>
-                <a:spcPts val="283"/>
-              </a:spcBef>
-              <a:buClr>
-                <a:srgbClr val="000000"/>
-              </a:buClr>
-              <a:buSzPct val="45000"/>
-              <a:buFont typeface="Wingdings" charset="2"/>
-              <a:buChar char=""/>
-            </a:pPr>
-            <a:r>
-              <a:rPr b="0" lang="pt-PT" sz="1200" strike="noStrike" u="none">
-                <a:solidFill>
-                  <a:srgbClr val="000000"/>
-                </a:solidFill>
-                <a:effectLst/>
-                <a:uFillTx/>
-                <a:latin typeface="Arial"/>
-              </a:rPr>
-              <a:t>Fifth Outline Level</a:t>
-            </a:r>
-            <a:endParaRPr b="0" lang="pt-PT" sz="1200" strike="noStrike" u="none">
-              <a:solidFill>
-                <a:srgbClr val="000000"/>
-              </a:solidFill>
-              <a:effectLst/>
-              <a:uFillTx/>
-              <a:latin typeface="Arial"/>
-            </a:endParaRPr>
-          </a:p>
-          <a:p>
-            <a:pPr lvl="5" marL="2592000" indent="-216000">
-              <a:lnSpc>
-                <a:spcPct val="100000"/>
-              </a:lnSpc>
-              <a:spcBef>
-                <a:spcPts val="283"/>
-              </a:spcBef>
-              <a:buClr>
-                <a:srgbClr val="000000"/>
-              </a:buClr>
-              <a:buSzPct val="45000"/>
-              <a:buFont typeface="Wingdings" charset="2"/>
-              <a:buChar char=""/>
-            </a:pPr>
-            <a:r>
-              <a:rPr b="0" lang="pt-PT" sz="1200" strike="noStrike" u="none">
-                <a:solidFill>
-                  <a:srgbClr val="000000"/>
-                </a:solidFill>
-                <a:effectLst/>
-                <a:uFillTx/>
-                <a:latin typeface="Arial"/>
-              </a:rPr>
-              <a:t>Sixth Outline Level</a:t>
-            </a:r>
-            <a:endParaRPr b="0" lang="pt-PT" sz="1200" strike="noStrike" u="none">
-              <a:solidFill>
-                <a:srgbClr val="000000"/>
-              </a:solidFill>
-              <a:effectLst/>
-              <a:uFillTx/>
-              <a:latin typeface="Arial"/>
-            </a:endParaRPr>
-          </a:p>
-          <a:p>
-            <a:pPr lvl="6" marL="3024000" indent="-216000">
-              <a:lnSpc>
-                <a:spcPct val="100000"/>
-              </a:lnSpc>
-              <a:spcBef>
-                <a:spcPts val="283"/>
-              </a:spcBef>
-              <a:buClr>
-                <a:srgbClr val="000000"/>
-              </a:buClr>
-              <a:buSzPct val="45000"/>
-              <a:buFont typeface="Wingdings" charset="2"/>
-              <a:buChar char=""/>
-            </a:pPr>
-            <a:r>
-              <a:rPr b="0" lang="pt-PT" sz="1200" strike="noStrike" u="none">
-                <a:solidFill>
-                  <a:srgbClr val="000000"/>
-                </a:solidFill>
-                <a:effectLst/>
-                <a:uFillTx/>
-                <a:latin typeface="Arial"/>
-              </a:rPr>
-              <a:t>Seventh Outline Level</a:t>
-            </a:r>
-            <a:endParaRPr b="0" lang="pt-PT" sz="1200" strike="noStrike" u="none">
-              <a:solidFill>
-                <a:srgbClr val="000000"/>
-              </a:solidFill>
-              <a:effectLst/>
-              <a:uFillTx/>
-              <a:latin typeface="Arial"/>
-            </a:endParaRPr>
-          </a:p>
-        </p:txBody>
-      </p:sp>
-      <p:sp>
-        <p:nvSpPr>
-          <p:cNvPr id="28" name="PlaceHolder 3"/>
-          <p:cNvSpPr>
-            <a:spLocks noGrp="1"/>
-          </p:cNvSpPr>
-          <p:nvPr>
-            <p:ph type="sldNum" idx="11"/>
-          </p:nvPr>
-        </p:nvSpPr>
-        <p:spPr>
-          <a:xfrm>
-            <a:off x="20013840" y="9791640"/>
-            <a:ext cx="1295280" cy="826200"/>
-          </a:xfrm>
-          <a:prstGeom prst="rect">
-            <a:avLst/>
-          </a:prstGeom>
-          <a:noFill/>
-          <a:ln w="0">
-            <a:noFill/>
-          </a:ln>
-        </p:spPr>
-        <p:txBody>
-          <a:bodyPr lIns="91440" rIns="91440" tIns="91440" bIns="91440" anchor="ctr">
-            <a:normAutofit/>
-          </a:bodyPr>
-          <a:lstStyle>
-            <a:lvl1pPr indent="0" algn="r">
-              <a:lnSpc>
-                <a:spcPct val="100000"/>
-              </a:lnSpc>
-              <a:buNone/>
-              <a:tabLst>
-                <a:tab algn="l" pos="0"/>
-              </a:tabLst>
-              <a:defRPr b="0" lang="en-GB" sz="1000" strike="noStrike" u="none">
-                <a:solidFill>
-                  <a:schemeClr val="dk2"/>
-                </a:solidFill>
-                <a:effectLst/>
-                <a:uFillTx/>
-                <a:latin typeface="Arial"/>
-                <a:ea typeface="Arial"/>
-              </a:defRPr>
-            </a:lvl1pPr>
-          </a:lstStyle>
-          <a:p>
-            <a:pPr indent="0" algn="r">
-              <a:lnSpc>
-                <a:spcPct val="100000"/>
-              </a:lnSpc>
-              <a:buNone/>
-              <a:tabLst>
-                <a:tab algn="l" pos="0"/>
-              </a:tabLst>
-            </a:pPr>
-            <a:fld id="{8F41C667-6E83-4101-B187-E4D8299C08DA}" type="slidenum">
-              <a:rPr b="0" lang="en-GB" sz="1000" strike="noStrike" u="none">
-                <a:solidFill>
-                  <a:schemeClr val="dk2"/>
-                </a:solidFill>
-                <a:effectLst/>
-                <a:uFillTx/>
-                <a:latin typeface="Arial"/>
-                <a:ea typeface="Arial"/>
-              </a:rPr>
-              <a:t>&lt;number&gt;</a:t>
-            </a:fld>
-            <a:endParaRPr b="0" lang="pt-PT" sz="1000" strike="noStrike" u="none">
-              <a:solidFill>
-                <a:srgbClr val="000000"/>
-              </a:solidFill>
-              <a:effectLst/>
-              <a:uFillTx/>
-              <a:latin typeface="Times New Roman"/>
-            </a:endParaRPr>
-          </a:p>
-        </p:txBody>
-      </p:sp>
-    </p:spTree>
-  </p:cSld>
-</p:sldLayout>
-</file>
-
-<file path=ppt/slideLayouts/slideLayout2.xml><?xml version="1.0" encoding="utf-8"?>
+<file path=ppt/slideLayouts/slideLayout5.xml><?xml version="1.0" encoding="utf-8"?>
 <p:sldLayout xmlns:a="http://schemas.openxmlformats.org/drawingml/2006/main" xmlns:p="http://schemas.openxmlformats.org/presentationml/2006/main" xmlns:r="http://schemas.openxmlformats.org/officeDocument/2006/relationships" xmlns:p14="http://schemas.microsoft.com/office/powerpoint/2010/main" xmlns:p15="http://schemas.microsoft.com/office/powerpoint/2012/main" xmlns:mc="http://schemas.openxmlformats.org/markup-compatibility/2006" type="blank" preserve="1">
   <p:cSld name="SECTION_TITLE_AND_DESCRIPTION">
     <p:bg>
@@ -829,14 +2156,14 @@
       </p:grpSpPr>
       <p:sp>
         <p:nvSpPr>
-          <p:cNvPr id="2" name="Google Shape;36;p9"/>
+          <p:cNvPr id="11" name="Google Shape;36;p9"/>
           <p:cNvSpPr/>
           <p:nvPr/>
         </p:nvSpPr>
         <p:spPr>
           <a:xfrm>
             <a:off x="10800000" y="-360"/>
-            <a:ext cx="10799280" cy="10799280"/>
+            <a:ext cx="10798920" cy="10798920"/>
           </a:xfrm>
           <a:prstGeom prst="rect">
             <a:avLst/>
@@ -881,7 +2208,7 @@
       </p:sp>
       <p:sp>
         <p:nvSpPr>
-          <p:cNvPr id="3" name="PlaceHolder 1"/>
+          <p:cNvPr id="12" name="PlaceHolder 1"/>
           <p:cNvSpPr>
             <a:spLocks noGrp="1"/>
           </p:cNvSpPr>
@@ -892,7 +2219,7 @@
         <p:spPr>
           <a:xfrm>
             <a:off x="627120" y="2589480"/>
-            <a:ext cx="9555120" cy="3112200"/>
+            <a:ext cx="9554760" cy="3111840"/>
           </a:xfrm>
           <a:prstGeom prst="rect">
             <a:avLst/>
@@ -940,7 +2267,7 @@
       </p:sp>
       <p:sp>
         <p:nvSpPr>
-          <p:cNvPr id="4" name="PlaceHolder 2"/>
+          <p:cNvPr id="13" name="PlaceHolder 2"/>
           <p:cNvSpPr>
             <a:spLocks noGrp="1"/>
           </p:cNvSpPr>
@@ -951,7 +2278,7 @@
         <p:spPr>
           <a:xfrm>
             <a:off x="11667960" y="1520280"/>
-            <a:ext cx="9063360" cy="7758360"/>
+            <a:ext cx="9063000" cy="7758000"/>
           </a:xfrm>
           <a:prstGeom prst="rect">
             <a:avLst/>
@@ -1214,18 +2541,18 @@
       </p:sp>
       <p:sp>
         <p:nvSpPr>
-          <p:cNvPr id="5" name="PlaceHolder 3"/>
+          <p:cNvPr id="14" name="PlaceHolder 3"/>
           <p:cNvSpPr>
             <a:spLocks noGrp="1"/>
           </p:cNvSpPr>
           <p:nvPr>
-            <p:ph type="sldNum" idx="2"/>
+            <p:ph type="sldNum" idx="5"/>
           </p:nvPr>
         </p:nvSpPr>
         <p:spPr>
           <a:xfrm>
             <a:off x="20013840" y="9791640"/>
-            <a:ext cx="1295280" cy="826200"/>
+            <a:ext cx="1294920" cy="825840"/>
           </a:xfrm>
           <a:prstGeom prst="rect">
             <a:avLst/>
@@ -1269,7 +2596,7 @@
                 <a:tab algn="l" pos="0"/>
               </a:tabLst>
             </a:pPr>
-            <a:fld id="{593A79B7-8568-4736-B6D7-FA33D128B04A}" type="slidenum">
+            <a:fld id="{A6BF33DC-5DAF-4709-A633-43049934F307}" type="slidenum">
               <a:rPr b="0" lang="en-GB" sz="1000" strike="noStrike" u="none">
                 <a:solidFill>
                   <a:schemeClr val="dk2"/>
@@ -1297,7 +2624,7 @@
 </p:sldLayout>
 </file>
 
-<file path=ppt/slideLayouts/slideLayout3.xml><?xml version="1.0" encoding="utf-8"?>
+<file path=ppt/slideLayouts/slideLayout6.xml><?xml version="1.0" encoding="utf-8"?>
 <p:sldLayout xmlns:a="http://schemas.openxmlformats.org/drawingml/2006/main" xmlns:p="http://schemas.openxmlformats.org/presentationml/2006/main" xmlns:r="http://schemas.openxmlformats.org/officeDocument/2006/relationships" xmlns:p14="http://schemas.microsoft.com/office/powerpoint/2010/main" xmlns:p15="http://schemas.microsoft.com/office/powerpoint/2012/main" xmlns:mc="http://schemas.openxmlformats.org/markup-compatibility/2006" type="blank" preserve="1">
   <p:cSld name="CAPTION_ONLY">
     <p:bg>
@@ -1323,7 +2650,7 @@
       </p:grpSpPr>
       <p:sp>
         <p:nvSpPr>
-          <p:cNvPr id="6" name="PlaceHolder 1"/>
+          <p:cNvPr id="15" name="PlaceHolder 1"/>
           <p:cNvSpPr>
             <a:spLocks noGrp="1"/>
           </p:cNvSpPr>
@@ -1334,7 +2661,7 @@
         <p:spPr>
           <a:xfrm>
             <a:off x="736200" y="8883000"/>
-            <a:ext cx="14169960" cy="1269720"/>
+            <a:ext cx="14169600" cy="1269360"/>
           </a:xfrm>
           <a:prstGeom prst="rect">
             <a:avLst/>
@@ -1597,18 +2924,18 @@
       </p:sp>
       <p:sp>
         <p:nvSpPr>
-          <p:cNvPr id="7" name="PlaceHolder 2"/>
+          <p:cNvPr id="16" name="PlaceHolder 2"/>
           <p:cNvSpPr>
             <a:spLocks noGrp="1"/>
           </p:cNvSpPr>
           <p:nvPr>
-            <p:ph type="sldNum" idx="3"/>
+            <p:ph type="sldNum" idx="6"/>
           </p:nvPr>
         </p:nvSpPr>
         <p:spPr>
           <a:xfrm>
             <a:off x="20013840" y="9791640"/>
-            <a:ext cx="1295280" cy="826200"/>
+            <a:ext cx="1294920" cy="825840"/>
           </a:xfrm>
           <a:prstGeom prst="rect">
             <a:avLst/>
@@ -1652,7 +2979,7 @@
                 <a:tab algn="l" pos="0"/>
               </a:tabLst>
             </a:pPr>
-            <a:fld id="{57897919-E67F-4B5B-9BAD-C104477EEC45}" type="slidenum">
+            <a:fld id="{F6103A99-8BB8-42A5-81FD-CD0856E11DC3}" type="slidenum">
               <a:rPr b="0" lang="en-GB" sz="1000" strike="noStrike" u="none">
                 <a:solidFill>
                   <a:schemeClr val="dk2"/>
@@ -1680,7 +3007,7 @@
 </p:sldLayout>
 </file>
 
-<file path=ppt/slideLayouts/slideLayout4.xml><?xml version="1.0" encoding="utf-8"?>
+<file path=ppt/slideLayouts/slideLayout7.xml><?xml version="1.0" encoding="utf-8"?>
 <p:sldLayout xmlns:a="http://schemas.openxmlformats.org/drawingml/2006/main" xmlns:p="http://schemas.openxmlformats.org/presentationml/2006/main" xmlns:r="http://schemas.openxmlformats.org/officeDocument/2006/relationships" xmlns:p14="http://schemas.microsoft.com/office/powerpoint/2010/main" xmlns:p15="http://schemas.microsoft.com/office/powerpoint/2012/main" xmlns:mc="http://schemas.openxmlformats.org/markup-compatibility/2006" type="title" preserve="1">
   <p:cSld name="TITLE">
     <p:bg>
@@ -1706,7 +3033,7 @@
       </p:grpSpPr>
       <p:sp>
         <p:nvSpPr>
-          <p:cNvPr id="8" name="PlaceHolder 1"/>
+          <p:cNvPr id="17" name="PlaceHolder 1"/>
           <p:cNvSpPr>
             <a:spLocks noGrp="1"/>
           </p:cNvSpPr>
@@ -1717,7 +3044,7 @@
         <p:spPr>
           <a:xfrm>
             <a:off x="736200" y="1563480"/>
-            <a:ext cx="20126880" cy="4309560"/>
+            <a:ext cx="20126520" cy="4309200"/>
           </a:xfrm>
           <a:prstGeom prst="rect">
             <a:avLst/>
@@ -1765,18 +3092,18 @@
       </p:sp>
       <p:sp>
         <p:nvSpPr>
-          <p:cNvPr id="9" name="PlaceHolder 2"/>
+          <p:cNvPr id="18" name="PlaceHolder 2"/>
           <p:cNvSpPr>
             <a:spLocks noGrp="1"/>
           </p:cNvSpPr>
           <p:nvPr>
-            <p:ph type="sldNum" idx="4"/>
+            <p:ph type="sldNum" idx="7"/>
           </p:nvPr>
         </p:nvSpPr>
         <p:spPr>
           <a:xfrm>
             <a:off x="20013840" y="9791640"/>
-            <a:ext cx="1295280" cy="826200"/>
+            <a:ext cx="1294920" cy="825840"/>
           </a:xfrm>
           <a:prstGeom prst="rect">
             <a:avLst/>
@@ -1820,7 +3147,7 @@
                 <a:tab algn="l" pos="0"/>
               </a:tabLst>
             </a:pPr>
-            <a:fld id="{CB8CB338-6963-4FA7-9659-66F29FFA7050}" type="slidenum">
+            <a:fld id="{97FD77A9-A41A-4BDF-A0C6-CA83EED72C24}" type="slidenum">
               <a:rPr b="0" lang="en-GB" sz="1000" strike="noStrike" u="none">
                 <a:solidFill>
                   <a:schemeClr val="dk2"/>
@@ -1845,7 +3172,7 @@
       </p:sp>
       <p:sp>
         <p:nvSpPr>
-          <p:cNvPr id="10" name="PlaceHolder 3"/>
+          <p:cNvPr id="19" name="PlaceHolder 3"/>
           <p:cNvSpPr>
             <a:spLocks noGrp="1"/>
           </p:cNvSpPr>
@@ -1856,7 +3183,7 @@
         <p:spPr>
           <a:xfrm>
             <a:off x="1079640" y="2526840"/>
-            <a:ext cx="19438920" cy="6262920"/>
+            <a:ext cx="19438560" cy="6262560"/>
           </a:xfrm>
           <a:prstGeom prst="rect">
             <a:avLst/>
@@ -2122,7 +3449,7 @@
 </p:sldLayout>
 </file>
 
-<file path=ppt/slideLayouts/slideLayout5.xml><?xml version="1.0" encoding="utf-8"?>
+<file path=ppt/slideLayouts/slideLayout8.xml><?xml version="1.0" encoding="utf-8"?>
 <p:sldLayout xmlns:a="http://schemas.openxmlformats.org/drawingml/2006/main" xmlns:p="http://schemas.openxmlformats.org/presentationml/2006/main" xmlns:r="http://schemas.openxmlformats.org/officeDocument/2006/relationships" xmlns:p14="http://schemas.microsoft.com/office/powerpoint/2010/main" xmlns:p15="http://schemas.microsoft.com/office/powerpoint/2012/main" xmlns:mc="http://schemas.openxmlformats.org/markup-compatibility/2006" type="blank" preserve="1">
   <p:cSld name="BIG_NUMBER">
     <p:bg>
@@ -2148,7 +3475,7 @@
       </p:grpSpPr>
       <p:sp>
         <p:nvSpPr>
-          <p:cNvPr id="11" name="PlaceHolder 1"/>
+          <p:cNvPr id="20" name="PlaceHolder 1"/>
           <p:cNvSpPr>
             <a:spLocks noGrp="1"/>
           </p:cNvSpPr>
@@ -2159,7 +3486,7 @@
         <p:spPr>
           <a:xfrm>
             <a:off x="736200" y="2322720"/>
-            <a:ext cx="20126880" cy="4122360"/>
+            <a:ext cx="20126520" cy="4122000"/>
           </a:xfrm>
           <a:prstGeom prst="rect">
             <a:avLst/>
@@ -2208,7 +3535,7 @@
       </p:sp>
       <p:sp>
         <p:nvSpPr>
-          <p:cNvPr id="12" name="PlaceHolder 2"/>
+          <p:cNvPr id="21" name="PlaceHolder 2"/>
           <p:cNvSpPr>
             <a:spLocks noGrp="1"/>
           </p:cNvSpPr>
@@ -2219,7 +3546,7 @@
         <p:spPr>
           <a:xfrm>
             <a:off x="736200" y="6618960"/>
-            <a:ext cx="20126880" cy="2730960"/>
+            <a:ext cx="20126520" cy="2730600"/>
           </a:xfrm>
           <a:prstGeom prst="rect">
             <a:avLst/>
@@ -2482,18 +3809,18 @@
       </p:sp>
       <p:sp>
         <p:nvSpPr>
-          <p:cNvPr id="13" name="PlaceHolder 3"/>
+          <p:cNvPr id="22" name="PlaceHolder 3"/>
           <p:cNvSpPr>
             <a:spLocks noGrp="1"/>
           </p:cNvSpPr>
           <p:nvPr>
-            <p:ph type="sldNum" idx="5"/>
+            <p:ph type="sldNum" idx="8"/>
           </p:nvPr>
         </p:nvSpPr>
         <p:spPr>
           <a:xfrm>
             <a:off x="20013840" y="9791640"/>
-            <a:ext cx="1295280" cy="826200"/>
+            <a:ext cx="1294920" cy="825840"/>
           </a:xfrm>
           <a:prstGeom prst="rect">
             <a:avLst/>
@@ -2537,7 +3864,7 @@
                 <a:tab algn="l" pos="0"/>
               </a:tabLst>
             </a:pPr>
-            <a:fld id="{5B474AD4-9FF6-449D-90DF-336CFD4AFBD6}" type="slidenum">
+            <a:fld id="{5E26F863-01CE-497F-AC96-F6039CA4F7DF}" type="slidenum">
               <a:rPr b="0" lang="en-GB" sz="1000" strike="noStrike" u="none">
                 <a:solidFill>
                   <a:schemeClr val="dk2"/>
@@ -2565,7 +3892,7 @@
 </p:sldLayout>
 </file>
 
-<file path=ppt/slideLayouts/slideLayout6.xml><?xml version="1.0" encoding="utf-8"?>
+<file path=ppt/slideLayouts/slideLayout9.xml><?xml version="1.0" encoding="utf-8"?>
 <p:sldLayout xmlns:a="http://schemas.openxmlformats.org/drawingml/2006/main" xmlns:p="http://schemas.openxmlformats.org/presentationml/2006/main" xmlns:r="http://schemas.openxmlformats.org/officeDocument/2006/relationships" xmlns:p14="http://schemas.microsoft.com/office/powerpoint/2010/main" xmlns:p15="http://schemas.microsoft.com/office/powerpoint/2012/main" xmlns:mc="http://schemas.openxmlformats.org/markup-compatibility/2006" type="blank" preserve="1">
   <p:cSld name="BLANK">
     <p:bg>
@@ -2591,1333 +3918,7 @@
       </p:grpSpPr>
       <p:sp>
         <p:nvSpPr>
-          <p:cNvPr id="14" name="PlaceHolder 1"/>
-          <p:cNvSpPr>
-            <a:spLocks noGrp="1"/>
-          </p:cNvSpPr>
-          <p:nvPr>
-            <p:ph type="sldNum" idx="6"/>
-          </p:nvPr>
-        </p:nvSpPr>
-        <p:spPr>
-          <a:xfrm>
-            <a:off x="20013840" y="9791640"/>
-            <a:ext cx="1295280" cy="826200"/>
-          </a:xfrm>
-          <a:prstGeom prst="rect">
-            <a:avLst/>
-          </a:prstGeom>
-          <a:noFill/>
-          <a:ln w="0">
-            <a:noFill/>
-          </a:ln>
-        </p:spPr>
-        <p:txBody>
-          <a:bodyPr lIns="91440" rIns="91440" tIns="91440" bIns="91440" anchor="ctr">
-            <a:normAutofit/>
-          </a:bodyPr>
-          <a:lstStyle>
-            <a:lvl1pPr indent="0" algn="r">
-              <a:lnSpc>
-                <a:spcPct val="100000"/>
-              </a:lnSpc>
-              <a:buNone/>
-              <a:tabLst>
-                <a:tab algn="l" pos="0"/>
-              </a:tabLst>
-              <a:defRPr b="0" lang="en-GB" sz="1000" strike="noStrike" u="none">
-                <a:solidFill>
-                  <a:schemeClr val="dk2"/>
-                </a:solidFill>
-                <a:effectLst/>
-                <a:uFillTx/>
-                <a:latin typeface="Arial"/>
-                <a:ea typeface="Arial"/>
-              </a:defRPr>
-            </a:lvl1pPr>
-          </a:lstStyle>
-          <a:p>
-            <a:pPr indent="0" algn="r">
-              <a:lnSpc>
-                <a:spcPct val="100000"/>
-              </a:lnSpc>
-              <a:buNone/>
-              <a:tabLst>
-                <a:tab algn="l" pos="0"/>
-              </a:tabLst>
-            </a:pPr>
-            <a:fld id="{0AC6CECB-9473-4998-8975-D8083913B8C4}" type="slidenum">
-              <a:rPr b="0" lang="en-GB" sz="1000" strike="noStrike" u="none">
-                <a:solidFill>
-                  <a:schemeClr val="dk2"/>
-                </a:solidFill>
-                <a:effectLst/>
-                <a:uFillTx/>
-                <a:latin typeface="Arial"/>
-                <a:ea typeface="Arial"/>
-              </a:rPr>
-              <a:t>&lt;number&gt;</a:t>
-            </a:fld>
-            <a:endParaRPr b="0" lang="pt-PT" sz="1000" strike="noStrike" u="none">
-              <a:solidFill>
-                <a:srgbClr val="000000"/>
-              </a:solidFill>
-              <a:effectLst/>
-              <a:uFillTx/>
-              <a:latin typeface="Times New Roman"/>
-            </a:endParaRPr>
-          </a:p>
-        </p:txBody>
-      </p:sp>
-    </p:spTree>
-  </p:cSld>
-</p:sldLayout>
-</file>
-
-<file path=ppt/slideLayouts/slideLayout7.xml><?xml version="1.0" encoding="utf-8"?>
-<p:sldLayout xmlns:a="http://schemas.openxmlformats.org/drawingml/2006/main" xmlns:p="http://schemas.openxmlformats.org/presentationml/2006/main" xmlns:r="http://schemas.openxmlformats.org/officeDocument/2006/relationships" xmlns:p14="http://schemas.microsoft.com/office/powerpoint/2010/main" xmlns:p15="http://schemas.microsoft.com/office/powerpoint/2012/main" xmlns:mc="http://schemas.openxmlformats.org/markup-compatibility/2006" type="blank" preserve="1">
-  <p:cSld name="SECTION_HEADER">
-    <p:bg>
-      <p:bgPr>
-        <a:solidFill>
-          <a:schemeClr val="lt1"/>
-        </a:solidFill>
-      </p:bgPr>
-    </p:bg>
-    <p:spTree>
-      <p:nvGrpSpPr>
-        <p:cNvPr id="1" name=""/>
-        <p:cNvGrpSpPr/>
-        <p:nvPr/>
-      </p:nvGrpSpPr>
-      <p:grpSpPr>
-        <a:xfrm>
-          <a:off x="0" y="0"/>
-          <a:ext cx="0" cy="0"/>
-          <a:chOff x="0" y="0"/>
-          <a:chExt cx="0" cy="0"/>
-        </a:xfrm>
-      </p:grpSpPr>
-      <p:sp>
-        <p:nvSpPr>
-          <p:cNvPr id="15" name="PlaceHolder 1"/>
-          <p:cNvSpPr>
-            <a:spLocks noGrp="1"/>
-          </p:cNvSpPr>
-          <p:nvPr>
-            <p:ph type="title"/>
-          </p:nvPr>
-        </p:nvSpPr>
-        <p:spPr>
-          <a:xfrm>
-            <a:off x="736200" y="4516200"/>
-            <a:ext cx="20126880" cy="1766880"/>
-          </a:xfrm>
-          <a:prstGeom prst="rect">
-            <a:avLst/>
-          </a:prstGeom>
-          <a:noFill/>
-          <a:ln w="0">
-            <a:noFill/>
-          </a:ln>
-        </p:spPr>
-        <p:txBody>
-          <a:bodyPr lIns="91440" rIns="91440" tIns="91440" bIns="91440" anchor="ctr">
-            <a:normAutofit/>
-          </a:bodyPr>
-          <a:p>
-            <a:pPr indent="0">
-              <a:lnSpc>
-                <a:spcPct val="100000"/>
-              </a:lnSpc>
-              <a:buNone/>
-              <a:tabLst>
-                <a:tab algn="l" pos="0"/>
-              </a:tabLst>
-            </a:pPr>
-            <a:r>
-              <a:rPr b="0" lang="pt-PT" sz="3600" strike="noStrike" u="none">
-                <a:solidFill>
-                  <a:srgbClr val="000000"/>
-                </a:solidFill>
-                <a:effectLst/>
-                <a:uFillTx/>
-                <a:latin typeface="Arial"/>
-              </a:rPr>
-              <a:t>Click to edit the title text format</a:t>
-            </a:r>
-            <a:endParaRPr b="0" lang="pt-PT" sz="3600" strike="noStrike" u="none">
-              <a:solidFill>
-                <a:srgbClr val="000000"/>
-              </a:solidFill>
-              <a:effectLst/>
-              <a:uFillTx/>
-              <a:latin typeface="Arial"/>
-            </a:endParaRPr>
-          </a:p>
-        </p:txBody>
-      </p:sp>
-      <p:sp>
-        <p:nvSpPr>
-          <p:cNvPr id="16" name="PlaceHolder 2"/>
-          <p:cNvSpPr>
-            <a:spLocks noGrp="1"/>
-          </p:cNvSpPr>
-          <p:nvPr>
-            <p:ph type="sldNum" idx="7"/>
-          </p:nvPr>
-        </p:nvSpPr>
-        <p:spPr>
-          <a:xfrm>
-            <a:off x="20013840" y="9791640"/>
-            <a:ext cx="1295280" cy="826200"/>
-          </a:xfrm>
-          <a:prstGeom prst="rect">
-            <a:avLst/>
-          </a:prstGeom>
-          <a:noFill/>
-          <a:ln w="0">
-            <a:noFill/>
-          </a:ln>
-        </p:spPr>
-        <p:txBody>
-          <a:bodyPr lIns="91440" rIns="91440" tIns="91440" bIns="91440" anchor="ctr">
-            <a:normAutofit/>
-          </a:bodyPr>
-          <a:lstStyle>
-            <a:lvl1pPr indent="0" algn="r">
-              <a:lnSpc>
-                <a:spcPct val="100000"/>
-              </a:lnSpc>
-              <a:buNone/>
-              <a:tabLst>
-                <a:tab algn="l" pos="0"/>
-              </a:tabLst>
-              <a:defRPr b="0" lang="en-GB" sz="1000" strike="noStrike" u="none">
-                <a:solidFill>
-                  <a:schemeClr val="dk2"/>
-                </a:solidFill>
-                <a:effectLst/>
-                <a:uFillTx/>
-                <a:latin typeface="Arial"/>
-                <a:ea typeface="Arial"/>
-              </a:defRPr>
-            </a:lvl1pPr>
-          </a:lstStyle>
-          <a:p>
-            <a:pPr indent="0" algn="r">
-              <a:lnSpc>
-                <a:spcPct val="100000"/>
-              </a:lnSpc>
-              <a:buNone/>
-              <a:tabLst>
-                <a:tab algn="l" pos="0"/>
-              </a:tabLst>
-            </a:pPr>
-            <a:fld id="{B977365B-503A-4924-9BB4-5B8A0E24CD31}" type="slidenum">
-              <a:rPr b="0" lang="en-GB" sz="1000" strike="noStrike" u="none">
-                <a:solidFill>
-                  <a:schemeClr val="dk2"/>
-                </a:solidFill>
-                <a:effectLst/>
-                <a:uFillTx/>
-                <a:latin typeface="Arial"/>
-                <a:ea typeface="Arial"/>
-              </a:rPr>
-              <a:t>&lt;number&gt;</a:t>
-            </a:fld>
-            <a:endParaRPr b="0" lang="pt-PT" sz="1000" strike="noStrike" u="none">
-              <a:solidFill>
-                <a:srgbClr val="000000"/>
-              </a:solidFill>
-              <a:effectLst/>
-              <a:uFillTx/>
-              <a:latin typeface="Times New Roman"/>
-            </a:endParaRPr>
-          </a:p>
-        </p:txBody>
-      </p:sp>
-    </p:spTree>
-  </p:cSld>
-</p:sldLayout>
-</file>
-
-<file path=ppt/slideLayouts/slideLayout8.xml><?xml version="1.0" encoding="utf-8"?>
-<p:sldLayout xmlns:a="http://schemas.openxmlformats.org/drawingml/2006/main" xmlns:p="http://schemas.openxmlformats.org/presentationml/2006/main" xmlns:r="http://schemas.openxmlformats.org/officeDocument/2006/relationships" xmlns:p14="http://schemas.microsoft.com/office/powerpoint/2010/main" xmlns:p15="http://schemas.microsoft.com/office/powerpoint/2012/main" xmlns:mc="http://schemas.openxmlformats.org/markup-compatibility/2006" type="tx" preserve="1">
-  <p:cSld name="TITLE_AND_BODY">
-    <p:bg>
-      <p:bgPr>
-        <a:solidFill>
-          <a:schemeClr val="lt1"/>
-        </a:solidFill>
-      </p:bgPr>
-    </p:bg>
-    <p:spTree>
-      <p:nvGrpSpPr>
-        <p:cNvPr id="1" name=""/>
-        <p:cNvGrpSpPr/>
-        <p:nvPr/>
-      </p:nvGrpSpPr>
-      <p:grpSpPr>
-        <a:xfrm>
-          <a:off x="0" y="0"/>
-          <a:ext cx="0" cy="0"/>
-          <a:chOff x="0" y="0"/>
-          <a:chExt cx="0" cy="0"/>
-        </a:xfrm>
-      </p:grpSpPr>
-      <p:sp>
-        <p:nvSpPr>
-          <p:cNvPr id="17" name="PlaceHolder 1"/>
-          <p:cNvSpPr>
-            <a:spLocks noGrp="1"/>
-          </p:cNvSpPr>
-          <p:nvPr>
-            <p:ph type="title"/>
-          </p:nvPr>
-        </p:nvSpPr>
-        <p:spPr>
-          <a:xfrm>
-            <a:off x="736200" y="934560"/>
-            <a:ext cx="20126880" cy="1201680"/>
-          </a:xfrm>
-          <a:prstGeom prst="rect">
-            <a:avLst/>
-          </a:prstGeom>
-          <a:noFill/>
-          <a:ln w="0">
-            <a:noFill/>
-          </a:ln>
-        </p:spPr>
-        <p:txBody>
-          <a:bodyPr lIns="91440" rIns="91440" tIns="91440" bIns="91440" anchor="t">
-            <a:normAutofit/>
-          </a:bodyPr>
-          <a:p>
-            <a:pPr indent="0">
-              <a:lnSpc>
-                <a:spcPct val="100000"/>
-              </a:lnSpc>
-              <a:buNone/>
-              <a:tabLst>
-                <a:tab algn="l" pos="0"/>
-              </a:tabLst>
-            </a:pPr>
-            <a:r>
-              <a:rPr b="0" lang="pt-PT" sz="2800" strike="noStrike" u="none">
-                <a:solidFill>
-                  <a:srgbClr val="000000"/>
-                </a:solidFill>
-                <a:effectLst/>
-                <a:uFillTx/>
-                <a:latin typeface="Arial"/>
-              </a:rPr>
-              <a:t>Click to edit the title text format</a:t>
-            </a:r>
-            <a:endParaRPr b="0" lang="pt-PT" sz="2800" strike="noStrike" u="none">
-              <a:solidFill>
-                <a:srgbClr val="000000"/>
-              </a:solidFill>
-              <a:effectLst/>
-              <a:uFillTx/>
-              <a:latin typeface="Arial"/>
-            </a:endParaRPr>
-          </a:p>
-        </p:txBody>
-      </p:sp>
-      <p:sp>
-        <p:nvSpPr>
-          <p:cNvPr id="18" name="PlaceHolder 2"/>
-          <p:cNvSpPr>
-            <a:spLocks noGrp="1"/>
-          </p:cNvSpPr>
-          <p:nvPr>
-            <p:ph type="body"/>
-          </p:nvPr>
-        </p:nvSpPr>
-        <p:spPr>
-          <a:xfrm>
-            <a:off x="736200" y="2419920"/>
-            <a:ext cx="20126880" cy="7173000"/>
-          </a:xfrm>
-          <a:prstGeom prst="rect">
-            <a:avLst/>
-          </a:prstGeom>
-          <a:noFill/>
-          <a:ln w="0">
-            <a:noFill/>
-          </a:ln>
-        </p:spPr>
-        <p:txBody>
-          <a:bodyPr lIns="91440" rIns="91440" tIns="91440" bIns="91440" anchor="t">
-            <a:normAutofit/>
-          </a:bodyPr>
-          <a:p>
-            <a:pPr marL="432000" indent="-324000">
-              <a:lnSpc>
-                <a:spcPct val="100000"/>
-              </a:lnSpc>
-              <a:spcBef>
-                <a:spcPts val="1417"/>
-              </a:spcBef>
-              <a:buClr>
-                <a:srgbClr val="000000"/>
-              </a:buClr>
-              <a:buSzPct val="45000"/>
-              <a:buFont typeface="Wingdings" charset="2"/>
-              <a:buChar char=""/>
-            </a:pPr>
-            <a:r>
-              <a:rPr b="0" lang="pt-PT" sz="1800" strike="noStrike" u="none">
-                <a:solidFill>
-                  <a:srgbClr val="000000"/>
-                </a:solidFill>
-                <a:effectLst/>
-                <a:uFillTx/>
-                <a:latin typeface="Arial"/>
-              </a:rPr>
-              <a:t>Click to edit the outline text format</a:t>
-            </a:r>
-            <a:endParaRPr b="0" lang="pt-PT" sz="1800" strike="noStrike" u="none">
-              <a:solidFill>
-                <a:srgbClr val="000000"/>
-              </a:solidFill>
-              <a:effectLst/>
-              <a:uFillTx/>
-              <a:latin typeface="Arial"/>
-            </a:endParaRPr>
-          </a:p>
-          <a:p>
-            <a:pPr lvl="1" marL="864000" indent="-324000">
-              <a:lnSpc>
-                <a:spcPct val="100000"/>
-              </a:lnSpc>
-              <a:spcBef>
-                <a:spcPts val="1134"/>
-              </a:spcBef>
-              <a:buClr>
-                <a:srgbClr val="000000"/>
-              </a:buClr>
-              <a:buSzPct val="75000"/>
-              <a:buFont typeface="Symbol" charset="2"/>
-              <a:buChar char=""/>
-            </a:pPr>
-            <a:r>
-              <a:rPr b="0" lang="pt-PT" sz="1800" strike="noStrike" u="none">
-                <a:solidFill>
-                  <a:srgbClr val="000000"/>
-                </a:solidFill>
-                <a:effectLst/>
-                <a:uFillTx/>
-                <a:latin typeface="Arial"/>
-              </a:rPr>
-              <a:t>Second Outline Level</a:t>
-            </a:r>
-            <a:endParaRPr b="0" lang="pt-PT" sz="1800" strike="noStrike" u="none">
-              <a:solidFill>
-                <a:srgbClr val="000000"/>
-              </a:solidFill>
-              <a:effectLst/>
-              <a:uFillTx/>
-              <a:latin typeface="Arial"/>
-            </a:endParaRPr>
-          </a:p>
-          <a:p>
-            <a:pPr lvl="2" marL="1296000" indent="-288000">
-              <a:lnSpc>
-                <a:spcPct val="100000"/>
-              </a:lnSpc>
-              <a:spcBef>
-                <a:spcPts val="850"/>
-              </a:spcBef>
-              <a:buClr>
-                <a:srgbClr val="000000"/>
-              </a:buClr>
-              <a:buSzPct val="45000"/>
-              <a:buFont typeface="Wingdings" charset="2"/>
-              <a:buChar char=""/>
-            </a:pPr>
-            <a:r>
-              <a:rPr b="0" lang="pt-PT" sz="1800" strike="noStrike" u="none">
-                <a:solidFill>
-                  <a:srgbClr val="000000"/>
-                </a:solidFill>
-                <a:effectLst/>
-                <a:uFillTx/>
-                <a:latin typeface="Arial"/>
-              </a:rPr>
-              <a:t>Third Outline Level</a:t>
-            </a:r>
-            <a:endParaRPr b="0" lang="pt-PT" sz="1800" strike="noStrike" u="none">
-              <a:solidFill>
-                <a:srgbClr val="000000"/>
-              </a:solidFill>
-              <a:effectLst/>
-              <a:uFillTx/>
-              <a:latin typeface="Arial"/>
-            </a:endParaRPr>
-          </a:p>
-          <a:p>
-            <a:pPr lvl="3" marL="1728000" indent="-216000">
-              <a:lnSpc>
-                <a:spcPct val="100000"/>
-              </a:lnSpc>
-              <a:spcBef>
-                <a:spcPts val="567"/>
-              </a:spcBef>
-              <a:buClr>
-                <a:srgbClr val="000000"/>
-              </a:buClr>
-              <a:buSzPct val="75000"/>
-              <a:buFont typeface="Symbol" charset="2"/>
-              <a:buChar char=""/>
-            </a:pPr>
-            <a:r>
-              <a:rPr b="0" lang="pt-PT" sz="1800" strike="noStrike" u="none">
-                <a:solidFill>
-                  <a:srgbClr val="000000"/>
-                </a:solidFill>
-                <a:effectLst/>
-                <a:uFillTx/>
-                <a:latin typeface="Arial"/>
-              </a:rPr>
-              <a:t>Fourth Outline Level</a:t>
-            </a:r>
-            <a:endParaRPr b="0" lang="pt-PT" sz="1800" strike="noStrike" u="none">
-              <a:solidFill>
-                <a:srgbClr val="000000"/>
-              </a:solidFill>
-              <a:effectLst/>
-              <a:uFillTx/>
-              <a:latin typeface="Arial"/>
-            </a:endParaRPr>
-          </a:p>
-          <a:p>
-            <a:pPr lvl="4" marL="2160000" indent="-216000">
-              <a:lnSpc>
-                <a:spcPct val="100000"/>
-              </a:lnSpc>
-              <a:spcBef>
-                <a:spcPts val="283"/>
-              </a:spcBef>
-              <a:buClr>
-                <a:srgbClr val="000000"/>
-              </a:buClr>
-              <a:buSzPct val="45000"/>
-              <a:buFont typeface="Wingdings" charset="2"/>
-              <a:buChar char=""/>
-            </a:pPr>
-            <a:r>
-              <a:rPr b="0" lang="pt-PT" sz="1800" strike="noStrike" u="none">
-                <a:solidFill>
-                  <a:srgbClr val="000000"/>
-                </a:solidFill>
-                <a:effectLst/>
-                <a:uFillTx/>
-                <a:latin typeface="Arial"/>
-              </a:rPr>
-              <a:t>Fifth Outline Level</a:t>
-            </a:r>
-            <a:endParaRPr b="0" lang="pt-PT" sz="1800" strike="noStrike" u="none">
-              <a:solidFill>
-                <a:srgbClr val="000000"/>
-              </a:solidFill>
-              <a:effectLst/>
-              <a:uFillTx/>
-              <a:latin typeface="Arial"/>
-            </a:endParaRPr>
-          </a:p>
-          <a:p>
-            <a:pPr lvl="5" marL="2592000" indent="-216000">
-              <a:lnSpc>
-                <a:spcPct val="100000"/>
-              </a:lnSpc>
-              <a:spcBef>
-                <a:spcPts val="283"/>
-              </a:spcBef>
-              <a:buClr>
-                <a:srgbClr val="000000"/>
-              </a:buClr>
-              <a:buSzPct val="45000"/>
-              <a:buFont typeface="Wingdings" charset="2"/>
-              <a:buChar char=""/>
-            </a:pPr>
-            <a:r>
-              <a:rPr b="0" lang="pt-PT" sz="1800" strike="noStrike" u="none">
-                <a:solidFill>
-                  <a:srgbClr val="000000"/>
-                </a:solidFill>
-                <a:effectLst/>
-                <a:uFillTx/>
-                <a:latin typeface="Arial"/>
-              </a:rPr>
-              <a:t>Sixth Outline Level</a:t>
-            </a:r>
-            <a:endParaRPr b="0" lang="pt-PT" sz="1800" strike="noStrike" u="none">
-              <a:solidFill>
-                <a:srgbClr val="000000"/>
-              </a:solidFill>
-              <a:effectLst/>
-              <a:uFillTx/>
-              <a:latin typeface="Arial"/>
-            </a:endParaRPr>
-          </a:p>
-          <a:p>
-            <a:pPr lvl="6" marL="3024000" indent="-216000">
-              <a:lnSpc>
-                <a:spcPct val="100000"/>
-              </a:lnSpc>
-              <a:spcBef>
-                <a:spcPts val="283"/>
-              </a:spcBef>
-              <a:buClr>
-                <a:srgbClr val="000000"/>
-              </a:buClr>
-              <a:buSzPct val="45000"/>
-              <a:buFont typeface="Wingdings" charset="2"/>
-              <a:buChar char=""/>
-            </a:pPr>
-            <a:r>
-              <a:rPr b="0" lang="pt-PT" sz="1800" strike="noStrike" u="none">
-                <a:solidFill>
-                  <a:srgbClr val="000000"/>
-                </a:solidFill>
-                <a:effectLst/>
-                <a:uFillTx/>
-                <a:latin typeface="Arial"/>
-              </a:rPr>
-              <a:t>Seventh Outline Level</a:t>
-            </a:r>
-            <a:endParaRPr b="0" lang="pt-PT" sz="1800" strike="noStrike" u="none">
-              <a:solidFill>
-                <a:srgbClr val="000000"/>
-              </a:solidFill>
-              <a:effectLst/>
-              <a:uFillTx/>
-              <a:latin typeface="Arial"/>
-            </a:endParaRPr>
-          </a:p>
-        </p:txBody>
-      </p:sp>
-      <p:sp>
-        <p:nvSpPr>
-          <p:cNvPr id="19" name="PlaceHolder 3"/>
-          <p:cNvSpPr>
-            <a:spLocks noGrp="1"/>
-          </p:cNvSpPr>
-          <p:nvPr>
-            <p:ph type="sldNum" idx="8"/>
-          </p:nvPr>
-        </p:nvSpPr>
-        <p:spPr>
-          <a:xfrm>
-            <a:off x="20013840" y="9791640"/>
-            <a:ext cx="1295280" cy="826200"/>
-          </a:xfrm>
-          <a:prstGeom prst="rect">
-            <a:avLst/>
-          </a:prstGeom>
-          <a:noFill/>
-          <a:ln w="0">
-            <a:noFill/>
-          </a:ln>
-        </p:spPr>
-        <p:txBody>
-          <a:bodyPr lIns="91440" rIns="91440" tIns="91440" bIns="91440" anchor="ctr">
-            <a:normAutofit/>
-          </a:bodyPr>
-          <a:lstStyle>
-            <a:lvl1pPr indent="0" algn="r">
-              <a:lnSpc>
-                <a:spcPct val="100000"/>
-              </a:lnSpc>
-              <a:buNone/>
-              <a:tabLst>
-                <a:tab algn="l" pos="0"/>
-              </a:tabLst>
-              <a:defRPr b="0" lang="en-GB" sz="1000" strike="noStrike" u="none">
-                <a:solidFill>
-                  <a:schemeClr val="dk2"/>
-                </a:solidFill>
-                <a:effectLst/>
-                <a:uFillTx/>
-                <a:latin typeface="Arial"/>
-                <a:ea typeface="Arial"/>
-              </a:defRPr>
-            </a:lvl1pPr>
-          </a:lstStyle>
-          <a:p>
-            <a:pPr indent="0" algn="r">
-              <a:lnSpc>
-                <a:spcPct val="100000"/>
-              </a:lnSpc>
-              <a:buNone/>
-              <a:tabLst>
-                <a:tab algn="l" pos="0"/>
-              </a:tabLst>
-            </a:pPr>
-            <a:fld id="{E43587F4-74D0-4AD9-99D7-912FD6209AD4}" type="slidenum">
-              <a:rPr b="0" lang="en-GB" sz="1000" strike="noStrike" u="none">
-                <a:solidFill>
-                  <a:schemeClr val="dk2"/>
-                </a:solidFill>
-                <a:effectLst/>
-                <a:uFillTx/>
-                <a:latin typeface="Arial"/>
-                <a:ea typeface="Arial"/>
-              </a:rPr>
-              <a:t>&lt;number&gt;</a:t>
-            </a:fld>
-            <a:endParaRPr b="0" lang="pt-PT" sz="1000" strike="noStrike" u="none">
-              <a:solidFill>
-                <a:srgbClr val="000000"/>
-              </a:solidFill>
-              <a:effectLst/>
-              <a:uFillTx/>
-              <a:latin typeface="Times New Roman"/>
-            </a:endParaRPr>
-          </a:p>
-        </p:txBody>
-      </p:sp>
-    </p:spTree>
-  </p:cSld>
-</p:sldLayout>
-</file>
-
-<file path=ppt/slideLayouts/slideLayout9.xml><?xml version="1.0" encoding="utf-8"?>
-<p:sldLayout xmlns:a="http://schemas.openxmlformats.org/drawingml/2006/main" xmlns:p="http://schemas.openxmlformats.org/presentationml/2006/main" xmlns:r="http://schemas.openxmlformats.org/officeDocument/2006/relationships" xmlns:p14="http://schemas.microsoft.com/office/powerpoint/2010/main" xmlns:p15="http://schemas.microsoft.com/office/powerpoint/2012/main" xmlns:mc="http://schemas.openxmlformats.org/markup-compatibility/2006" type="twoObj" preserve="1">
-  <p:cSld name="TITLE_AND_TWO_COLUMNS">
-    <p:bg>
-      <p:bgPr>
-        <a:solidFill>
-          <a:schemeClr val="lt1"/>
-        </a:solidFill>
-      </p:bgPr>
-    </p:bg>
-    <p:spTree>
-      <p:nvGrpSpPr>
-        <p:cNvPr id="1" name=""/>
-        <p:cNvGrpSpPr/>
-        <p:nvPr/>
-      </p:nvGrpSpPr>
-      <p:grpSpPr>
-        <a:xfrm>
-          <a:off x="0" y="0"/>
-          <a:ext cx="0" cy="0"/>
-          <a:chOff x="0" y="0"/>
-          <a:chExt cx="0" cy="0"/>
-        </a:xfrm>
-      </p:grpSpPr>
-      <p:sp>
-        <p:nvSpPr>
-          <p:cNvPr id="20" name="PlaceHolder 1"/>
-          <p:cNvSpPr>
-            <a:spLocks noGrp="1"/>
-          </p:cNvSpPr>
-          <p:nvPr>
-            <p:ph type="title"/>
-          </p:nvPr>
-        </p:nvSpPr>
-        <p:spPr>
-          <a:xfrm>
-            <a:off x="736200" y="934560"/>
-            <a:ext cx="20126880" cy="1201680"/>
-          </a:xfrm>
-          <a:prstGeom prst="rect">
-            <a:avLst/>
-          </a:prstGeom>
-          <a:noFill/>
-          <a:ln w="0">
-            <a:noFill/>
-          </a:ln>
-        </p:spPr>
-        <p:txBody>
-          <a:bodyPr lIns="91440" rIns="91440" tIns="91440" bIns="91440" anchor="t">
-            <a:normAutofit/>
-          </a:bodyPr>
-          <a:p>
-            <a:pPr indent="0">
-              <a:lnSpc>
-                <a:spcPct val="100000"/>
-              </a:lnSpc>
-              <a:buNone/>
-              <a:tabLst>
-                <a:tab algn="l" pos="0"/>
-              </a:tabLst>
-            </a:pPr>
-            <a:r>
-              <a:rPr b="0" lang="pt-PT" sz="2800" strike="noStrike" u="none">
-                <a:solidFill>
-                  <a:srgbClr val="000000"/>
-                </a:solidFill>
-                <a:effectLst/>
-                <a:uFillTx/>
-                <a:latin typeface="Arial"/>
-              </a:rPr>
-              <a:t>Click to edit the title text format</a:t>
-            </a:r>
-            <a:endParaRPr b="0" lang="pt-PT" sz="2800" strike="noStrike" u="none">
-              <a:solidFill>
-                <a:srgbClr val="000000"/>
-              </a:solidFill>
-              <a:effectLst/>
-              <a:uFillTx/>
-              <a:latin typeface="Arial"/>
-            </a:endParaRPr>
-          </a:p>
-        </p:txBody>
-      </p:sp>
-      <p:sp>
-        <p:nvSpPr>
-          <p:cNvPr id="21" name="PlaceHolder 2"/>
-          <p:cNvSpPr>
-            <a:spLocks noGrp="1"/>
-          </p:cNvSpPr>
-          <p:nvPr>
-            <p:ph type="body"/>
-          </p:nvPr>
-        </p:nvSpPr>
-        <p:spPr>
-          <a:xfrm>
-            <a:off x="736200" y="2419920"/>
-            <a:ext cx="9447840" cy="7173000"/>
-          </a:xfrm>
-          <a:prstGeom prst="rect">
-            <a:avLst/>
-          </a:prstGeom>
-          <a:noFill/>
-          <a:ln w="0">
-            <a:noFill/>
-          </a:ln>
-        </p:spPr>
-        <p:txBody>
-          <a:bodyPr lIns="91440" rIns="91440" tIns="91440" bIns="91440" anchor="t">
-            <a:normAutofit/>
-          </a:bodyPr>
-          <a:p>
-            <a:pPr marL="432000" indent="-324000">
-              <a:lnSpc>
-                <a:spcPct val="100000"/>
-              </a:lnSpc>
-              <a:spcBef>
-                <a:spcPts val="1417"/>
-              </a:spcBef>
-              <a:buClr>
-                <a:srgbClr val="000000"/>
-              </a:buClr>
-              <a:buSzPct val="45000"/>
-              <a:buFont typeface="Wingdings" charset="2"/>
-              <a:buChar char=""/>
-            </a:pPr>
-            <a:r>
-              <a:rPr b="0" lang="pt-PT" sz="1400" strike="noStrike" u="none">
-                <a:solidFill>
-                  <a:srgbClr val="000000"/>
-                </a:solidFill>
-                <a:effectLst/>
-                <a:uFillTx/>
-                <a:latin typeface="Arial"/>
-              </a:rPr>
-              <a:t>Click to edit the outline text format</a:t>
-            </a:r>
-            <a:endParaRPr b="0" lang="pt-PT" sz="1400" strike="noStrike" u="none">
-              <a:solidFill>
-                <a:srgbClr val="000000"/>
-              </a:solidFill>
-              <a:effectLst/>
-              <a:uFillTx/>
-              <a:latin typeface="Arial"/>
-            </a:endParaRPr>
-          </a:p>
-          <a:p>
-            <a:pPr lvl="1" marL="864000" indent="-324000">
-              <a:lnSpc>
-                <a:spcPct val="100000"/>
-              </a:lnSpc>
-              <a:spcBef>
-                <a:spcPts val="1134"/>
-              </a:spcBef>
-              <a:buClr>
-                <a:srgbClr val="000000"/>
-              </a:buClr>
-              <a:buSzPct val="75000"/>
-              <a:buFont typeface="Symbol" charset="2"/>
-              <a:buChar char=""/>
-            </a:pPr>
-            <a:r>
-              <a:rPr b="0" lang="pt-PT" sz="1400" strike="noStrike" u="none">
-                <a:solidFill>
-                  <a:srgbClr val="000000"/>
-                </a:solidFill>
-                <a:effectLst/>
-                <a:uFillTx/>
-                <a:latin typeface="Arial"/>
-              </a:rPr>
-              <a:t>Second Outline Level</a:t>
-            </a:r>
-            <a:endParaRPr b="0" lang="pt-PT" sz="1400" strike="noStrike" u="none">
-              <a:solidFill>
-                <a:srgbClr val="000000"/>
-              </a:solidFill>
-              <a:effectLst/>
-              <a:uFillTx/>
-              <a:latin typeface="Arial"/>
-            </a:endParaRPr>
-          </a:p>
-          <a:p>
-            <a:pPr lvl="2" marL="1296000" indent="-288000">
-              <a:lnSpc>
-                <a:spcPct val="100000"/>
-              </a:lnSpc>
-              <a:spcBef>
-                <a:spcPts val="850"/>
-              </a:spcBef>
-              <a:buClr>
-                <a:srgbClr val="000000"/>
-              </a:buClr>
-              <a:buSzPct val="45000"/>
-              <a:buFont typeface="Wingdings" charset="2"/>
-              <a:buChar char=""/>
-            </a:pPr>
-            <a:r>
-              <a:rPr b="0" lang="pt-PT" sz="1400" strike="noStrike" u="none">
-                <a:solidFill>
-                  <a:srgbClr val="000000"/>
-                </a:solidFill>
-                <a:effectLst/>
-                <a:uFillTx/>
-                <a:latin typeface="Arial"/>
-              </a:rPr>
-              <a:t>Third Outline Level</a:t>
-            </a:r>
-            <a:endParaRPr b="0" lang="pt-PT" sz="1400" strike="noStrike" u="none">
-              <a:solidFill>
-                <a:srgbClr val="000000"/>
-              </a:solidFill>
-              <a:effectLst/>
-              <a:uFillTx/>
-              <a:latin typeface="Arial"/>
-            </a:endParaRPr>
-          </a:p>
-          <a:p>
-            <a:pPr lvl="3" marL="1728000" indent="-216000">
-              <a:lnSpc>
-                <a:spcPct val="100000"/>
-              </a:lnSpc>
-              <a:spcBef>
-                <a:spcPts val="567"/>
-              </a:spcBef>
-              <a:buClr>
-                <a:srgbClr val="000000"/>
-              </a:buClr>
-              <a:buSzPct val="75000"/>
-              <a:buFont typeface="Symbol" charset="2"/>
-              <a:buChar char=""/>
-            </a:pPr>
-            <a:r>
-              <a:rPr b="0" lang="pt-PT" sz="1400" strike="noStrike" u="none">
-                <a:solidFill>
-                  <a:srgbClr val="000000"/>
-                </a:solidFill>
-                <a:effectLst/>
-                <a:uFillTx/>
-                <a:latin typeface="Arial"/>
-              </a:rPr>
-              <a:t>Fourth Outline Level</a:t>
-            </a:r>
-            <a:endParaRPr b="0" lang="pt-PT" sz="1400" strike="noStrike" u="none">
-              <a:solidFill>
-                <a:srgbClr val="000000"/>
-              </a:solidFill>
-              <a:effectLst/>
-              <a:uFillTx/>
-              <a:latin typeface="Arial"/>
-            </a:endParaRPr>
-          </a:p>
-          <a:p>
-            <a:pPr lvl="4" marL="2160000" indent="-216000">
-              <a:lnSpc>
-                <a:spcPct val="100000"/>
-              </a:lnSpc>
-              <a:spcBef>
-                <a:spcPts val="283"/>
-              </a:spcBef>
-              <a:buClr>
-                <a:srgbClr val="000000"/>
-              </a:buClr>
-              <a:buSzPct val="45000"/>
-              <a:buFont typeface="Wingdings" charset="2"/>
-              <a:buChar char=""/>
-            </a:pPr>
-            <a:r>
-              <a:rPr b="0" lang="pt-PT" sz="1400" strike="noStrike" u="none">
-                <a:solidFill>
-                  <a:srgbClr val="000000"/>
-                </a:solidFill>
-                <a:effectLst/>
-                <a:uFillTx/>
-                <a:latin typeface="Arial"/>
-              </a:rPr>
-              <a:t>Fifth Outline Level</a:t>
-            </a:r>
-            <a:endParaRPr b="0" lang="pt-PT" sz="1400" strike="noStrike" u="none">
-              <a:solidFill>
-                <a:srgbClr val="000000"/>
-              </a:solidFill>
-              <a:effectLst/>
-              <a:uFillTx/>
-              <a:latin typeface="Arial"/>
-            </a:endParaRPr>
-          </a:p>
-          <a:p>
-            <a:pPr lvl="5" marL="2592000" indent="-216000">
-              <a:lnSpc>
-                <a:spcPct val="100000"/>
-              </a:lnSpc>
-              <a:spcBef>
-                <a:spcPts val="283"/>
-              </a:spcBef>
-              <a:buClr>
-                <a:srgbClr val="000000"/>
-              </a:buClr>
-              <a:buSzPct val="45000"/>
-              <a:buFont typeface="Wingdings" charset="2"/>
-              <a:buChar char=""/>
-            </a:pPr>
-            <a:r>
-              <a:rPr b="0" lang="pt-PT" sz="1400" strike="noStrike" u="none">
-                <a:solidFill>
-                  <a:srgbClr val="000000"/>
-                </a:solidFill>
-                <a:effectLst/>
-                <a:uFillTx/>
-                <a:latin typeface="Arial"/>
-              </a:rPr>
-              <a:t>Sixth Outline Level</a:t>
-            </a:r>
-            <a:endParaRPr b="0" lang="pt-PT" sz="1400" strike="noStrike" u="none">
-              <a:solidFill>
-                <a:srgbClr val="000000"/>
-              </a:solidFill>
-              <a:effectLst/>
-              <a:uFillTx/>
-              <a:latin typeface="Arial"/>
-            </a:endParaRPr>
-          </a:p>
-          <a:p>
-            <a:pPr lvl="6" marL="3024000" indent="-216000">
-              <a:lnSpc>
-                <a:spcPct val="100000"/>
-              </a:lnSpc>
-              <a:spcBef>
-                <a:spcPts val="283"/>
-              </a:spcBef>
-              <a:buClr>
-                <a:srgbClr val="000000"/>
-              </a:buClr>
-              <a:buSzPct val="45000"/>
-              <a:buFont typeface="Wingdings" charset="2"/>
-              <a:buChar char=""/>
-            </a:pPr>
-            <a:r>
-              <a:rPr b="0" lang="pt-PT" sz="1400" strike="noStrike" u="none">
-                <a:solidFill>
-                  <a:srgbClr val="000000"/>
-                </a:solidFill>
-                <a:effectLst/>
-                <a:uFillTx/>
-                <a:latin typeface="Arial"/>
-              </a:rPr>
-              <a:t>Seventh Outline Level</a:t>
-            </a:r>
-            <a:endParaRPr b="0" lang="pt-PT" sz="1400" strike="noStrike" u="none">
-              <a:solidFill>
-                <a:srgbClr val="000000"/>
-              </a:solidFill>
-              <a:effectLst/>
-              <a:uFillTx/>
-              <a:latin typeface="Arial"/>
-            </a:endParaRPr>
-          </a:p>
-        </p:txBody>
-      </p:sp>
-      <p:sp>
-        <p:nvSpPr>
-          <p:cNvPr id="22" name="PlaceHolder 3"/>
-          <p:cNvSpPr>
-            <a:spLocks noGrp="1"/>
-          </p:cNvSpPr>
-          <p:nvPr>
-            <p:ph type="body"/>
-          </p:nvPr>
-        </p:nvSpPr>
-        <p:spPr>
-          <a:xfrm>
-            <a:off x="11415240" y="2419920"/>
-            <a:ext cx="9447840" cy="7173000"/>
-          </a:xfrm>
-          <a:prstGeom prst="rect">
-            <a:avLst/>
-          </a:prstGeom>
-          <a:noFill/>
-          <a:ln w="0">
-            <a:noFill/>
-          </a:ln>
-        </p:spPr>
-        <p:txBody>
-          <a:bodyPr lIns="91440" rIns="91440" tIns="91440" bIns="91440" anchor="t">
-            <a:normAutofit/>
-          </a:bodyPr>
-          <a:p>
-            <a:pPr marL="432000" indent="-324000">
-              <a:lnSpc>
-                <a:spcPct val="100000"/>
-              </a:lnSpc>
-              <a:spcBef>
-                <a:spcPts val="1417"/>
-              </a:spcBef>
-              <a:buClr>
-                <a:srgbClr val="000000"/>
-              </a:buClr>
-              <a:buSzPct val="45000"/>
-              <a:buFont typeface="Wingdings" charset="2"/>
-              <a:buChar char=""/>
-            </a:pPr>
-            <a:r>
-              <a:rPr b="0" lang="pt-PT" sz="1400" strike="noStrike" u="none">
-                <a:solidFill>
-                  <a:srgbClr val="000000"/>
-                </a:solidFill>
-                <a:effectLst/>
-                <a:uFillTx/>
-                <a:latin typeface="Arial"/>
-              </a:rPr>
-              <a:t>Click to edit the outline text format</a:t>
-            </a:r>
-            <a:endParaRPr b="0" lang="pt-PT" sz="1400" strike="noStrike" u="none">
-              <a:solidFill>
-                <a:srgbClr val="000000"/>
-              </a:solidFill>
-              <a:effectLst/>
-              <a:uFillTx/>
-              <a:latin typeface="Arial"/>
-            </a:endParaRPr>
-          </a:p>
-          <a:p>
-            <a:pPr lvl="1" marL="864000" indent="-324000">
-              <a:lnSpc>
-                <a:spcPct val="100000"/>
-              </a:lnSpc>
-              <a:spcBef>
-                <a:spcPts val="1134"/>
-              </a:spcBef>
-              <a:buClr>
-                <a:srgbClr val="000000"/>
-              </a:buClr>
-              <a:buSzPct val="75000"/>
-              <a:buFont typeface="Symbol" charset="2"/>
-              <a:buChar char=""/>
-            </a:pPr>
-            <a:r>
-              <a:rPr b="0" lang="pt-PT" sz="1400" strike="noStrike" u="none">
-                <a:solidFill>
-                  <a:srgbClr val="000000"/>
-                </a:solidFill>
-                <a:effectLst/>
-                <a:uFillTx/>
-                <a:latin typeface="Arial"/>
-              </a:rPr>
-              <a:t>Second Outline Level</a:t>
-            </a:r>
-            <a:endParaRPr b="0" lang="pt-PT" sz="1400" strike="noStrike" u="none">
-              <a:solidFill>
-                <a:srgbClr val="000000"/>
-              </a:solidFill>
-              <a:effectLst/>
-              <a:uFillTx/>
-              <a:latin typeface="Arial"/>
-            </a:endParaRPr>
-          </a:p>
-          <a:p>
-            <a:pPr lvl="2" marL="1296000" indent="-288000">
-              <a:lnSpc>
-                <a:spcPct val="100000"/>
-              </a:lnSpc>
-              <a:spcBef>
-                <a:spcPts val="850"/>
-              </a:spcBef>
-              <a:buClr>
-                <a:srgbClr val="000000"/>
-              </a:buClr>
-              <a:buSzPct val="45000"/>
-              <a:buFont typeface="Wingdings" charset="2"/>
-              <a:buChar char=""/>
-            </a:pPr>
-            <a:r>
-              <a:rPr b="0" lang="pt-PT" sz="1400" strike="noStrike" u="none">
-                <a:solidFill>
-                  <a:srgbClr val="000000"/>
-                </a:solidFill>
-                <a:effectLst/>
-                <a:uFillTx/>
-                <a:latin typeface="Arial"/>
-              </a:rPr>
-              <a:t>Third Outline Level</a:t>
-            </a:r>
-            <a:endParaRPr b="0" lang="pt-PT" sz="1400" strike="noStrike" u="none">
-              <a:solidFill>
-                <a:srgbClr val="000000"/>
-              </a:solidFill>
-              <a:effectLst/>
-              <a:uFillTx/>
-              <a:latin typeface="Arial"/>
-            </a:endParaRPr>
-          </a:p>
-          <a:p>
-            <a:pPr lvl="3" marL="1728000" indent="-216000">
-              <a:lnSpc>
-                <a:spcPct val="100000"/>
-              </a:lnSpc>
-              <a:spcBef>
-                <a:spcPts val="567"/>
-              </a:spcBef>
-              <a:buClr>
-                <a:srgbClr val="000000"/>
-              </a:buClr>
-              <a:buSzPct val="75000"/>
-              <a:buFont typeface="Symbol" charset="2"/>
-              <a:buChar char=""/>
-            </a:pPr>
-            <a:r>
-              <a:rPr b="0" lang="pt-PT" sz="1400" strike="noStrike" u="none">
-                <a:solidFill>
-                  <a:srgbClr val="000000"/>
-                </a:solidFill>
-                <a:effectLst/>
-                <a:uFillTx/>
-                <a:latin typeface="Arial"/>
-              </a:rPr>
-              <a:t>Fourth Outline Level</a:t>
-            </a:r>
-            <a:endParaRPr b="0" lang="pt-PT" sz="1400" strike="noStrike" u="none">
-              <a:solidFill>
-                <a:srgbClr val="000000"/>
-              </a:solidFill>
-              <a:effectLst/>
-              <a:uFillTx/>
-              <a:latin typeface="Arial"/>
-            </a:endParaRPr>
-          </a:p>
-          <a:p>
-            <a:pPr lvl="4" marL="2160000" indent="-216000">
-              <a:lnSpc>
-                <a:spcPct val="100000"/>
-              </a:lnSpc>
-              <a:spcBef>
-                <a:spcPts val="283"/>
-              </a:spcBef>
-              <a:buClr>
-                <a:srgbClr val="000000"/>
-              </a:buClr>
-              <a:buSzPct val="45000"/>
-              <a:buFont typeface="Wingdings" charset="2"/>
-              <a:buChar char=""/>
-            </a:pPr>
-            <a:r>
-              <a:rPr b="0" lang="pt-PT" sz="1400" strike="noStrike" u="none">
-                <a:solidFill>
-                  <a:srgbClr val="000000"/>
-                </a:solidFill>
-                <a:effectLst/>
-                <a:uFillTx/>
-                <a:latin typeface="Arial"/>
-              </a:rPr>
-              <a:t>Fifth Outline Level</a:t>
-            </a:r>
-            <a:endParaRPr b="0" lang="pt-PT" sz="1400" strike="noStrike" u="none">
-              <a:solidFill>
-                <a:srgbClr val="000000"/>
-              </a:solidFill>
-              <a:effectLst/>
-              <a:uFillTx/>
-              <a:latin typeface="Arial"/>
-            </a:endParaRPr>
-          </a:p>
-          <a:p>
-            <a:pPr lvl="5" marL="2592000" indent="-216000">
-              <a:lnSpc>
-                <a:spcPct val="100000"/>
-              </a:lnSpc>
-              <a:spcBef>
-                <a:spcPts val="283"/>
-              </a:spcBef>
-              <a:buClr>
-                <a:srgbClr val="000000"/>
-              </a:buClr>
-              <a:buSzPct val="45000"/>
-              <a:buFont typeface="Wingdings" charset="2"/>
-              <a:buChar char=""/>
-            </a:pPr>
-            <a:r>
-              <a:rPr b="0" lang="pt-PT" sz="1400" strike="noStrike" u="none">
-                <a:solidFill>
-                  <a:srgbClr val="000000"/>
-                </a:solidFill>
-                <a:effectLst/>
-                <a:uFillTx/>
-                <a:latin typeface="Arial"/>
-              </a:rPr>
-              <a:t>Sixth Outline Level</a:t>
-            </a:r>
-            <a:endParaRPr b="0" lang="pt-PT" sz="1400" strike="noStrike" u="none">
-              <a:solidFill>
-                <a:srgbClr val="000000"/>
-              </a:solidFill>
-              <a:effectLst/>
-              <a:uFillTx/>
-              <a:latin typeface="Arial"/>
-            </a:endParaRPr>
-          </a:p>
-          <a:p>
-            <a:pPr lvl="6" marL="3024000" indent="-216000">
-              <a:lnSpc>
-                <a:spcPct val="100000"/>
-              </a:lnSpc>
-              <a:spcBef>
-                <a:spcPts val="283"/>
-              </a:spcBef>
-              <a:buClr>
-                <a:srgbClr val="000000"/>
-              </a:buClr>
-              <a:buSzPct val="45000"/>
-              <a:buFont typeface="Wingdings" charset="2"/>
-              <a:buChar char=""/>
-            </a:pPr>
-            <a:r>
-              <a:rPr b="0" lang="pt-PT" sz="1400" strike="noStrike" u="none">
-                <a:solidFill>
-                  <a:srgbClr val="000000"/>
-                </a:solidFill>
-                <a:effectLst/>
-                <a:uFillTx/>
-                <a:latin typeface="Arial"/>
-              </a:rPr>
-              <a:t>Seventh Outline Level</a:t>
-            </a:r>
-            <a:endParaRPr b="0" lang="pt-PT" sz="1400" strike="noStrike" u="none">
-              <a:solidFill>
-                <a:srgbClr val="000000"/>
-              </a:solidFill>
-              <a:effectLst/>
-              <a:uFillTx/>
-              <a:latin typeface="Arial"/>
-            </a:endParaRPr>
-          </a:p>
-        </p:txBody>
-      </p:sp>
-      <p:sp>
-        <p:nvSpPr>
-          <p:cNvPr id="23" name="PlaceHolder 4"/>
+          <p:cNvPr id="23" name="PlaceHolder 1"/>
           <p:cNvSpPr>
             <a:spLocks noGrp="1"/>
           </p:cNvSpPr>
@@ -3928,7 +3929,7 @@
         <p:spPr>
           <a:xfrm>
             <a:off x="20013840" y="9791640"/>
-            <a:ext cx="1295280" cy="826200"/>
+            <a:ext cx="1294920" cy="825840"/>
           </a:xfrm>
           <a:prstGeom prst="rect">
             <a:avLst/>
@@ -3972,7 +3973,7 @@
                 <a:tab algn="l" pos="0"/>
               </a:tabLst>
             </a:pPr>
-            <a:fld id="{98BCAD0A-9261-4490-82D0-8EB4C566FF76}" type="slidenum">
+            <a:fld id="{23FF8D0A-560E-4BF1-BBE9-99C243393C4D}" type="slidenum">
               <a:rPr b="0" lang="en-GB" sz="1000" strike="noStrike" u="none">
                 <a:solidFill>
                   <a:schemeClr val="dk2"/>
@@ -4068,7 +4069,7 @@
         <p:spPr>
           <a:xfrm>
             <a:off x="0" y="0"/>
-            <a:ext cx="21599280" cy="10799280"/>
+            <a:ext cx="21598920" cy="10798920"/>
           </a:xfrm>
           <a:prstGeom prst="rect">
             <a:avLst/>
@@ -4092,7 +4093,7 @@
         <p:spPr>
           <a:xfrm>
             <a:off x="859680" y="4015080"/>
-            <a:ext cx="19879560" cy="2769120"/>
+            <a:ext cx="19879200" cy="2768760"/>
           </a:xfrm>
           <a:prstGeom prst="rect">
             <a:avLst/>
@@ -4142,7 +4143,7 @@
         <p:spPr>
           <a:xfrm>
             <a:off x="5944680" y="-31320"/>
-            <a:ext cx="720" cy="10857240"/>
+            <a:ext cx="1080" cy="10857600"/>
           </a:xfrm>
           <a:prstGeom prst="straightConnector1">
             <a:avLst/>
@@ -4164,7 +4165,7 @@
         <p:spPr>
           <a:xfrm>
             <a:off x="3197160" y="84240"/>
-            <a:ext cx="2410200" cy="480240"/>
+            <a:ext cx="2409840" cy="479880"/>
           </a:xfrm>
           <a:prstGeom prst="roundRect">
             <a:avLst>
@@ -4232,7 +4233,7 @@
         <p:spPr>
           <a:xfrm>
             <a:off x="6281640" y="84240"/>
-            <a:ext cx="2410200" cy="480240"/>
+            <a:ext cx="2409840" cy="479880"/>
           </a:xfrm>
           <a:prstGeom prst="roundRect">
             <a:avLst>
@@ -4300,7 +4301,7 @@
         <p:spPr>
           <a:xfrm>
             <a:off x="9366120" y="84240"/>
-            <a:ext cx="2410200" cy="480240"/>
+            <a:ext cx="2409840" cy="479880"/>
           </a:xfrm>
           <a:prstGeom prst="roundRect">
             <a:avLst>
@@ -4368,7 +4369,7 @@
         <p:spPr>
           <a:xfrm>
             <a:off x="12395880" y="84240"/>
-            <a:ext cx="2410200" cy="480240"/>
+            <a:ext cx="2409840" cy="479880"/>
           </a:xfrm>
           <a:prstGeom prst="roundRect">
             <a:avLst>
@@ -4436,7 +4437,7 @@
         <p:spPr>
           <a:xfrm>
             <a:off x="15532560" y="84240"/>
-            <a:ext cx="2410200" cy="480240"/>
+            <a:ext cx="2409840" cy="479880"/>
           </a:xfrm>
           <a:prstGeom prst="roundRect">
             <a:avLst>
@@ -4504,7 +4505,7 @@
         <p:spPr>
           <a:xfrm>
             <a:off x="18668880" y="84240"/>
-            <a:ext cx="2410200" cy="480240"/>
+            <a:ext cx="2409840" cy="479880"/>
           </a:xfrm>
           <a:prstGeom prst="roundRect">
             <a:avLst>
@@ -4572,7 +4573,7 @@
         <p:spPr>
           <a:xfrm>
             <a:off x="167400" y="84240"/>
-            <a:ext cx="2410200" cy="480240"/>
+            <a:ext cx="2409840" cy="479880"/>
           </a:xfrm>
           <a:prstGeom prst="roundRect">
             <a:avLst>
@@ -4640,7 +4641,7 @@
         <p:spPr>
           <a:xfrm>
             <a:off x="3197160" y="1385640"/>
-            <a:ext cx="2410200" cy="480240"/>
+            <a:ext cx="2409840" cy="479880"/>
           </a:xfrm>
           <a:prstGeom prst="roundRect">
             <a:avLst>
@@ -4708,7 +4709,7 @@
         <p:spPr>
           <a:xfrm>
             <a:off x="3197160" y="2961360"/>
-            <a:ext cx="2410200" cy="480240"/>
+            <a:ext cx="2409840" cy="479880"/>
           </a:xfrm>
           <a:prstGeom prst="roundRect">
             <a:avLst>
@@ -4776,7 +4777,7 @@
         <p:spPr>
           <a:xfrm>
             <a:off x="3197160" y="4537440"/>
-            <a:ext cx="2410200" cy="480240"/>
+            <a:ext cx="2409840" cy="479880"/>
           </a:xfrm>
           <a:prstGeom prst="roundRect">
             <a:avLst>
@@ -4844,7 +4845,7 @@
         <p:spPr>
           <a:xfrm>
             <a:off x="3197160" y="6113160"/>
-            <a:ext cx="2410200" cy="480240"/>
+            <a:ext cx="2409840" cy="479880"/>
           </a:xfrm>
           <a:prstGeom prst="roundRect">
             <a:avLst>
@@ -4912,7 +4913,7 @@
         <p:spPr>
           <a:xfrm>
             <a:off x="3197160" y="7689240"/>
-            <a:ext cx="2410200" cy="480240"/>
+            <a:ext cx="2409840" cy="479880"/>
           </a:xfrm>
           <a:prstGeom prst="roundRect">
             <a:avLst>
@@ -4980,7 +4981,7 @@
         <p:spPr>
           <a:xfrm>
             <a:off x="3197160" y="9264960"/>
-            <a:ext cx="2410200" cy="480240"/>
+            <a:ext cx="2409840" cy="479880"/>
           </a:xfrm>
           <a:prstGeom prst="roundRect">
             <a:avLst>
@@ -5048,7 +5049,7 @@
         <p:spPr>
           <a:xfrm>
             <a:off x="5607720" y="1625760"/>
-            <a:ext cx="16043040" cy="720"/>
+            <a:ext cx="16043400" cy="1080"/>
           </a:xfrm>
           <a:prstGeom prst="straightConnector1">
             <a:avLst/>
@@ -5071,7 +5072,7 @@
         <p:spPr>
           <a:xfrm>
             <a:off x="5607720" y="3201840"/>
-            <a:ext cx="16043040" cy="720"/>
+            <a:ext cx="16043400" cy="1080"/>
           </a:xfrm>
           <a:prstGeom prst="straightConnector1">
             <a:avLst/>
@@ -5094,7 +5095,7 @@
         <p:spPr>
           <a:xfrm>
             <a:off x="5607720" y="4777560"/>
-            <a:ext cx="16043040" cy="720"/>
+            <a:ext cx="16043400" cy="1080"/>
           </a:xfrm>
           <a:prstGeom prst="straightConnector1">
             <a:avLst/>
@@ -5117,7 +5118,7 @@
         <p:spPr>
           <a:xfrm>
             <a:off x="5607720" y="6353640"/>
-            <a:ext cx="16043040" cy="720"/>
+            <a:ext cx="16043400" cy="1080"/>
           </a:xfrm>
           <a:prstGeom prst="straightConnector1">
             <a:avLst/>
@@ -5140,7 +5141,7 @@
         <p:spPr>
           <a:xfrm>
             <a:off x="5607720" y="7929360"/>
-            <a:ext cx="16043040" cy="720"/>
+            <a:ext cx="16043400" cy="1080"/>
           </a:xfrm>
           <a:prstGeom prst="straightConnector1">
             <a:avLst/>
@@ -5163,7 +5164,7 @@
         <p:spPr>
           <a:xfrm>
             <a:off x="5607720" y="9505440"/>
-            <a:ext cx="16043040" cy="720"/>
+            <a:ext cx="16043400" cy="1080"/>
           </a:xfrm>
           <a:prstGeom prst="straightConnector1">
             <a:avLst/>
@@ -5186,7 +5187,7 @@
         <p:spPr>
           <a:xfrm>
             <a:off x="6235200" y="1330920"/>
-            <a:ext cx="2410200" cy="4076280"/>
+            <a:ext cx="2409840" cy="4075920"/>
           </a:xfrm>
           <a:prstGeom prst="roundRect">
             <a:avLst>
@@ -5262,7 +5263,7 @@
         <p:spPr>
           <a:xfrm>
             <a:off x="2874240" y="-28440"/>
-            <a:ext cx="720" cy="10857600"/>
+            <a:ext cx="1080" cy="10857960"/>
           </a:xfrm>
           <a:prstGeom prst="straightConnector1">
             <a:avLst/>
@@ -5284,7 +5285,7 @@
         <p:spPr>
           <a:xfrm>
             <a:off x="6240960" y="6022080"/>
-            <a:ext cx="2436480" cy="4176360"/>
+            <a:ext cx="2436120" cy="4176000"/>
           </a:xfrm>
           <a:prstGeom prst="roundRect">
             <a:avLst>
@@ -5375,7 +5376,7 @@
         <p:spPr>
           <a:xfrm>
             <a:off x="12691080" y="719640"/>
-            <a:ext cx="1875240" cy="2292480"/>
+            <a:ext cx="1874880" cy="2292120"/>
           </a:xfrm>
           <a:prstGeom prst="roundRect">
             <a:avLst>
@@ -5443,7 +5444,7 @@
         <p:spPr>
           <a:xfrm>
             <a:off x="9609840" y="680040"/>
-            <a:ext cx="1875240" cy="2292480"/>
+            <a:ext cx="1874880" cy="2292120"/>
           </a:xfrm>
           <a:prstGeom prst="roundRect">
             <a:avLst>
@@ -5511,7 +5512,7 @@
         <p:spPr>
           <a:xfrm>
             <a:off x="12691080" y="2122200"/>
-            <a:ext cx="1875240" cy="2292480"/>
+            <a:ext cx="1874880" cy="2292120"/>
           </a:xfrm>
           <a:prstGeom prst="roundRect">
             <a:avLst>
@@ -5579,7 +5580,7 @@
         <p:spPr>
           <a:xfrm>
             <a:off x="12691080" y="3372120"/>
-            <a:ext cx="1875240" cy="2292480"/>
+            <a:ext cx="1874880" cy="2292120"/>
           </a:xfrm>
           <a:prstGeom prst="roundRect">
             <a:avLst>
@@ -5647,7 +5648,7 @@
         <p:spPr>
           <a:xfrm>
             <a:off x="12691080" y="5006160"/>
-            <a:ext cx="1875240" cy="2292480"/>
+            <a:ext cx="1874880" cy="2292120"/>
           </a:xfrm>
           <a:prstGeom prst="roundRect">
             <a:avLst>
@@ -5715,7 +5716,7 @@
         <p:spPr>
           <a:xfrm>
             <a:off x="12663360" y="6631920"/>
-            <a:ext cx="1875240" cy="2292480"/>
+            <a:ext cx="1874880" cy="2292120"/>
           </a:xfrm>
           <a:prstGeom prst="roundRect">
             <a:avLst>
@@ -5783,7 +5784,7 @@
         <p:spPr>
           <a:xfrm>
             <a:off x="12663360" y="8276400"/>
-            <a:ext cx="1875240" cy="2292480"/>
+            <a:ext cx="1874880" cy="2292120"/>
           </a:xfrm>
           <a:prstGeom prst="roundRect">
             <a:avLst>
@@ -5851,7 +5852,7 @@
         <p:spPr>
           <a:xfrm>
             <a:off x="9609840" y="2283120"/>
-            <a:ext cx="1875240" cy="2292480"/>
+            <a:ext cx="1874880" cy="2292120"/>
           </a:xfrm>
           <a:prstGeom prst="roundRect">
             <a:avLst>
@@ -5919,7 +5920,7 @@
         <p:spPr>
           <a:xfrm>
             <a:off x="9609840" y="3782160"/>
-            <a:ext cx="1875240" cy="2292480"/>
+            <a:ext cx="1874880" cy="2292120"/>
           </a:xfrm>
           <a:prstGeom prst="roundRect">
             <a:avLst>
@@ -5987,7 +5988,7 @@
         <p:spPr>
           <a:xfrm>
             <a:off x="9621000" y="5207040"/>
-            <a:ext cx="1875240" cy="2292480"/>
+            <a:ext cx="1874880" cy="2292120"/>
           </a:xfrm>
           <a:prstGeom prst="roundRect">
             <a:avLst>
@@ -6055,7 +6056,7 @@
         <p:spPr>
           <a:xfrm>
             <a:off x="9609840" y="6725520"/>
-            <a:ext cx="1875240" cy="2292480"/>
+            <a:ext cx="1874880" cy="2292120"/>
           </a:xfrm>
           <a:prstGeom prst="roundRect">
             <a:avLst>
@@ -6123,7 +6124,7 @@
         <p:spPr>
           <a:xfrm>
             <a:off x="9582120" y="8301600"/>
-            <a:ext cx="1875240" cy="2292480"/>
+            <a:ext cx="1874880" cy="2292120"/>
           </a:xfrm>
           <a:prstGeom prst="roundRect">
             <a:avLst>
@@ -6221,7 +6222,7 @@
         <p:spPr>
           <a:xfrm>
             <a:off x="5944680" y="-31320"/>
-            <a:ext cx="720" cy="10857240"/>
+            <a:ext cx="1080" cy="10857600"/>
           </a:xfrm>
           <a:prstGeom prst="straightConnector1">
             <a:avLst/>
@@ -6243,7 +6244,7 @@
         <p:spPr>
           <a:xfrm>
             <a:off x="3197160" y="84240"/>
-            <a:ext cx="2410200" cy="480240"/>
+            <a:ext cx="2409840" cy="479880"/>
           </a:xfrm>
           <a:prstGeom prst="roundRect">
             <a:avLst>
@@ -6311,7 +6312,7 @@
         <p:spPr>
           <a:xfrm>
             <a:off x="6281640" y="84240"/>
-            <a:ext cx="2410200" cy="480240"/>
+            <a:ext cx="2409840" cy="479880"/>
           </a:xfrm>
           <a:prstGeom prst="roundRect">
             <a:avLst>
@@ -6379,7 +6380,7 @@
         <p:spPr>
           <a:xfrm>
             <a:off x="9366120" y="84240"/>
-            <a:ext cx="2410200" cy="480240"/>
+            <a:ext cx="2409840" cy="479880"/>
           </a:xfrm>
           <a:prstGeom prst="roundRect">
             <a:avLst>
@@ -6447,7 +6448,7 @@
         <p:spPr>
           <a:xfrm>
             <a:off x="12395880" y="84240"/>
-            <a:ext cx="2410200" cy="480240"/>
+            <a:ext cx="2409840" cy="479880"/>
           </a:xfrm>
           <a:prstGeom prst="roundRect">
             <a:avLst>
@@ -6515,7 +6516,7 @@
         <p:spPr>
           <a:xfrm>
             <a:off x="15532560" y="84240"/>
-            <a:ext cx="2410200" cy="480240"/>
+            <a:ext cx="2409840" cy="479880"/>
           </a:xfrm>
           <a:prstGeom prst="roundRect">
             <a:avLst>
@@ -6583,7 +6584,7 @@
         <p:spPr>
           <a:xfrm>
             <a:off x="18668880" y="84240"/>
-            <a:ext cx="2410200" cy="480240"/>
+            <a:ext cx="2409840" cy="479880"/>
           </a:xfrm>
           <a:prstGeom prst="roundRect">
             <a:avLst>
@@ -6651,7 +6652,7 @@
         <p:spPr>
           <a:xfrm>
             <a:off x="167400" y="84240"/>
-            <a:ext cx="2410200" cy="480240"/>
+            <a:ext cx="2409840" cy="479880"/>
           </a:xfrm>
           <a:prstGeom prst="roundRect">
             <a:avLst>
@@ -6719,7 +6720,7 @@
         <p:spPr>
           <a:xfrm>
             <a:off x="3197160" y="1385640"/>
-            <a:ext cx="2410200" cy="480240"/>
+            <a:ext cx="2409840" cy="479880"/>
           </a:xfrm>
           <a:prstGeom prst="roundRect">
             <a:avLst>
@@ -6787,7 +6788,7 @@
         <p:spPr>
           <a:xfrm>
             <a:off x="3197160" y="2961360"/>
-            <a:ext cx="2410200" cy="480240"/>
+            <a:ext cx="2409840" cy="479880"/>
           </a:xfrm>
           <a:prstGeom prst="roundRect">
             <a:avLst>
@@ -6855,7 +6856,7 @@
         <p:spPr>
           <a:xfrm>
             <a:off x="3197160" y="4537440"/>
-            <a:ext cx="2410200" cy="480240"/>
+            <a:ext cx="2409840" cy="479880"/>
           </a:xfrm>
           <a:prstGeom prst="roundRect">
             <a:avLst>
@@ -6923,7 +6924,7 @@
         <p:spPr>
           <a:xfrm>
             <a:off x="3197160" y="6113160"/>
-            <a:ext cx="2410200" cy="480240"/>
+            <a:ext cx="2409840" cy="479880"/>
           </a:xfrm>
           <a:prstGeom prst="roundRect">
             <a:avLst>
@@ -6991,7 +6992,7 @@
         <p:spPr>
           <a:xfrm>
             <a:off x="3197160" y="7689240"/>
-            <a:ext cx="2410200" cy="480240"/>
+            <a:ext cx="2409840" cy="479880"/>
           </a:xfrm>
           <a:prstGeom prst="roundRect">
             <a:avLst>
@@ -7059,7 +7060,7 @@
         <p:spPr>
           <a:xfrm>
             <a:off x="3197160" y="9264960"/>
-            <a:ext cx="2410200" cy="480240"/>
+            <a:ext cx="2409840" cy="479880"/>
           </a:xfrm>
           <a:prstGeom prst="roundRect">
             <a:avLst>
@@ -7127,7 +7128,7 @@
         <p:spPr>
           <a:xfrm>
             <a:off x="5607720" y="1625760"/>
-            <a:ext cx="16043040" cy="720"/>
+            <a:ext cx="16043400" cy="1080"/>
           </a:xfrm>
           <a:prstGeom prst="straightConnector1">
             <a:avLst/>
@@ -7150,7 +7151,7 @@
         <p:spPr>
           <a:xfrm>
             <a:off x="5607720" y="3201840"/>
-            <a:ext cx="16043040" cy="720"/>
+            <a:ext cx="16043400" cy="1080"/>
           </a:xfrm>
           <a:prstGeom prst="straightConnector1">
             <a:avLst/>
@@ -7173,7 +7174,7 @@
         <p:spPr>
           <a:xfrm>
             <a:off x="5607720" y="4777560"/>
-            <a:ext cx="16043040" cy="720"/>
+            <a:ext cx="16043400" cy="1080"/>
           </a:xfrm>
           <a:prstGeom prst="straightConnector1">
             <a:avLst/>
@@ -7196,7 +7197,7 @@
         <p:spPr>
           <a:xfrm>
             <a:off x="5607720" y="6353640"/>
-            <a:ext cx="16043040" cy="720"/>
+            <a:ext cx="16043400" cy="1080"/>
           </a:xfrm>
           <a:prstGeom prst="straightConnector1">
             <a:avLst/>
@@ -7219,7 +7220,7 @@
         <p:spPr>
           <a:xfrm>
             <a:off x="5607720" y="7929360"/>
-            <a:ext cx="16043040" cy="720"/>
+            <a:ext cx="16043400" cy="1080"/>
           </a:xfrm>
           <a:prstGeom prst="straightConnector1">
             <a:avLst/>
@@ -7242,7 +7243,7 @@
         <p:spPr>
           <a:xfrm>
             <a:off x="5607720" y="9505440"/>
-            <a:ext cx="16043040" cy="720"/>
+            <a:ext cx="16043400" cy="1080"/>
           </a:xfrm>
           <a:prstGeom prst="straightConnector1">
             <a:avLst/>
@@ -7265,7 +7266,7 @@
         <p:spPr>
           <a:xfrm>
             <a:off x="6235200" y="1330920"/>
-            <a:ext cx="2410200" cy="4076280"/>
+            <a:ext cx="2409840" cy="4075920"/>
           </a:xfrm>
           <a:prstGeom prst="roundRect">
             <a:avLst>
@@ -7341,7 +7342,7 @@
         <p:spPr>
           <a:xfrm>
             <a:off x="2874240" y="-28440"/>
-            <a:ext cx="720" cy="10857600"/>
+            <a:ext cx="1080" cy="10857960"/>
           </a:xfrm>
           <a:prstGeom prst="straightConnector1">
             <a:avLst/>
@@ -7363,7 +7364,7 @@
         <p:spPr>
           <a:xfrm>
             <a:off x="6240960" y="6022080"/>
-            <a:ext cx="2436480" cy="4176360"/>
+            <a:ext cx="2436120" cy="4176000"/>
           </a:xfrm>
           <a:prstGeom prst="roundRect">
             <a:avLst>
@@ -7454,7 +7455,7 @@
         <p:spPr>
           <a:xfrm>
             <a:off x="19018800" y="680040"/>
-            <a:ext cx="1875240" cy="2292480"/>
+            <a:ext cx="1874880" cy="2292120"/>
           </a:xfrm>
           <a:prstGeom prst="roundRect">
             <a:avLst>
@@ -7522,7 +7523,7 @@
         <p:spPr>
           <a:xfrm>
             <a:off x="12657600" y="737640"/>
-            <a:ext cx="1875240" cy="2292480"/>
+            <a:ext cx="1874880" cy="2292120"/>
           </a:xfrm>
           <a:prstGeom prst="roundRect">
             <a:avLst>
@@ -7590,7 +7591,7 @@
         <p:spPr>
           <a:xfrm>
             <a:off x="19018800" y="2082600"/>
-            <a:ext cx="1875240" cy="2292480"/>
+            <a:ext cx="1874880" cy="2292120"/>
           </a:xfrm>
           <a:prstGeom prst="roundRect">
             <a:avLst>
@@ -7658,7 +7659,7 @@
         <p:spPr>
           <a:xfrm>
             <a:off x="19018800" y="3332160"/>
-            <a:ext cx="1875240" cy="2292480"/>
+            <a:ext cx="1874880" cy="2292120"/>
           </a:xfrm>
           <a:prstGeom prst="roundRect">
             <a:avLst>
@@ -7726,7 +7727,7 @@
         <p:spPr>
           <a:xfrm>
             <a:off x="19018800" y="4966560"/>
-            <a:ext cx="1875240" cy="2292480"/>
+            <a:ext cx="1874880" cy="2292120"/>
           </a:xfrm>
           <a:prstGeom prst="roundRect">
             <a:avLst>
@@ -7794,7 +7795,7 @@
         <p:spPr>
           <a:xfrm>
             <a:off x="18991080" y="6592320"/>
-            <a:ext cx="1875240" cy="2292480"/>
+            <a:ext cx="1874880" cy="2292120"/>
           </a:xfrm>
           <a:prstGeom prst="roundRect">
             <a:avLst>
@@ -7862,7 +7863,7 @@
         <p:spPr>
           <a:xfrm>
             <a:off x="18991080" y="8236440"/>
-            <a:ext cx="1875240" cy="2292480"/>
+            <a:ext cx="1874880" cy="2292120"/>
           </a:xfrm>
           <a:prstGeom prst="roundRect">
             <a:avLst>
@@ -7930,7 +7931,7 @@
         <p:spPr>
           <a:xfrm>
             <a:off x="12657600" y="2340720"/>
-            <a:ext cx="1875240" cy="2292480"/>
+            <a:ext cx="1874880" cy="2292120"/>
           </a:xfrm>
           <a:prstGeom prst="roundRect">
             <a:avLst>
@@ -7998,7 +7999,7 @@
         <p:spPr>
           <a:xfrm>
             <a:off x="12657600" y="3839760"/>
-            <a:ext cx="1875240" cy="2292480"/>
+            <a:ext cx="1874880" cy="2292120"/>
           </a:xfrm>
           <a:prstGeom prst="roundRect">
             <a:avLst>
@@ -8066,7 +8067,7 @@
         <p:spPr>
           <a:xfrm>
             <a:off x="12668400" y="5264640"/>
-            <a:ext cx="1875240" cy="2292480"/>
+            <a:ext cx="1874880" cy="2292120"/>
           </a:xfrm>
           <a:prstGeom prst="roundRect">
             <a:avLst>
@@ -8134,7 +8135,7 @@
         <p:spPr>
           <a:xfrm>
             <a:off x="12657600" y="6783120"/>
-            <a:ext cx="1875240" cy="2292480"/>
+            <a:ext cx="1874880" cy="2292120"/>
           </a:xfrm>
           <a:prstGeom prst="roundRect">
             <a:avLst>
@@ -8202,7 +8203,7 @@
         <p:spPr>
           <a:xfrm>
             <a:off x="12629880" y="8358840"/>
-            <a:ext cx="1875240" cy="2292480"/>
+            <a:ext cx="1874880" cy="2292120"/>
           </a:xfrm>
           <a:prstGeom prst="roundRect">
             <a:avLst>
@@ -8306,7 +8307,7 @@
         <p:spPr>
           <a:xfrm>
             <a:off x="0" y="0"/>
-            <a:ext cx="21599280" cy="10799280"/>
+            <a:ext cx="21598920" cy="10798920"/>
           </a:xfrm>
           <a:prstGeom prst="rect">
             <a:avLst/>
@@ -8326,14 +8327,14 @@
         <p:spPr>
           <a:xfrm>
             <a:off x="814320" y="3300840"/>
-            <a:ext cx="19956960" cy="4197960"/>
+            <a:ext cx="19956600" cy="4197600"/>
           </a:xfrm>
           <a:prstGeom prst="rect">
             <a:avLst/>
           </a:prstGeom>
         </p:spPr>
         <p:txBody>
-          <a:bodyPr wrap="none" lIns="204480" rIns="204480" tIns="102240" bIns="102240" anchor="ctr" anchorCtr="1">
+          <a:bodyPr wrap="none" lIns="261720" rIns="261720" tIns="102240" bIns="102240" anchor="ctr" anchorCtr="1">
             <a:prstTxWarp prst="textPlain">
               <a:avLst>
                 <a:gd name="adj" fmla="val 50000"/>
@@ -8419,7 +8420,7 @@
         <p:spPr>
           <a:xfrm>
             <a:off x="5944680" y="-31320"/>
-            <a:ext cx="720" cy="10857240"/>
+            <a:ext cx="1080" cy="10857600"/>
           </a:xfrm>
           <a:prstGeom prst="straightConnector1">
             <a:avLst/>
@@ -8441,7 +8442,7 @@
         <p:spPr>
           <a:xfrm>
             <a:off x="3197160" y="84240"/>
-            <a:ext cx="2410200" cy="480240"/>
+            <a:ext cx="2409840" cy="479880"/>
           </a:xfrm>
           <a:prstGeom prst="roundRect">
             <a:avLst>
@@ -8509,7 +8510,7 @@
         <p:spPr>
           <a:xfrm>
             <a:off x="6281640" y="84240"/>
-            <a:ext cx="2410200" cy="480240"/>
+            <a:ext cx="2409840" cy="479880"/>
           </a:xfrm>
           <a:prstGeom prst="roundRect">
             <a:avLst>
@@ -8577,7 +8578,7 @@
         <p:spPr>
           <a:xfrm>
             <a:off x="9366120" y="84240"/>
-            <a:ext cx="2410200" cy="480240"/>
+            <a:ext cx="2409840" cy="479880"/>
           </a:xfrm>
           <a:prstGeom prst="roundRect">
             <a:avLst>
@@ -8645,7 +8646,7 @@
         <p:spPr>
           <a:xfrm>
             <a:off x="12395880" y="84240"/>
-            <a:ext cx="2410200" cy="480240"/>
+            <a:ext cx="2409840" cy="479880"/>
           </a:xfrm>
           <a:prstGeom prst="roundRect">
             <a:avLst>
@@ -8713,7 +8714,7 @@
         <p:spPr>
           <a:xfrm>
             <a:off x="15532560" y="84240"/>
-            <a:ext cx="2410200" cy="480240"/>
+            <a:ext cx="2409840" cy="479880"/>
           </a:xfrm>
           <a:prstGeom prst="roundRect">
             <a:avLst>
@@ -8781,7 +8782,7 @@
         <p:spPr>
           <a:xfrm>
             <a:off x="18668880" y="84240"/>
-            <a:ext cx="2410200" cy="480240"/>
+            <a:ext cx="2409840" cy="479880"/>
           </a:xfrm>
           <a:prstGeom prst="roundRect">
             <a:avLst>
@@ -8849,7 +8850,7 @@
         <p:spPr>
           <a:xfrm>
             <a:off x="167400" y="84240"/>
-            <a:ext cx="2410200" cy="480240"/>
+            <a:ext cx="2409840" cy="479880"/>
           </a:xfrm>
           <a:prstGeom prst="roundRect">
             <a:avLst>
@@ -8917,7 +8918,7 @@
         <p:spPr>
           <a:xfrm>
             <a:off x="3197160" y="1385640"/>
-            <a:ext cx="2410200" cy="480240"/>
+            <a:ext cx="2409840" cy="479880"/>
           </a:xfrm>
           <a:prstGeom prst="roundRect">
             <a:avLst>
@@ -8985,7 +8986,7 @@
         <p:spPr>
           <a:xfrm>
             <a:off x="3197160" y="2961360"/>
-            <a:ext cx="2410200" cy="480240"/>
+            <a:ext cx="2409840" cy="479880"/>
           </a:xfrm>
           <a:prstGeom prst="roundRect">
             <a:avLst>
@@ -9053,7 +9054,7 @@
         <p:spPr>
           <a:xfrm>
             <a:off x="3197160" y="4537440"/>
-            <a:ext cx="2410200" cy="480240"/>
+            <a:ext cx="2409840" cy="479880"/>
           </a:xfrm>
           <a:prstGeom prst="roundRect">
             <a:avLst>
@@ -9121,7 +9122,7 @@
         <p:spPr>
           <a:xfrm>
             <a:off x="3197160" y="6113160"/>
-            <a:ext cx="2410200" cy="480240"/>
+            <a:ext cx="2409840" cy="479880"/>
           </a:xfrm>
           <a:prstGeom prst="roundRect">
             <a:avLst>
@@ -9189,7 +9190,7 @@
         <p:spPr>
           <a:xfrm>
             <a:off x="3197160" y="7689240"/>
-            <a:ext cx="2410200" cy="480240"/>
+            <a:ext cx="2409840" cy="479880"/>
           </a:xfrm>
           <a:prstGeom prst="roundRect">
             <a:avLst>
@@ -9257,7 +9258,7 @@
         <p:spPr>
           <a:xfrm>
             <a:off x="3197160" y="9264960"/>
-            <a:ext cx="2410200" cy="480240"/>
+            <a:ext cx="2409840" cy="479880"/>
           </a:xfrm>
           <a:prstGeom prst="roundRect">
             <a:avLst>
@@ -9325,7 +9326,7 @@
         <p:spPr>
           <a:xfrm>
             <a:off x="5607720" y="1625760"/>
-            <a:ext cx="16043040" cy="720"/>
+            <a:ext cx="16043400" cy="1080"/>
           </a:xfrm>
           <a:prstGeom prst="straightConnector1">
             <a:avLst/>
@@ -9348,7 +9349,7 @@
         <p:spPr>
           <a:xfrm>
             <a:off x="5607720" y="3201840"/>
-            <a:ext cx="16043040" cy="720"/>
+            <a:ext cx="16043400" cy="1080"/>
           </a:xfrm>
           <a:prstGeom prst="straightConnector1">
             <a:avLst/>
@@ -9371,7 +9372,7 @@
         <p:spPr>
           <a:xfrm>
             <a:off x="5607720" y="4777560"/>
-            <a:ext cx="16043040" cy="720"/>
+            <a:ext cx="16043400" cy="1080"/>
           </a:xfrm>
           <a:prstGeom prst="straightConnector1">
             <a:avLst/>
@@ -9394,7 +9395,7 @@
         <p:spPr>
           <a:xfrm>
             <a:off x="5607720" y="6353640"/>
-            <a:ext cx="16043040" cy="720"/>
+            <a:ext cx="16043400" cy="1080"/>
           </a:xfrm>
           <a:prstGeom prst="straightConnector1">
             <a:avLst/>
@@ -9417,7 +9418,7 @@
         <p:spPr>
           <a:xfrm>
             <a:off x="5607720" y="7929360"/>
-            <a:ext cx="16043040" cy="720"/>
+            <a:ext cx="16043400" cy="1080"/>
           </a:xfrm>
           <a:prstGeom prst="straightConnector1">
             <a:avLst/>
@@ -9440,7 +9441,7 @@
         <p:spPr>
           <a:xfrm>
             <a:off x="5607720" y="9505440"/>
-            <a:ext cx="16043040" cy="720"/>
+            <a:ext cx="16043400" cy="1080"/>
           </a:xfrm>
           <a:prstGeom prst="straightConnector1">
             <a:avLst/>
@@ -9463,7 +9464,7 @@
         <p:spPr>
           <a:xfrm>
             <a:off x="6235200" y="970920"/>
-            <a:ext cx="2410200" cy="8928720"/>
+            <a:ext cx="2409840" cy="8928360"/>
           </a:xfrm>
           <a:prstGeom prst="roundRect">
             <a:avLst>
@@ -9587,7 +9588,7 @@
         <p:spPr>
           <a:xfrm>
             <a:off x="2874240" y="-28440"/>
-            <a:ext cx="720" cy="10857600"/>
+            <a:ext cx="1080" cy="10857960"/>
           </a:xfrm>
           <a:prstGeom prst="straightConnector1">
             <a:avLst/>
@@ -9609,7 +9610,7 @@
         <p:spPr>
           <a:xfrm>
             <a:off x="18838800" y="1220040"/>
-            <a:ext cx="1140840" cy="759600"/>
+            <a:ext cx="1140480" cy="759240"/>
           </a:xfrm>
           <a:prstGeom prst="roundRect">
             <a:avLst>
@@ -9677,7 +9678,7 @@
         <p:spPr>
           <a:xfrm>
             <a:off x="12600000" y="9075960"/>
-            <a:ext cx="1875240" cy="1720800"/>
+            <a:ext cx="1874880" cy="1720440"/>
           </a:xfrm>
           <a:prstGeom prst="roundRect">
             <a:avLst>
@@ -9745,7 +9746,7 @@
         <p:spPr>
           <a:xfrm>
             <a:off x="18900000" y="2840040"/>
-            <a:ext cx="1140840" cy="759600"/>
+            <a:ext cx="1140480" cy="759240"/>
           </a:xfrm>
           <a:prstGeom prst="roundRect">
             <a:avLst>
@@ -9813,7 +9814,7 @@
         <p:spPr>
           <a:xfrm>
             <a:off x="18838800" y="4280040"/>
-            <a:ext cx="1140840" cy="759600"/>
+            <a:ext cx="1140480" cy="759240"/>
           </a:xfrm>
           <a:prstGeom prst="roundRect">
             <a:avLst>
@@ -9881,7 +9882,7 @@
         <p:spPr>
           <a:xfrm>
             <a:off x="18838800" y="5940000"/>
-            <a:ext cx="1140840" cy="759600"/>
+            <a:ext cx="1140480" cy="759240"/>
           </a:xfrm>
           <a:prstGeom prst="roundRect">
             <a:avLst>
@@ -9949,7 +9950,7 @@
         <p:spPr>
           <a:xfrm>
             <a:off x="18838800" y="7520040"/>
-            <a:ext cx="1140840" cy="759600"/>
+            <a:ext cx="1140480" cy="759240"/>
           </a:xfrm>
           <a:prstGeom prst="roundRect">
             <a:avLst>
@@ -10017,7 +10018,7 @@
         <p:spPr>
           <a:xfrm>
             <a:off x="18838800" y="9140040"/>
-            <a:ext cx="1140840" cy="759600"/>
+            <a:ext cx="1140480" cy="759240"/>
           </a:xfrm>
           <a:prstGeom prst="roundRect">
             <a:avLst>
@@ -10085,7 +10086,7 @@
         <p:spPr>
           <a:xfrm>
             <a:off x="12600360" y="7200000"/>
-            <a:ext cx="1875240" cy="1720800"/>
+            <a:ext cx="1874880" cy="1720440"/>
           </a:xfrm>
           <a:prstGeom prst="roundRect">
             <a:avLst>
@@ -10153,7 +10154,7 @@
         <p:spPr>
           <a:xfrm>
             <a:off x="12657600" y="5478840"/>
-            <a:ext cx="1875240" cy="1720800"/>
+            <a:ext cx="1874880" cy="1720440"/>
           </a:xfrm>
           <a:prstGeom prst="roundRect">
             <a:avLst>
@@ -10221,7 +10222,7 @@
         <p:spPr>
           <a:xfrm>
             <a:off x="12704400" y="3780000"/>
-            <a:ext cx="1875240" cy="1720800"/>
+            <a:ext cx="1874880" cy="1720440"/>
           </a:xfrm>
           <a:prstGeom prst="roundRect">
             <a:avLst>
@@ -10289,7 +10290,7 @@
         <p:spPr>
           <a:xfrm>
             <a:off x="12704400" y="2238840"/>
-            <a:ext cx="1875240" cy="1720800"/>
+            <a:ext cx="1874880" cy="1720440"/>
           </a:xfrm>
           <a:prstGeom prst="roundRect">
             <a:avLst>
@@ -10357,7 +10358,7 @@
         <p:spPr>
           <a:xfrm>
             <a:off x="12600000" y="618840"/>
-            <a:ext cx="1875240" cy="1720800"/>
+            <a:ext cx="1874880" cy="1720440"/>
           </a:xfrm>
           <a:prstGeom prst="roundRect">
             <a:avLst>
@@ -10455,7 +10456,7 @@
         <p:spPr>
           <a:xfrm>
             <a:off x="5944680" y="-31320"/>
-            <a:ext cx="720" cy="10857240"/>
+            <a:ext cx="1080" cy="10857600"/>
           </a:xfrm>
           <a:prstGeom prst="straightConnector1">
             <a:avLst/>
@@ -10477,7 +10478,7 @@
         <p:spPr>
           <a:xfrm>
             <a:off x="3197160" y="84240"/>
-            <a:ext cx="2410200" cy="480240"/>
+            <a:ext cx="2409840" cy="479880"/>
           </a:xfrm>
           <a:prstGeom prst="roundRect">
             <a:avLst>
@@ -10545,7 +10546,7 @@
         <p:spPr>
           <a:xfrm>
             <a:off x="6281640" y="84240"/>
-            <a:ext cx="2410200" cy="480240"/>
+            <a:ext cx="2409840" cy="479880"/>
           </a:xfrm>
           <a:prstGeom prst="roundRect">
             <a:avLst>
@@ -10613,7 +10614,7 @@
         <p:spPr>
           <a:xfrm>
             <a:off x="9366120" y="84240"/>
-            <a:ext cx="2410200" cy="480240"/>
+            <a:ext cx="2409840" cy="479880"/>
           </a:xfrm>
           <a:prstGeom prst="roundRect">
             <a:avLst>
@@ -10681,7 +10682,7 @@
         <p:spPr>
           <a:xfrm>
             <a:off x="12395880" y="84240"/>
-            <a:ext cx="2410200" cy="480240"/>
+            <a:ext cx="2409840" cy="479880"/>
           </a:xfrm>
           <a:prstGeom prst="roundRect">
             <a:avLst>
@@ -10749,7 +10750,7 @@
         <p:spPr>
           <a:xfrm>
             <a:off x="15532560" y="84240"/>
-            <a:ext cx="2410200" cy="480240"/>
+            <a:ext cx="2409840" cy="479880"/>
           </a:xfrm>
           <a:prstGeom prst="roundRect">
             <a:avLst>
@@ -10817,7 +10818,7 @@
         <p:spPr>
           <a:xfrm>
             <a:off x="18668880" y="84240"/>
-            <a:ext cx="2410200" cy="480240"/>
+            <a:ext cx="2409840" cy="479880"/>
           </a:xfrm>
           <a:prstGeom prst="roundRect">
             <a:avLst>
@@ -10885,7 +10886,7 @@
         <p:spPr>
           <a:xfrm>
             <a:off x="167400" y="84240"/>
-            <a:ext cx="2410200" cy="480240"/>
+            <a:ext cx="2409840" cy="479880"/>
           </a:xfrm>
           <a:prstGeom prst="roundRect">
             <a:avLst>
@@ -10953,7 +10954,7 @@
         <p:spPr>
           <a:xfrm>
             <a:off x="3197160" y="1385640"/>
-            <a:ext cx="2410200" cy="480240"/>
+            <a:ext cx="2409840" cy="479880"/>
           </a:xfrm>
           <a:prstGeom prst="roundRect">
             <a:avLst>
@@ -11021,7 +11022,7 @@
         <p:spPr>
           <a:xfrm>
             <a:off x="3197160" y="2961360"/>
-            <a:ext cx="2410200" cy="480240"/>
+            <a:ext cx="2409840" cy="479880"/>
           </a:xfrm>
           <a:prstGeom prst="roundRect">
             <a:avLst>
@@ -11089,7 +11090,7 @@
         <p:spPr>
           <a:xfrm>
             <a:off x="3197160" y="4537440"/>
-            <a:ext cx="2410200" cy="480240"/>
+            <a:ext cx="2409840" cy="479880"/>
           </a:xfrm>
           <a:prstGeom prst="roundRect">
             <a:avLst>
@@ -11157,7 +11158,7 @@
         <p:spPr>
           <a:xfrm>
             <a:off x="3197160" y="6113160"/>
-            <a:ext cx="2410200" cy="480240"/>
+            <a:ext cx="2409840" cy="479880"/>
           </a:xfrm>
           <a:prstGeom prst="roundRect">
             <a:avLst>
@@ -11225,7 +11226,7 @@
         <p:spPr>
           <a:xfrm>
             <a:off x="3197160" y="7689240"/>
-            <a:ext cx="2410200" cy="480240"/>
+            <a:ext cx="2409840" cy="479880"/>
           </a:xfrm>
           <a:prstGeom prst="roundRect">
             <a:avLst>
@@ -11293,7 +11294,7 @@
         <p:spPr>
           <a:xfrm>
             <a:off x="3197160" y="9264960"/>
-            <a:ext cx="2410200" cy="480240"/>
+            <a:ext cx="2409840" cy="479880"/>
           </a:xfrm>
           <a:prstGeom prst="roundRect">
             <a:avLst>
@@ -11361,7 +11362,7 @@
         <p:spPr>
           <a:xfrm>
             <a:off x="5607720" y="1625760"/>
-            <a:ext cx="16043040" cy="720"/>
+            <a:ext cx="16043400" cy="1080"/>
           </a:xfrm>
           <a:prstGeom prst="straightConnector1">
             <a:avLst/>
@@ -11384,7 +11385,7 @@
         <p:spPr>
           <a:xfrm>
             <a:off x="5607720" y="3201840"/>
-            <a:ext cx="16043040" cy="720"/>
+            <a:ext cx="16043400" cy="1080"/>
           </a:xfrm>
           <a:prstGeom prst="straightConnector1">
             <a:avLst/>
@@ -11407,7 +11408,7 @@
         <p:spPr>
           <a:xfrm>
             <a:off x="5607720" y="4777560"/>
-            <a:ext cx="16043040" cy="720"/>
+            <a:ext cx="16043400" cy="1080"/>
           </a:xfrm>
           <a:prstGeom prst="straightConnector1">
             <a:avLst/>
@@ -11430,7 +11431,7 @@
         <p:spPr>
           <a:xfrm>
             <a:off x="5607720" y="6353640"/>
-            <a:ext cx="16043040" cy="720"/>
+            <a:ext cx="16043400" cy="1080"/>
           </a:xfrm>
           <a:prstGeom prst="straightConnector1">
             <a:avLst/>
@@ -11453,7 +11454,7 @@
         <p:spPr>
           <a:xfrm>
             <a:off x="5607720" y="7929360"/>
-            <a:ext cx="16043040" cy="720"/>
+            <a:ext cx="16043400" cy="1080"/>
           </a:xfrm>
           <a:prstGeom prst="straightConnector1">
             <a:avLst/>
@@ -11476,7 +11477,7 @@
         <p:spPr>
           <a:xfrm>
             <a:off x="5607720" y="9505440"/>
-            <a:ext cx="16043040" cy="720"/>
+            <a:ext cx="16043400" cy="1080"/>
           </a:xfrm>
           <a:prstGeom prst="straightConnector1">
             <a:avLst/>
@@ -11499,7 +11500,7 @@
         <p:spPr>
           <a:xfrm>
             <a:off x="6235200" y="970920"/>
-            <a:ext cx="2410200" cy="9469080"/>
+            <a:ext cx="2409840" cy="9468720"/>
           </a:xfrm>
           <a:prstGeom prst="roundRect">
             <a:avLst>
@@ -11623,7 +11624,7 @@
         <p:spPr>
           <a:xfrm>
             <a:off x="2874240" y="-28440"/>
-            <a:ext cx="720" cy="10857600"/>
+            <a:ext cx="1080" cy="10857960"/>
           </a:xfrm>
           <a:prstGeom prst="straightConnector1">
             <a:avLst/>
@@ -11645,7 +11646,7 @@
         <p:spPr>
           <a:xfrm>
             <a:off x="18838800" y="1220040"/>
-            <a:ext cx="1140840" cy="759600"/>
+            <a:ext cx="1140480" cy="759240"/>
           </a:xfrm>
           <a:prstGeom prst="roundRect">
             <a:avLst>
@@ -11713,7 +11714,7 @@
         <p:spPr>
           <a:xfrm>
             <a:off x="12539160" y="8869680"/>
-            <a:ext cx="2160000" cy="1184040"/>
+            <a:ext cx="2159640" cy="1183680"/>
           </a:xfrm>
           <a:prstGeom prst="roundRect">
             <a:avLst>
@@ -11781,7 +11782,7 @@
         <p:spPr>
           <a:xfrm>
             <a:off x="18900000" y="2840040"/>
-            <a:ext cx="1140840" cy="759600"/>
+            <a:ext cx="1140480" cy="759240"/>
           </a:xfrm>
           <a:prstGeom prst="roundRect">
             <a:avLst>
@@ -11849,7 +11850,7 @@
         <p:spPr>
           <a:xfrm>
             <a:off x="18838800" y="4280040"/>
-            <a:ext cx="1140840" cy="759600"/>
+            <a:ext cx="1140480" cy="759240"/>
           </a:xfrm>
           <a:prstGeom prst="roundRect">
             <a:avLst>
@@ -11917,7 +11918,7 @@
         <p:spPr>
           <a:xfrm>
             <a:off x="18838800" y="5940000"/>
-            <a:ext cx="1140840" cy="759600"/>
+            <a:ext cx="1140480" cy="759240"/>
           </a:xfrm>
           <a:prstGeom prst="roundRect">
             <a:avLst>
@@ -11985,7 +11986,7 @@
         <p:spPr>
           <a:xfrm>
             <a:off x="18838800" y="7520040"/>
-            <a:ext cx="1140840" cy="759600"/>
+            <a:ext cx="1140480" cy="759240"/>
           </a:xfrm>
           <a:prstGeom prst="roundRect">
             <a:avLst>
@@ -12053,7 +12054,7 @@
         <p:spPr>
           <a:xfrm>
             <a:off x="18838800" y="9140040"/>
-            <a:ext cx="1140840" cy="759600"/>
+            <a:ext cx="1140480" cy="759240"/>
           </a:xfrm>
           <a:prstGeom prst="roundRect">
             <a:avLst>
@@ -12121,7 +12122,7 @@
         <p:spPr>
           <a:xfrm>
             <a:off x="12600360" y="7560000"/>
-            <a:ext cx="1875240" cy="729720"/>
+            <a:ext cx="1874880" cy="729360"/>
           </a:xfrm>
           <a:prstGeom prst="roundRect">
             <a:avLst>
@@ -12189,7 +12190,7 @@
         <p:spPr>
           <a:xfrm>
             <a:off x="12704400" y="3960000"/>
-            <a:ext cx="1875240" cy="1440000"/>
+            <a:ext cx="1874880" cy="1439640"/>
           </a:xfrm>
           <a:prstGeom prst="roundRect">
             <a:avLst>
@@ -12257,7 +12258,7 @@
         <p:spPr>
           <a:xfrm>
             <a:off x="12704400" y="2637000"/>
-            <a:ext cx="1875240" cy="963000"/>
+            <a:ext cx="1874880" cy="962640"/>
           </a:xfrm>
           <a:prstGeom prst="roundRect">
             <a:avLst>
@@ -12325,7 +12326,7 @@
         <p:spPr>
           <a:xfrm>
             <a:off x="12704760" y="979200"/>
-            <a:ext cx="1875240" cy="1360800"/>
+            <a:ext cx="1874880" cy="1360440"/>
           </a:xfrm>
           <a:prstGeom prst="roundRect">
             <a:avLst>
@@ -12393,7 +12394,7 @@
         <p:spPr>
           <a:xfrm>
             <a:off x="15840000" y="9000000"/>
-            <a:ext cx="1875240" cy="1080000"/>
+            <a:ext cx="1874880" cy="1079640"/>
           </a:xfrm>
           <a:prstGeom prst="roundRect">
             <a:avLst>
@@ -12461,7 +12462,7 @@
         <p:spPr>
           <a:xfrm>
             <a:off x="15840000" y="7380000"/>
-            <a:ext cx="1875240" cy="1180800"/>
+            <a:ext cx="1874880" cy="1180440"/>
           </a:xfrm>
           <a:prstGeom prst="roundRect">
             <a:avLst>
@@ -12529,7 +12530,7 @@
         <p:spPr>
           <a:xfrm>
             <a:off x="15764760" y="5400000"/>
-            <a:ext cx="1875240" cy="1720800"/>
+            <a:ext cx="1874880" cy="1720440"/>
           </a:xfrm>
           <a:prstGeom prst="roundRect">
             <a:avLst>
@@ -12597,7 +12598,7 @@
         <p:spPr>
           <a:xfrm>
             <a:off x="15764760" y="4140000"/>
-            <a:ext cx="1875240" cy="1000800"/>
+            <a:ext cx="1874880" cy="1000440"/>
           </a:xfrm>
           <a:prstGeom prst="roundRect">
             <a:avLst>
@@ -12665,7 +12666,7 @@
         <p:spPr>
           <a:xfrm>
             <a:off x="15764760" y="2520000"/>
-            <a:ext cx="1875240" cy="1080000"/>
+            <a:ext cx="1874880" cy="1079640"/>
           </a:xfrm>
           <a:prstGeom prst="roundRect">
             <a:avLst>
@@ -12711,43 +12712,7 @@
                 <a:latin typeface="Consolas"/>
                 <a:ea typeface="Consolas"/>
               </a:rPr>
-              <a:t>Recognize </a:t>
-            </a:r>
-            <a:r>
-              <a:rPr b="0" lang="en-US" sz="1400" strike="noStrike" u="none">
-                <a:solidFill>
-                  <a:srgbClr val="000000"/>
-                </a:solidFill>
-                <a:effectLst/>
-                <a:uFillTx/>
-                <a:latin typeface="Consolas"/>
-                <a:ea typeface="Consolas"/>
-              </a:rPr>
-              <a:t>present code </a:t>
-            </a:r>
-            <a:r>
-              <a:rPr b="0" lang="en-US" sz="1400" strike="noStrike" u="none">
-                <a:solidFill>
-                  <a:srgbClr val="000000"/>
-                </a:solidFill>
-                <a:effectLst/>
-                <a:uFillTx/>
-                <a:latin typeface="Consolas"/>
-                <a:ea typeface="Consolas"/>
-              </a:rPr>
-              <a:t>smells, Design </a:t>
-            </a:r>
-            <a:r>
-              <a:rPr b="0" lang="en-US" sz="1400" strike="noStrike" u="none">
-                <a:solidFill>
-                  <a:srgbClr val="000000"/>
-                </a:solidFill>
-                <a:effectLst/>
-                <a:uFillTx/>
-                <a:latin typeface="Consolas"/>
-                <a:ea typeface="Consolas"/>
-              </a:rPr>
-              <a:t>patterns.</a:t>
+              <a:t>Recognize present code smells, Design patterns.</a:t>
             </a:r>
             <a:endParaRPr b="0" lang="pt-PT" sz="1400" strike="noStrike" u="none">
               <a:solidFill>
@@ -12769,7 +12734,7 @@
         <p:spPr>
           <a:xfrm>
             <a:off x="15764760" y="1159200"/>
-            <a:ext cx="1875240" cy="1000800"/>
+            <a:ext cx="1874880" cy="1000440"/>
           </a:xfrm>
           <a:prstGeom prst="roundRect">
             <a:avLst>
@@ -12837,7 +12802,7 @@
         <p:spPr>
           <a:xfrm>
             <a:off x="9540000" y="1080000"/>
-            <a:ext cx="1875240" cy="963000"/>
+            <a:ext cx="1874880" cy="962640"/>
           </a:xfrm>
           <a:prstGeom prst="roundRect">
             <a:avLst>
@@ -12905,7 +12870,7 @@
         <p:spPr>
           <a:xfrm>
             <a:off x="9540000" y="2700000"/>
-            <a:ext cx="1875240" cy="963000"/>
+            <a:ext cx="1874880" cy="962640"/>
           </a:xfrm>
           <a:prstGeom prst="roundRect">
             <a:avLst>
@@ -12973,7 +12938,7 @@
         <p:spPr>
           <a:xfrm>
             <a:off x="9540000" y="4320000"/>
-            <a:ext cx="1875240" cy="963000"/>
+            <a:ext cx="1874880" cy="962640"/>
           </a:xfrm>
           <a:prstGeom prst="roundRect">
             <a:avLst>
@@ -13041,7 +13006,7 @@
         <p:spPr>
           <a:xfrm>
             <a:off x="9644760" y="5877000"/>
-            <a:ext cx="1875240" cy="963000"/>
+            <a:ext cx="1874880" cy="962640"/>
           </a:xfrm>
           <a:prstGeom prst="roundRect">
             <a:avLst>
@@ -13109,7 +13074,7 @@
         <p:spPr>
           <a:xfrm>
             <a:off x="9720000" y="7380000"/>
-            <a:ext cx="1875240" cy="963000"/>
+            <a:ext cx="1874880" cy="962640"/>
           </a:xfrm>
           <a:prstGeom prst="roundRect">
             <a:avLst>
@@ -13177,7 +13142,7 @@
         <p:spPr>
           <a:xfrm>
             <a:off x="9824760" y="9117000"/>
-            <a:ext cx="1875240" cy="963000"/>
+            <a:ext cx="1874880" cy="962640"/>
           </a:xfrm>
           <a:prstGeom prst="roundRect">
             <a:avLst>
@@ -13224,6 +13189,1706 @@
                 <a:ea typeface="Consolas"/>
               </a:rPr>
               <a:t>Analyze Code Metrics.</a:t>
+            </a:r>
+            <a:endParaRPr b="0" lang="pt-PT" sz="1400" strike="noStrike" u="none">
+              <a:solidFill>
+                <a:srgbClr val="000000"/>
+              </a:solidFill>
+              <a:effectLst/>
+              <a:uFillTx/>
+              <a:latin typeface="Arial"/>
+            </a:endParaRPr>
+          </a:p>
+        </p:txBody>
+      </p:sp>
+    </p:spTree>
+  </p:cSld>
+  <mc:AlternateContent>
+    <mc:Choice Requires="p14">
+      <p:transition spd="slow" p14:dur="2000"/>
+    </mc:Choice>
+    <mc:Fallback>
+      <p:transition spd="slow"/>
+    </mc:Fallback>
+  </mc:AlternateContent>
+</p:sld>
+</file>
+
+<file path=ppt/slides/slide15.xml><?xml version="1.0" encoding="utf-8"?>
+<p:sld xmlns:a="http://schemas.openxmlformats.org/drawingml/2006/main" xmlns:p="http://schemas.openxmlformats.org/presentationml/2006/main" xmlns:r="http://schemas.openxmlformats.org/officeDocument/2006/relationships" xmlns:p14="http://schemas.microsoft.com/office/powerpoint/2010/main" xmlns:p15="http://schemas.microsoft.com/office/powerpoint/2012/main" xmlns:mc="http://schemas.openxmlformats.org/markup-compatibility/2006">
+  <p:cSld>
+    <p:spTree>
+      <p:nvGrpSpPr>
+        <p:cNvPr id="1" name=""/>
+        <p:cNvGrpSpPr/>
+        <p:nvPr/>
+      </p:nvGrpSpPr>
+      <p:grpSpPr>
+        <a:xfrm>
+          <a:off x="0" y="0"/>
+          <a:ext cx="0" cy="0"/>
+          <a:chOff x="0" y="0"/>
+          <a:chExt cx="0" cy="0"/>
+        </a:xfrm>
+      </p:grpSpPr>
+      <p:cxnSp>
+        <p:nvCxnSpPr>
+          <p:cNvPr id="343" name="Google Shape;66;p 3"/>
+          <p:cNvCxnSpPr/>
+          <p:nvPr/>
+        </p:nvCxnSpPr>
+        <p:spPr>
+          <a:xfrm>
+            <a:off x="5944680" y="-31320"/>
+            <a:ext cx="1080" cy="10857600"/>
+          </a:xfrm>
+          <a:prstGeom prst="straightConnector1">
+            <a:avLst/>
+          </a:prstGeom>
+          <a:ln w="38100">
+            <a:solidFill>
+              <a:srgbClr val="5b0f00"/>
+            </a:solidFill>
+            <a:round/>
+          </a:ln>
+        </p:spPr>
+      </p:cxnSp>
+      <p:sp>
+        <p:nvSpPr>
+          <p:cNvPr id="344" name="Google Shape;67;p 3"/>
+          <p:cNvSpPr/>
+          <p:nvPr/>
+        </p:nvSpPr>
+        <p:spPr>
+          <a:xfrm>
+            <a:off x="3197160" y="84240"/>
+            <a:ext cx="2409840" cy="479880"/>
+          </a:xfrm>
+          <a:prstGeom prst="roundRect">
+            <a:avLst>
+              <a:gd name="adj" fmla="val 16667"/>
+            </a:avLst>
+          </a:prstGeom>
+          <a:solidFill>
+            <a:srgbClr val="f9cb9c"/>
+          </a:solidFill>
+          <a:ln w="28575">
+            <a:solidFill>
+              <a:srgbClr val="b45f06"/>
+            </a:solidFill>
+            <a:round/>
+          </a:ln>
+        </p:spPr>
+        <p:style>
+          <a:lnRef idx="0"/>
+          <a:fillRef idx="0"/>
+          <a:effectRef idx="0"/>
+          <a:fontRef idx="minor"/>
+        </p:style>
+        <p:txBody>
+          <a:bodyPr lIns="90000" rIns="90000" tIns="91440" bIns="91440" anchor="ctr">
+            <a:noAutofit/>
+          </a:bodyPr>
+          <a:p>
+            <a:pPr algn="ctr">
+              <a:lnSpc>
+                <a:spcPct val="100000"/>
+              </a:lnSpc>
+              <a:tabLst>
+                <a:tab algn="l" pos="0"/>
+              </a:tabLst>
+            </a:pPr>
+            <a:r>
+              <a:rPr b="1" lang="en-GB" sz="1800" strike="noStrike" u="none">
+                <a:solidFill>
+                  <a:srgbClr val="000000"/>
+                </a:solidFill>
+                <a:effectLst/>
+                <a:uFillTx/>
+                <a:latin typeface="Consolas"/>
+                <a:ea typeface="Consolas"/>
+              </a:rPr>
+              <a:t>Student ID</a:t>
+            </a:r>
+            <a:endParaRPr b="0" lang="pt-PT" sz="1800" strike="noStrike" u="none">
+              <a:solidFill>
+                <a:srgbClr val="000000"/>
+              </a:solidFill>
+              <a:effectLst/>
+              <a:uFillTx/>
+              <a:latin typeface="Arial"/>
+            </a:endParaRPr>
+          </a:p>
+        </p:txBody>
+      </p:sp>
+      <p:sp>
+        <p:nvSpPr>
+          <p:cNvPr id="345" name="Google Shape;68;p 3"/>
+          <p:cNvSpPr/>
+          <p:nvPr/>
+        </p:nvSpPr>
+        <p:spPr>
+          <a:xfrm>
+            <a:off x="6281640" y="84240"/>
+            <a:ext cx="2409840" cy="479880"/>
+          </a:xfrm>
+          <a:prstGeom prst="roundRect">
+            <a:avLst>
+              <a:gd name="adj" fmla="val 16667"/>
+            </a:avLst>
+          </a:prstGeom>
+          <a:solidFill>
+            <a:srgbClr val="f9cb9c"/>
+          </a:solidFill>
+          <a:ln w="28575">
+            <a:solidFill>
+              <a:srgbClr val="b45f06"/>
+            </a:solidFill>
+            <a:round/>
+          </a:ln>
+        </p:spPr>
+        <p:style>
+          <a:lnRef idx="0"/>
+          <a:fillRef idx="0"/>
+          <a:effectRef idx="0"/>
+          <a:fontRef idx="minor"/>
+        </p:style>
+        <p:txBody>
+          <a:bodyPr lIns="90000" rIns="90000" tIns="91440" bIns="91440" anchor="ctr">
+            <a:noAutofit/>
+          </a:bodyPr>
+          <a:p>
+            <a:pPr algn="ctr">
+              <a:lnSpc>
+                <a:spcPct val="100000"/>
+              </a:lnSpc>
+              <a:tabLst>
+                <a:tab algn="l" pos="0"/>
+              </a:tabLst>
+            </a:pPr>
+            <a:r>
+              <a:rPr b="1" lang="en-GB" sz="1800" strike="noStrike" u="none">
+                <a:solidFill>
+                  <a:srgbClr val="000000"/>
+                </a:solidFill>
+                <a:effectLst/>
+                <a:uFillTx/>
+                <a:latin typeface="Consolas"/>
+                <a:ea typeface="Consolas"/>
+              </a:rPr>
+              <a:t>Story</a:t>
+            </a:r>
+            <a:endParaRPr b="0" lang="pt-PT" sz="1800" strike="noStrike" u="none">
+              <a:solidFill>
+                <a:srgbClr val="000000"/>
+              </a:solidFill>
+              <a:effectLst/>
+              <a:uFillTx/>
+              <a:latin typeface="Arial"/>
+            </a:endParaRPr>
+          </a:p>
+        </p:txBody>
+      </p:sp>
+      <p:sp>
+        <p:nvSpPr>
+          <p:cNvPr id="346" name="Google Shape;69;p 3"/>
+          <p:cNvSpPr/>
+          <p:nvPr/>
+        </p:nvSpPr>
+        <p:spPr>
+          <a:xfrm>
+            <a:off x="9366120" y="84240"/>
+            <a:ext cx="2409840" cy="479880"/>
+          </a:xfrm>
+          <a:prstGeom prst="roundRect">
+            <a:avLst>
+              <a:gd name="adj" fmla="val 16667"/>
+            </a:avLst>
+          </a:prstGeom>
+          <a:solidFill>
+            <a:srgbClr val="f9cb9c"/>
+          </a:solidFill>
+          <a:ln w="28575">
+            <a:solidFill>
+              <a:srgbClr val="b45f06"/>
+            </a:solidFill>
+            <a:round/>
+          </a:ln>
+        </p:spPr>
+        <p:style>
+          <a:lnRef idx="0"/>
+          <a:fillRef idx="0"/>
+          <a:effectRef idx="0"/>
+          <a:fontRef idx="minor"/>
+        </p:style>
+        <p:txBody>
+          <a:bodyPr lIns="90000" rIns="90000" tIns="91440" bIns="91440" anchor="ctr">
+            <a:noAutofit/>
+          </a:bodyPr>
+          <a:p>
+            <a:pPr algn="ctr">
+              <a:lnSpc>
+                <a:spcPct val="100000"/>
+              </a:lnSpc>
+              <a:tabLst>
+                <a:tab algn="l" pos="0"/>
+              </a:tabLst>
+            </a:pPr>
+            <a:r>
+              <a:rPr b="1" lang="en-GB" sz="1800" strike="noStrike" u="none">
+                <a:solidFill>
+                  <a:srgbClr val="000000"/>
+                </a:solidFill>
+                <a:effectLst/>
+                <a:uFillTx/>
+                <a:latin typeface="Consolas"/>
+                <a:ea typeface="Consolas"/>
+              </a:rPr>
+              <a:t>To Do</a:t>
+            </a:r>
+            <a:endParaRPr b="0" lang="pt-PT" sz="1800" strike="noStrike" u="none">
+              <a:solidFill>
+                <a:srgbClr val="000000"/>
+              </a:solidFill>
+              <a:effectLst/>
+              <a:uFillTx/>
+              <a:latin typeface="Arial"/>
+            </a:endParaRPr>
+          </a:p>
+        </p:txBody>
+      </p:sp>
+      <p:sp>
+        <p:nvSpPr>
+          <p:cNvPr id="347" name="Google Shape;70;p 3"/>
+          <p:cNvSpPr/>
+          <p:nvPr/>
+        </p:nvSpPr>
+        <p:spPr>
+          <a:xfrm>
+            <a:off x="12395880" y="84240"/>
+            <a:ext cx="2409840" cy="479880"/>
+          </a:xfrm>
+          <a:prstGeom prst="roundRect">
+            <a:avLst>
+              <a:gd name="adj" fmla="val 16667"/>
+            </a:avLst>
+          </a:prstGeom>
+          <a:solidFill>
+            <a:srgbClr val="f9cb9c"/>
+          </a:solidFill>
+          <a:ln w="28575">
+            <a:solidFill>
+              <a:srgbClr val="b45f06"/>
+            </a:solidFill>
+            <a:round/>
+          </a:ln>
+        </p:spPr>
+        <p:style>
+          <a:lnRef idx="0"/>
+          <a:fillRef idx="0"/>
+          <a:effectRef idx="0"/>
+          <a:fontRef idx="minor"/>
+        </p:style>
+        <p:txBody>
+          <a:bodyPr lIns="90000" rIns="90000" tIns="91440" bIns="91440" anchor="ctr">
+            <a:noAutofit/>
+          </a:bodyPr>
+          <a:p>
+            <a:pPr algn="ctr">
+              <a:lnSpc>
+                <a:spcPct val="100000"/>
+              </a:lnSpc>
+              <a:tabLst>
+                <a:tab algn="l" pos="0"/>
+              </a:tabLst>
+            </a:pPr>
+            <a:r>
+              <a:rPr b="1" lang="en-GB" sz="1800" strike="noStrike" u="none">
+                <a:solidFill>
+                  <a:srgbClr val="000000"/>
+                </a:solidFill>
+                <a:effectLst/>
+                <a:uFillTx/>
+                <a:latin typeface="Consolas"/>
+                <a:ea typeface="Consolas"/>
+              </a:rPr>
+              <a:t>Doing</a:t>
+            </a:r>
+            <a:endParaRPr b="0" lang="pt-PT" sz="1800" strike="noStrike" u="none">
+              <a:solidFill>
+                <a:srgbClr val="000000"/>
+              </a:solidFill>
+              <a:effectLst/>
+              <a:uFillTx/>
+              <a:latin typeface="Arial"/>
+            </a:endParaRPr>
+          </a:p>
+        </p:txBody>
+      </p:sp>
+      <p:sp>
+        <p:nvSpPr>
+          <p:cNvPr id="348" name="Google Shape;71;p 3"/>
+          <p:cNvSpPr/>
+          <p:nvPr/>
+        </p:nvSpPr>
+        <p:spPr>
+          <a:xfrm>
+            <a:off x="15532560" y="84240"/>
+            <a:ext cx="2409840" cy="479880"/>
+          </a:xfrm>
+          <a:prstGeom prst="roundRect">
+            <a:avLst>
+              <a:gd name="adj" fmla="val 16667"/>
+            </a:avLst>
+          </a:prstGeom>
+          <a:solidFill>
+            <a:srgbClr val="f9cb9c"/>
+          </a:solidFill>
+          <a:ln w="28575">
+            <a:solidFill>
+              <a:srgbClr val="b45f06"/>
+            </a:solidFill>
+            <a:round/>
+          </a:ln>
+        </p:spPr>
+        <p:style>
+          <a:lnRef idx="0"/>
+          <a:fillRef idx="0"/>
+          <a:effectRef idx="0"/>
+          <a:fontRef idx="minor"/>
+        </p:style>
+        <p:txBody>
+          <a:bodyPr lIns="90000" rIns="90000" tIns="91440" bIns="91440" anchor="ctr">
+            <a:noAutofit/>
+          </a:bodyPr>
+          <a:p>
+            <a:pPr algn="ctr">
+              <a:lnSpc>
+                <a:spcPct val="100000"/>
+              </a:lnSpc>
+              <a:tabLst>
+                <a:tab algn="l" pos="0"/>
+              </a:tabLst>
+            </a:pPr>
+            <a:r>
+              <a:rPr b="1" lang="en-GB" sz="1800" strike="noStrike" u="none">
+                <a:solidFill>
+                  <a:srgbClr val="000000"/>
+                </a:solidFill>
+                <a:effectLst/>
+                <a:uFillTx/>
+                <a:latin typeface="Consolas"/>
+                <a:ea typeface="Consolas"/>
+              </a:rPr>
+              <a:t>Review</a:t>
+            </a:r>
+            <a:endParaRPr b="0" lang="pt-PT" sz="1800" strike="noStrike" u="none">
+              <a:solidFill>
+                <a:srgbClr val="000000"/>
+              </a:solidFill>
+              <a:effectLst/>
+              <a:uFillTx/>
+              <a:latin typeface="Arial"/>
+            </a:endParaRPr>
+          </a:p>
+        </p:txBody>
+      </p:sp>
+      <p:sp>
+        <p:nvSpPr>
+          <p:cNvPr id="349" name="Google Shape;72;p 3"/>
+          <p:cNvSpPr/>
+          <p:nvPr/>
+        </p:nvSpPr>
+        <p:spPr>
+          <a:xfrm>
+            <a:off x="18668880" y="84240"/>
+            <a:ext cx="2409840" cy="479880"/>
+          </a:xfrm>
+          <a:prstGeom prst="roundRect">
+            <a:avLst>
+              <a:gd name="adj" fmla="val 16667"/>
+            </a:avLst>
+          </a:prstGeom>
+          <a:solidFill>
+            <a:srgbClr val="f9cb9c"/>
+          </a:solidFill>
+          <a:ln w="28575">
+            <a:solidFill>
+              <a:srgbClr val="b45f06"/>
+            </a:solidFill>
+            <a:round/>
+          </a:ln>
+        </p:spPr>
+        <p:style>
+          <a:lnRef idx="0"/>
+          <a:fillRef idx="0"/>
+          <a:effectRef idx="0"/>
+          <a:fontRef idx="minor"/>
+        </p:style>
+        <p:txBody>
+          <a:bodyPr lIns="90000" rIns="90000" tIns="91440" bIns="91440" anchor="ctr">
+            <a:noAutofit/>
+          </a:bodyPr>
+          <a:p>
+            <a:pPr algn="ctr">
+              <a:lnSpc>
+                <a:spcPct val="100000"/>
+              </a:lnSpc>
+              <a:tabLst>
+                <a:tab algn="l" pos="0"/>
+              </a:tabLst>
+            </a:pPr>
+            <a:r>
+              <a:rPr b="1" lang="en-GB" sz="1800" strike="noStrike" u="none">
+                <a:solidFill>
+                  <a:srgbClr val="000000"/>
+                </a:solidFill>
+                <a:effectLst/>
+                <a:uFillTx/>
+                <a:latin typeface="Consolas"/>
+                <a:ea typeface="Consolas"/>
+              </a:rPr>
+              <a:t>Done</a:t>
+            </a:r>
+            <a:endParaRPr b="0" lang="pt-PT" sz="1800" strike="noStrike" u="none">
+              <a:solidFill>
+                <a:srgbClr val="000000"/>
+              </a:solidFill>
+              <a:effectLst/>
+              <a:uFillTx/>
+              <a:latin typeface="Arial"/>
+            </a:endParaRPr>
+          </a:p>
+        </p:txBody>
+      </p:sp>
+      <p:sp>
+        <p:nvSpPr>
+          <p:cNvPr id="350" name="Google Shape;73;p 3"/>
+          <p:cNvSpPr/>
+          <p:nvPr/>
+        </p:nvSpPr>
+        <p:spPr>
+          <a:xfrm>
+            <a:off x="167400" y="84240"/>
+            <a:ext cx="2409840" cy="479880"/>
+          </a:xfrm>
+          <a:prstGeom prst="roundRect">
+            <a:avLst>
+              <a:gd name="adj" fmla="val 16667"/>
+            </a:avLst>
+          </a:prstGeom>
+          <a:solidFill>
+            <a:srgbClr val="f9cb9c"/>
+          </a:solidFill>
+          <a:ln w="28575">
+            <a:solidFill>
+              <a:srgbClr val="b45f06"/>
+            </a:solidFill>
+            <a:round/>
+          </a:ln>
+        </p:spPr>
+        <p:style>
+          <a:lnRef idx="0"/>
+          <a:fillRef idx="0"/>
+          <a:effectRef idx="0"/>
+          <a:fontRef idx="minor"/>
+        </p:style>
+        <p:txBody>
+          <a:bodyPr lIns="90000" rIns="90000" tIns="91440" bIns="91440" anchor="ctr">
+            <a:noAutofit/>
+          </a:bodyPr>
+          <a:p>
+            <a:pPr algn="ctr">
+              <a:lnSpc>
+                <a:spcPct val="100000"/>
+              </a:lnSpc>
+              <a:tabLst>
+                <a:tab algn="l" pos="0"/>
+              </a:tabLst>
+            </a:pPr>
+            <a:r>
+              <a:rPr b="1" lang="en-GB" sz="1800" strike="noStrike" u="none">
+                <a:solidFill>
+                  <a:srgbClr val="000000"/>
+                </a:solidFill>
+                <a:effectLst/>
+                <a:uFillTx/>
+                <a:latin typeface="Consolas"/>
+                <a:ea typeface="Consolas"/>
+              </a:rPr>
+              <a:t>Backlog</a:t>
+            </a:r>
+            <a:endParaRPr b="0" lang="pt-PT" sz="1800" strike="noStrike" u="none">
+              <a:solidFill>
+                <a:srgbClr val="000000"/>
+              </a:solidFill>
+              <a:effectLst/>
+              <a:uFillTx/>
+              <a:latin typeface="Arial"/>
+            </a:endParaRPr>
+          </a:p>
+        </p:txBody>
+      </p:sp>
+      <p:sp>
+        <p:nvSpPr>
+          <p:cNvPr id="351" name="Google Shape;74;p 3"/>
+          <p:cNvSpPr/>
+          <p:nvPr/>
+        </p:nvSpPr>
+        <p:spPr>
+          <a:xfrm>
+            <a:off x="3197160" y="1385640"/>
+            <a:ext cx="2409840" cy="479880"/>
+          </a:xfrm>
+          <a:prstGeom prst="roundRect">
+            <a:avLst>
+              <a:gd name="adj" fmla="val 16667"/>
+            </a:avLst>
+          </a:prstGeom>
+          <a:solidFill>
+            <a:srgbClr val="e6b8af"/>
+          </a:solidFill>
+          <a:ln w="28575">
+            <a:solidFill>
+              <a:srgbClr val="5b0f00"/>
+            </a:solidFill>
+            <a:round/>
+          </a:ln>
+        </p:spPr>
+        <p:style>
+          <a:lnRef idx="0"/>
+          <a:fillRef idx="0"/>
+          <a:effectRef idx="0"/>
+          <a:fontRef idx="minor"/>
+        </p:style>
+        <p:txBody>
+          <a:bodyPr lIns="90000" rIns="90000" tIns="91440" bIns="91440" anchor="ctr">
+            <a:noAutofit/>
+          </a:bodyPr>
+          <a:p>
+            <a:pPr algn="ctr">
+              <a:lnSpc>
+                <a:spcPct val="100000"/>
+              </a:lnSpc>
+              <a:tabLst>
+                <a:tab algn="l" pos="0"/>
+              </a:tabLst>
+            </a:pPr>
+            <a:r>
+              <a:rPr b="1" lang="en-GB" sz="1800" strike="noStrike" u="none">
+                <a:solidFill>
+                  <a:srgbClr val="000000"/>
+                </a:solidFill>
+                <a:effectLst/>
+                <a:uFillTx/>
+                <a:latin typeface="Consolas"/>
+                <a:ea typeface="Consolas"/>
+              </a:rPr>
+              <a:t>66565</a:t>
+            </a:r>
+            <a:endParaRPr b="0" lang="pt-PT" sz="1800" strike="noStrike" u="none">
+              <a:solidFill>
+                <a:srgbClr val="000000"/>
+              </a:solidFill>
+              <a:effectLst/>
+              <a:uFillTx/>
+              <a:latin typeface="Arial"/>
+            </a:endParaRPr>
+          </a:p>
+        </p:txBody>
+      </p:sp>
+      <p:sp>
+        <p:nvSpPr>
+          <p:cNvPr id="352" name="Google Shape;75;p 3"/>
+          <p:cNvSpPr/>
+          <p:nvPr/>
+        </p:nvSpPr>
+        <p:spPr>
+          <a:xfrm>
+            <a:off x="3197160" y="2961360"/>
+            <a:ext cx="2409840" cy="479880"/>
+          </a:xfrm>
+          <a:prstGeom prst="roundRect">
+            <a:avLst>
+              <a:gd name="adj" fmla="val 16667"/>
+            </a:avLst>
+          </a:prstGeom>
+          <a:solidFill>
+            <a:srgbClr val="e6b8af"/>
+          </a:solidFill>
+          <a:ln w="28575">
+            <a:solidFill>
+              <a:srgbClr val="5b0f00"/>
+            </a:solidFill>
+            <a:round/>
+          </a:ln>
+        </p:spPr>
+        <p:style>
+          <a:lnRef idx="0"/>
+          <a:fillRef idx="0"/>
+          <a:effectRef idx="0"/>
+          <a:fontRef idx="minor"/>
+        </p:style>
+        <p:txBody>
+          <a:bodyPr lIns="90000" rIns="90000" tIns="91440" bIns="91440" anchor="ctr">
+            <a:noAutofit/>
+          </a:bodyPr>
+          <a:p>
+            <a:pPr algn="ctr">
+              <a:lnSpc>
+                <a:spcPct val="100000"/>
+              </a:lnSpc>
+              <a:tabLst>
+                <a:tab algn="l" pos="0"/>
+              </a:tabLst>
+            </a:pPr>
+            <a:r>
+              <a:rPr b="1" lang="en-GB" sz="1800" strike="noStrike" u="none">
+                <a:solidFill>
+                  <a:srgbClr val="000000"/>
+                </a:solidFill>
+                <a:effectLst/>
+                <a:uFillTx/>
+                <a:latin typeface="Consolas"/>
+                <a:ea typeface="Consolas"/>
+              </a:rPr>
+              <a:t>67196</a:t>
+            </a:r>
+            <a:endParaRPr b="0" lang="pt-PT" sz="1800" strike="noStrike" u="none">
+              <a:solidFill>
+                <a:srgbClr val="000000"/>
+              </a:solidFill>
+              <a:effectLst/>
+              <a:uFillTx/>
+              <a:latin typeface="Arial"/>
+            </a:endParaRPr>
+          </a:p>
+        </p:txBody>
+      </p:sp>
+      <p:sp>
+        <p:nvSpPr>
+          <p:cNvPr id="353" name="Google Shape;76;p 3"/>
+          <p:cNvSpPr/>
+          <p:nvPr/>
+        </p:nvSpPr>
+        <p:spPr>
+          <a:xfrm>
+            <a:off x="3197160" y="4537440"/>
+            <a:ext cx="2409840" cy="479880"/>
+          </a:xfrm>
+          <a:prstGeom prst="roundRect">
+            <a:avLst>
+              <a:gd name="adj" fmla="val 16667"/>
+            </a:avLst>
+          </a:prstGeom>
+          <a:solidFill>
+            <a:srgbClr val="e6b8af"/>
+          </a:solidFill>
+          <a:ln w="28575">
+            <a:solidFill>
+              <a:srgbClr val="5b0f00"/>
+            </a:solidFill>
+            <a:round/>
+          </a:ln>
+        </p:spPr>
+        <p:style>
+          <a:lnRef idx="0"/>
+          <a:fillRef idx="0"/>
+          <a:effectRef idx="0"/>
+          <a:fontRef idx="minor"/>
+        </p:style>
+        <p:txBody>
+          <a:bodyPr lIns="90000" rIns="90000" tIns="91440" bIns="91440" anchor="ctr">
+            <a:noAutofit/>
+          </a:bodyPr>
+          <a:p>
+            <a:pPr algn="ctr">
+              <a:lnSpc>
+                <a:spcPct val="100000"/>
+              </a:lnSpc>
+              <a:tabLst>
+                <a:tab algn="l" pos="0"/>
+              </a:tabLst>
+            </a:pPr>
+            <a:r>
+              <a:rPr b="1" lang="en-GB" sz="1800" strike="noStrike" u="none">
+                <a:solidFill>
+                  <a:srgbClr val="000000"/>
+                </a:solidFill>
+                <a:effectLst/>
+                <a:uFillTx/>
+                <a:latin typeface="Consolas"/>
+                <a:ea typeface="Consolas"/>
+              </a:rPr>
+              <a:t>67215</a:t>
+            </a:r>
+            <a:endParaRPr b="0" lang="pt-PT" sz="1800" strike="noStrike" u="none">
+              <a:solidFill>
+                <a:srgbClr val="000000"/>
+              </a:solidFill>
+              <a:effectLst/>
+              <a:uFillTx/>
+              <a:latin typeface="Arial"/>
+            </a:endParaRPr>
+          </a:p>
+        </p:txBody>
+      </p:sp>
+      <p:sp>
+        <p:nvSpPr>
+          <p:cNvPr id="354" name="Google Shape;77;p 3"/>
+          <p:cNvSpPr/>
+          <p:nvPr/>
+        </p:nvSpPr>
+        <p:spPr>
+          <a:xfrm>
+            <a:off x="3197160" y="6113160"/>
+            <a:ext cx="2409840" cy="479880"/>
+          </a:xfrm>
+          <a:prstGeom prst="roundRect">
+            <a:avLst>
+              <a:gd name="adj" fmla="val 16667"/>
+            </a:avLst>
+          </a:prstGeom>
+          <a:solidFill>
+            <a:srgbClr val="e6b8af"/>
+          </a:solidFill>
+          <a:ln w="28575">
+            <a:solidFill>
+              <a:srgbClr val="5b0f00"/>
+            </a:solidFill>
+            <a:round/>
+          </a:ln>
+        </p:spPr>
+        <p:style>
+          <a:lnRef idx="0"/>
+          <a:fillRef idx="0"/>
+          <a:effectRef idx="0"/>
+          <a:fontRef idx="minor"/>
+        </p:style>
+        <p:txBody>
+          <a:bodyPr lIns="90000" rIns="90000" tIns="91440" bIns="91440" anchor="ctr">
+            <a:noAutofit/>
+          </a:bodyPr>
+          <a:p>
+            <a:pPr algn="ctr">
+              <a:lnSpc>
+                <a:spcPct val="100000"/>
+              </a:lnSpc>
+              <a:tabLst>
+                <a:tab algn="l" pos="0"/>
+              </a:tabLst>
+            </a:pPr>
+            <a:r>
+              <a:rPr b="1" lang="pt-PT" sz="1800" strike="noStrike" u="none">
+                <a:solidFill>
+                  <a:srgbClr val="000000"/>
+                </a:solidFill>
+                <a:effectLst/>
+                <a:uFillTx/>
+                <a:latin typeface="Consolas"/>
+                <a:ea typeface="Consolas"/>
+              </a:rPr>
+              <a:t>68509</a:t>
+            </a:r>
+            <a:endParaRPr b="0" lang="pt-PT" sz="1800" strike="noStrike" u="none">
+              <a:solidFill>
+                <a:srgbClr val="000000"/>
+              </a:solidFill>
+              <a:effectLst/>
+              <a:uFillTx/>
+              <a:latin typeface="Arial"/>
+            </a:endParaRPr>
+          </a:p>
+        </p:txBody>
+      </p:sp>
+      <p:sp>
+        <p:nvSpPr>
+          <p:cNvPr id="355" name="Google Shape;78;p 3"/>
+          <p:cNvSpPr/>
+          <p:nvPr/>
+        </p:nvSpPr>
+        <p:spPr>
+          <a:xfrm>
+            <a:off x="3197160" y="7689240"/>
+            <a:ext cx="2409840" cy="479880"/>
+          </a:xfrm>
+          <a:prstGeom prst="roundRect">
+            <a:avLst>
+              <a:gd name="adj" fmla="val 16667"/>
+            </a:avLst>
+          </a:prstGeom>
+          <a:solidFill>
+            <a:srgbClr val="e6b8af"/>
+          </a:solidFill>
+          <a:ln w="28575">
+            <a:solidFill>
+              <a:srgbClr val="5b0f00"/>
+            </a:solidFill>
+            <a:round/>
+          </a:ln>
+        </p:spPr>
+        <p:style>
+          <a:lnRef idx="0"/>
+          <a:fillRef idx="0"/>
+          <a:effectRef idx="0"/>
+          <a:fontRef idx="minor"/>
+        </p:style>
+        <p:txBody>
+          <a:bodyPr lIns="90000" rIns="90000" tIns="91440" bIns="91440" anchor="ctr">
+            <a:noAutofit/>
+          </a:bodyPr>
+          <a:p>
+            <a:pPr algn="ctr">
+              <a:lnSpc>
+                <a:spcPct val="100000"/>
+              </a:lnSpc>
+              <a:tabLst>
+                <a:tab algn="l" pos="0"/>
+              </a:tabLst>
+            </a:pPr>
+            <a:r>
+              <a:rPr b="1" lang="en-GB" sz="1800" strike="noStrike" u="none">
+                <a:solidFill>
+                  <a:srgbClr val="000000"/>
+                </a:solidFill>
+                <a:effectLst/>
+                <a:uFillTx/>
+                <a:latin typeface="Consolas"/>
+                <a:ea typeface="Consolas"/>
+              </a:rPr>
+              <a:t>68663</a:t>
+            </a:r>
+            <a:endParaRPr b="0" lang="pt-PT" sz="1800" strike="noStrike" u="none">
+              <a:solidFill>
+                <a:srgbClr val="000000"/>
+              </a:solidFill>
+              <a:effectLst/>
+              <a:uFillTx/>
+              <a:latin typeface="Arial"/>
+            </a:endParaRPr>
+          </a:p>
+        </p:txBody>
+      </p:sp>
+      <p:sp>
+        <p:nvSpPr>
+          <p:cNvPr id="356" name="Google Shape;79;p 3"/>
+          <p:cNvSpPr/>
+          <p:nvPr/>
+        </p:nvSpPr>
+        <p:spPr>
+          <a:xfrm>
+            <a:off x="3197160" y="9264960"/>
+            <a:ext cx="2409840" cy="479880"/>
+          </a:xfrm>
+          <a:prstGeom prst="roundRect">
+            <a:avLst>
+              <a:gd name="adj" fmla="val 16667"/>
+            </a:avLst>
+          </a:prstGeom>
+          <a:solidFill>
+            <a:srgbClr val="e6b8af"/>
+          </a:solidFill>
+          <a:ln w="28575">
+            <a:solidFill>
+              <a:srgbClr val="5b0f00"/>
+            </a:solidFill>
+            <a:round/>
+          </a:ln>
+        </p:spPr>
+        <p:style>
+          <a:lnRef idx="0"/>
+          <a:fillRef idx="0"/>
+          <a:effectRef idx="0"/>
+          <a:fontRef idx="minor"/>
+        </p:style>
+        <p:txBody>
+          <a:bodyPr lIns="90000" rIns="90000" tIns="91440" bIns="91440" anchor="ctr">
+            <a:noAutofit/>
+          </a:bodyPr>
+          <a:p>
+            <a:pPr algn="ctr">
+              <a:lnSpc>
+                <a:spcPct val="100000"/>
+              </a:lnSpc>
+              <a:tabLst>
+                <a:tab algn="l" pos="0"/>
+              </a:tabLst>
+            </a:pPr>
+            <a:r>
+              <a:rPr b="1" lang="en-GB" sz="1800" strike="noStrike" u="none">
+                <a:solidFill>
+                  <a:srgbClr val="000000"/>
+                </a:solidFill>
+                <a:effectLst/>
+                <a:uFillTx/>
+                <a:latin typeface="Consolas"/>
+                <a:ea typeface="Consolas"/>
+              </a:rPr>
+              <a:t>70116</a:t>
+            </a:r>
+            <a:endParaRPr b="0" lang="pt-PT" sz="1800" strike="noStrike" u="none">
+              <a:solidFill>
+                <a:srgbClr val="000000"/>
+              </a:solidFill>
+              <a:effectLst/>
+              <a:uFillTx/>
+              <a:latin typeface="Arial"/>
+            </a:endParaRPr>
+          </a:p>
+        </p:txBody>
+      </p:sp>
+      <p:cxnSp>
+        <p:nvCxnSpPr>
+          <p:cNvPr id="357" name="Google Shape;80;p 3"/>
+          <p:cNvCxnSpPr/>
+          <p:nvPr/>
+        </p:nvCxnSpPr>
+        <p:spPr>
+          <a:xfrm>
+            <a:off x="5607720" y="1625760"/>
+            <a:ext cx="16043400" cy="1080"/>
+          </a:xfrm>
+          <a:prstGeom prst="straightConnector1">
+            <a:avLst/>
+          </a:prstGeom>
+          <a:ln w="28575">
+            <a:solidFill>
+              <a:srgbClr val="999999"/>
+            </a:solidFill>
+            <a:prstDash val="dash"/>
+            <a:round/>
+          </a:ln>
+        </p:spPr>
+      </p:cxnSp>
+      <p:cxnSp>
+        <p:nvCxnSpPr>
+          <p:cNvPr id="358" name="Google Shape;81;p 3"/>
+          <p:cNvCxnSpPr/>
+          <p:nvPr/>
+        </p:nvCxnSpPr>
+        <p:spPr>
+          <a:xfrm>
+            <a:off x="5607720" y="3201840"/>
+            <a:ext cx="16043400" cy="1080"/>
+          </a:xfrm>
+          <a:prstGeom prst="straightConnector1">
+            <a:avLst/>
+          </a:prstGeom>
+          <a:ln w="28575">
+            <a:solidFill>
+              <a:srgbClr val="999999"/>
+            </a:solidFill>
+            <a:prstDash val="dash"/>
+            <a:round/>
+          </a:ln>
+        </p:spPr>
+      </p:cxnSp>
+      <p:cxnSp>
+        <p:nvCxnSpPr>
+          <p:cNvPr id="359" name="Google Shape;82;p 3"/>
+          <p:cNvCxnSpPr/>
+          <p:nvPr/>
+        </p:nvCxnSpPr>
+        <p:spPr>
+          <a:xfrm>
+            <a:off x="5607720" y="4777560"/>
+            <a:ext cx="16043400" cy="1080"/>
+          </a:xfrm>
+          <a:prstGeom prst="straightConnector1">
+            <a:avLst/>
+          </a:prstGeom>
+          <a:ln w="28575">
+            <a:solidFill>
+              <a:srgbClr val="999999"/>
+            </a:solidFill>
+            <a:prstDash val="dash"/>
+            <a:round/>
+          </a:ln>
+        </p:spPr>
+      </p:cxnSp>
+      <p:cxnSp>
+        <p:nvCxnSpPr>
+          <p:cNvPr id="360" name="Google Shape;83;p 3"/>
+          <p:cNvCxnSpPr/>
+          <p:nvPr/>
+        </p:nvCxnSpPr>
+        <p:spPr>
+          <a:xfrm>
+            <a:off x="5607720" y="6353640"/>
+            <a:ext cx="16043400" cy="1080"/>
+          </a:xfrm>
+          <a:prstGeom prst="straightConnector1">
+            <a:avLst/>
+          </a:prstGeom>
+          <a:ln w="28575">
+            <a:solidFill>
+              <a:srgbClr val="999999"/>
+            </a:solidFill>
+            <a:prstDash val="dash"/>
+            <a:round/>
+          </a:ln>
+        </p:spPr>
+      </p:cxnSp>
+      <p:cxnSp>
+        <p:nvCxnSpPr>
+          <p:cNvPr id="361" name="Google Shape;84;p 3"/>
+          <p:cNvCxnSpPr/>
+          <p:nvPr/>
+        </p:nvCxnSpPr>
+        <p:spPr>
+          <a:xfrm>
+            <a:off x="5607720" y="7929360"/>
+            <a:ext cx="16043400" cy="1080"/>
+          </a:xfrm>
+          <a:prstGeom prst="straightConnector1">
+            <a:avLst/>
+          </a:prstGeom>
+          <a:ln w="28575">
+            <a:solidFill>
+              <a:srgbClr val="999999"/>
+            </a:solidFill>
+            <a:prstDash val="dash"/>
+            <a:round/>
+          </a:ln>
+        </p:spPr>
+      </p:cxnSp>
+      <p:cxnSp>
+        <p:nvCxnSpPr>
+          <p:cNvPr id="362" name="Google Shape;85;p 3"/>
+          <p:cNvCxnSpPr/>
+          <p:nvPr/>
+        </p:nvCxnSpPr>
+        <p:spPr>
+          <a:xfrm>
+            <a:off x="5607720" y="9505440"/>
+            <a:ext cx="16043400" cy="1080"/>
+          </a:xfrm>
+          <a:prstGeom prst="straightConnector1">
+            <a:avLst/>
+          </a:prstGeom>
+          <a:ln w="28575">
+            <a:solidFill>
+              <a:srgbClr val="999999"/>
+            </a:solidFill>
+            <a:prstDash val="dash"/>
+            <a:round/>
+          </a:ln>
+        </p:spPr>
+      </p:cxnSp>
+      <p:sp>
+        <p:nvSpPr>
+          <p:cNvPr id="363" name="Google Shape;86;p 3"/>
+          <p:cNvSpPr/>
+          <p:nvPr/>
+        </p:nvSpPr>
+        <p:spPr>
+          <a:xfrm>
+            <a:off x="6235200" y="970920"/>
+            <a:ext cx="2409840" cy="9468720"/>
+          </a:xfrm>
+          <a:prstGeom prst="roundRect">
+            <a:avLst>
+              <a:gd name="adj" fmla="val 16667"/>
+            </a:avLst>
+          </a:prstGeom>
+          <a:solidFill>
+            <a:srgbClr val="ffab40"/>
+          </a:solidFill>
+          <a:ln>
+            <a:solidFill>
+              <a:srgbClr val="6f4a1c"/>
+            </a:solidFill>
+            <a:round/>
+          </a:ln>
+        </p:spPr>
+        <p:style>
+          <a:lnRef idx="2">
+            <a:schemeClr val="accent4">
+              <a:shade val="15000"/>
+            </a:schemeClr>
+          </a:lnRef>
+          <a:fillRef idx="1">
+            <a:schemeClr val="accent4"/>
+          </a:fillRef>
+          <a:effectRef idx="0">
+            <a:schemeClr val="accent4"/>
+          </a:effectRef>
+          <a:fontRef idx="minor"/>
+        </p:style>
+        <p:txBody>
+          <a:bodyPr lIns="90000" rIns="90000" tIns="91440" bIns="91440" anchor="t">
+            <a:noAutofit/>
+          </a:bodyPr>
+          <a:p>
+            <a:pPr>
+              <a:lnSpc>
+                <a:spcPct val="100000"/>
+              </a:lnSpc>
+              <a:tabLst>
+                <a:tab algn="l" pos="0"/>
+              </a:tabLst>
+            </a:pPr>
+            <a:r>
+              <a:rPr b="0" lang="en-US" sz="2600" strike="noStrike" u="none">
+                <a:solidFill>
+                  <a:schemeClr val="lt1"/>
+                </a:solidFill>
+                <a:effectLst/>
+                <a:uFillTx/>
+                <a:latin typeface="Consolas"/>
+                <a:ea typeface="Consolas"/>
+              </a:rPr>
+              <a:t>Code Smells and design patterns report.</a:t>
+            </a:r>
+            <a:endParaRPr b="0" lang="pt-PT" sz="2600" strike="noStrike" u="none">
+              <a:solidFill>
+                <a:srgbClr val="000000"/>
+              </a:solidFill>
+              <a:effectLst/>
+              <a:uFillTx/>
+              <a:latin typeface="Arial"/>
+            </a:endParaRPr>
+          </a:p>
+          <a:p>
+            <a:pPr>
+              <a:lnSpc>
+                <a:spcPct val="100000"/>
+              </a:lnSpc>
+              <a:tabLst>
+                <a:tab algn="l" pos="0"/>
+              </a:tabLst>
+            </a:pPr>
+            <a:endParaRPr b="0" lang="pt-PT" sz="2600" strike="noStrike" u="none">
+              <a:solidFill>
+                <a:srgbClr val="000000"/>
+              </a:solidFill>
+              <a:effectLst/>
+              <a:uFillTx/>
+              <a:latin typeface="Arial"/>
+            </a:endParaRPr>
+          </a:p>
+          <a:p>
+            <a:pPr>
+              <a:lnSpc>
+                <a:spcPct val="100000"/>
+              </a:lnSpc>
+              <a:tabLst>
+                <a:tab algn="l" pos="0"/>
+              </a:tabLst>
+            </a:pPr>
+            <a:r>
+              <a:rPr b="0" lang="en-US" sz="2600" strike="noStrike" u="none">
+                <a:solidFill>
+                  <a:schemeClr val="lt1"/>
+                </a:solidFill>
+                <a:effectLst/>
+                <a:uFillTx/>
+                <a:latin typeface="Consolas"/>
+                <a:ea typeface="Consolas"/>
+              </a:rPr>
+              <a:t>Use case diagram</a:t>
+            </a:r>
+            <a:endParaRPr b="0" lang="pt-PT" sz="2600" strike="noStrike" u="none">
+              <a:solidFill>
+                <a:srgbClr val="000000"/>
+              </a:solidFill>
+              <a:effectLst/>
+              <a:uFillTx/>
+              <a:latin typeface="Arial"/>
+            </a:endParaRPr>
+          </a:p>
+        </p:txBody>
+      </p:sp>
+      <p:cxnSp>
+        <p:nvCxnSpPr>
+          <p:cNvPr id="364" name="Google Shape;91;p 3"/>
+          <p:cNvCxnSpPr/>
+          <p:nvPr/>
+        </p:nvCxnSpPr>
+        <p:spPr>
+          <a:xfrm>
+            <a:off x="2874240" y="-28440"/>
+            <a:ext cx="1080" cy="10857960"/>
+          </a:xfrm>
+          <a:prstGeom prst="straightConnector1">
+            <a:avLst/>
+          </a:prstGeom>
+          <a:ln w="38100">
+            <a:solidFill>
+              <a:srgbClr val="5b0f00"/>
+            </a:solidFill>
+            <a:round/>
+          </a:ln>
+        </p:spPr>
+      </p:cxnSp>
+      <p:sp>
+        <p:nvSpPr>
+          <p:cNvPr id="365" name="Google Shape;87;p 36"/>
+          <p:cNvSpPr/>
+          <p:nvPr/>
+        </p:nvSpPr>
+        <p:spPr>
+          <a:xfrm rot="33000">
+            <a:off x="18353520" y="852480"/>
+            <a:ext cx="2880360" cy="1293480"/>
+          </a:xfrm>
+          <a:prstGeom prst="roundRect">
+            <a:avLst>
+              <a:gd name="adj" fmla="val 16667"/>
+            </a:avLst>
+          </a:prstGeom>
+          <a:solidFill>
+            <a:srgbClr val="d9ead3"/>
+          </a:solidFill>
+          <a:ln w="28575">
+            <a:solidFill>
+              <a:srgbClr val="274e13"/>
+            </a:solidFill>
+            <a:round/>
+          </a:ln>
+        </p:spPr>
+        <p:style>
+          <a:lnRef idx="0"/>
+          <a:fillRef idx="0"/>
+          <a:effectRef idx="0"/>
+          <a:fontRef idx="minor"/>
+        </p:style>
+        <p:txBody>
+          <a:bodyPr lIns="90000" rIns="90000" tIns="91440" bIns="91440" anchor="t">
+            <a:noAutofit/>
+          </a:bodyPr>
+          <a:p>
+            <a:pPr>
+              <a:lnSpc>
+                <a:spcPct val="100000"/>
+              </a:lnSpc>
+              <a:tabLst>
+                <a:tab algn="l" pos="0"/>
+              </a:tabLst>
+            </a:pPr>
+            <a:r>
+              <a:rPr b="0" lang="en-US" sz="1400" strike="noStrike" u="none">
+                <a:solidFill>
+                  <a:srgbClr val="000000"/>
+                </a:solidFill>
+                <a:effectLst/>
+                <a:uFillTx/>
+                <a:latin typeface="Consolas"/>
+                <a:ea typeface="Consolas"/>
+              </a:rPr>
+              <a:t>Explore codebase. </a:t>
+            </a:r>
+            <a:r>
+              <a:rPr b="0" lang="en-US" sz="1400" strike="noStrike" u="none">
+                <a:solidFill>
+                  <a:srgbClr val="000000"/>
+                </a:solidFill>
+                <a:effectLst/>
+                <a:uFillTx/>
+                <a:latin typeface="Consolas"/>
+                <a:ea typeface="Consolas"/>
+              </a:rPr>
+              <a:t>Recognize Design patterns, Code Smells, Code Metrics and create Use case diagram.</a:t>
+            </a:r>
+            <a:endParaRPr b="0" lang="pt-PT" sz="1400" strike="noStrike" u="none">
+              <a:solidFill>
+                <a:srgbClr val="000000"/>
+              </a:solidFill>
+              <a:effectLst/>
+              <a:uFillTx/>
+              <a:latin typeface="Arial"/>
+            </a:endParaRPr>
+          </a:p>
+        </p:txBody>
+      </p:sp>
+      <p:sp>
+        <p:nvSpPr>
+          <p:cNvPr id="366" name="Google Shape;87;p 38"/>
+          <p:cNvSpPr/>
+          <p:nvPr/>
+        </p:nvSpPr>
+        <p:spPr>
+          <a:xfrm rot="33000">
+            <a:off x="18353520" y="8833680"/>
+            <a:ext cx="2880360" cy="1293480"/>
+          </a:xfrm>
+          <a:prstGeom prst="roundRect">
+            <a:avLst>
+              <a:gd name="adj" fmla="val 16667"/>
+            </a:avLst>
+          </a:prstGeom>
+          <a:solidFill>
+            <a:srgbClr val="d9ead3"/>
+          </a:solidFill>
+          <a:ln w="28575">
+            <a:solidFill>
+              <a:srgbClr val="274e13"/>
+            </a:solidFill>
+            <a:round/>
+          </a:ln>
+        </p:spPr>
+        <p:style>
+          <a:lnRef idx="0"/>
+          <a:fillRef idx="0"/>
+          <a:effectRef idx="0"/>
+          <a:fontRef idx="minor"/>
+        </p:style>
+        <p:txBody>
+          <a:bodyPr lIns="90000" rIns="90000" tIns="91440" bIns="91440" anchor="t">
+            <a:noAutofit/>
+          </a:bodyPr>
+          <a:p>
+            <a:pPr>
+              <a:lnSpc>
+                <a:spcPct val="100000"/>
+              </a:lnSpc>
+              <a:tabLst>
+                <a:tab algn="l" pos="0"/>
+              </a:tabLst>
+            </a:pPr>
+            <a:r>
+              <a:rPr b="0" lang="en-US" sz="1400" strike="noStrike" u="none">
+                <a:solidFill>
+                  <a:srgbClr val="000000"/>
+                </a:solidFill>
+                <a:effectLst/>
+                <a:uFillTx/>
+                <a:latin typeface="Consolas"/>
+                <a:ea typeface="Consolas"/>
+              </a:rPr>
+              <a:t>Explore codebase. </a:t>
+            </a:r>
+            <a:r>
+              <a:rPr b="0" lang="en-US" sz="1400" strike="noStrike" u="none">
+                <a:solidFill>
+                  <a:srgbClr val="000000"/>
+                </a:solidFill>
+                <a:effectLst/>
+                <a:uFillTx/>
+                <a:latin typeface="Consolas"/>
+                <a:ea typeface="Consolas"/>
+              </a:rPr>
+              <a:t>Recognize Design patterns, Code Smells, Code Metrics and create Use case diagram.</a:t>
+            </a:r>
+            <a:endParaRPr b="0" lang="pt-PT" sz="1400" strike="noStrike" u="none">
+              <a:solidFill>
+                <a:srgbClr val="000000"/>
+              </a:solidFill>
+              <a:effectLst/>
+              <a:uFillTx/>
+              <a:latin typeface="Arial"/>
+            </a:endParaRPr>
+          </a:p>
+        </p:txBody>
+      </p:sp>
+      <p:sp>
+        <p:nvSpPr>
+          <p:cNvPr id="367" name="Google Shape;87;p 39"/>
+          <p:cNvSpPr/>
+          <p:nvPr/>
+        </p:nvSpPr>
+        <p:spPr>
+          <a:xfrm rot="33000">
+            <a:off x="18353160" y="7213680"/>
+            <a:ext cx="2880360" cy="1293480"/>
+          </a:xfrm>
+          <a:prstGeom prst="roundRect">
+            <a:avLst>
+              <a:gd name="adj" fmla="val 16667"/>
+            </a:avLst>
+          </a:prstGeom>
+          <a:solidFill>
+            <a:srgbClr val="d9ead3"/>
+          </a:solidFill>
+          <a:ln w="28575">
+            <a:solidFill>
+              <a:srgbClr val="274e13"/>
+            </a:solidFill>
+            <a:round/>
+          </a:ln>
+        </p:spPr>
+        <p:style>
+          <a:lnRef idx="0"/>
+          <a:fillRef idx="0"/>
+          <a:effectRef idx="0"/>
+          <a:fontRef idx="minor"/>
+        </p:style>
+        <p:txBody>
+          <a:bodyPr lIns="90000" rIns="90000" tIns="91440" bIns="91440" anchor="t">
+            <a:noAutofit/>
+          </a:bodyPr>
+          <a:p>
+            <a:pPr>
+              <a:lnSpc>
+                <a:spcPct val="100000"/>
+              </a:lnSpc>
+              <a:tabLst>
+                <a:tab algn="l" pos="0"/>
+              </a:tabLst>
+            </a:pPr>
+            <a:r>
+              <a:rPr b="0" lang="en-US" sz="1400" strike="noStrike" u="none">
+                <a:solidFill>
+                  <a:srgbClr val="000000"/>
+                </a:solidFill>
+                <a:effectLst/>
+                <a:uFillTx/>
+                <a:latin typeface="Consolas"/>
+                <a:ea typeface="Consolas"/>
+              </a:rPr>
+              <a:t>Explore codebase. </a:t>
+            </a:r>
+            <a:r>
+              <a:rPr b="0" lang="en-US" sz="1400" strike="noStrike" u="none">
+                <a:solidFill>
+                  <a:srgbClr val="000000"/>
+                </a:solidFill>
+                <a:effectLst/>
+                <a:uFillTx/>
+                <a:latin typeface="Consolas"/>
+                <a:ea typeface="Consolas"/>
+              </a:rPr>
+              <a:t>Recognize Design patterns, Code Smells, Code Metrics and create Use case diagram.</a:t>
+            </a:r>
+            <a:endParaRPr b="0" lang="pt-PT" sz="1400" strike="noStrike" u="none">
+              <a:solidFill>
+                <a:srgbClr val="000000"/>
+              </a:solidFill>
+              <a:effectLst/>
+              <a:uFillTx/>
+              <a:latin typeface="Arial"/>
+            </a:endParaRPr>
+          </a:p>
+        </p:txBody>
+      </p:sp>
+      <p:sp>
+        <p:nvSpPr>
+          <p:cNvPr id="368" name="Google Shape;87;p 40"/>
+          <p:cNvSpPr/>
+          <p:nvPr/>
+        </p:nvSpPr>
+        <p:spPr>
+          <a:xfrm rot="33000">
+            <a:off x="18353160" y="5593680"/>
+            <a:ext cx="2880360" cy="1293480"/>
+          </a:xfrm>
+          <a:prstGeom prst="roundRect">
+            <a:avLst>
+              <a:gd name="adj" fmla="val 16667"/>
+            </a:avLst>
+          </a:prstGeom>
+          <a:solidFill>
+            <a:srgbClr val="d9ead3"/>
+          </a:solidFill>
+          <a:ln w="28575">
+            <a:solidFill>
+              <a:srgbClr val="274e13"/>
+            </a:solidFill>
+            <a:round/>
+          </a:ln>
+        </p:spPr>
+        <p:style>
+          <a:lnRef idx="0"/>
+          <a:fillRef idx="0"/>
+          <a:effectRef idx="0"/>
+          <a:fontRef idx="minor"/>
+        </p:style>
+        <p:txBody>
+          <a:bodyPr lIns="90000" rIns="90000" tIns="91440" bIns="91440" anchor="t">
+            <a:noAutofit/>
+          </a:bodyPr>
+          <a:p>
+            <a:pPr>
+              <a:lnSpc>
+                <a:spcPct val="100000"/>
+              </a:lnSpc>
+              <a:tabLst>
+                <a:tab algn="l" pos="0"/>
+              </a:tabLst>
+            </a:pPr>
+            <a:r>
+              <a:rPr b="0" lang="en-US" sz="1400" strike="noStrike" u="none">
+                <a:solidFill>
+                  <a:srgbClr val="000000"/>
+                </a:solidFill>
+                <a:effectLst/>
+                <a:uFillTx/>
+                <a:latin typeface="Consolas"/>
+                <a:ea typeface="Consolas"/>
+              </a:rPr>
+              <a:t>Explore codebase. </a:t>
+            </a:r>
+            <a:r>
+              <a:rPr b="0" lang="en-US" sz="1400" strike="noStrike" u="none">
+                <a:solidFill>
+                  <a:srgbClr val="000000"/>
+                </a:solidFill>
+                <a:effectLst/>
+                <a:uFillTx/>
+                <a:latin typeface="Consolas"/>
+                <a:ea typeface="Consolas"/>
+              </a:rPr>
+              <a:t>Recognize Design patterns, Code Smells, Code Metrics and create Use case diagram.</a:t>
+            </a:r>
+            <a:endParaRPr b="0" lang="pt-PT" sz="1400" strike="noStrike" u="none">
+              <a:solidFill>
+                <a:srgbClr val="000000"/>
+              </a:solidFill>
+              <a:effectLst/>
+              <a:uFillTx/>
+              <a:latin typeface="Arial"/>
+            </a:endParaRPr>
+          </a:p>
+        </p:txBody>
+      </p:sp>
+      <p:sp>
+        <p:nvSpPr>
+          <p:cNvPr id="369" name="Google Shape;87;p 41"/>
+          <p:cNvSpPr/>
+          <p:nvPr/>
+        </p:nvSpPr>
+        <p:spPr>
+          <a:xfrm rot="33000">
+            <a:off x="18353160" y="4092480"/>
+            <a:ext cx="2880360" cy="1293480"/>
+          </a:xfrm>
+          <a:prstGeom prst="roundRect">
+            <a:avLst>
+              <a:gd name="adj" fmla="val 16667"/>
+            </a:avLst>
+          </a:prstGeom>
+          <a:solidFill>
+            <a:srgbClr val="d9ead3"/>
+          </a:solidFill>
+          <a:ln w="28575">
+            <a:solidFill>
+              <a:srgbClr val="274e13"/>
+            </a:solidFill>
+            <a:round/>
+          </a:ln>
+        </p:spPr>
+        <p:style>
+          <a:lnRef idx="0"/>
+          <a:fillRef idx="0"/>
+          <a:effectRef idx="0"/>
+          <a:fontRef idx="minor"/>
+        </p:style>
+        <p:txBody>
+          <a:bodyPr lIns="90000" rIns="90000" tIns="91440" bIns="91440" anchor="t">
+            <a:noAutofit/>
+          </a:bodyPr>
+          <a:p>
+            <a:pPr>
+              <a:lnSpc>
+                <a:spcPct val="100000"/>
+              </a:lnSpc>
+              <a:tabLst>
+                <a:tab algn="l" pos="0"/>
+              </a:tabLst>
+            </a:pPr>
+            <a:r>
+              <a:rPr b="0" lang="en-US" sz="1400" strike="noStrike" u="none">
+                <a:solidFill>
+                  <a:srgbClr val="000000"/>
+                </a:solidFill>
+                <a:effectLst/>
+                <a:uFillTx/>
+                <a:latin typeface="Consolas"/>
+                <a:ea typeface="Consolas"/>
+              </a:rPr>
+              <a:t>Explore codebase. </a:t>
+            </a:r>
+            <a:r>
+              <a:rPr b="0" lang="en-US" sz="1400" strike="noStrike" u="none">
+                <a:solidFill>
+                  <a:srgbClr val="000000"/>
+                </a:solidFill>
+                <a:effectLst/>
+                <a:uFillTx/>
+                <a:latin typeface="Consolas"/>
+                <a:ea typeface="Consolas"/>
+              </a:rPr>
+              <a:t>Recognize Design patterns, Code Smells, Code Metrics and create Use case diagram.</a:t>
+            </a:r>
+            <a:endParaRPr b="0" lang="pt-PT" sz="1400" strike="noStrike" u="none">
+              <a:solidFill>
+                <a:srgbClr val="000000"/>
+              </a:solidFill>
+              <a:effectLst/>
+              <a:uFillTx/>
+              <a:latin typeface="Arial"/>
+            </a:endParaRPr>
+          </a:p>
+        </p:txBody>
+      </p:sp>
+      <p:sp>
+        <p:nvSpPr>
+          <p:cNvPr id="370" name="Google Shape;87;p 42"/>
+          <p:cNvSpPr/>
+          <p:nvPr/>
+        </p:nvSpPr>
+        <p:spPr>
+          <a:xfrm rot="33000">
+            <a:off x="18353160" y="2533680"/>
+            <a:ext cx="2880360" cy="1293480"/>
+          </a:xfrm>
+          <a:prstGeom prst="roundRect">
+            <a:avLst>
+              <a:gd name="adj" fmla="val 16667"/>
+            </a:avLst>
+          </a:prstGeom>
+          <a:solidFill>
+            <a:srgbClr val="d9ead3"/>
+          </a:solidFill>
+          <a:ln w="28575">
+            <a:solidFill>
+              <a:srgbClr val="274e13"/>
+            </a:solidFill>
+            <a:round/>
+          </a:ln>
+        </p:spPr>
+        <p:style>
+          <a:lnRef idx="0"/>
+          <a:fillRef idx="0"/>
+          <a:effectRef idx="0"/>
+          <a:fontRef idx="minor"/>
+        </p:style>
+        <p:txBody>
+          <a:bodyPr lIns="90000" rIns="90000" tIns="91440" bIns="91440" anchor="t">
+            <a:noAutofit/>
+          </a:bodyPr>
+          <a:p>
+            <a:pPr>
+              <a:lnSpc>
+                <a:spcPct val="100000"/>
+              </a:lnSpc>
+              <a:tabLst>
+                <a:tab algn="l" pos="0"/>
+              </a:tabLst>
+            </a:pPr>
+            <a:r>
+              <a:rPr b="0" lang="en-US" sz="1400" strike="noStrike" u="none">
+                <a:solidFill>
+                  <a:srgbClr val="000000"/>
+                </a:solidFill>
+                <a:effectLst/>
+                <a:uFillTx/>
+                <a:latin typeface="Consolas"/>
+                <a:ea typeface="Consolas"/>
+              </a:rPr>
+              <a:t>Explore codebase. </a:t>
+            </a:r>
+            <a:r>
+              <a:rPr b="0" lang="en-US" sz="1400" strike="noStrike" u="none">
+                <a:solidFill>
+                  <a:srgbClr val="000000"/>
+                </a:solidFill>
+                <a:effectLst/>
+                <a:uFillTx/>
+                <a:latin typeface="Consolas"/>
+                <a:ea typeface="Consolas"/>
+              </a:rPr>
+              <a:t>Recognize Design patterns, Code Smells, Code Metrics and create Use case diagram.</a:t>
             </a:r>
             <a:endParaRPr b="0" lang="pt-PT" sz="1400" strike="noStrike" u="none">
               <a:solidFill>
@@ -13281,7 +14946,7 @@
         <p:spPr>
           <a:xfrm>
             <a:off x="0" y="0"/>
-            <a:ext cx="21599280" cy="10799280"/>
+            <a:ext cx="21598920" cy="10798920"/>
           </a:xfrm>
           <a:prstGeom prst="rect">
             <a:avLst/>
@@ -13301,14 +14966,14 @@
         <p:spPr>
           <a:xfrm>
             <a:off x="814320" y="3300840"/>
-            <a:ext cx="19970640" cy="4197960"/>
+            <a:ext cx="19970280" cy="4197600"/>
           </a:xfrm>
           <a:prstGeom prst="rect">
             <a:avLst/>
           </a:prstGeom>
         </p:spPr>
         <p:txBody>
-          <a:bodyPr wrap="none" lIns="204480" rIns="204480" tIns="102240" bIns="102240" anchor="ctr" anchorCtr="1">
+          <a:bodyPr wrap="none" lIns="261720" rIns="261720" tIns="102240" bIns="102240" anchor="ctr" anchorCtr="1">
             <a:prstTxWarp prst="textPlain">
               <a:avLst>
                 <a:gd name="adj" fmla="val 50000"/>
@@ -13394,7 +15059,7 @@
         <p:spPr>
           <a:xfrm>
             <a:off x="5944680" y="-31320"/>
-            <a:ext cx="720" cy="10857240"/>
+            <a:ext cx="1080" cy="10857600"/>
           </a:xfrm>
           <a:prstGeom prst="straightConnector1">
             <a:avLst/>
@@ -13416,7 +15081,7 @@
         <p:spPr>
           <a:xfrm>
             <a:off x="3197160" y="84240"/>
-            <a:ext cx="2410200" cy="480240"/>
+            <a:ext cx="2409840" cy="479880"/>
           </a:xfrm>
           <a:prstGeom prst="roundRect">
             <a:avLst>
@@ -13484,7 +15149,7 @@
         <p:spPr>
           <a:xfrm>
             <a:off x="6281640" y="84240"/>
-            <a:ext cx="2410200" cy="480240"/>
+            <a:ext cx="2409840" cy="479880"/>
           </a:xfrm>
           <a:prstGeom prst="roundRect">
             <a:avLst>
@@ -13552,7 +15217,7 @@
         <p:spPr>
           <a:xfrm>
             <a:off x="9366120" y="84240"/>
-            <a:ext cx="2410200" cy="480240"/>
+            <a:ext cx="2409840" cy="479880"/>
           </a:xfrm>
           <a:prstGeom prst="roundRect">
             <a:avLst>
@@ -13620,7 +15285,7 @@
         <p:spPr>
           <a:xfrm>
             <a:off x="12395880" y="84240"/>
-            <a:ext cx="2410200" cy="480240"/>
+            <a:ext cx="2409840" cy="479880"/>
           </a:xfrm>
           <a:prstGeom prst="roundRect">
             <a:avLst>
@@ -13688,7 +15353,7 @@
         <p:spPr>
           <a:xfrm>
             <a:off x="15532560" y="84240"/>
-            <a:ext cx="2410200" cy="480240"/>
+            <a:ext cx="2409840" cy="479880"/>
           </a:xfrm>
           <a:prstGeom prst="roundRect">
             <a:avLst>
@@ -13756,7 +15421,7 @@
         <p:spPr>
           <a:xfrm>
             <a:off x="18668880" y="84240"/>
-            <a:ext cx="2410200" cy="480240"/>
+            <a:ext cx="2409840" cy="479880"/>
           </a:xfrm>
           <a:prstGeom prst="roundRect">
             <a:avLst>
@@ -13824,7 +15489,7 @@
         <p:spPr>
           <a:xfrm>
             <a:off x="167400" y="84240"/>
-            <a:ext cx="2410200" cy="480240"/>
+            <a:ext cx="2409840" cy="479880"/>
           </a:xfrm>
           <a:prstGeom prst="roundRect">
             <a:avLst>
@@ -13892,7 +15557,7 @@
         <p:spPr>
           <a:xfrm>
             <a:off x="3197160" y="1385640"/>
-            <a:ext cx="2410200" cy="480240"/>
+            <a:ext cx="2409840" cy="479880"/>
           </a:xfrm>
           <a:prstGeom prst="roundRect">
             <a:avLst>
@@ -13960,7 +15625,7 @@
         <p:spPr>
           <a:xfrm>
             <a:off x="3197160" y="2961360"/>
-            <a:ext cx="2410200" cy="480240"/>
+            <a:ext cx="2409840" cy="479880"/>
           </a:xfrm>
           <a:prstGeom prst="roundRect">
             <a:avLst>
@@ -14028,7 +15693,7 @@
         <p:spPr>
           <a:xfrm>
             <a:off x="3197160" y="4537440"/>
-            <a:ext cx="2410200" cy="480240"/>
+            <a:ext cx="2409840" cy="479880"/>
           </a:xfrm>
           <a:prstGeom prst="roundRect">
             <a:avLst>
@@ -14096,7 +15761,7 @@
         <p:spPr>
           <a:xfrm>
             <a:off x="3197160" y="6113160"/>
-            <a:ext cx="2410200" cy="480240"/>
+            <a:ext cx="2409840" cy="479880"/>
           </a:xfrm>
           <a:prstGeom prst="roundRect">
             <a:avLst>
@@ -14164,7 +15829,7 @@
         <p:spPr>
           <a:xfrm>
             <a:off x="3197160" y="7689240"/>
-            <a:ext cx="2410200" cy="480240"/>
+            <a:ext cx="2409840" cy="479880"/>
           </a:xfrm>
           <a:prstGeom prst="roundRect">
             <a:avLst>
@@ -14232,7 +15897,7 @@
         <p:spPr>
           <a:xfrm>
             <a:off x="3197160" y="9264960"/>
-            <a:ext cx="2410200" cy="480240"/>
+            <a:ext cx="2409840" cy="479880"/>
           </a:xfrm>
           <a:prstGeom prst="roundRect">
             <a:avLst>
@@ -14300,7 +15965,7 @@
         <p:spPr>
           <a:xfrm>
             <a:off x="5607720" y="1625760"/>
-            <a:ext cx="16043040" cy="720"/>
+            <a:ext cx="16043400" cy="1080"/>
           </a:xfrm>
           <a:prstGeom prst="straightConnector1">
             <a:avLst/>
@@ -14323,7 +15988,7 @@
         <p:spPr>
           <a:xfrm>
             <a:off x="5607720" y="3201840"/>
-            <a:ext cx="16043040" cy="720"/>
+            <a:ext cx="16043400" cy="1080"/>
           </a:xfrm>
           <a:prstGeom prst="straightConnector1">
             <a:avLst/>
@@ -14346,7 +16011,7 @@
         <p:spPr>
           <a:xfrm>
             <a:off x="5607720" y="4777560"/>
-            <a:ext cx="16043040" cy="720"/>
+            <a:ext cx="16043400" cy="1080"/>
           </a:xfrm>
           <a:prstGeom prst="straightConnector1">
             <a:avLst/>
@@ -14369,7 +16034,7 @@
         <p:spPr>
           <a:xfrm>
             <a:off x="5607720" y="6353640"/>
-            <a:ext cx="16043040" cy="720"/>
+            <a:ext cx="16043400" cy="1080"/>
           </a:xfrm>
           <a:prstGeom prst="straightConnector1">
             <a:avLst/>
@@ -14392,7 +16057,7 @@
         <p:spPr>
           <a:xfrm>
             <a:off x="5607720" y="7929360"/>
-            <a:ext cx="16043040" cy="720"/>
+            <a:ext cx="16043400" cy="1080"/>
           </a:xfrm>
           <a:prstGeom prst="straightConnector1">
             <a:avLst/>
@@ -14415,7 +16080,7 @@
         <p:spPr>
           <a:xfrm>
             <a:off x="5607720" y="9505440"/>
-            <a:ext cx="16043040" cy="720"/>
+            <a:ext cx="16043400" cy="1080"/>
           </a:xfrm>
           <a:prstGeom prst="straightConnector1">
             <a:avLst/>
@@ -14438,7 +16103,7 @@
         <p:spPr>
           <a:xfrm>
             <a:off x="167400" y="801720"/>
-            <a:ext cx="2410200" cy="2639880"/>
+            <a:ext cx="2409840" cy="2639520"/>
           </a:xfrm>
           <a:prstGeom prst="roundRect">
             <a:avLst>
@@ -14533,7 +16198,7 @@
         <p:spPr>
           <a:xfrm>
             <a:off x="167400" y="7345800"/>
-            <a:ext cx="2436480" cy="2775960"/>
+            <a:ext cx="2436120" cy="2775600"/>
           </a:xfrm>
           <a:prstGeom prst="roundRect">
             <a:avLst>
@@ -14628,7 +16293,7 @@
         <p:spPr>
           <a:xfrm>
             <a:off x="2874240" y="-28440"/>
-            <a:ext cx="720" cy="10857600"/>
+            <a:ext cx="1080" cy="10857960"/>
           </a:xfrm>
           <a:prstGeom prst="straightConnector1">
             <a:avLst/>
@@ -14650,7 +16315,7 @@
         <p:spPr>
           <a:xfrm>
             <a:off x="167400" y="3894840"/>
-            <a:ext cx="2436480" cy="2639880"/>
+            <a:ext cx="2436120" cy="2639520"/>
           </a:xfrm>
           <a:prstGeom prst="roundRect">
             <a:avLst>
@@ -14775,7 +16440,7 @@
         <p:spPr>
           <a:xfrm>
             <a:off x="5944680" y="-31320"/>
-            <a:ext cx="720" cy="10857240"/>
+            <a:ext cx="1080" cy="10857600"/>
           </a:xfrm>
           <a:prstGeom prst="straightConnector1">
             <a:avLst/>
@@ -14797,7 +16462,7 @@
         <p:spPr>
           <a:xfrm>
             <a:off x="3197160" y="84240"/>
-            <a:ext cx="2410200" cy="480240"/>
+            <a:ext cx="2409840" cy="479880"/>
           </a:xfrm>
           <a:prstGeom prst="roundRect">
             <a:avLst>
@@ -14865,7 +16530,7 @@
         <p:spPr>
           <a:xfrm>
             <a:off x="6281640" y="84240"/>
-            <a:ext cx="2410200" cy="480240"/>
+            <a:ext cx="2409840" cy="479880"/>
           </a:xfrm>
           <a:prstGeom prst="roundRect">
             <a:avLst>
@@ -14933,7 +16598,7 @@
         <p:spPr>
           <a:xfrm>
             <a:off x="9366120" y="84240"/>
-            <a:ext cx="2410200" cy="480240"/>
+            <a:ext cx="2409840" cy="479880"/>
           </a:xfrm>
           <a:prstGeom prst="roundRect">
             <a:avLst>
@@ -15001,7 +16666,7 @@
         <p:spPr>
           <a:xfrm>
             <a:off x="12395880" y="84240"/>
-            <a:ext cx="2410200" cy="480240"/>
+            <a:ext cx="2409840" cy="479880"/>
           </a:xfrm>
           <a:prstGeom prst="roundRect">
             <a:avLst>
@@ -15069,7 +16734,7 @@
         <p:spPr>
           <a:xfrm>
             <a:off x="15532560" y="84240"/>
-            <a:ext cx="2410200" cy="480240"/>
+            <a:ext cx="2409840" cy="479880"/>
           </a:xfrm>
           <a:prstGeom prst="roundRect">
             <a:avLst>
@@ -15137,7 +16802,7 @@
         <p:spPr>
           <a:xfrm>
             <a:off x="18668880" y="84240"/>
-            <a:ext cx="2410200" cy="480240"/>
+            <a:ext cx="2409840" cy="479880"/>
           </a:xfrm>
           <a:prstGeom prst="roundRect">
             <a:avLst>
@@ -15205,7 +16870,7 @@
         <p:spPr>
           <a:xfrm>
             <a:off x="167400" y="84240"/>
-            <a:ext cx="2410200" cy="480240"/>
+            <a:ext cx="2409840" cy="479880"/>
           </a:xfrm>
           <a:prstGeom prst="roundRect">
             <a:avLst>
@@ -15273,7 +16938,7 @@
         <p:spPr>
           <a:xfrm>
             <a:off x="3197160" y="1385640"/>
-            <a:ext cx="2410200" cy="480240"/>
+            <a:ext cx="2409840" cy="479880"/>
           </a:xfrm>
           <a:prstGeom prst="roundRect">
             <a:avLst>
@@ -15341,7 +17006,7 @@
         <p:spPr>
           <a:xfrm>
             <a:off x="3197160" y="2961360"/>
-            <a:ext cx="2410200" cy="480240"/>
+            <a:ext cx="2409840" cy="479880"/>
           </a:xfrm>
           <a:prstGeom prst="roundRect">
             <a:avLst>
@@ -15409,7 +17074,7 @@
         <p:spPr>
           <a:xfrm>
             <a:off x="3197160" y="4537440"/>
-            <a:ext cx="2410200" cy="480240"/>
+            <a:ext cx="2409840" cy="479880"/>
           </a:xfrm>
           <a:prstGeom prst="roundRect">
             <a:avLst>
@@ -15477,7 +17142,7 @@
         <p:spPr>
           <a:xfrm>
             <a:off x="3197160" y="6113160"/>
-            <a:ext cx="2410200" cy="480240"/>
+            <a:ext cx="2409840" cy="479880"/>
           </a:xfrm>
           <a:prstGeom prst="roundRect">
             <a:avLst>
@@ -15545,7 +17210,7 @@
         <p:spPr>
           <a:xfrm>
             <a:off x="3197160" y="7689240"/>
-            <a:ext cx="2410200" cy="480240"/>
+            <a:ext cx="2409840" cy="479880"/>
           </a:xfrm>
           <a:prstGeom prst="roundRect">
             <a:avLst>
@@ -15613,7 +17278,7 @@
         <p:spPr>
           <a:xfrm>
             <a:off x="3197160" y="9264960"/>
-            <a:ext cx="2410200" cy="480240"/>
+            <a:ext cx="2409840" cy="479880"/>
           </a:xfrm>
           <a:prstGeom prst="roundRect">
             <a:avLst>
@@ -15681,7 +17346,7 @@
         <p:spPr>
           <a:xfrm>
             <a:off x="5607720" y="1625760"/>
-            <a:ext cx="16043040" cy="720"/>
+            <a:ext cx="16043400" cy="1080"/>
           </a:xfrm>
           <a:prstGeom prst="straightConnector1">
             <a:avLst/>
@@ -15704,7 +17369,7 @@
         <p:spPr>
           <a:xfrm>
             <a:off x="5607720" y="3201840"/>
-            <a:ext cx="16043040" cy="720"/>
+            <a:ext cx="16043400" cy="1080"/>
           </a:xfrm>
           <a:prstGeom prst="straightConnector1">
             <a:avLst/>
@@ -15727,7 +17392,7 @@
         <p:spPr>
           <a:xfrm>
             <a:off x="5607720" y="4777560"/>
-            <a:ext cx="16043040" cy="720"/>
+            <a:ext cx="16043400" cy="1080"/>
           </a:xfrm>
           <a:prstGeom prst="straightConnector1">
             <a:avLst/>
@@ -15750,7 +17415,7 @@
         <p:spPr>
           <a:xfrm>
             <a:off x="5607720" y="6353640"/>
-            <a:ext cx="16043040" cy="720"/>
+            <a:ext cx="16043400" cy="1080"/>
           </a:xfrm>
           <a:prstGeom prst="straightConnector1">
             <a:avLst/>
@@ -15773,7 +17438,7 @@
         <p:spPr>
           <a:xfrm>
             <a:off x="5607720" y="7929360"/>
-            <a:ext cx="16043040" cy="720"/>
+            <a:ext cx="16043400" cy="1080"/>
           </a:xfrm>
           <a:prstGeom prst="straightConnector1">
             <a:avLst/>
@@ -15796,7 +17461,7 @@
         <p:spPr>
           <a:xfrm>
             <a:off x="5607720" y="9505440"/>
-            <a:ext cx="16043040" cy="720"/>
+            <a:ext cx="16043400" cy="1080"/>
           </a:xfrm>
           <a:prstGeom prst="straightConnector1">
             <a:avLst/>
@@ -15819,7 +17484,7 @@
         <p:spPr>
           <a:xfrm>
             <a:off x="167400" y="801720"/>
-            <a:ext cx="2410200" cy="1647720"/>
+            <a:ext cx="2409840" cy="1647360"/>
           </a:xfrm>
           <a:prstGeom prst="roundRect">
             <a:avLst>
@@ -15887,7 +17552,7 @@
         <p:spPr>
           <a:xfrm>
             <a:off x="6281640" y="801720"/>
-            <a:ext cx="2410200" cy="1647720"/>
+            <a:ext cx="2409840" cy="1647360"/>
           </a:xfrm>
           <a:prstGeom prst="roundRect">
             <a:avLst>
@@ -15955,7 +17620,7 @@
         <p:spPr>
           <a:xfrm>
             <a:off x="12395520" y="801720"/>
-            <a:ext cx="2410200" cy="1647720"/>
+            <a:ext cx="2409840" cy="1647360"/>
           </a:xfrm>
           <a:prstGeom prst="roundRect">
             <a:avLst>
@@ -16023,7 +17688,7 @@
         <p:spPr>
           <a:xfrm>
             <a:off x="6281640" y="4042800"/>
-            <a:ext cx="2410200" cy="1647720"/>
+            <a:ext cx="2409840" cy="1647360"/>
           </a:xfrm>
           <a:prstGeom prst="roundRect">
             <a:avLst>
@@ -16091,7 +17756,7 @@
         <p:spPr>
           <a:xfrm>
             <a:off x="15426000" y="3953520"/>
-            <a:ext cx="2410200" cy="1647720"/>
+            <a:ext cx="2409840" cy="1647360"/>
           </a:xfrm>
           <a:prstGeom prst="roundRect">
             <a:avLst>
@@ -16159,7 +17824,7 @@
         <p:spPr>
           <a:xfrm>
             <a:off x="2874240" y="-28440"/>
-            <a:ext cx="720" cy="10857600"/>
+            <a:ext cx="1080" cy="10857960"/>
           </a:xfrm>
           <a:prstGeom prst="straightConnector1">
             <a:avLst/>
@@ -16181,7 +17846,7 @@
         <p:spPr>
           <a:xfrm>
             <a:off x="140760" y="2687040"/>
-            <a:ext cx="2410200" cy="1647720"/>
+            <a:ext cx="2409840" cy="1647360"/>
           </a:xfrm>
           <a:prstGeom prst="roundRect">
             <a:avLst>
@@ -16279,7 +17944,7 @@
         <p:spPr>
           <a:xfrm>
             <a:off x="5944680" y="-31320"/>
-            <a:ext cx="720" cy="10857240"/>
+            <a:ext cx="1080" cy="10857600"/>
           </a:xfrm>
           <a:prstGeom prst="straightConnector1">
             <a:avLst/>
@@ -16301,7 +17966,7 @@
         <p:spPr>
           <a:xfrm>
             <a:off x="3197160" y="84240"/>
-            <a:ext cx="2410200" cy="480240"/>
+            <a:ext cx="2409840" cy="479880"/>
           </a:xfrm>
           <a:prstGeom prst="roundRect">
             <a:avLst>
@@ -16369,7 +18034,7 @@
         <p:spPr>
           <a:xfrm>
             <a:off x="6281640" y="84240"/>
-            <a:ext cx="2410200" cy="480240"/>
+            <a:ext cx="2409840" cy="479880"/>
           </a:xfrm>
           <a:prstGeom prst="roundRect">
             <a:avLst>
@@ -16437,7 +18102,7 @@
         <p:spPr>
           <a:xfrm>
             <a:off x="9366120" y="84240"/>
-            <a:ext cx="2410200" cy="480240"/>
+            <a:ext cx="2409840" cy="479880"/>
           </a:xfrm>
           <a:prstGeom prst="roundRect">
             <a:avLst>
@@ -16505,7 +18170,7 @@
         <p:spPr>
           <a:xfrm>
             <a:off x="12395880" y="84240"/>
-            <a:ext cx="2410200" cy="480240"/>
+            <a:ext cx="2409840" cy="479880"/>
           </a:xfrm>
           <a:prstGeom prst="roundRect">
             <a:avLst>
@@ -16573,7 +18238,7 @@
         <p:spPr>
           <a:xfrm>
             <a:off x="15532560" y="84240"/>
-            <a:ext cx="2410200" cy="480240"/>
+            <a:ext cx="2409840" cy="479880"/>
           </a:xfrm>
           <a:prstGeom prst="roundRect">
             <a:avLst>
@@ -16641,7 +18306,7 @@
         <p:spPr>
           <a:xfrm>
             <a:off x="18668880" y="84240"/>
-            <a:ext cx="2410200" cy="480240"/>
+            <a:ext cx="2409840" cy="479880"/>
           </a:xfrm>
           <a:prstGeom prst="roundRect">
             <a:avLst>
@@ -16709,7 +18374,7 @@
         <p:spPr>
           <a:xfrm>
             <a:off x="167400" y="84240"/>
-            <a:ext cx="2410200" cy="480240"/>
+            <a:ext cx="2409840" cy="479880"/>
           </a:xfrm>
           <a:prstGeom prst="roundRect">
             <a:avLst>
@@ -16777,7 +18442,7 @@
         <p:spPr>
           <a:xfrm>
             <a:off x="3197160" y="1385640"/>
-            <a:ext cx="2410200" cy="480240"/>
+            <a:ext cx="2409840" cy="479880"/>
           </a:xfrm>
           <a:prstGeom prst="roundRect">
             <a:avLst>
@@ -16845,7 +18510,7 @@
         <p:spPr>
           <a:xfrm>
             <a:off x="3197160" y="2961360"/>
-            <a:ext cx="2410200" cy="480240"/>
+            <a:ext cx="2409840" cy="479880"/>
           </a:xfrm>
           <a:prstGeom prst="roundRect">
             <a:avLst>
@@ -16913,7 +18578,7 @@
         <p:spPr>
           <a:xfrm>
             <a:off x="3197160" y="4537440"/>
-            <a:ext cx="2410200" cy="480240"/>
+            <a:ext cx="2409840" cy="479880"/>
           </a:xfrm>
           <a:prstGeom prst="roundRect">
             <a:avLst>
@@ -16981,7 +18646,7 @@
         <p:spPr>
           <a:xfrm>
             <a:off x="3197160" y="6113160"/>
-            <a:ext cx="2410200" cy="480240"/>
+            <a:ext cx="2409840" cy="479880"/>
           </a:xfrm>
           <a:prstGeom prst="roundRect">
             <a:avLst>
@@ -17049,7 +18714,7 @@
         <p:spPr>
           <a:xfrm>
             <a:off x="3197160" y="7689240"/>
-            <a:ext cx="2410200" cy="480240"/>
+            <a:ext cx="2409840" cy="479880"/>
           </a:xfrm>
           <a:prstGeom prst="roundRect">
             <a:avLst>
@@ -17117,7 +18782,7 @@
         <p:spPr>
           <a:xfrm>
             <a:off x="3197160" y="9264960"/>
-            <a:ext cx="2410200" cy="480240"/>
+            <a:ext cx="2409840" cy="479880"/>
           </a:xfrm>
           <a:prstGeom prst="roundRect">
             <a:avLst>
@@ -17185,7 +18850,7 @@
         <p:spPr>
           <a:xfrm>
             <a:off x="5607720" y="1625760"/>
-            <a:ext cx="16043040" cy="720"/>
+            <a:ext cx="16043400" cy="1080"/>
           </a:xfrm>
           <a:prstGeom prst="straightConnector1">
             <a:avLst/>
@@ -17208,7 +18873,7 @@
         <p:spPr>
           <a:xfrm>
             <a:off x="5607720" y="3201840"/>
-            <a:ext cx="16043040" cy="720"/>
+            <a:ext cx="16043400" cy="1080"/>
           </a:xfrm>
           <a:prstGeom prst="straightConnector1">
             <a:avLst/>
@@ -17231,7 +18896,7 @@
         <p:spPr>
           <a:xfrm>
             <a:off x="5607720" y="4777560"/>
-            <a:ext cx="16043040" cy="720"/>
+            <a:ext cx="16043400" cy="1080"/>
           </a:xfrm>
           <a:prstGeom prst="straightConnector1">
             <a:avLst/>
@@ -17254,7 +18919,7 @@
         <p:spPr>
           <a:xfrm>
             <a:off x="5607720" y="6353640"/>
-            <a:ext cx="16043040" cy="720"/>
+            <a:ext cx="16043400" cy="1080"/>
           </a:xfrm>
           <a:prstGeom prst="straightConnector1">
             <a:avLst/>
@@ -17277,7 +18942,7 @@
         <p:spPr>
           <a:xfrm>
             <a:off x="5607720" y="7929360"/>
-            <a:ext cx="16043040" cy="720"/>
+            <a:ext cx="16043400" cy="1080"/>
           </a:xfrm>
           <a:prstGeom prst="straightConnector1">
             <a:avLst/>
@@ -17300,7 +18965,7 @@
         <p:spPr>
           <a:xfrm>
             <a:off x="5607720" y="9505440"/>
-            <a:ext cx="16043040" cy="720"/>
+            <a:ext cx="16043400" cy="1080"/>
           </a:xfrm>
           <a:prstGeom prst="straightConnector1">
             <a:avLst/>
@@ -17323,7 +18988,7 @@
         <p:spPr>
           <a:xfrm>
             <a:off x="167400" y="801720"/>
-            <a:ext cx="2410200" cy="1647720"/>
+            <a:ext cx="2409840" cy="1647360"/>
           </a:xfrm>
           <a:prstGeom prst="roundRect">
             <a:avLst>
@@ -17391,7 +19056,7 @@
         <p:spPr>
           <a:xfrm>
             <a:off x="6281640" y="801720"/>
-            <a:ext cx="2410200" cy="1647720"/>
+            <a:ext cx="2409840" cy="1647360"/>
           </a:xfrm>
           <a:prstGeom prst="roundRect">
             <a:avLst>
@@ -17459,7 +19124,7 @@
         <p:spPr>
           <a:xfrm>
             <a:off x="15532560" y="801720"/>
-            <a:ext cx="2410200" cy="1647720"/>
+            <a:ext cx="2409840" cy="1647360"/>
           </a:xfrm>
           <a:prstGeom prst="roundRect">
             <a:avLst>
@@ -17527,7 +19192,7 @@
         <p:spPr>
           <a:xfrm>
             <a:off x="6281640" y="4042800"/>
-            <a:ext cx="2410200" cy="1647720"/>
+            <a:ext cx="2409840" cy="1647360"/>
           </a:xfrm>
           <a:prstGeom prst="roundRect">
             <a:avLst>
@@ -17595,7 +19260,7 @@
         <p:spPr>
           <a:xfrm>
             <a:off x="15426000" y="3953520"/>
-            <a:ext cx="2410200" cy="1647720"/>
+            <a:ext cx="2409840" cy="1647360"/>
           </a:xfrm>
           <a:prstGeom prst="roundRect">
             <a:avLst>
@@ -17663,7 +19328,7 @@
         <p:spPr>
           <a:xfrm>
             <a:off x="2874240" y="-28440"/>
-            <a:ext cx="720" cy="10857600"/>
+            <a:ext cx="1080" cy="10857960"/>
           </a:xfrm>
           <a:prstGeom prst="straightConnector1">
             <a:avLst/>
@@ -17685,7 +19350,7 @@
         <p:spPr>
           <a:xfrm>
             <a:off x="140760" y="2687040"/>
-            <a:ext cx="2410200" cy="1647720"/>
+            <a:ext cx="2409840" cy="1647360"/>
           </a:xfrm>
           <a:prstGeom prst="roundRect">
             <a:avLst>
@@ -17783,7 +19448,7 @@
         <p:spPr>
           <a:xfrm>
             <a:off x="5944680" y="-31320"/>
-            <a:ext cx="720" cy="10857240"/>
+            <a:ext cx="1080" cy="10857600"/>
           </a:xfrm>
           <a:prstGeom prst="straightConnector1">
             <a:avLst/>
@@ -17805,7 +19470,7 @@
         <p:spPr>
           <a:xfrm>
             <a:off x="3197160" y="84240"/>
-            <a:ext cx="2410200" cy="480240"/>
+            <a:ext cx="2409840" cy="479880"/>
           </a:xfrm>
           <a:prstGeom prst="roundRect">
             <a:avLst>
@@ -17873,7 +19538,7 @@
         <p:spPr>
           <a:xfrm>
             <a:off x="6281640" y="84240"/>
-            <a:ext cx="2410200" cy="480240"/>
+            <a:ext cx="2409840" cy="479880"/>
           </a:xfrm>
           <a:prstGeom prst="roundRect">
             <a:avLst>
@@ -17941,7 +19606,7 @@
         <p:spPr>
           <a:xfrm>
             <a:off x="9366120" y="84240"/>
-            <a:ext cx="2410200" cy="480240"/>
+            <a:ext cx="2409840" cy="479880"/>
           </a:xfrm>
           <a:prstGeom prst="roundRect">
             <a:avLst>
@@ -18009,7 +19674,7 @@
         <p:spPr>
           <a:xfrm>
             <a:off x="12395880" y="84240"/>
-            <a:ext cx="2410200" cy="480240"/>
+            <a:ext cx="2409840" cy="479880"/>
           </a:xfrm>
           <a:prstGeom prst="roundRect">
             <a:avLst>
@@ -18077,7 +19742,7 @@
         <p:spPr>
           <a:xfrm>
             <a:off x="15532560" y="84240"/>
-            <a:ext cx="2410200" cy="480240"/>
+            <a:ext cx="2409840" cy="479880"/>
           </a:xfrm>
           <a:prstGeom prst="roundRect">
             <a:avLst>
@@ -18145,7 +19810,7 @@
         <p:spPr>
           <a:xfrm>
             <a:off x="18668880" y="84240"/>
-            <a:ext cx="2410200" cy="480240"/>
+            <a:ext cx="2409840" cy="479880"/>
           </a:xfrm>
           <a:prstGeom prst="roundRect">
             <a:avLst>
@@ -18213,7 +19878,7 @@
         <p:spPr>
           <a:xfrm>
             <a:off x="167400" y="84240"/>
-            <a:ext cx="2410200" cy="480240"/>
+            <a:ext cx="2409840" cy="479880"/>
           </a:xfrm>
           <a:prstGeom prst="roundRect">
             <a:avLst>
@@ -18281,7 +19946,7 @@
         <p:spPr>
           <a:xfrm>
             <a:off x="3197160" y="1385640"/>
-            <a:ext cx="2410200" cy="480240"/>
+            <a:ext cx="2409840" cy="479880"/>
           </a:xfrm>
           <a:prstGeom prst="roundRect">
             <a:avLst>
@@ -18349,7 +20014,7 @@
         <p:spPr>
           <a:xfrm>
             <a:off x="3197160" y="2961360"/>
-            <a:ext cx="2410200" cy="480240"/>
+            <a:ext cx="2409840" cy="479880"/>
           </a:xfrm>
           <a:prstGeom prst="roundRect">
             <a:avLst>
@@ -18417,7 +20082,7 @@
         <p:spPr>
           <a:xfrm>
             <a:off x="3197160" y="4537440"/>
-            <a:ext cx="2410200" cy="480240"/>
+            <a:ext cx="2409840" cy="479880"/>
           </a:xfrm>
           <a:prstGeom prst="roundRect">
             <a:avLst>
@@ -18485,7 +20150,7 @@
         <p:spPr>
           <a:xfrm>
             <a:off x="3197160" y="6113160"/>
-            <a:ext cx="2410200" cy="480240"/>
+            <a:ext cx="2409840" cy="479880"/>
           </a:xfrm>
           <a:prstGeom prst="roundRect">
             <a:avLst>
@@ -18553,7 +20218,7 @@
         <p:spPr>
           <a:xfrm>
             <a:off x="3197160" y="7689240"/>
-            <a:ext cx="2410200" cy="480240"/>
+            <a:ext cx="2409840" cy="479880"/>
           </a:xfrm>
           <a:prstGeom prst="roundRect">
             <a:avLst>
@@ -18621,7 +20286,7 @@
         <p:spPr>
           <a:xfrm>
             <a:off x="3197160" y="9264960"/>
-            <a:ext cx="2410200" cy="480240"/>
+            <a:ext cx="2409840" cy="479880"/>
           </a:xfrm>
           <a:prstGeom prst="roundRect">
             <a:avLst>
@@ -18689,7 +20354,7 @@
         <p:spPr>
           <a:xfrm>
             <a:off x="5607720" y="1625760"/>
-            <a:ext cx="16043040" cy="720"/>
+            <a:ext cx="16043400" cy="1080"/>
           </a:xfrm>
           <a:prstGeom prst="straightConnector1">
             <a:avLst/>
@@ -18712,7 +20377,7 @@
         <p:spPr>
           <a:xfrm>
             <a:off x="5607720" y="3201840"/>
-            <a:ext cx="16043040" cy="720"/>
+            <a:ext cx="16043400" cy="1080"/>
           </a:xfrm>
           <a:prstGeom prst="straightConnector1">
             <a:avLst/>
@@ -18735,7 +20400,7 @@
         <p:spPr>
           <a:xfrm>
             <a:off x="5607720" y="4777560"/>
-            <a:ext cx="16043040" cy="720"/>
+            <a:ext cx="16043400" cy="1080"/>
           </a:xfrm>
           <a:prstGeom prst="straightConnector1">
             <a:avLst/>
@@ -18758,7 +20423,7 @@
         <p:spPr>
           <a:xfrm>
             <a:off x="5607720" y="6353640"/>
-            <a:ext cx="16043040" cy="720"/>
+            <a:ext cx="16043400" cy="1080"/>
           </a:xfrm>
           <a:prstGeom prst="straightConnector1">
             <a:avLst/>
@@ -18781,7 +20446,7 @@
         <p:spPr>
           <a:xfrm>
             <a:off x="5607720" y="7929360"/>
-            <a:ext cx="16043040" cy="720"/>
+            <a:ext cx="16043400" cy="1080"/>
           </a:xfrm>
           <a:prstGeom prst="straightConnector1">
             <a:avLst/>
@@ -18804,7 +20469,7 @@
         <p:spPr>
           <a:xfrm>
             <a:off x="5607720" y="9505440"/>
-            <a:ext cx="16043040" cy="720"/>
+            <a:ext cx="16043400" cy="1080"/>
           </a:xfrm>
           <a:prstGeom prst="straightConnector1">
             <a:avLst/>
@@ -18827,7 +20492,7 @@
         <p:spPr>
           <a:xfrm>
             <a:off x="167400" y="801720"/>
-            <a:ext cx="2410200" cy="1647720"/>
+            <a:ext cx="2409840" cy="1647360"/>
           </a:xfrm>
           <a:prstGeom prst="roundRect">
             <a:avLst>
@@ -18895,7 +20560,7 @@
         <p:spPr>
           <a:xfrm>
             <a:off x="6281640" y="801720"/>
-            <a:ext cx="2410200" cy="1647720"/>
+            <a:ext cx="2409840" cy="1647360"/>
           </a:xfrm>
           <a:prstGeom prst="roundRect">
             <a:avLst>
@@ -18963,7 +20628,7 @@
         <p:spPr>
           <a:xfrm>
             <a:off x="15532560" y="801720"/>
-            <a:ext cx="2410200" cy="1647720"/>
+            <a:ext cx="2409840" cy="1647360"/>
           </a:xfrm>
           <a:prstGeom prst="roundRect">
             <a:avLst>
@@ -19031,7 +20696,7 @@
         <p:spPr>
           <a:xfrm>
             <a:off x="6281640" y="4042800"/>
-            <a:ext cx="2410200" cy="1647720"/>
+            <a:ext cx="2409840" cy="1647360"/>
           </a:xfrm>
           <a:prstGeom prst="roundRect">
             <a:avLst>
@@ -19099,7 +20764,7 @@
         <p:spPr>
           <a:xfrm>
             <a:off x="12395880" y="3953520"/>
-            <a:ext cx="2410200" cy="1647720"/>
+            <a:ext cx="2409840" cy="1647360"/>
           </a:xfrm>
           <a:prstGeom prst="roundRect">
             <a:avLst>
@@ -19167,7 +20832,7 @@
         <p:spPr>
           <a:xfrm>
             <a:off x="2874240" y="-28440"/>
-            <a:ext cx="720" cy="10857600"/>
+            <a:ext cx="1080" cy="10857960"/>
           </a:xfrm>
           <a:prstGeom prst="straightConnector1">
             <a:avLst/>
@@ -19189,7 +20854,7 @@
         <p:spPr>
           <a:xfrm>
             <a:off x="140760" y="2687040"/>
-            <a:ext cx="2410200" cy="1647720"/>
+            <a:ext cx="2409840" cy="1647360"/>
           </a:xfrm>
           <a:prstGeom prst="roundRect">
             <a:avLst>
@@ -19287,7 +20952,7 @@
         <p:spPr>
           <a:xfrm>
             <a:off x="5944680" y="-31320"/>
-            <a:ext cx="720" cy="10857240"/>
+            <a:ext cx="1080" cy="10857600"/>
           </a:xfrm>
           <a:prstGeom prst="straightConnector1">
             <a:avLst/>
@@ -19309,7 +20974,7 @@
         <p:spPr>
           <a:xfrm>
             <a:off x="3197160" y="84240"/>
-            <a:ext cx="2410200" cy="480240"/>
+            <a:ext cx="2409840" cy="479880"/>
           </a:xfrm>
           <a:prstGeom prst="roundRect">
             <a:avLst>
@@ -19377,7 +21042,7 @@
         <p:spPr>
           <a:xfrm>
             <a:off x="6281640" y="84240"/>
-            <a:ext cx="2410200" cy="480240"/>
+            <a:ext cx="2409840" cy="479880"/>
           </a:xfrm>
           <a:prstGeom prst="roundRect">
             <a:avLst>
@@ -19445,7 +21110,7 @@
         <p:spPr>
           <a:xfrm>
             <a:off x="9366120" y="84240"/>
-            <a:ext cx="2410200" cy="480240"/>
+            <a:ext cx="2409840" cy="479880"/>
           </a:xfrm>
           <a:prstGeom prst="roundRect">
             <a:avLst>
@@ -19513,7 +21178,7 @@
         <p:spPr>
           <a:xfrm>
             <a:off x="12395880" y="84240"/>
-            <a:ext cx="2410200" cy="480240"/>
+            <a:ext cx="2409840" cy="479880"/>
           </a:xfrm>
           <a:prstGeom prst="roundRect">
             <a:avLst>
@@ -19581,7 +21246,7 @@
         <p:spPr>
           <a:xfrm>
             <a:off x="15532560" y="84240"/>
-            <a:ext cx="2410200" cy="480240"/>
+            <a:ext cx="2409840" cy="479880"/>
           </a:xfrm>
           <a:prstGeom prst="roundRect">
             <a:avLst>
@@ -19649,7 +21314,7 @@
         <p:spPr>
           <a:xfrm>
             <a:off x="18668880" y="84240"/>
-            <a:ext cx="2410200" cy="480240"/>
+            <a:ext cx="2409840" cy="479880"/>
           </a:xfrm>
           <a:prstGeom prst="roundRect">
             <a:avLst>
@@ -19717,7 +21382,7 @@
         <p:spPr>
           <a:xfrm>
             <a:off x="167400" y="84240"/>
-            <a:ext cx="2410200" cy="480240"/>
+            <a:ext cx="2409840" cy="479880"/>
           </a:xfrm>
           <a:prstGeom prst="roundRect">
             <a:avLst>
@@ -19785,7 +21450,7 @@
         <p:spPr>
           <a:xfrm>
             <a:off x="3197160" y="1385640"/>
-            <a:ext cx="2410200" cy="480240"/>
+            <a:ext cx="2409840" cy="479880"/>
           </a:xfrm>
           <a:prstGeom prst="roundRect">
             <a:avLst>
@@ -19853,7 +21518,7 @@
         <p:spPr>
           <a:xfrm>
             <a:off x="3197160" y="2961360"/>
-            <a:ext cx="2410200" cy="480240"/>
+            <a:ext cx="2409840" cy="479880"/>
           </a:xfrm>
           <a:prstGeom prst="roundRect">
             <a:avLst>
@@ -19921,7 +21586,7 @@
         <p:spPr>
           <a:xfrm>
             <a:off x="3197160" y="4537440"/>
-            <a:ext cx="2410200" cy="480240"/>
+            <a:ext cx="2409840" cy="479880"/>
           </a:xfrm>
           <a:prstGeom prst="roundRect">
             <a:avLst>
@@ -19989,7 +21654,7 @@
         <p:spPr>
           <a:xfrm>
             <a:off x="3197160" y="6113160"/>
-            <a:ext cx="2410200" cy="480240"/>
+            <a:ext cx="2409840" cy="479880"/>
           </a:xfrm>
           <a:prstGeom prst="roundRect">
             <a:avLst>
@@ -20057,7 +21722,7 @@
         <p:spPr>
           <a:xfrm>
             <a:off x="3197160" y="7689240"/>
-            <a:ext cx="2410200" cy="480240"/>
+            <a:ext cx="2409840" cy="479880"/>
           </a:xfrm>
           <a:prstGeom prst="roundRect">
             <a:avLst>
@@ -20125,7 +21790,7 @@
         <p:spPr>
           <a:xfrm>
             <a:off x="3197160" y="9264960"/>
-            <a:ext cx="2410200" cy="480240"/>
+            <a:ext cx="2409840" cy="479880"/>
           </a:xfrm>
           <a:prstGeom prst="roundRect">
             <a:avLst>
@@ -20193,7 +21858,7 @@
         <p:spPr>
           <a:xfrm>
             <a:off x="5607720" y="1625760"/>
-            <a:ext cx="16043040" cy="720"/>
+            <a:ext cx="16043400" cy="1080"/>
           </a:xfrm>
           <a:prstGeom prst="straightConnector1">
             <a:avLst/>
@@ -20216,7 +21881,7 @@
         <p:spPr>
           <a:xfrm>
             <a:off x="5607720" y="3201840"/>
-            <a:ext cx="16043040" cy="720"/>
+            <a:ext cx="16043400" cy="1080"/>
           </a:xfrm>
           <a:prstGeom prst="straightConnector1">
             <a:avLst/>
@@ -20239,7 +21904,7 @@
         <p:spPr>
           <a:xfrm>
             <a:off x="5607720" y="4777560"/>
-            <a:ext cx="16043040" cy="720"/>
+            <a:ext cx="16043400" cy="1080"/>
           </a:xfrm>
           <a:prstGeom prst="straightConnector1">
             <a:avLst/>
@@ -20262,7 +21927,7 @@
         <p:spPr>
           <a:xfrm>
             <a:off x="5607720" y="6353640"/>
-            <a:ext cx="16043040" cy="720"/>
+            <a:ext cx="16043400" cy="1080"/>
           </a:xfrm>
           <a:prstGeom prst="straightConnector1">
             <a:avLst/>
@@ -20285,7 +21950,7 @@
         <p:spPr>
           <a:xfrm>
             <a:off x="5607720" y="7929360"/>
-            <a:ext cx="16043040" cy="720"/>
+            <a:ext cx="16043400" cy="1080"/>
           </a:xfrm>
           <a:prstGeom prst="straightConnector1">
             <a:avLst/>
@@ -20308,7 +21973,7 @@
         <p:spPr>
           <a:xfrm>
             <a:off x="5607720" y="9505440"/>
-            <a:ext cx="16043040" cy="720"/>
+            <a:ext cx="16043400" cy="1080"/>
           </a:xfrm>
           <a:prstGeom prst="straightConnector1">
             <a:avLst/>
@@ -20331,7 +21996,7 @@
         <p:spPr>
           <a:xfrm>
             <a:off x="167400" y="801720"/>
-            <a:ext cx="2410200" cy="1647720"/>
+            <a:ext cx="2409840" cy="1647360"/>
           </a:xfrm>
           <a:prstGeom prst="roundRect">
             <a:avLst>
@@ -20399,7 +22064,7 @@
         <p:spPr>
           <a:xfrm>
             <a:off x="6281640" y="801720"/>
-            <a:ext cx="2410200" cy="1647720"/>
+            <a:ext cx="2409840" cy="1647360"/>
           </a:xfrm>
           <a:prstGeom prst="roundRect">
             <a:avLst>
@@ -20467,7 +22132,7 @@
         <p:spPr>
           <a:xfrm>
             <a:off x="18668880" y="801720"/>
-            <a:ext cx="2410200" cy="1647720"/>
+            <a:ext cx="2409840" cy="1647360"/>
           </a:xfrm>
           <a:prstGeom prst="roundRect">
             <a:avLst>
@@ -20535,7 +22200,7 @@
         <p:spPr>
           <a:xfrm>
             <a:off x="6281640" y="4042800"/>
-            <a:ext cx="2410200" cy="1647720"/>
+            <a:ext cx="2409840" cy="1647360"/>
           </a:xfrm>
           <a:prstGeom prst="roundRect">
             <a:avLst>
@@ -20603,7 +22268,7 @@
         <p:spPr>
           <a:xfrm>
             <a:off x="12395880" y="3953520"/>
-            <a:ext cx="2410200" cy="1647720"/>
+            <a:ext cx="2409840" cy="1647360"/>
           </a:xfrm>
           <a:prstGeom prst="roundRect">
             <a:avLst>
@@ -20671,7 +22336,7 @@
         <p:spPr>
           <a:xfrm>
             <a:off x="2874240" y="-28440"/>
-            <a:ext cx="720" cy="10857600"/>
+            <a:ext cx="1080" cy="10857960"/>
           </a:xfrm>
           <a:prstGeom prst="straightConnector1">
             <a:avLst/>
@@ -20693,7 +22358,7 @@
         <p:spPr>
           <a:xfrm>
             <a:off x="140760" y="2687040"/>
-            <a:ext cx="2410200" cy="1647720"/>
+            <a:ext cx="2409840" cy="1647360"/>
           </a:xfrm>
           <a:prstGeom prst="roundRect">
             <a:avLst>
@@ -20797,7 +22462,7 @@
         <p:spPr>
           <a:xfrm>
             <a:off x="0" y="0"/>
-            <a:ext cx="21599280" cy="10799280"/>
+            <a:ext cx="21598920" cy="10798920"/>
           </a:xfrm>
           <a:prstGeom prst="rect">
             <a:avLst/>
@@ -20817,14 +22482,14 @@
         <p:spPr>
           <a:xfrm>
             <a:off x="814320" y="3300840"/>
-            <a:ext cx="19956960" cy="4197960"/>
+            <a:ext cx="19956600" cy="4197600"/>
           </a:xfrm>
           <a:prstGeom prst="rect">
             <a:avLst/>
           </a:prstGeom>
         </p:spPr>
         <p:txBody>
-          <a:bodyPr wrap="none" lIns="204480" rIns="204480" tIns="102240" bIns="102240" anchor="ctr" anchorCtr="1">
+          <a:bodyPr wrap="none" lIns="261720" rIns="261720" tIns="102240" bIns="102240" anchor="ctr" anchorCtr="1">
             <a:prstTxWarp prst="textPlain">
               <a:avLst>
                 <a:gd name="adj" fmla="val 50000"/>
@@ -20910,7 +22575,7 @@
         <p:spPr>
           <a:xfrm>
             <a:off x="5944680" y="-31320"/>
-            <a:ext cx="720" cy="10857240"/>
+            <a:ext cx="1080" cy="10857600"/>
           </a:xfrm>
           <a:prstGeom prst="straightConnector1">
             <a:avLst/>
@@ -20932,7 +22597,7 @@
         <p:spPr>
           <a:xfrm>
             <a:off x="3197160" y="84240"/>
-            <a:ext cx="2410200" cy="480240"/>
+            <a:ext cx="2409840" cy="479880"/>
           </a:xfrm>
           <a:prstGeom prst="roundRect">
             <a:avLst>
@@ -21000,7 +22665,7 @@
         <p:spPr>
           <a:xfrm>
             <a:off x="6281640" y="84240"/>
-            <a:ext cx="2410200" cy="480240"/>
+            <a:ext cx="2409840" cy="479880"/>
           </a:xfrm>
           <a:prstGeom prst="roundRect">
             <a:avLst>
@@ -21068,7 +22733,7 @@
         <p:spPr>
           <a:xfrm>
             <a:off x="9366120" y="84240"/>
-            <a:ext cx="2410200" cy="480240"/>
+            <a:ext cx="2409840" cy="479880"/>
           </a:xfrm>
           <a:prstGeom prst="roundRect">
             <a:avLst>
@@ -21136,7 +22801,7 @@
         <p:spPr>
           <a:xfrm>
             <a:off x="12395880" y="84240"/>
-            <a:ext cx="2410200" cy="480240"/>
+            <a:ext cx="2409840" cy="479880"/>
           </a:xfrm>
           <a:prstGeom prst="roundRect">
             <a:avLst>
@@ -21204,7 +22869,7 @@
         <p:spPr>
           <a:xfrm>
             <a:off x="15532560" y="84240"/>
-            <a:ext cx="2410200" cy="480240"/>
+            <a:ext cx="2409840" cy="479880"/>
           </a:xfrm>
           <a:prstGeom prst="roundRect">
             <a:avLst>
@@ -21272,7 +22937,7 @@
         <p:spPr>
           <a:xfrm>
             <a:off x="18668880" y="84240"/>
-            <a:ext cx="2410200" cy="480240"/>
+            <a:ext cx="2409840" cy="479880"/>
           </a:xfrm>
           <a:prstGeom prst="roundRect">
             <a:avLst>
@@ -21340,7 +23005,7 @@
         <p:spPr>
           <a:xfrm>
             <a:off x="167400" y="84240"/>
-            <a:ext cx="2410200" cy="480240"/>
+            <a:ext cx="2409840" cy="479880"/>
           </a:xfrm>
           <a:prstGeom prst="roundRect">
             <a:avLst>
@@ -21408,7 +23073,7 @@
         <p:spPr>
           <a:xfrm>
             <a:off x="3197160" y="1385640"/>
-            <a:ext cx="2410200" cy="480240"/>
+            <a:ext cx="2409840" cy="479880"/>
           </a:xfrm>
           <a:prstGeom prst="roundRect">
             <a:avLst>
@@ -21476,7 +23141,7 @@
         <p:spPr>
           <a:xfrm>
             <a:off x="3197160" y="2961360"/>
-            <a:ext cx="2410200" cy="480240"/>
+            <a:ext cx="2409840" cy="479880"/>
           </a:xfrm>
           <a:prstGeom prst="roundRect">
             <a:avLst>
@@ -21544,7 +23209,7 @@
         <p:spPr>
           <a:xfrm>
             <a:off x="3197160" y="4537440"/>
-            <a:ext cx="2410200" cy="480240"/>
+            <a:ext cx="2409840" cy="479880"/>
           </a:xfrm>
           <a:prstGeom prst="roundRect">
             <a:avLst>
@@ -21612,7 +23277,7 @@
         <p:spPr>
           <a:xfrm>
             <a:off x="3197160" y="6113160"/>
-            <a:ext cx="2410200" cy="480240"/>
+            <a:ext cx="2409840" cy="479880"/>
           </a:xfrm>
           <a:prstGeom prst="roundRect">
             <a:avLst>
@@ -21680,7 +23345,7 @@
         <p:spPr>
           <a:xfrm>
             <a:off x="3197160" y="7689240"/>
-            <a:ext cx="2410200" cy="480240"/>
+            <a:ext cx="2409840" cy="479880"/>
           </a:xfrm>
           <a:prstGeom prst="roundRect">
             <a:avLst>
@@ -21748,7 +23413,7 @@
         <p:spPr>
           <a:xfrm>
             <a:off x="3197160" y="9264960"/>
-            <a:ext cx="2410200" cy="480240"/>
+            <a:ext cx="2409840" cy="479880"/>
           </a:xfrm>
           <a:prstGeom prst="roundRect">
             <a:avLst>
@@ -21816,7 +23481,7 @@
         <p:spPr>
           <a:xfrm>
             <a:off x="5607720" y="1625760"/>
-            <a:ext cx="16043040" cy="720"/>
+            <a:ext cx="16043400" cy="1080"/>
           </a:xfrm>
           <a:prstGeom prst="straightConnector1">
             <a:avLst/>
@@ -21839,7 +23504,7 @@
         <p:spPr>
           <a:xfrm>
             <a:off x="5607720" y="3201840"/>
-            <a:ext cx="16043040" cy="720"/>
+            <a:ext cx="16043400" cy="1080"/>
           </a:xfrm>
           <a:prstGeom prst="straightConnector1">
             <a:avLst/>
@@ -21862,7 +23527,7 @@
         <p:spPr>
           <a:xfrm>
             <a:off x="5607720" y="4777560"/>
-            <a:ext cx="16043040" cy="720"/>
+            <a:ext cx="16043400" cy="1080"/>
           </a:xfrm>
           <a:prstGeom prst="straightConnector1">
             <a:avLst/>
@@ -21885,7 +23550,7 @@
         <p:spPr>
           <a:xfrm>
             <a:off x="5607720" y="6353640"/>
-            <a:ext cx="16043040" cy="720"/>
+            <a:ext cx="16043400" cy="1080"/>
           </a:xfrm>
           <a:prstGeom prst="straightConnector1">
             <a:avLst/>
@@ -21908,7 +23573,7 @@
         <p:spPr>
           <a:xfrm>
             <a:off x="5607720" y="7929360"/>
-            <a:ext cx="16043040" cy="720"/>
+            <a:ext cx="16043400" cy="1080"/>
           </a:xfrm>
           <a:prstGeom prst="straightConnector1">
             <a:avLst/>
@@ -21931,7 +23596,7 @@
         <p:spPr>
           <a:xfrm>
             <a:off x="5607720" y="9505440"/>
-            <a:ext cx="16043040" cy="720"/>
+            <a:ext cx="16043400" cy="1080"/>
           </a:xfrm>
           <a:prstGeom prst="straightConnector1">
             <a:avLst/>
@@ -21954,7 +23619,7 @@
         <p:spPr>
           <a:xfrm>
             <a:off x="167400" y="801720"/>
-            <a:ext cx="2410200" cy="2639880"/>
+            <a:ext cx="2409840" cy="2639520"/>
           </a:xfrm>
           <a:prstGeom prst="roundRect">
             <a:avLst>
@@ -22030,7 +23695,7 @@
         <p:spPr>
           <a:xfrm>
             <a:off x="2874240" y="-28440"/>
-            <a:ext cx="720" cy="10857600"/>
+            <a:ext cx="1080" cy="10857960"/>
           </a:xfrm>
           <a:prstGeom prst="straightConnector1">
             <a:avLst/>
@@ -22052,7 +23717,7 @@
         <p:spPr>
           <a:xfrm>
             <a:off x="167400" y="3894840"/>
-            <a:ext cx="2436480" cy="2639880"/>
+            <a:ext cx="2436120" cy="2639520"/>
           </a:xfrm>
           <a:prstGeom prst="roundRect">
             <a:avLst>
@@ -22143,7 +23808,7 @@
         <p:spPr>
           <a:xfrm>
             <a:off x="29520" y="1385640"/>
-            <a:ext cx="1875240" cy="2292480"/>
+            <a:ext cx="1874880" cy="2292120"/>
           </a:xfrm>
           <a:prstGeom prst="roundRect">
             <a:avLst>
@@ -22211,7 +23876,7 @@
         <p:spPr>
           <a:xfrm>
             <a:off x="984600" y="1480680"/>
-            <a:ext cx="1875240" cy="2292480"/>
+            <a:ext cx="1874880" cy="2292120"/>
           </a:xfrm>
           <a:prstGeom prst="roundRect">
             <a:avLst>

--- a/SE202526/Management/Scrum Board.pptx
+++ b/SE202526/Management/Scrum Board.pptx
@@ -120,6 +120,11 @@
       </a:defRPr>
     </a:lvl9pPr>
   </p:defaultTextStyle>
+  <p:extLst>
+    <p:ext uri="{EFAFB233-063F-42B5-8137-9DF3F51BA10A}">
+      <p15:sldGuideLst xmlns:p15="http://schemas.microsoft.com/office/powerpoint/2012/main"/>
+    </p:ext>
+  </p:extLst>
 </p:presentation>
 </file>
 
@@ -17908,6 +17913,188 @@
               </a:rPr>
               <a:t>Define the structure and behavior of the new warning messages</a:t>
             </a:r>
+            <a:endParaRPr lang="pt-PT" sz="1400" b="0" u="none" strike="noStrike" dirty="0">
+              <a:solidFill>
+                <a:srgbClr val="000000"/>
+              </a:solidFill>
+              <a:effectLst/>
+              <a:uFillTx/>
+              <a:latin typeface="Arial"/>
+            </a:endParaRPr>
+          </a:p>
+        </p:txBody>
+      </p:sp>
+      <p:sp>
+        <p:nvSpPr>
+          <p:cNvPr id="2" name="Google Shape;86;p15">
+            <a:extLst>
+              <a:ext uri="{FF2B5EF4-FFF2-40B4-BE49-F238E27FC236}">
+                <a16:creationId xmlns:a16="http://schemas.microsoft.com/office/drawing/2014/main" id="{EABC4697-C325-E97D-571B-A96A86A7BB5F}"/>
+              </a:ext>
+            </a:extLst>
+          </p:cNvPr>
+          <p:cNvSpPr/>
+          <p:nvPr/>
+        </p:nvSpPr>
+        <p:spPr>
+          <a:xfrm>
+            <a:off x="167400" y="1639472"/>
+            <a:ext cx="2409840" cy="879561"/>
+          </a:xfrm>
+          <a:prstGeom prst="roundRect">
+            <a:avLst>
+              <a:gd name="adj" fmla="val 16667"/>
+            </a:avLst>
+          </a:prstGeom>
+          <a:solidFill>
+            <a:srgbClr val="D9EAD3"/>
+          </a:solidFill>
+          <a:ln w="28575">
+            <a:solidFill>
+              <a:srgbClr val="274E13"/>
+            </a:solidFill>
+            <a:round/>
+          </a:ln>
+        </p:spPr>
+        <p:style>
+          <a:lnRef idx="0">
+            <a:scrgbClr r="0" g="0" b="0"/>
+          </a:lnRef>
+          <a:fillRef idx="0">
+            <a:scrgbClr r="0" g="0" b="0"/>
+          </a:fillRef>
+          <a:effectRef idx="0">
+            <a:scrgbClr r="0" g="0" b="0"/>
+          </a:effectRef>
+          <a:fontRef idx="minor"/>
+        </p:style>
+        <p:txBody>
+          <a:bodyPr lIns="90000" tIns="91440" rIns="90000" bIns="91440" anchor="t">
+            <a:noAutofit/>
+          </a:bodyPr>
+          <a:lstStyle/>
+          <a:p>
+            <a:pPr>
+              <a:lnSpc>
+                <a:spcPct val="100000"/>
+              </a:lnSpc>
+            </a:pPr>
+            <a:r>
+              <a:rPr lang="pt-PT" sz="1400" dirty="0">
+                <a:solidFill>
+                  <a:srgbClr val="000000"/>
+                </a:solidFill>
+                <a:latin typeface="Arial"/>
+              </a:rPr>
+              <a:t>US1</a:t>
+            </a:r>
+            <a:r>
+              <a:rPr lang="en-US" sz="1400" dirty="0">
+                <a:solidFill>
+                  <a:srgbClr val="000000"/>
+                </a:solidFill>
+                <a:latin typeface="Arial"/>
+              </a:rPr>
+              <a:t>: implementing</a:t>
+            </a:r>
+          </a:p>
+          <a:p>
+            <a:pPr>
+              <a:lnSpc>
+                <a:spcPct val="100000"/>
+              </a:lnSpc>
+            </a:pPr>
+            <a:endParaRPr lang="pt-PT" sz="1400" b="0" u="none" strike="noStrike" dirty="0">
+              <a:solidFill>
+                <a:srgbClr val="000000"/>
+              </a:solidFill>
+              <a:effectLst/>
+              <a:uFillTx/>
+              <a:latin typeface="Arial"/>
+            </a:endParaRPr>
+          </a:p>
+        </p:txBody>
+      </p:sp>
+      <p:sp>
+        <p:nvSpPr>
+          <p:cNvPr id="3" name="Google Shape;86;p15">
+            <a:extLst>
+              <a:ext uri="{FF2B5EF4-FFF2-40B4-BE49-F238E27FC236}">
+                <a16:creationId xmlns:a16="http://schemas.microsoft.com/office/drawing/2014/main" id="{06688CFE-324B-3DE4-AFB0-E9378C7A3251}"/>
+              </a:ext>
+            </a:extLst>
+          </p:cNvPr>
+          <p:cNvSpPr/>
+          <p:nvPr/>
+        </p:nvSpPr>
+        <p:spPr>
+          <a:xfrm>
+            <a:off x="184230" y="3568487"/>
+            <a:ext cx="2393010" cy="879561"/>
+          </a:xfrm>
+          <a:prstGeom prst="roundRect">
+            <a:avLst>
+              <a:gd name="adj" fmla="val 16667"/>
+            </a:avLst>
+          </a:prstGeom>
+          <a:solidFill>
+            <a:srgbClr val="D9EAD3"/>
+          </a:solidFill>
+          <a:ln w="28575">
+            <a:solidFill>
+              <a:srgbClr val="274E13"/>
+            </a:solidFill>
+            <a:round/>
+          </a:ln>
+        </p:spPr>
+        <p:style>
+          <a:lnRef idx="0">
+            <a:scrgbClr r="0" g="0" b="0"/>
+          </a:lnRef>
+          <a:fillRef idx="0">
+            <a:scrgbClr r="0" g="0" b="0"/>
+          </a:fillRef>
+          <a:effectRef idx="0">
+            <a:scrgbClr r="0" g="0" b="0"/>
+          </a:effectRef>
+          <a:fontRef idx="minor"/>
+        </p:style>
+        <p:txBody>
+          <a:bodyPr lIns="90000" tIns="91440" rIns="90000" bIns="91440" anchor="t">
+            <a:noAutofit/>
+          </a:bodyPr>
+          <a:lstStyle/>
+          <a:p>
+            <a:pPr>
+              <a:lnSpc>
+                <a:spcPct val="100000"/>
+              </a:lnSpc>
+            </a:pPr>
+            <a:r>
+              <a:rPr lang="pt-PT" sz="1400" dirty="0">
+                <a:solidFill>
+                  <a:srgbClr val="000000"/>
+                </a:solidFill>
+                <a:latin typeface="Arial"/>
+              </a:rPr>
+              <a:t>US2</a:t>
+            </a:r>
+            <a:r>
+              <a:rPr lang="en-US" sz="1400" dirty="0">
+                <a:solidFill>
+                  <a:srgbClr val="000000"/>
+                </a:solidFill>
+                <a:latin typeface="Arial"/>
+              </a:rPr>
+              <a:t>: implementing</a:t>
+            </a:r>
+          </a:p>
+          <a:p>
+            <a:pPr>
+              <a:lnSpc>
+                <a:spcPct val="100000"/>
+              </a:lnSpc>
+            </a:pPr>
             <a:endParaRPr lang="pt-PT" sz="1400" b="0" u="none" strike="noStrike" dirty="0">
               <a:solidFill>
                 <a:srgbClr val="000000"/>

--- a/SE202526/Management/Scrum Board.pptx
+++ b/SE202526/Management/Scrum Board.pptx
@@ -22,6 +22,7 @@
     <p:sldId id="270" r:id="rId16"/>
     <p:sldId id="271" r:id="rId17"/>
     <p:sldId id="272" r:id="rId18"/>
+    <p:sldId id="273" r:id="rId19"/>
   </p:sldIdLst>
   <p:sldSz cx="21599525" cy="10799763"/>
   <p:notesSz cx="7559675" cy="10691813"/>
@@ -18110,6 +18111,2683 @@
     <p:extLst>
       <p:ext uri="{BB962C8B-B14F-4D97-AF65-F5344CB8AC3E}">
         <p14:creationId xmlns:p14="http://schemas.microsoft.com/office/powerpoint/2010/main" val="3190489301"/>
+      </p:ext>
+    </p:extLst>
+  </p:cSld>
+  <p:clrMapOvr>
+    <a:masterClrMapping/>
+  </p:clrMapOvr>
+</p:sld>
+</file>
+
+<file path=ppt/slides/slide18.xml><?xml version="1.0" encoding="utf-8"?>
+<p:sld xmlns:a="http://schemas.openxmlformats.org/drawingml/2006/main" xmlns:r="http://schemas.openxmlformats.org/officeDocument/2006/relationships" xmlns:p="http://schemas.openxmlformats.org/presentationml/2006/main">
+  <p:cSld>
+    <p:spTree>
+      <p:nvGrpSpPr>
+        <p:cNvPr id="1" name="">
+          <a:extLst>
+            <a:ext uri="{FF2B5EF4-FFF2-40B4-BE49-F238E27FC236}">
+              <a16:creationId xmlns:a16="http://schemas.microsoft.com/office/drawing/2014/main" id="{D0B8E483-D5F1-EAE7-91CD-F13934DE1D74}"/>
+            </a:ext>
+          </a:extLst>
+        </p:cNvPr>
+        <p:cNvGrpSpPr/>
+        <p:nvPr/>
+      </p:nvGrpSpPr>
+      <p:grpSpPr>
+        <a:xfrm>
+          <a:off x="0" y="0"/>
+          <a:ext cx="0" cy="0"/>
+          <a:chOff x="0" y="0"/>
+          <a:chExt cx="0" cy="0"/>
+        </a:xfrm>
+      </p:grpSpPr>
+      <p:cxnSp>
+        <p:nvCxnSpPr>
+          <p:cNvPr id="33" name="Google Shape;66;p15">
+            <a:extLst>
+              <a:ext uri="{FF2B5EF4-FFF2-40B4-BE49-F238E27FC236}">
+                <a16:creationId xmlns:a16="http://schemas.microsoft.com/office/drawing/2014/main" id="{AD1247B2-BAD1-3EBB-DF76-16F75A4AB4DB}"/>
+              </a:ext>
+            </a:extLst>
+          </p:cNvPr>
+          <p:cNvCxnSpPr/>
+          <p:nvPr/>
+        </p:nvCxnSpPr>
+        <p:spPr>
+          <a:xfrm>
+            <a:off x="5944680" y="-31320"/>
+            <a:ext cx="1080" cy="10857600"/>
+          </a:xfrm>
+          <a:prstGeom prst="straightConnector1">
+            <a:avLst/>
+          </a:prstGeom>
+          <a:ln w="38100">
+            <a:solidFill>
+              <a:srgbClr val="5B0F00"/>
+            </a:solidFill>
+            <a:round/>
+          </a:ln>
+        </p:spPr>
+      </p:cxnSp>
+      <p:sp>
+        <p:nvSpPr>
+          <p:cNvPr id="34" name="Google Shape;67;p15">
+            <a:extLst>
+              <a:ext uri="{FF2B5EF4-FFF2-40B4-BE49-F238E27FC236}">
+                <a16:creationId xmlns:a16="http://schemas.microsoft.com/office/drawing/2014/main" id="{625C174C-9066-096D-E396-62F164233D86}"/>
+              </a:ext>
+            </a:extLst>
+          </p:cNvPr>
+          <p:cNvSpPr/>
+          <p:nvPr/>
+        </p:nvSpPr>
+        <p:spPr>
+          <a:xfrm>
+            <a:off x="3197160" y="84240"/>
+            <a:ext cx="2409840" cy="479880"/>
+          </a:xfrm>
+          <a:prstGeom prst="roundRect">
+            <a:avLst>
+              <a:gd name="adj" fmla="val 16667"/>
+            </a:avLst>
+          </a:prstGeom>
+          <a:solidFill>
+            <a:srgbClr val="F9CB9C"/>
+          </a:solidFill>
+          <a:ln w="28575">
+            <a:solidFill>
+              <a:srgbClr val="B45F06"/>
+            </a:solidFill>
+            <a:round/>
+          </a:ln>
+        </p:spPr>
+        <p:style>
+          <a:lnRef idx="0">
+            <a:scrgbClr r="0" g="0" b="0"/>
+          </a:lnRef>
+          <a:fillRef idx="0">
+            <a:scrgbClr r="0" g="0" b="0"/>
+          </a:fillRef>
+          <a:effectRef idx="0">
+            <a:scrgbClr r="0" g="0" b="0"/>
+          </a:effectRef>
+          <a:fontRef idx="minor"/>
+        </p:style>
+        <p:txBody>
+          <a:bodyPr lIns="90000" tIns="91440" rIns="90000" bIns="91440" anchor="ctr">
+            <a:noAutofit/>
+          </a:bodyPr>
+          <a:lstStyle/>
+          <a:p>
+            <a:pPr algn="ctr">
+              <a:lnSpc>
+                <a:spcPct val="100000"/>
+              </a:lnSpc>
+              <a:tabLst>
+                <a:tab pos="0" algn="l"/>
+              </a:tabLst>
+            </a:pPr>
+            <a:r>
+              <a:rPr lang="en-GB" sz="1800" b="1" u="none" strike="noStrike">
+                <a:solidFill>
+                  <a:srgbClr val="000000"/>
+                </a:solidFill>
+                <a:effectLst/>
+                <a:uFillTx/>
+                <a:latin typeface="Consolas"/>
+                <a:ea typeface="Consolas"/>
+              </a:rPr>
+              <a:t>Student ID</a:t>
+            </a:r>
+            <a:endParaRPr lang="pt-PT" sz="1800" b="0" u="none" strike="noStrike">
+              <a:solidFill>
+                <a:srgbClr val="000000"/>
+              </a:solidFill>
+              <a:effectLst/>
+              <a:uFillTx/>
+              <a:latin typeface="Arial"/>
+            </a:endParaRPr>
+          </a:p>
+        </p:txBody>
+      </p:sp>
+      <p:sp>
+        <p:nvSpPr>
+          <p:cNvPr id="35" name="Google Shape;68;p15">
+            <a:extLst>
+              <a:ext uri="{FF2B5EF4-FFF2-40B4-BE49-F238E27FC236}">
+                <a16:creationId xmlns:a16="http://schemas.microsoft.com/office/drawing/2014/main" id="{56E11A6B-E1FF-11F1-603B-49F8FD0A5F23}"/>
+              </a:ext>
+            </a:extLst>
+          </p:cNvPr>
+          <p:cNvSpPr/>
+          <p:nvPr/>
+        </p:nvSpPr>
+        <p:spPr>
+          <a:xfrm>
+            <a:off x="6281640" y="84240"/>
+            <a:ext cx="2409840" cy="479880"/>
+          </a:xfrm>
+          <a:prstGeom prst="roundRect">
+            <a:avLst>
+              <a:gd name="adj" fmla="val 16667"/>
+            </a:avLst>
+          </a:prstGeom>
+          <a:solidFill>
+            <a:srgbClr val="F9CB9C"/>
+          </a:solidFill>
+          <a:ln w="28575">
+            <a:solidFill>
+              <a:srgbClr val="B45F06"/>
+            </a:solidFill>
+            <a:round/>
+          </a:ln>
+        </p:spPr>
+        <p:style>
+          <a:lnRef idx="0">
+            <a:scrgbClr r="0" g="0" b="0"/>
+          </a:lnRef>
+          <a:fillRef idx="0">
+            <a:scrgbClr r="0" g="0" b="0"/>
+          </a:fillRef>
+          <a:effectRef idx="0">
+            <a:scrgbClr r="0" g="0" b="0"/>
+          </a:effectRef>
+          <a:fontRef idx="minor"/>
+        </p:style>
+        <p:txBody>
+          <a:bodyPr lIns="90000" tIns="91440" rIns="90000" bIns="91440" anchor="ctr">
+            <a:noAutofit/>
+          </a:bodyPr>
+          <a:lstStyle/>
+          <a:p>
+            <a:pPr algn="ctr">
+              <a:lnSpc>
+                <a:spcPct val="100000"/>
+              </a:lnSpc>
+              <a:tabLst>
+                <a:tab pos="0" algn="l"/>
+              </a:tabLst>
+            </a:pPr>
+            <a:r>
+              <a:rPr lang="en-GB" sz="1800" b="1" u="none" strike="noStrike">
+                <a:solidFill>
+                  <a:srgbClr val="000000"/>
+                </a:solidFill>
+                <a:effectLst/>
+                <a:uFillTx/>
+                <a:latin typeface="Consolas"/>
+                <a:ea typeface="Consolas"/>
+              </a:rPr>
+              <a:t>Story</a:t>
+            </a:r>
+            <a:endParaRPr lang="pt-PT" sz="1800" b="0" u="none" strike="noStrike">
+              <a:solidFill>
+                <a:srgbClr val="000000"/>
+              </a:solidFill>
+              <a:effectLst/>
+              <a:uFillTx/>
+              <a:latin typeface="Arial"/>
+            </a:endParaRPr>
+          </a:p>
+        </p:txBody>
+      </p:sp>
+      <p:sp>
+        <p:nvSpPr>
+          <p:cNvPr id="36" name="Google Shape;69;p15">
+            <a:extLst>
+              <a:ext uri="{FF2B5EF4-FFF2-40B4-BE49-F238E27FC236}">
+                <a16:creationId xmlns:a16="http://schemas.microsoft.com/office/drawing/2014/main" id="{46F48B97-4CC8-13E0-CCD7-1E4F53FEBEA4}"/>
+              </a:ext>
+            </a:extLst>
+          </p:cNvPr>
+          <p:cNvSpPr/>
+          <p:nvPr/>
+        </p:nvSpPr>
+        <p:spPr>
+          <a:xfrm>
+            <a:off x="9366120" y="84240"/>
+            <a:ext cx="2409840" cy="479880"/>
+          </a:xfrm>
+          <a:prstGeom prst="roundRect">
+            <a:avLst>
+              <a:gd name="adj" fmla="val 16667"/>
+            </a:avLst>
+          </a:prstGeom>
+          <a:solidFill>
+            <a:srgbClr val="F9CB9C"/>
+          </a:solidFill>
+          <a:ln w="28575">
+            <a:solidFill>
+              <a:srgbClr val="B45F06"/>
+            </a:solidFill>
+            <a:round/>
+          </a:ln>
+        </p:spPr>
+        <p:style>
+          <a:lnRef idx="0">
+            <a:scrgbClr r="0" g="0" b="0"/>
+          </a:lnRef>
+          <a:fillRef idx="0">
+            <a:scrgbClr r="0" g="0" b="0"/>
+          </a:fillRef>
+          <a:effectRef idx="0">
+            <a:scrgbClr r="0" g="0" b="0"/>
+          </a:effectRef>
+          <a:fontRef idx="minor"/>
+        </p:style>
+        <p:txBody>
+          <a:bodyPr lIns="90000" tIns="91440" rIns="90000" bIns="91440" anchor="ctr">
+            <a:noAutofit/>
+          </a:bodyPr>
+          <a:lstStyle/>
+          <a:p>
+            <a:pPr algn="ctr">
+              <a:lnSpc>
+                <a:spcPct val="100000"/>
+              </a:lnSpc>
+              <a:tabLst>
+                <a:tab pos="0" algn="l"/>
+              </a:tabLst>
+            </a:pPr>
+            <a:r>
+              <a:rPr lang="en-GB" sz="1800" b="1" u="none" strike="noStrike">
+                <a:solidFill>
+                  <a:srgbClr val="000000"/>
+                </a:solidFill>
+                <a:effectLst/>
+                <a:uFillTx/>
+                <a:latin typeface="Consolas"/>
+                <a:ea typeface="Consolas"/>
+              </a:rPr>
+              <a:t>To Do</a:t>
+            </a:r>
+            <a:endParaRPr lang="pt-PT" sz="1800" b="0" u="none" strike="noStrike">
+              <a:solidFill>
+                <a:srgbClr val="000000"/>
+              </a:solidFill>
+              <a:effectLst/>
+              <a:uFillTx/>
+              <a:latin typeface="Arial"/>
+            </a:endParaRPr>
+          </a:p>
+        </p:txBody>
+      </p:sp>
+      <p:sp>
+        <p:nvSpPr>
+          <p:cNvPr id="37" name="Google Shape;70;p15">
+            <a:extLst>
+              <a:ext uri="{FF2B5EF4-FFF2-40B4-BE49-F238E27FC236}">
+                <a16:creationId xmlns:a16="http://schemas.microsoft.com/office/drawing/2014/main" id="{C7B03619-22DA-0B25-14DE-9068FB53CD7B}"/>
+              </a:ext>
+            </a:extLst>
+          </p:cNvPr>
+          <p:cNvSpPr/>
+          <p:nvPr/>
+        </p:nvSpPr>
+        <p:spPr>
+          <a:xfrm>
+            <a:off x="12395880" y="84240"/>
+            <a:ext cx="2409840" cy="479880"/>
+          </a:xfrm>
+          <a:prstGeom prst="roundRect">
+            <a:avLst>
+              <a:gd name="adj" fmla="val 16667"/>
+            </a:avLst>
+          </a:prstGeom>
+          <a:solidFill>
+            <a:srgbClr val="F9CB9C"/>
+          </a:solidFill>
+          <a:ln w="28575">
+            <a:solidFill>
+              <a:srgbClr val="B45F06"/>
+            </a:solidFill>
+            <a:round/>
+          </a:ln>
+        </p:spPr>
+        <p:style>
+          <a:lnRef idx="0">
+            <a:scrgbClr r="0" g="0" b="0"/>
+          </a:lnRef>
+          <a:fillRef idx="0">
+            <a:scrgbClr r="0" g="0" b="0"/>
+          </a:fillRef>
+          <a:effectRef idx="0">
+            <a:scrgbClr r="0" g="0" b="0"/>
+          </a:effectRef>
+          <a:fontRef idx="minor"/>
+        </p:style>
+        <p:txBody>
+          <a:bodyPr lIns="90000" tIns="91440" rIns="90000" bIns="91440" anchor="ctr">
+            <a:noAutofit/>
+          </a:bodyPr>
+          <a:lstStyle/>
+          <a:p>
+            <a:pPr algn="ctr">
+              <a:lnSpc>
+                <a:spcPct val="100000"/>
+              </a:lnSpc>
+              <a:tabLst>
+                <a:tab pos="0" algn="l"/>
+              </a:tabLst>
+            </a:pPr>
+            <a:r>
+              <a:rPr lang="en-GB" sz="1800" b="1" u="none" strike="noStrike">
+                <a:solidFill>
+                  <a:srgbClr val="000000"/>
+                </a:solidFill>
+                <a:effectLst/>
+                <a:uFillTx/>
+                <a:latin typeface="Consolas"/>
+                <a:ea typeface="Consolas"/>
+              </a:rPr>
+              <a:t>Doing</a:t>
+            </a:r>
+            <a:endParaRPr lang="pt-PT" sz="1800" b="0" u="none" strike="noStrike">
+              <a:solidFill>
+                <a:srgbClr val="000000"/>
+              </a:solidFill>
+              <a:effectLst/>
+              <a:uFillTx/>
+              <a:latin typeface="Arial"/>
+            </a:endParaRPr>
+          </a:p>
+        </p:txBody>
+      </p:sp>
+      <p:sp>
+        <p:nvSpPr>
+          <p:cNvPr id="38" name="Google Shape;71;p15">
+            <a:extLst>
+              <a:ext uri="{FF2B5EF4-FFF2-40B4-BE49-F238E27FC236}">
+                <a16:creationId xmlns:a16="http://schemas.microsoft.com/office/drawing/2014/main" id="{A96015B2-9C72-1449-F697-5A3D6ED13173}"/>
+              </a:ext>
+            </a:extLst>
+          </p:cNvPr>
+          <p:cNvSpPr/>
+          <p:nvPr/>
+        </p:nvSpPr>
+        <p:spPr>
+          <a:xfrm>
+            <a:off x="15532560" y="84240"/>
+            <a:ext cx="2409840" cy="479880"/>
+          </a:xfrm>
+          <a:prstGeom prst="roundRect">
+            <a:avLst>
+              <a:gd name="adj" fmla="val 16667"/>
+            </a:avLst>
+          </a:prstGeom>
+          <a:solidFill>
+            <a:srgbClr val="F9CB9C"/>
+          </a:solidFill>
+          <a:ln w="28575">
+            <a:solidFill>
+              <a:srgbClr val="B45F06"/>
+            </a:solidFill>
+            <a:round/>
+          </a:ln>
+        </p:spPr>
+        <p:style>
+          <a:lnRef idx="0">
+            <a:scrgbClr r="0" g="0" b="0"/>
+          </a:lnRef>
+          <a:fillRef idx="0">
+            <a:scrgbClr r="0" g="0" b="0"/>
+          </a:fillRef>
+          <a:effectRef idx="0">
+            <a:scrgbClr r="0" g="0" b="0"/>
+          </a:effectRef>
+          <a:fontRef idx="minor"/>
+        </p:style>
+        <p:txBody>
+          <a:bodyPr lIns="90000" tIns="91440" rIns="90000" bIns="91440" anchor="ctr">
+            <a:noAutofit/>
+          </a:bodyPr>
+          <a:lstStyle/>
+          <a:p>
+            <a:pPr algn="ctr">
+              <a:lnSpc>
+                <a:spcPct val="100000"/>
+              </a:lnSpc>
+              <a:tabLst>
+                <a:tab pos="0" algn="l"/>
+              </a:tabLst>
+            </a:pPr>
+            <a:r>
+              <a:rPr lang="en-GB" sz="1800" b="1" u="none" strike="noStrike">
+                <a:solidFill>
+                  <a:srgbClr val="000000"/>
+                </a:solidFill>
+                <a:effectLst/>
+                <a:uFillTx/>
+                <a:latin typeface="Consolas"/>
+                <a:ea typeface="Consolas"/>
+              </a:rPr>
+              <a:t>Review</a:t>
+            </a:r>
+            <a:endParaRPr lang="pt-PT" sz="1800" b="0" u="none" strike="noStrike">
+              <a:solidFill>
+                <a:srgbClr val="000000"/>
+              </a:solidFill>
+              <a:effectLst/>
+              <a:uFillTx/>
+              <a:latin typeface="Arial"/>
+            </a:endParaRPr>
+          </a:p>
+        </p:txBody>
+      </p:sp>
+      <p:sp>
+        <p:nvSpPr>
+          <p:cNvPr id="39" name="Google Shape;72;p15">
+            <a:extLst>
+              <a:ext uri="{FF2B5EF4-FFF2-40B4-BE49-F238E27FC236}">
+                <a16:creationId xmlns:a16="http://schemas.microsoft.com/office/drawing/2014/main" id="{ADB38658-052F-FCA7-CD4C-6F2A5913EC0B}"/>
+              </a:ext>
+            </a:extLst>
+          </p:cNvPr>
+          <p:cNvSpPr/>
+          <p:nvPr/>
+        </p:nvSpPr>
+        <p:spPr>
+          <a:xfrm>
+            <a:off x="18668880" y="84240"/>
+            <a:ext cx="2409840" cy="479880"/>
+          </a:xfrm>
+          <a:prstGeom prst="roundRect">
+            <a:avLst>
+              <a:gd name="adj" fmla="val 16667"/>
+            </a:avLst>
+          </a:prstGeom>
+          <a:solidFill>
+            <a:srgbClr val="F9CB9C"/>
+          </a:solidFill>
+          <a:ln w="28575">
+            <a:solidFill>
+              <a:srgbClr val="B45F06"/>
+            </a:solidFill>
+            <a:round/>
+          </a:ln>
+        </p:spPr>
+        <p:style>
+          <a:lnRef idx="0">
+            <a:scrgbClr r="0" g="0" b="0"/>
+          </a:lnRef>
+          <a:fillRef idx="0">
+            <a:scrgbClr r="0" g="0" b="0"/>
+          </a:fillRef>
+          <a:effectRef idx="0">
+            <a:scrgbClr r="0" g="0" b="0"/>
+          </a:effectRef>
+          <a:fontRef idx="minor"/>
+        </p:style>
+        <p:txBody>
+          <a:bodyPr lIns="90000" tIns="91440" rIns="90000" bIns="91440" anchor="ctr">
+            <a:noAutofit/>
+          </a:bodyPr>
+          <a:lstStyle/>
+          <a:p>
+            <a:pPr algn="ctr">
+              <a:lnSpc>
+                <a:spcPct val="100000"/>
+              </a:lnSpc>
+              <a:tabLst>
+                <a:tab pos="0" algn="l"/>
+              </a:tabLst>
+            </a:pPr>
+            <a:r>
+              <a:rPr lang="en-GB" sz="1800" b="1" u="none" strike="noStrike">
+                <a:solidFill>
+                  <a:srgbClr val="000000"/>
+                </a:solidFill>
+                <a:effectLst/>
+                <a:uFillTx/>
+                <a:latin typeface="Consolas"/>
+                <a:ea typeface="Consolas"/>
+              </a:rPr>
+              <a:t>Done</a:t>
+            </a:r>
+            <a:endParaRPr lang="pt-PT" sz="1800" b="0" u="none" strike="noStrike">
+              <a:solidFill>
+                <a:srgbClr val="000000"/>
+              </a:solidFill>
+              <a:effectLst/>
+              <a:uFillTx/>
+              <a:latin typeface="Arial"/>
+            </a:endParaRPr>
+          </a:p>
+        </p:txBody>
+      </p:sp>
+      <p:sp>
+        <p:nvSpPr>
+          <p:cNvPr id="40" name="Google Shape;73;p15">
+            <a:extLst>
+              <a:ext uri="{FF2B5EF4-FFF2-40B4-BE49-F238E27FC236}">
+                <a16:creationId xmlns:a16="http://schemas.microsoft.com/office/drawing/2014/main" id="{ED406476-3CBF-F9B8-1D0B-DC6FAFF6C7A7}"/>
+              </a:ext>
+            </a:extLst>
+          </p:cNvPr>
+          <p:cNvSpPr/>
+          <p:nvPr/>
+        </p:nvSpPr>
+        <p:spPr>
+          <a:xfrm>
+            <a:off x="167400" y="84240"/>
+            <a:ext cx="2409840" cy="479880"/>
+          </a:xfrm>
+          <a:prstGeom prst="roundRect">
+            <a:avLst>
+              <a:gd name="adj" fmla="val 16667"/>
+            </a:avLst>
+          </a:prstGeom>
+          <a:solidFill>
+            <a:srgbClr val="F9CB9C"/>
+          </a:solidFill>
+          <a:ln w="28575">
+            <a:solidFill>
+              <a:srgbClr val="B45F06"/>
+            </a:solidFill>
+            <a:round/>
+          </a:ln>
+        </p:spPr>
+        <p:style>
+          <a:lnRef idx="0">
+            <a:scrgbClr r="0" g="0" b="0"/>
+          </a:lnRef>
+          <a:fillRef idx="0">
+            <a:scrgbClr r="0" g="0" b="0"/>
+          </a:fillRef>
+          <a:effectRef idx="0">
+            <a:scrgbClr r="0" g="0" b="0"/>
+          </a:effectRef>
+          <a:fontRef idx="minor"/>
+        </p:style>
+        <p:txBody>
+          <a:bodyPr lIns="90000" tIns="91440" rIns="90000" bIns="91440" anchor="ctr">
+            <a:noAutofit/>
+          </a:bodyPr>
+          <a:lstStyle/>
+          <a:p>
+            <a:pPr algn="ctr">
+              <a:lnSpc>
+                <a:spcPct val="100000"/>
+              </a:lnSpc>
+              <a:tabLst>
+                <a:tab pos="0" algn="l"/>
+              </a:tabLst>
+            </a:pPr>
+            <a:r>
+              <a:rPr lang="en-GB" sz="1800" b="1" u="none" strike="noStrike">
+                <a:solidFill>
+                  <a:srgbClr val="000000"/>
+                </a:solidFill>
+                <a:effectLst/>
+                <a:uFillTx/>
+                <a:latin typeface="Consolas"/>
+                <a:ea typeface="Consolas"/>
+              </a:rPr>
+              <a:t>Backlog</a:t>
+            </a:r>
+            <a:endParaRPr lang="pt-PT" sz="1800" b="0" u="none" strike="noStrike">
+              <a:solidFill>
+                <a:srgbClr val="000000"/>
+              </a:solidFill>
+              <a:effectLst/>
+              <a:uFillTx/>
+              <a:latin typeface="Arial"/>
+            </a:endParaRPr>
+          </a:p>
+        </p:txBody>
+      </p:sp>
+      <p:sp>
+        <p:nvSpPr>
+          <p:cNvPr id="41" name="Google Shape;74;p15">
+            <a:extLst>
+              <a:ext uri="{FF2B5EF4-FFF2-40B4-BE49-F238E27FC236}">
+                <a16:creationId xmlns:a16="http://schemas.microsoft.com/office/drawing/2014/main" id="{581ED07E-0618-F66B-73BE-255706ECA5C8}"/>
+              </a:ext>
+            </a:extLst>
+          </p:cNvPr>
+          <p:cNvSpPr/>
+          <p:nvPr/>
+        </p:nvSpPr>
+        <p:spPr>
+          <a:xfrm>
+            <a:off x="3197160" y="1385640"/>
+            <a:ext cx="2409840" cy="479880"/>
+          </a:xfrm>
+          <a:prstGeom prst="roundRect">
+            <a:avLst>
+              <a:gd name="adj" fmla="val 16667"/>
+            </a:avLst>
+          </a:prstGeom>
+          <a:solidFill>
+            <a:srgbClr val="E6B8AF"/>
+          </a:solidFill>
+          <a:ln w="28575">
+            <a:solidFill>
+              <a:srgbClr val="5B0F00"/>
+            </a:solidFill>
+            <a:round/>
+          </a:ln>
+        </p:spPr>
+        <p:style>
+          <a:lnRef idx="0">
+            <a:scrgbClr r="0" g="0" b="0"/>
+          </a:lnRef>
+          <a:fillRef idx="0">
+            <a:scrgbClr r="0" g="0" b="0"/>
+          </a:fillRef>
+          <a:effectRef idx="0">
+            <a:scrgbClr r="0" g="0" b="0"/>
+          </a:effectRef>
+          <a:fontRef idx="minor"/>
+        </p:style>
+        <p:txBody>
+          <a:bodyPr lIns="90000" tIns="91440" rIns="90000" bIns="91440" anchor="ctr">
+            <a:noAutofit/>
+          </a:bodyPr>
+          <a:lstStyle/>
+          <a:p>
+            <a:pPr algn="ctr">
+              <a:lnSpc>
+                <a:spcPct val="100000"/>
+              </a:lnSpc>
+              <a:tabLst>
+                <a:tab pos="0" algn="l"/>
+              </a:tabLst>
+            </a:pPr>
+            <a:r>
+              <a:rPr lang="en-GB" sz="1800" b="1" u="none" strike="noStrike">
+                <a:solidFill>
+                  <a:srgbClr val="000000"/>
+                </a:solidFill>
+                <a:effectLst/>
+                <a:uFillTx/>
+                <a:latin typeface="Consolas"/>
+                <a:ea typeface="Consolas"/>
+              </a:rPr>
+              <a:t>66565</a:t>
+            </a:r>
+            <a:endParaRPr lang="pt-PT" sz="1800" b="0" u="none" strike="noStrike">
+              <a:solidFill>
+                <a:srgbClr val="000000"/>
+              </a:solidFill>
+              <a:effectLst/>
+              <a:uFillTx/>
+              <a:latin typeface="Arial"/>
+            </a:endParaRPr>
+          </a:p>
+        </p:txBody>
+      </p:sp>
+      <p:sp>
+        <p:nvSpPr>
+          <p:cNvPr id="42" name="Google Shape;75;p15">
+            <a:extLst>
+              <a:ext uri="{FF2B5EF4-FFF2-40B4-BE49-F238E27FC236}">
+                <a16:creationId xmlns:a16="http://schemas.microsoft.com/office/drawing/2014/main" id="{6AF7B3E5-87A3-82A0-24EB-C223A8964607}"/>
+              </a:ext>
+            </a:extLst>
+          </p:cNvPr>
+          <p:cNvSpPr/>
+          <p:nvPr/>
+        </p:nvSpPr>
+        <p:spPr>
+          <a:xfrm>
+            <a:off x="3197160" y="6126258"/>
+            <a:ext cx="2409840" cy="479880"/>
+          </a:xfrm>
+          <a:prstGeom prst="roundRect">
+            <a:avLst>
+              <a:gd name="adj" fmla="val 16667"/>
+            </a:avLst>
+          </a:prstGeom>
+          <a:solidFill>
+            <a:srgbClr val="E6B8AF"/>
+          </a:solidFill>
+          <a:ln w="28575">
+            <a:solidFill>
+              <a:srgbClr val="5B0F00"/>
+            </a:solidFill>
+            <a:round/>
+          </a:ln>
+        </p:spPr>
+        <p:style>
+          <a:lnRef idx="0">
+            <a:scrgbClr r="0" g="0" b="0"/>
+          </a:lnRef>
+          <a:fillRef idx="0">
+            <a:scrgbClr r="0" g="0" b="0"/>
+          </a:fillRef>
+          <a:effectRef idx="0">
+            <a:scrgbClr r="0" g="0" b="0"/>
+          </a:effectRef>
+          <a:fontRef idx="minor"/>
+        </p:style>
+        <p:txBody>
+          <a:bodyPr lIns="90000" tIns="91440" rIns="90000" bIns="91440" anchor="ctr">
+            <a:noAutofit/>
+          </a:bodyPr>
+          <a:lstStyle/>
+          <a:p>
+            <a:pPr algn="ctr">
+              <a:lnSpc>
+                <a:spcPct val="100000"/>
+              </a:lnSpc>
+              <a:tabLst>
+                <a:tab pos="0" algn="l"/>
+              </a:tabLst>
+            </a:pPr>
+            <a:r>
+              <a:rPr lang="en-GB" sz="1800" b="1" u="none" strike="noStrike">
+                <a:solidFill>
+                  <a:srgbClr val="000000"/>
+                </a:solidFill>
+                <a:effectLst/>
+                <a:uFillTx/>
+                <a:latin typeface="Consolas"/>
+                <a:ea typeface="Consolas"/>
+              </a:rPr>
+              <a:t>67196</a:t>
+            </a:r>
+            <a:endParaRPr lang="pt-PT" sz="1800" b="0" u="none" strike="noStrike">
+              <a:solidFill>
+                <a:srgbClr val="000000"/>
+              </a:solidFill>
+              <a:effectLst/>
+              <a:uFillTx/>
+              <a:latin typeface="Arial"/>
+            </a:endParaRPr>
+          </a:p>
+        </p:txBody>
+      </p:sp>
+      <p:sp>
+        <p:nvSpPr>
+          <p:cNvPr id="43" name="Google Shape;76;p15">
+            <a:extLst>
+              <a:ext uri="{FF2B5EF4-FFF2-40B4-BE49-F238E27FC236}">
+                <a16:creationId xmlns:a16="http://schemas.microsoft.com/office/drawing/2014/main" id="{D15E634C-0422-0D98-1B70-01ABCBBAB6D4}"/>
+              </a:ext>
+            </a:extLst>
+          </p:cNvPr>
+          <p:cNvSpPr/>
+          <p:nvPr/>
+        </p:nvSpPr>
+        <p:spPr>
+          <a:xfrm>
+            <a:off x="3197160" y="2990658"/>
+            <a:ext cx="2409840" cy="479880"/>
+          </a:xfrm>
+          <a:prstGeom prst="roundRect">
+            <a:avLst>
+              <a:gd name="adj" fmla="val 16667"/>
+            </a:avLst>
+          </a:prstGeom>
+          <a:solidFill>
+            <a:srgbClr val="E6B8AF"/>
+          </a:solidFill>
+          <a:ln w="28575">
+            <a:solidFill>
+              <a:srgbClr val="5B0F00"/>
+            </a:solidFill>
+            <a:round/>
+          </a:ln>
+        </p:spPr>
+        <p:style>
+          <a:lnRef idx="0">
+            <a:scrgbClr r="0" g="0" b="0"/>
+          </a:lnRef>
+          <a:fillRef idx="0">
+            <a:scrgbClr r="0" g="0" b="0"/>
+          </a:fillRef>
+          <a:effectRef idx="0">
+            <a:scrgbClr r="0" g="0" b="0"/>
+          </a:effectRef>
+          <a:fontRef idx="minor"/>
+        </p:style>
+        <p:txBody>
+          <a:bodyPr lIns="90000" tIns="91440" rIns="90000" bIns="91440" anchor="ctr">
+            <a:noAutofit/>
+          </a:bodyPr>
+          <a:lstStyle/>
+          <a:p>
+            <a:pPr algn="ctr">
+              <a:lnSpc>
+                <a:spcPct val="100000"/>
+              </a:lnSpc>
+              <a:tabLst>
+                <a:tab pos="0" algn="l"/>
+              </a:tabLst>
+            </a:pPr>
+            <a:r>
+              <a:rPr lang="en-GB" sz="1800" b="1" u="none" strike="noStrike">
+                <a:solidFill>
+                  <a:srgbClr val="000000"/>
+                </a:solidFill>
+                <a:effectLst/>
+                <a:uFillTx/>
+                <a:latin typeface="Consolas"/>
+                <a:ea typeface="Consolas"/>
+              </a:rPr>
+              <a:t>67215</a:t>
+            </a:r>
+            <a:endParaRPr lang="pt-PT" sz="1800" b="0" u="none" strike="noStrike">
+              <a:solidFill>
+                <a:srgbClr val="000000"/>
+              </a:solidFill>
+              <a:effectLst/>
+              <a:uFillTx/>
+              <a:latin typeface="Arial"/>
+            </a:endParaRPr>
+          </a:p>
+        </p:txBody>
+      </p:sp>
+      <p:sp>
+        <p:nvSpPr>
+          <p:cNvPr id="44" name="Google Shape;77;p15">
+            <a:extLst>
+              <a:ext uri="{FF2B5EF4-FFF2-40B4-BE49-F238E27FC236}">
+                <a16:creationId xmlns:a16="http://schemas.microsoft.com/office/drawing/2014/main" id="{6EB6E2F5-8A10-2D84-A784-26AC2AFB67D0}"/>
+              </a:ext>
+            </a:extLst>
+          </p:cNvPr>
+          <p:cNvSpPr/>
+          <p:nvPr/>
+        </p:nvSpPr>
+        <p:spPr>
+          <a:xfrm>
+            <a:off x="3212280" y="4550178"/>
+            <a:ext cx="2409840" cy="479880"/>
+          </a:xfrm>
+          <a:prstGeom prst="roundRect">
+            <a:avLst>
+              <a:gd name="adj" fmla="val 16667"/>
+            </a:avLst>
+          </a:prstGeom>
+          <a:solidFill>
+            <a:srgbClr val="E6B8AF"/>
+          </a:solidFill>
+          <a:ln w="28575">
+            <a:solidFill>
+              <a:srgbClr val="5B0F00"/>
+            </a:solidFill>
+            <a:round/>
+          </a:ln>
+        </p:spPr>
+        <p:style>
+          <a:lnRef idx="0">
+            <a:scrgbClr r="0" g="0" b="0"/>
+          </a:lnRef>
+          <a:fillRef idx="0">
+            <a:scrgbClr r="0" g="0" b="0"/>
+          </a:fillRef>
+          <a:effectRef idx="0">
+            <a:scrgbClr r="0" g="0" b="0"/>
+          </a:effectRef>
+          <a:fontRef idx="minor"/>
+        </p:style>
+        <p:txBody>
+          <a:bodyPr lIns="90000" tIns="91440" rIns="90000" bIns="91440" anchor="ctr">
+            <a:noAutofit/>
+          </a:bodyPr>
+          <a:lstStyle/>
+          <a:p>
+            <a:pPr algn="ctr">
+              <a:lnSpc>
+                <a:spcPct val="100000"/>
+              </a:lnSpc>
+              <a:tabLst>
+                <a:tab pos="0" algn="l"/>
+              </a:tabLst>
+            </a:pPr>
+            <a:r>
+              <a:rPr lang="pt-PT" sz="1800" b="1" u="none" strike="noStrike">
+                <a:solidFill>
+                  <a:srgbClr val="000000"/>
+                </a:solidFill>
+                <a:effectLst/>
+                <a:uFillTx/>
+                <a:latin typeface="Consolas"/>
+                <a:ea typeface="Consolas"/>
+              </a:rPr>
+              <a:t>68509</a:t>
+            </a:r>
+            <a:endParaRPr lang="pt-PT" sz="1800" b="0" u="none" strike="noStrike">
+              <a:solidFill>
+                <a:srgbClr val="000000"/>
+              </a:solidFill>
+              <a:effectLst/>
+              <a:uFillTx/>
+              <a:latin typeface="Arial"/>
+            </a:endParaRPr>
+          </a:p>
+        </p:txBody>
+      </p:sp>
+      <p:sp>
+        <p:nvSpPr>
+          <p:cNvPr id="45" name="Google Shape;78;p15">
+            <a:extLst>
+              <a:ext uri="{FF2B5EF4-FFF2-40B4-BE49-F238E27FC236}">
+                <a16:creationId xmlns:a16="http://schemas.microsoft.com/office/drawing/2014/main" id="{2C9AF98C-26E9-8D90-1A7A-75B6909A8672}"/>
+              </a:ext>
+            </a:extLst>
+          </p:cNvPr>
+          <p:cNvSpPr/>
+          <p:nvPr/>
+        </p:nvSpPr>
+        <p:spPr>
+          <a:xfrm>
+            <a:off x="3197160" y="7685778"/>
+            <a:ext cx="2409840" cy="479880"/>
+          </a:xfrm>
+          <a:prstGeom prst="roundRect">
+            <a:avLst>
+              <a:gd name="adj" fmla="val 16667"/>
+            </a:avLst>
+          </a:prstGeom>
+          <a:solidFill>
+            <a:srgbClr val="E6B8AF"/>
+          </a:solidFill>
+          <a:ln w="28575">
+            <a:solidFill>
+              <a:srgbClr val="5B0F00"/>
+            </a:solidFill>
+            <a:round/>
+          </a:ln>
+        </p:spPr>
+        <p:style>
+          <a:lnRef idx="0">
+            <a:scrgbClr r="0" g="0" b="0"/>
+          </a:lnRef>
+          <a:fillRef idx="0">
+            <a:scrgbClr r="0" g="0" b="0"/>
+          </a:fillRef>
+          <a:effectRef idx="0">
+            <a:scrgbClr r="0" g="0" b="0"/>
+          </a:effectRef>
+          <a:fontRef idx="minor"/>
+        </p:style>
+        <p:txBody>
+          <a:bodyPr lIns="90000" tIns="91440" rIns="90000" bIns="91440" anchor="ctr">
+            <a:noAutofit/>
+          </a:bodyPr>
+          <a:lstStyle/>
+          <a:p>
+            <a:pPr algn="ctr">
+              <a:lnSpc>
+                <a:spcPct val="100000"/>
+              </a:lnSpc>
+              <a:tabLst>
+                <a:tab pos="0" algn="l"/>
+              </a:tabLst>
+            </a:pPr>
+            <a:r>
+              <a:rPr lang="en-GB" sz="1800" b="1" u="none" strike="noStrike">
+                <a:solidFill>
+                  <a:srgbClr val="000000"/>
+                </a:solidFill>
+                <a:effectLst/>
+                <a:uFillTx/>
+                <a:latin typeface="Consolas"/>
+                <a:ea typeface="Consolas"/>
+              </a:rPr>
+              <a:t>68663</a:t>
+            </a:r>
+            <a:endParaRPr lang="pt-PT" sz="1800" b="0" u="none" strike="noStrike">
+              <a:solidFill>
+                <a:srgbClr val="000000"/>
+              </a:solidFill>
+              <a:effectLst/>
+              <a:uFillTx/>
+              <a:latin typeface="Arial"/>
+            </a:endParaRPr>
+          </a:p>
+        </p:txBody>
+      </p:sp>
+      <p:sp>
+        <p:nvSpPr>
+          <p:cNvPr id="46" name="Google Shape;79;p15">
+            <a:extLst>
+              <a:ext uri="{FF2B5EF4-FFF2-40B4-BE49-F238E27FC236}">
+                <a16:creationId xmlns:a16="http://schemas.microsoft.com/office/drawing/2014/main" id="{6C784DE9-4EE8-649A-DA42-1D8A5AAA84C4}"/>
+              </a:ext>
+            </a:extLst>
+          </p:cNvPr>
+          <p:cNvSpPr/>
+          <p:nvPr/>
+        </p:nvSpPr>
+        <p:spPr>
+          <a:xfrm>
+            <a:off x="3197160" y="9264960"/>
+            <a:ext cx="2409840" cy="479880"/>
+          </a:xfrm>
+          <a:prstGeom prst="roundRect">
+            <a:avLst>
+              <a:gd name="adj" fmla="val 16667"/>
+            </a:avLst>
+          </a:prstGeom>
+          <a:solidFill>
+            <a:srgbClr val="E6B8AF"/>
+          </a:solidFill>
+          <a:ln w="28575">
+            <a:solidFill>
+              <a:srgbClr val="5B0F00"/>
+            </a:solidFill>
+            <a:round/>
+          </a:ln>
+        </p:spPr>
+        <p:style>
+          <a:lnRef idx="0">
+            <a:scrgbClr r="0" g="0" b="0"/>
+          </a:lnRef>
+          <a:fillRef idx="0">
+            <a:scrgbClr r="0" g="0" b="0"/>
+          </a:fillRef>
+          <a:effectRef idx="0">
+            <a:scrgbClr r="0" g="0" b="0"/>
+          </a:effectRef>
+          <a:fontRef idx="minor"/>
+        </p:style>
+        <p:txBody>
+          <a:bodyPr lIns="90000" tIns="91440" rIns="90000" bIns="91440" anchor="ctr">
+            <a:noAutofit/>
+          </a:bodyPr>
+          <a:lstStyle/>
+          <a:p>
+            <a:pPr algn="ctr">
+              <a:lnSpc>
+                <a:spcPct val="100000"/>
+              </a:lnSpc>
+              <a:tabLst>
+                <a:tab pos="0" algn="l"/>
+              </a:tabLst>
+            </a:pPr>
+            <a:r>
+              <a:rPr lang="en-GB" sz="1800" b="1" u="none" strike="noStrike">
+                <a:solidFill>
+                  <a:srgbClr val="000000"/>
+                </a:solidFill>
+                <a:effectLst/>
+                <a:uFillTx/>
+                <a:latin typeface="Consolas"/>
+                <a:ea typeface="Consolas"/>
+              </a:rPr>
+              <a:t>70116</a:t>
+            </a:r>
+            <a:endParaRPr lang="pt-PT" sz="1800" b="0" u="none" strike="noStrike">
+              <a:solidFill>
+                <a:srgbClr val="000000"/>
+              </a:solidFill>
+              <a:effectLst/>
+              <a:uFillTx/>
+              <a:latin typeface="Arial"/>
+            </a:endParaRPr>
+          </a:p>
+        </p:txBody>
+      </p:sp>
+      <p:cxnSp>
+        <p:nvCxnSpPr>
+          <p:cNvPr id="47" name="Google Shape;80;p15">
+            <a:extLst>
+              <a:ext uri="{FF2B5EF4-FFF2-40B4-BE49-F238E27FC236}">
+                <a16:creationId xmlns:a16="http://schemas.microsoft.com/office/drawing/2014/main" id="{B9D2D41C-150C-D6BB-4081-15C328FB9C45}"/>
+              </a:ext>
+            </a:extLst>
+          </p:cNvPr>
+          <p:cNvCxnSpPr/>
+          <p:nvPr/>
+        </p:nvCxnSpPr>
+        <p:spPr>
+          <a:xfrm>
+            <a:off x="5607720" y="1625760"/>
+            <a:ext cx="16043400" cy="1080"/>
+          </a:xfrm>
+          <a:prstGeom prst="straightConnector1">
+            <a:avLst/>
+          </a:prstGeom>
+          <a:ln w="28575">
+            <a:solidFill>
+              <a:srgbClr val="999999"/>
+            </a:solidFill>
+            <a:prstDash val="dash"/>
+            <a:round/>
+          </a:ln>
+        </p:spPr>
+      </p:cxnSp>
+      <p:cxnSp>
+        <p:nvCxnSpPr>
+          <p:cNvPr id="48" name="Google Shape;81;p15">
+            <a:extLst>
+              <a:ext uri="{FF2B5EF4-FFF2-40B4-BE49-F238E27FC236}">
+                <a16:creationId xmlns:a16="http://schemas.microsoft.com/office/drawing/2014/main" id="{06D541C3-B34D-A031-2C27-3DE8A013D113}"/>
+              </a:ext>
+            </a:extLst>
+          </p:cNvPr>
+          <p:cNvCxnSpPr/>
+          <p:nvPr/>
+        </p:nvCxnSpPr>
+        <p:spPr>
+          <a:xfrm>
+            <a:off x="5607720" y="3201840"/>
+            <a:ext cx="16043400" cy="1080"/>
+          </a:xfrm>
+          <a:prstGeom prst="straightConnector1">
+            <a:avLst/>
+          </a:prstGeom>
+          <a:ln w="28575">
+            <a:solidFill>
+              <a:srgbClr val="999999"/>
+            </a:solidFill>
+            <a:prstDash val="dash"/>
+            <a:round/>
+          </a:ln>
+        </p:spPr>
+      </p:cxnSp>
+      <p:cxnSp>
+        <p:nvCxnSpPr>
+          <p:cNvPr id="49" name="Google Shape;82;p15">
+            <a:extLst>
+              <a:ext uri="{FF2B5EF4-FFF2-40B4-BE49-F238E27FC236}">
+                <a16:creationId xmlns:a16="http://schemas.microsoft.com/office/drawing/2014/main" id="{0B2587F0-5002-3140-013A-127D38B7CDEA}"/>
+              </a:ext>
+            </a:extLst>
+          </p:cNvPr>
+          <p:cNvCxnSpPr/>
+          <p:nvPr/>
+        </p:nvCxnSpPr>
+        <p:spPr>
+          <a:xfrm>
+            <a:off x="5607720" y="4777560"/>
+            <a:ext cx="16043400" cy="1080"/>
+          </a:xfrm>
+          <a:prstGeom prst="straightConnector1">
+            <a:avLst/>
+          </a:prstGeom>
+          <a:ln w="28575">
+            <a:solidFill>
+              <a:srgbClr val="999999"/>
+            </a:solidFill>
+            <a:prstDash val="dash"/>
+            <a:round/>
+          </a:ln>
+        </p:spPr>
+      </p:cxnSp>
+      <p:cxnSp>
+        <p:nvCxnSpPr>
+          <p:cNvPr id="50" name="Google Shape;83;p15">
+            <a:extLst>
+              <a:ext uri="{FF2B5EF4-FFF2-40B4-BE49-F238E27FC236}">
+                <a16:creationId xmlns:a16="http://schemas.microsoft.com/office/drawing/2014/main" id="{AECEDE54-E3AE-F7C3-7A32-0282FE4CDA59}"/>
+              </a:ext>
+            </a:extLst>
+          </p:cNvPr>
+          <p:cNvCxnSpPr/>
+          <p:nvPr/>
+        </p:nvCxnSpPr>
+        <p:spPr>
+          <a:xfrm>
+            <a:off x="5607720" y="6353640"/>
+            <a:ext cx="16043400" cy="1080"/>
+          </a:xfrm>
+          <a:prstGeom prst="straightConnector1">
+            <a:avLst/>
+          </a:prstGeom>
+          <a:ln w="28575">
+            <a:solidFill>
+              <a:srgbClr val="999999"/>
+            </a:solidFill>
+            <a:prstDash val="dash"/>
+            <a:round/>
+          </a:ln>
+        </p:spPr>
+      </p:cxnSp>
+      <p:cxnSp>
+        <p:nvCxnSpPr>
+          <p:cNvPr id="51" name="Google Shape;84;p15">
+            <a:extLst>
+              <a:ext uri="{FF2B5EF4-FFF2-40B4-BE49-F238E27FC236}">
+                <a16:creationId xmlns:a16="http://schemas.microsoft.com/office/drawing/2014/main" id="{E9816BE7-9A80-AF09-53FD-A6AD0A9A5C66}"/>
+              </a:ext>
+            </a:extLst>
+          </p:cNvPr>
+          <p:cNvCxnSpPr/>
+          <p:nvPr/>
+        </p:nvCxnSpPr>
+        <p:spPr>
+          <a:xfrm>
+            <a:off x="5607720" y="7929360"/>
+            <a:ext cx="16043400" cy="1080"/>
+          </a:xfrm>
+          <a:prstGeom prst="straightConnector1">
+            <a:avLst/>
+          </a:prstGeom>
+          <a:ln w="28575">
+            <a:solidFill>
+              <a:srgbClr val="999999"/>
+            </a:solidFill>
+            <a:prstDash val="dash"/>
+            <a:round/>
+          </a:ln>
+        </p:spPr>
+      </p:cxnSp>
+      <p:cxnSp>
+        <p:nvCxnSpPr>
+          <p:cNvPr id="52" name="Google Shape;85;p15">
+            <a:extLst>
+              <a:ext uri="{FF2B5EF4-FFF2-40B4-BE49-F238E27FC236}">
+                <a16:creationId xmlns:a16="http://schemas.microsoft.com/office/drawing/2014/main" id="{57493F2E-C542-AC27-8870-BFCFE82D4772}"/>
+              </a:ext>
+            </a:extLst>
+          </p:cNvPr>
+          <p:cNvCxnSpPr/>
+          <p:nvPr/>
+        </p:nvCxnSpPr>
+        <p:spPr>
+          <a:xfrm>
+            <a:off x="5607720" y="9505440"/>
+            <a:ext cx="16043400" cy="1080"/>
+          </a:xfrm>
+          <a:prstGeom prst="straightConnector1">
+            <a:avLst/>
+          </a:prstGeom>
+          <a:ln w="28575">
+            <a:solidFill>
+              <a:srgbClr val="999999"/>
+            </a:solidFill>
+            <a:prstDash val="dash"/>
+            <a:round/>
+          </a:ln>
+        </p:spPr>
+      </p:cxnSp>
+      <p:sp>
+        <p:nvSpPr>
+          <p:cNvPr id="53" name="Google Shape;86;p15">
+            <a:extLst>
+              <a:ext uri="{FF2B5EF4-FFF2-40B4-BE49-F238E27FC236}">
+                <a16:creationId xmlns:a16="http://schemas.microsoft.com/office/drawing/2014/main" id="{8EB2805B-B679-2A77-2CFD-48E0DE4437DA}"/>
+              </a:ext>
+            </a:extLst>
+          </p:cNvPr>
+          <p:cNvSpPr/>
+          <p:nvPr/>
+        </p:nvSpPr>
+        <p:spPr>
+          <a:xfrm>
+            <a:off x="6395940" y="1257039"/>
+            <a:ext cx="2436120" cy="3838374"/>
+          </a:xfrm>
+          <a:prstGeom prst="roundRect">
+            <a:avLst>
+              <a:gd name="adj" fmla="val 16667"/>
+            </a:avLst>
+          </a:prstGeom>
+          <a:solidFill>
+            <a:srgbClr val="D9EAD3"/>
+          </a:solidFill>
+          <a:ln w="28575">
+            <a:solidFill>
+              <a:srgbClr val="274E13"/>
+            </a:solidFill>
+            <a:round/>
+          </a:ln>
+        </p:spPr>
+        <p:style>
+          <a:lnRef idx="0">
+            <a:scrgbClr r="0" g="0" b="0"/>
+          </a:lnRef>
+          <a:fillRef idx="0">
+            <a:scrgbClr r="0" g="0" b="0"/>
+          </a:fillRef>
+          <a:effectRef idx="0">
+            <a:scrgbClr r="0" g="0" b="0"/>
+          </a:effectRef>
+          <a:fontRef idx="minor"/>
+        </p:style>
+        <p:txBody>
+          <a:bodyPr lIns="90000" tIns="91440" rIns="90000" bIns="91440" anchor="t">
+            <a:noAutofit/>
+          </a:bodyPr>
+          <a:lstStyle/>
+          <a:p>
+            <a:pPr>
+              <a:lnSpc>
+                <a:spcPct val="100000"/>
+              </a:lnSpc>
+            </a:pPr>
+            <a:r>
+              <a:rPr lang="en-GB" sz="1400" b="0" u="none" strike="noStrike" dirty="0">
+                <a:solidFill>
+                  <a:srgbClr val="000000"/>
+                </a:solidFill>
+                <a:effectLst/>
+                <a:uFillTx/>
+                <a:latin typeface="Consolas"/>
+                <a:ea typeface="Consolas"/>
+              </a:rPr>
+              <a:t>US1: </a:t>
+            </a:r>
+            <a:r>
+              <a:rPr lang="en-US" sz="1400" dirty="0">
+                <a:solidFill>
+                  <a:srgbClr val="000000"/>
+                </a:solidFill>
+                <a:ea typeface="Arial"/>
+              </a:rPr>
+              <a:t>As a Mindustry player, I want to upgrade machines with efficiency levels, so that I can create more resources per time unit in case of drills and other resource generators, and have better defences in case of weapons.</a:t>
+            </a:r>
+            <a:endParaRPr lang="pt-PT" sz="1400" b="0" u="none" strike="noStrike" dirty="0">
+              <a:solidFill>
+                <a:srgbClr val="000000"/>
+              </a:solidFill>
+              <a:effectLst/>
+              <a:uFillTx/>
+              <a:latin typeface="Arial"/>
+            </a:endParaRPr>
+          </a:p>
+        </p:txBody>
+      </p:sp>
+      <p:sp>
+        <p:nvSpPr>
+          <p:cNvPr id="54" name="Google Shape;87;p15">
+            <a:extLst>
+              <a:ext uri="{FF2B5EF4-FFF2-40B4-BE49-F238E27FC236}">
+                <a16:creationId xmlns:a16="http://schemas.microsoft.com/office/drawing/2014/main" id="{3B1F639D-90B0-1A58-C539-E09F74DF2154}"/>
+              </a:ext>
+            </a:extLst>
+          </p:cNvPr>
+          <p:cNvSpPr/>
+          <p:nvPr/>
+        </p:nvSpPr>
+        <p:spPr>
+          <a:xfrm>
+            <a:off x="167400" y="6967080"/>
+            <a:ext cx="2436120" cy="2775600"/>
+          </a:xfrm>
+          <a:prstGeom prst="roundRect">
+            <a:avLst>
+              <a:gd name="adj" fmla="val 16667"/>
+            </a:avLst>
+          </a:prstGeom>
+          <a:solidFill>
+            <a:srgbClr val="D9EAD3"/>
+          </a:solidFill>
+          <a:ln w="28575">
+            <a:solidFill>
+              <a:srgbClr val="274E13"/>
+            </a:solidFill>
+            <a:round/>
+          </a:ln>
+        </p:spPr>
+        <p:style>
+          <a:lnRef idx="0">
+            <a:scrgbClr r="0" g="0" b="0"/>
+          </a:lnRef>
+          <a:fillRef idx="0">
+            <a:scrgbClr r="0" g="0" b="0"/>
+          </a:fillRef>
+          <a:effectRef idx="0">
+            <a:scrgbClr r="0" g="0" b="0"/>
+          </a:effectRef>
+          <a:fontRef idx="minor"/>
+        </p:style>
+        <p:txBody>
+          <a:bodyPr lIns="90000" tIns="91440" rIns="90000" bIns="91440" anchor="t">
+            <a:noAutofit/>
+          </a:bodyPr>
+          <a:lstStyle/>
+          <a:p>
+            <a:pPr>
+              <a:lnSpc>
+                <a:spcPct val="100000"/>
+              </a:lnSpc>
+            </a:pPr>
+            <a:r>
+              <a:rPr lang="en-GB" sz="1400" b="0" u="none" strike="noStrike" dirty="0">
+                <a:solidFill>
+                  <a:srgbClr val="000000"/>
+                </a:solidFill>
+                <a:effectLst/>
+                <a:uFillTx/>
+                <a:latin typeface="Consolas"/>
+                <a:ea typeface="Consolas"/>
+              </a:rPr>
+              <a:t>US3: </a:t>
+            </a:r>
+            <a:r>
+              <a:rPr lang="en-US" sz="1400" dirty="0">
+                <a:solidFill>
+                  <a:srgbClr val="000000"/>
+                </a:solidFill>
+                <a:ea typeface="Arial"/>
+              </a:rPr>
+              <a:t>As a veteran player, I want to orchestrate a new defensive strategy by pulling enemy air units to the ground, so that I can play the game in a more creative way.</a:t>
+            </a:r>
+            <a:endParaRPr lang="pt-PT" sz="1400" b="0" u="none" strike="noStrike" dirty="0">
+              <a:solidFill>
+                <a:srgbClr val="000000"/>
+              </a:solidFill>
+              <a:effectLst/>
+              <a:uFillTx/>
+              <a:latin typeface="Arial"/>
+            </a:endParaRPr>
+          </a:p>
+        </p:txBody>
+      </p:sp>
+      <p:cxnSp>
+        <p:nvCxnSpPr>
+          <p:cNvPr id="55" name="Google Shape;91;p15">
+            <a:extLst>
+              <a:ext uri="{FF2B5EF4-FFF2-40B4-BE49-F238E27FC236}">
+                <a16:creationId xmlns:a16="http://schemas.microsoft.com/office/drawing/2014/main" id="{0C8C7E71-73BF-6917-49BA-2EBCE132FB2F}"/>
+              </a:ext>
+            </a:extLst>
+          </p:cNvPr>
+          <p:cNvCxnSpPr/>
+          <p:nvPr/>
+        </p:nvCxnSpPr>
+        <p:spPr>
+          <a:xfrm>
+            <a:off x="2874240" y="-28440"/>
+            <a:ext cx="1080" cy="10857960"/>
+          </a:xfrm>
+          <a:prstGeom prst="straightConnector1">
+            <a:avLst/>
+          </a:prstGeom>
+          <a:ln w="38100">
+            <a:solidFill>
+              <a:srgbClr val="5B0F00"/>
+            </a:solidFill>
+            <a:round/>
+          </a:ln>
+        </p:spPr>
+      </p:cxnSp>
+      <p:sp>
+        <p:nvSpPr>
+          <p:cNvPr id="56" name="Google Shape;92;p15">
+            <a:extLst>
+              <a:ext uri="{FF2B5EF4-FFF2-40B4-BE49-F238E27FC236}">
+                <a16:creationId xmlns:a16="http://schemas.microsoft.com/office/drawing/2014/main" id="{189D625E-A668-C98F-BF0D-6B132E939699}"/>
+              </a:ext>
+            </a:extLst>
+          </p:cNvPr>
+          <p:cNvSpPr/>
+          <p:nvPr/>
+        </p:nvSpPr>
+        <p:spPr>
+          <a:xfrm>
+            <a:off x="6422220" y="6126258"/>
+            <a:ext cx="2436120" cy="3616422"/>
+          </a:xfrm>
+          <a:prstGeom prst="roundRect">
+            <a:avLst>
+              <a:gd name="adj" fmla="val 16667"/>
+            </a:avLst>
+          </a:prstGeom>
+          <a:solidFill>
+            <a:srgbClr val="D9EAD3"/>
+          </a:solidFill>
+          <a:ln w="28575">
+            <a:solidFill>
+              <a:srgbClr val="274E13"/>
+            </a:solidFill>
+            <a:round/>
+          </a:ln>
+        </p:spPr>
+        <p:style>
+          <a:lnRef idx="0">
+            <a:scrgbClr r="0" g="0" b="0"/>
+          </a:lnRef>
+          <a:fillRef idx="0">
+            <a:scrgbClr r="0" g="0" b="0"/>
+          </a:fillRef>
+          <a:effectRef idx="0">
+            <a:scrgbClr r="0" g="0" b="0"/>
+          </a:effectRef>
+          <a:fontRef idx="minor"/>
+        </p:style>
+        <p:txBody>
+          <a:bodyPr lIns="90000" tIns="91440" rIns="90000" bIns="91440" anchor="t">
+            <a:noAutofit/>
+          </a:bodyPr>
+          <a:lstStyle/>
+          <a:p>
+            <a:pPr>
+              <a:lnSpc>
+                <a:spcPct val="100000"/>
+              </a:lnSpc>
+            </a:pPr>
+            <a:r>
+              <a:rPr lang="en-GB" sz="1400" b="0" u="none" strike="noStrike" dirty="0">
+                <a:solidFill>
+                  <a:srgbClr val="000000"/>
+                </a:solidFill>
+                <a:effectLst/>
+                <a:uFillTx/>
+                <a:latin typeface="Consolas"/>
+                <a:ea typeface="Consolas"/>
+              </a:rPr>
+              <a:t>US2: </a:t>
+            </a:r>
+            <a:r>
+              <a:rPr lang="en-US" sz="1400" dirty="0">
+                <a:solidFill>
+                  <a:srgbClr val="000000"/>
+                </a:solidFill>
+                <a:ea typeface="Arial"/>
+              </a:rPr>
+              <a:t>As a player that likes to keep track of everything, I want to receive a text warning everytime I misplace a conveyor for whatever reason and obtain possible fixes, so that I can have everything under my watch and build solid structures quickly.</a:t>
+            </a:r>
+            <a:endParaRPr lang="pt-PT" sz="1400" b="0" u="none" strike="noStrike" dirty="0">
+              <a:solidFill>
+                <a:srgbClr val="000000"/>
+              </a:solidFill>
+              <a:effectLst/>
+              <a:uFillTx/>
+              <a:latin typeface="Arial"/>
+            </a:endParaRPr>
+          </a:p>
+        </p:txBody>
+      </p:sp>
+      <p:sp>
+        <p:nvSpPr>
+          <p:cNvPr id="5" name="Google Shape;86;p15">
+            <a:extLst>
+              <a:ext uri="{FF2B5EF4-FFF2-40B4-BE49-F238E27FC236}">
+                <a16:creationId xmlns:a16="http://schemas.microsoft.com/office/drawing/2014/main" id="{FE843AF7-7EBD-7A79-BE98-0005E7DCFC37}"/>
+              </a:ext>
+            </a:extLst>
+          </p:cNvPr>
+          <p:cNvSpPr/>
+          <p:nvPr/>
+        </p:nvSpPr>
+        <p:spPr>
+          <a:xfrm>
+            <a:off x="15532560" y="5913499"/>
+            <a:ext cx="2436120" cy="879561"/>
+          </a:xfrm>
+          <a:prstGeom prst="roundRect">
+            <a:avLst>
+              <a:gd name="adj" fmla="val 16667"/>
+            </a:avLst>
+          </a:prstGeom>
+          <a:solidFill>
+            <a:srgbClr val="D9EAD3"/>
+          </a:solidFill>
+          <a:ln w="28575">
+            <a:solidFill>
+              <a:srgbClr val="274E13"/>
+            </a:solidFill>
+            <a:round/>
+          </a:ln>
+        </p:spPr>
+        <p:style>
+          <a:lnRef idx="0">
+            <a:scrgbClr r="0" g="0" b="0"/>
+          </a:lnRef>
+          <a:fillRef idx="0">
+            <a:scrgbClr r="0" g="0" b="0"/>
+          </a:fillRef>
+          <a:effectRef idx="0">
+            <a:scrgbClr r="0" g="0" b="0"/>
+          </a:effectRef>
+          <a:fontRef idx="minor"/>
+        </p:style>
+        <p:txBody>
+          <a:bodyPr lIns="90000" tIns="91440" rIns="90000" bIns="91440" anchor="t">
+            <a:noAutofit/>
+          </a:bodyPr>
+          <a:lstStyle/>
+          <a:p>
+            <a:pPr>
+              <a:lnSpc>
+                <a:spcPct val="100000"/>
+              </a:lnSpc>
+            </a:pPr>
+            <a:r>
+              <a:rPr lang="pt-PT" sz="1400" b="0" u="none" strike="noStrike" dirty="0">
+                <a:solidFill>
+                  <a:srgbClr val="000000"/>
+                </a:solidFill>
+                <a:effectLst/>
+                <a:uFillTx/>
+                <a:latin typeface="Arial"/>
+              </a:rPr>
+              <a:t>Review and map the existing code related to machines.</a:t>
+            </a:r>
+          </a:p>
+        </p:txBody>
+      </p:sp>
+      <p:sp>
+        <p:nvSpPr>
+          <p:cNvPr id="6" name="Rectangle 1">
+            <a:extLst>
+              <a:ext uri="{FF2B5EF4-FFF2-40B4-BE49-F238E27FC236}">
+                <a16:creationId xmlns:a16="http://schemas.microsoft.com/office/drawing/2014/main" id="{6C42508C-D1BE-4FBE-C644-D8EDDDDA8C6B}"/>
+              </a:ext>
+            </a:extLst>
+          </p:cNvPr>
+          <p:cNvSpPr>
+            <a:spLocks noChangeArrowheads="1"/>
+          </p:cNvSpPr>
+          <p:nvPr/>
+        </p:nvSpPr>
+        <p:spPr bwMode="auto">
+          <a:xfrm>
+            <a:off x="0" y="0"/>
+            <a:ext cx="21599525" cy="0"/>
+          </a:xfrm>
+          <a:prstGeom prst="rect">
+            <a:avLst/>
+          </a:prstGeom>
+          <a:noFill/>
+          <a:ln>
+            <a:noFill/>
+          </a:ln>
+          <a:effectLst/>
+          <a:extLst>
+            <a:ext uri="{909E8E84-426E-40DD-AFC4-6F175D3DCCD1}">
+              <a14:hiddenFill xmlns:a14="http://schemas.microsoft.com/office/drawing/2010/main">
+                <a:solidFill>
+                  <a:schemeClr val="accent1"/>
+                </a:solidFill>
+              </a14:hiddenFill>
+            </a:ext>
+            <a:ext uri="{91240B29-F687-4F45-9708-019B960494DF}">
+              <a14:hiddenLine xmlns:a14="http://schemas.microsoft.com/office/drawing/2010/main" w="9525">
+                <a:solidFill>
+                  <a:schemeClr val="tx1"/>
+                </a:solidFill>
+                <a:miter lim="800000"/>
+                <a:headEnd/>
+                <a:tailEnd/>
+              </a14:hiddenLine>
+            </a:ext>
+            <a:ext uri="{AF507438-7753-43E0-B8FC-AC1667EBCBE1}">
+              <a14:hiddenEffects xmlns:a14="http://schemas.microsoft.com/office/drawing/2010/main">
+                <a:effectLst>
+                  <a:outerShdw dist="35921" dir="2700000" algn="ctr" rotWithShape="0">
+                    <a:schemeClr val="bg2"/>
+                  </a:outerShdw>
+                </a:effectLst>
+              </a14:hiddenEffects>
+            </a:ext>
+          </a:extLst>
+        </p:spPr>
+        <p:txBody>
+          <a:bodyPr vert="horz" wrap="none" lIns="91440" tIns="45720" rIns="91440" bIns="45720" numCol="1" anchor="ctr" anchorCtr="0" compatLnSpc="1">
+            <a:prstTxWarp prst="textNoShape">
+              <a:avLst/>
+            </a:prstTxWarp>
+            <a:spAutoFit/>
+          </a:bodyPr>
+          <a:lstStyle/>
+          <a:p>
+            <a:pPr marL="0" marR="0" lvl="0" indent="0" algn="l" defTabSz="914400" rtl="0" eaLnBrk="0" fontAlgn="base" latinLnBrk="0" hangingPunct="0">
+              <a:lnSpc>
+                <a:spcPct val="100000"/>
+              </a:lnSpc>
+              <a:spcBef>
+                <a:spcPct val="0"/>
+              </a:spcBef>
+              <a:spcAft>
+                <a:spcPct val="0"/>
+              </a:spcAft>
+              <a:buClrTx/>
+              <a:buSzTx/>
+              <a:buFontTx/>
+              <a:buChar char="•"/>
+              <a:tabLst/>
+            </a:pPr>
+            <a:r>
+              <a:rPr kumimoji="0" lang="en-US" altLang="en-US" sz="1800" b="0" i="0" u="none" strike="noStrike" cap="none" normalizeH="0" baseline="0">
+                <a:ln>
+                  <a:noFill/>
+                </a:ln>
+                <a:solidFill>
+                  <a:schemeClr val="tx1"/>
+                </a:solidFill>
+                <a:effectLst/>
+                <a:latin typeface="Arial" panose="020B0604020202020204" pitchFamily="34" charset="0"/>
+              </a:rPr>
+              <a:t>Review and map the existing code related to machine efficiency and stats.</a:t>
+            </a:r>
+          </a:p>
+          <a:p>
+            <a:pPr marL="0" marR="0" lvl="0" indent="0" algn="l" defTabSz="914400" rtl="0" eaLnBrk="0" fontAlgn="base" latinLnBrk="0" hangingPunct="0">
+              <a:lnSpc>
+                <a:spcPct val="100000"/>
+              </a:lnSpc>
+              <a:spcBef>
+                <a:spcPct val="0"/>
+              </a:spcBef>
+              <a:spcAft>
+                <a:spcPct val="0"/>
+              </a:spcAft>
+              <a:buClrTx/>
+              <a:buSzTx/>
+              <a:buFontTx/>
+              <a:buChar char="•"/>
+              <a:tabLst/>
+            </a:pPr>
+            <a:endParaRPr kumimoji="0" lang="en-US" altLang="en-US" sz="1800" b="0" i="0" u="none" strike="noStrike" cap="none" normalizeH="0" baseline="0">
+              <a:ln>
+                <a:noFill/>
+              </a:ln>
+              <a:solidFill>
+                <a:schemeClr val="tx1"/>
+              </a:solidFill>
+              <a:effectLst/>
+              <a:latin typeface="Arial" panose="020B0604020202020204" pitchFamily="34" charset="0"/>
+            </a:endParaRPr>
+          </a:p>
+        </p:txBody>
+      </p:sp>
+      <p:sp>
+        <p:nvSpPr>
+          <p:cNvPr id="8" name="Google Shape;86;p15">
+            <a:extLst>
+              <a:ext uri="{FF2B5EF4-FFF2-40B4-BE49-F238E27FC236}">
+                <a16:creationId xmlns:a16="http://schemas.microsoft.com/office/drawing/2014/main" id="{6956E678-D824-4F4B-C6E6-30647D1963FB}"/>
+              </a:ext>
+            </a:extLst>
+          </p:cNvPr>
+          <p:cNvSpPr/>
+          <p:nvPr/>
+        </p:nvSpPr>
+        <p:spPr>
+          <a:xfrm>
+            <a:off x="15532560" y="7553740"/>
+            <a:ext cx="2436120" cy="1158203"/>
+          </a:xfrm>
+          <a:prstGeom prst="roundRect">
+            <a:avLst>
+              <a:gd name="adj" fmla="val 16667"/>
+            </a:avLst>
+          </a:prstGeom>
+          <a:solidFill>
+            <a:srgbClr val="D9EAD3"/>
+          </a:solidFill>
+          <a:ln w="28575">
+            <a:solidFill>
+              <a:srgbClr val="274E13"/>
+            </a:solidFill>
+            <a:round/>
+          </a:ln>
+        </p:spPr>
+        <p:style>
+          <a:lnRef idx="0">
+            <a:scrgbClr r="0" g="0" b="0"/>
+          </a:lnRef>
+          <a:fillRef idx="0">
+            <a:scrgbClr r="0" g="0" b="0"/>
+          </a:fillRef>
+          <a:effectRef idx="0">
+            <a:scrgbClr r="0" g="0" b="0"/>
+          </a:effectRef>
+          <a:fontRef idx="minor"/>
+        </p:style>
+        <p:txBody>
+          <a:bodyPr lIns="90000" tIns="91440" rIns="90000" bIns="91440" anchor="t">
+            <a:noAutofit/>
+          </a:bodyPr>
+          <a:lstStyle/>
+          <a:p>
+            <a:pPr>
+              <a:lnSpc>
+                <a:spcPct val="100000"/>
+              </a:lnSpc>
+            </a:pPr>
+            <a:r>
+              <a:rPr lang="pt-PT" sz="1400" b="0" u="none" strike="noStrike" dirty="0">
+                <a:solidFill>
+                  <a:srgbClr val="000000"/>
+                </a:solidFill>
+                <a:effectLst/>
+                <a:uFillTx/>
+                <a:latin typeface="Arial"/>
+              </a:rPr>
+              <a:t>Identify the classes that could support upgrade levels or if there’s a need to create new ones/</a:t>
+            </a:r>
+          </a:p>
+        </p:txBody>
+      </p:sp>
+      <p:sp>
+        <p:nvSpPr>
+          <p:cNvPr id="9" name="Google Shape;86;p15">
+            <a:extLst>
+              <a:ext uri="{FF2B5EF4-FFF2-40B4-BE49-F238E27FC236}">
+                <a16:creationId xmlns:a16="http://schemas.microsoft.com/office/drawing/2014/main" id="{41F72F27-EAAB-B0F0-0519-257DFD25A299}"/>
+              </a:ext>
+            </a:extLst>
+          </p:cNvPr>
+          <p:cNvSpPr/>
+          <p:nvPr/>
+        </p:nvSpPr>
+        <p:spPr>
+          <a:xfrm>
+            <a:off x="15536797" y="9128380"/>
+            <a:ext cx="2436120" cy="1158203"/>
+          </a:xfrm>
+          <a:prstGeom prst="roundRect">
+            <a:avLst>
+              <a:gd name="adj" fmla="val 16667"/>
+            </a:avLst>
+          </a:prstGeom>
+          <a:solidFill>
+            <a:srgbClr val="D9EAD3"/>
+          </a:solidFill>
+          <a:ln w="28575">
+            <a:solidFill>
+              <a:srgbClr val="274E13"/>
+            </a:solidFill>
+            <a:round/>
+          </a:ln>
+        </p:spPr>
+        <p:style>
+          <a:lnRef idx="0">
+            <a:scrgbClr r="0" g="0" b="0"/>
+          </a:lnRef>
+          <a:fillRef idx="0">
+            <a:scrgbClr r="0" g="0" b="0"/>
+          </a:fillRef>
+          <a:effectRef idx="0">
+            <a:scrgbClr r="0" g="0" b="0"/>
+          </a:effectRef>
+          <a:fontRef idx="minor"/>
+        </p:style>
+        <p:txBody>
+          <a:bodyPr lIns="90000" tIns="91440" rIns="90000" bIns="91440" anchor="t">
+            <a:noAutofit/>
+          </a:bodyPr>
+          <a:lstStyle/>
+          <a:p>
+            <a:pPr>
+              <a:lnSpc>
+                <a:spcPct val="100000"/>
+              </a:lnSpc>
+            </a:pPr>
+            <a:r>
+              <a:rPr lang="pt-PT" sz="1400" dirty="0">
+                <a:solidFill>
+                  <a:srgbClr val="000000"/>
+                </a:solidFill>
+                <a:latin typeface="Arial"/>
+              </a:rPr>
+              <a:t>Draft possible methods needed for implementing efficieny upgrades.</a:t>
+            </a:r>
+            <a:endParaRPr lang="pt-PT" sz="1400" b="0" u="none" strike="noStrike" dirty="0">
+              <a:solidFill>
+                <a:srgbClr val="000000"/>
+              </a:solidFill>
+              <a:effectLst/>
+              <a:uFillTx/>
+              <a:latin typeface="Arial"/>
+            </a:endParaRPr>
+          </a:p>
+        </p:txBody>
+      </p:sp>
+      <p:sp>
+        <p:nvSpPr>
+          <p:cNvPr id="10" name="Google Shape;86;p15">
+            <a:extLst>
+              <a:ext uri="{FF2B5EF4-FFF2-40B4-BE49-F238E27FC236}">
+                <a16:creationId xmlns:a16="http://schemas.microsoft.com/office/drawing/2014/main" id="{8560747D-AD5F-22DC-F591-73A5396DD9B4}"/>
+              </a:ext>
+            </a:extLst>
+          </p:cNvPr>
+          <p:cNvSpPr/>
+          <p:nvPr/>
+        </p:nvSpPr>
+        <p:spPr>
+          <a:xfrm>
+            <a:off x="15532560" y="1127097"/>
+            <a:ext cx="2436120" cy="1158203"/>
+          </a:xfrm>
+          <a:prstGeom prst="roundRect">
+            <a:avLst>
+              <a:gd name="adj" fmla="val 16667"/>
+            </a:avLst>
+          </a:prstGeom>
+          <a:solidFill>
+            <a:srgbClr val="D9EAD3"/>
+          </a:solidFill>
+          <a:ln w="28575">
+            <a:solidFill>
+              <a:srgbClr val="274E13"/>
+            </a:solidFill>
+            <a:round/>
+          </a:ln>
+        </p:spPr>
+        <p:style>
+          <a:lnRef idx="0">
+            <a:scrgbClr r="0" g="0" b="0"/>
+          </a:lnRef>
+          <a:fillRef idx="0">
+            <a:scrgbClr r="0" g="0" b="0"/>
+          </a:fillRef>
+          <a:effectRef idx="0">
+            <a:scrgbClr r="0" g="0" b="0"/>
+          </a:effectRef>
+          <a:fontRef idx="minor"/>
+        </p:style>
+        <p:txBody>
+          <a:bodyPr lIns="90000" tIns="91440" rIns="90000" bIns="91440" anchor="t">
+            <a:noAutofit/>
+          </a:bodyPr>
+          <a:lstStyle/>
+          <a:p>
+            <a:pPr>
+              <a:lnSpc>
+                <a:spcPct val="100000"/>
+              </a:lnSpc>
+            </a:pPr>
+            <a:r>
+              <a:rPr lang="pt-PT" sz="1400" b="0" u="none" strike="noStrike" dirty="0">
+                <a:solidFill>
+                  <a:srgbClr val="000000"/>
+                </a:solidFill>
+                <a:effectLst/>
+                <a:uFillTx/>
+                <a:latin typeface="Arial"/>
+              </a:rPr>
+              <a:t>Review and map converyor related code, such as error detection.</a:t>
+            </a:r>
+          </a:p>
+        </p:txBody>
+      </p:sp>
+      <p:sp>
+        <p:nvSpPr>
+          <p:cNvPr id="11" name="Google Shape;86;p15">
+            <a:extLst>
+              <a:ext uri="{FF2B5EF4-FFF2-40B4-BE49-F238E27FC236}">
+                <a16:creationId xmlns:a16="http://schemas.microsoft.com/office/drawing/2014/main" id="{41BA1EF1-9533-C028-C0F2-CC4DF63227CF}"/>
+              </a:ext>
+            </a:extLst>
+          </p:cNvPr>
+          <p:cNvSpPr/>
+          <p:nvPr/>
+        </p:nvSpPr>
+        <p:spPr>
+          <a:xfrm>
+            <a:off x="15532560" y="2726544"/>
+            <a:ext cx="2436120" cy="1158203"/>
+          </a:xfrm>
+          <a:prstGeom prst="roundRect">
+            <a:avLst>
+              <a:gd name="adj" fmla="val 16667"/>
+            </a:avLst>
+          </a:prstGeom>
+          <a:solidFill>
+            <a:srgbClr val="D9EAD3"/>
+          </a:solidFill>
+          <a:ln w="28575">
+            <a:solidFill>
+              <a:srgbClr val="274E13"/>
+            </a:solidFill>
+            <a:round/>
+          </a:ln>
+        </p:spPr>
+        <p:style>
+          <a:lnRef idx="0">
+            <a:scrgbClr r="0" g="0" b="0"/>
+          </a:lnRef>
+          <a:fillRef idx="0">
+            <a:scrgbClr r="0" g="0" b="0"/>
+          </a:fillRef>
+          <a:effectRef idx="0">
+            <a:scrgbClr r="0" g="0" b="0"/>
+          </a:effectRef>
+          <a:fontRef idx="minor"/>
+        </p:style>
+        <p:txBody>
+          <a:bodyPr lIns="90000" tIns="91440" rIns="90000" bIns="91440" anchor="t">
+            <a:noAutofit/>
+          </a:bodyPr>
+          <a:lstStyle/>
+          <a:p>
+            <a:pPr>
+              <a:lnSpc>
+                <a:spcPct val="100000"/>
+              </a:lnSpc>
+            </a:pPr>
+            <a:r>
+              <a:rPr lang="pt-PT" sz="1400" b="0" u="none" strike="noStrike" dirty="0">
+                <a:solidFill>
+                  <a:srgbClr val="000000"/>
+                </a:solidFill>
+                <a:effectLst/>
+                <a:uFillTx/>
+                <a:latin typeface="Arial"/>
+              </a:rPr>
+              <a:t>Locate where warnings and destination checks are currently handled</a:t>
+            </a:r>
+          </a:p>
+        </p:txBody>
+      </p:sp>
+      <p:sp>
+        <p:nvSpPr>
+          <p:cNvPr id="12" name="Google Shape;86;p15">
+            <a:extLst>
+              <a:ext uri="{FF2B5EF4-FFF2-40B4-BE49-F238E27FC236}">
+                <a16:creationId xmlns:a16="http://schemas.microsoft.com/office/drawing/2014/main" id="{A691CAC6-7058-B5AB-F38C-D4E2C2CF898B}"/>
+              </a:ext>
+            </a:extLst>
+          </p:cNvPr>
+          <p:cNvSpPr/>
+          <p:nvPr/>
+        </p:nvSpPr>
+        <p:spPr>
+          <a:xfrm>
+            <a:off x="15532560" y="4316956"/>
+            <a:ext cx="2436120" cy="1158203"/>
+          </a:xfrm>
+          <a:prstGeom prst="roundRect">
+            <a:avLst>
+              <a:gd name="adj" fmla="val 16667"/>
+            </a:avLst>
+          </a:prstGeom>
+          <a:solidFill>
+            <a:srgbClr val="D9EAD3"/>
+          </a:solidFill>
+          <a:ln w="28575">
+            <a:solidFill>
+              <a:srgbClr val="274E13"/>
+            </a:solidFill>
+            <a:round/>
+          </a:ln>
+        </p:spPr>
+        <p:style>
+          <a:lnRef idx="0">
+            <a:scrgbClr r="0" g="0" b="0"/>
+          </a:lnRef>
+          <a:fillRef idx="0">
+            <a:scrgbClr r="0" g="0" b="0"/>
+          </a:fillRef>
+          <a:effectRef idx="0">
+            <a:scrgbClr r="0" g="0" b="0"/>
+          </a:effectRef>
+          <a:fontRef idx="minor"/>
+        </p:style>
+        <p:txBody>
+          <a:bodyPr lIns="90000" tIns="91440" rIns="90000" bIns="91440" anchor="t">
+            <a:noAutofit/>
+          </a:bodyPr>
+          <a:lstStyle/>
+          <a:p>
+            <a:pPr>
+              <a:lnSpc>
+                <a:spcPct val="100000"/>
+              </a:lnSpc>
+            </a:pPr>
+            <a:r>
+              <a:rPr lang="pt-PT" sz="1400" dirty="0">
+                <a:solidFill>
+                  <a:srgbClr val="000000"/>
+                </a:solidFill>
+                <a:latin typeface="Arial"/>
+              </a:rPr>
+              <a:t>Define the structure and behavior of the new warning messages</a:t>
+            </a:r>
+            <a:endParaRPr lang="pt-PT" sz="1400" b="0" u="none" strike="noStrike" dirty="0">
+              <a:solidFill>
+                <a:srgbClr val="000000"/>
+              </a:solidFill>
+              <a:effectLst/>
+              <a:uFillTx/>
+              <a:latin typeface="Arial"/>
+            </a:endParaRPr>
+          </a:p>
+        </p:txBody>
+      </p:sp>
+      <p:sp>
+        <p:nvSpPr>
+          <p:cNvPr id="2" name="Google Shape;86;p15">
+            <a:extLst>
+              <a:ext uri="{FF2B5EF4-FFF2-40B4-BE49-F238E27FC236}">
+                <a16:creationId xmlns:a16="http://schemas.microsoft.com/office/drawing/2014/main" id="{4CBF43E1-0378-1E31-182F-22085CD351A0}"/>
+              </a:ext>
+            </a:extLst>
+          </p:cNvPr>
+          <p:cNvSpPr/>
+          <p:nvPr/>
+        </p:nvSpPr>
+        <p:spPr>
+          <a:xfrm>
+            <a:off x="12424500" y="1382566"/>
+            <a:ext cx="2409840" cy="879561"/>
+          </a:xfrm>
+          <a:prstGeom prst="roundRect">
+            <a:avLst>
+              <a:gd name="adj" fmla="val 16667"/>
+            </a:avLst>
+          </a:prstGeom>
+          <a:solidFill>
+            <a:srgbClr val="D9EAD3"/>
+          </a:solidFill>
+          <a:ln w="28575">
+            <a:solidFill>
+              <a:srgbClr val="274E13"/>
+            </a:solidFill>
+            <a:round/>
+          </a:ln>
+        </p:spPr>
+        <p:style>
+          <a:lnRef idx="0">
+            <a:scrgbClr r="0" g="0" b="0"/>
+          </a:lnRef>
+          <a:fillRef idx="0">
+            <a:scrgbClr r="0" g="0" b="0"/>
+          </a:fillRef>
+          <a:effectRef idx="0">
+            <a:scrgbClr r="0" g="0" b="0"/>
+          </a:effectRef>
+          <a:fontRef idx="minor"/>
+        </p:style>
+        <p:txBody>
+          <a:bodyPr lIns="90000" tIns="91440" rIns="90000" bIns="91440" anchor="t">
+            <a:noAutofit/>
+          </a:bodyPr>
+          <a:lstStyle/>
+          <a:p>
+            <a:pPr>
+              <a:lnSpc>
+                <a:spcPct val="100000"/>
+              </a:lnSpc>
+            </a:pPr>
+            <a:r>
+              <a:rPr lang="pt-PT" sz="1400" dirty="0">
+                <a:solidFill>
+                  <a:srgbClr val="000000"/>
+                </a:solidFill>
+                <a:latin typeface="Arial"/>
+              </a:rPr>
+              <a:t>US1</a:t>
+            </a:r>
+            <a:r>
+              <a:rPr lang="en-US" sz="1400" dirty="0">
+                <a:solidFill>
+                  <a:srgbClr val="000000"/>
+                </a:solidFill>
+                <a:latin typeface="Arial"/>
+              </a:rPr>
+              <a:t>: implementing</a:t>
+            </a:r>
+          </a:p>
+          <a:p>
+            <a:pPr>
+              <a:lnSpc>
+                <a:spcPct val="100000"/>
+              </a:lnSpc>
+            </a:pPr>
+            <a:endParaRPr lang="pt-PT" sz="1400" b="0" u="none" strike="noStrike" dirty="0">
+              <a:solidFill>
+                <a:srgbClr val="000000"/>
+              </a:solidFill>
+              <a:effectLst/>
+              <a:uFillTx/>
+              <a:latin typeface="Arial"/>
+            </a:endParaRPr>
+          </a:p>
+        </p:txBody>
+      </p:sp>
+      <p:sp>
+        <p:nvSpPr>
+          <p:cNvPr id="3" name="Google Shape;86;p15">
+            <a:extLst>
+              <a:ext uri="{FF2B5EF4-FFF2-40B4-BE49-F238E27FC236}">
+                <a16:creationId xmlns:a16="http://schemas.microsoft.com/office/drawing/2014/main" id="{7152AF48-7718-F551-126C-AF68C04A9C13}"/>
+              </a:ext>
+            </a:extLst>
+          </p:cNvPr>
+          <p:cNvSpPr/>
+          <p:nvPr/>
+        </p:nvSpPr>
+        <p:spPr>
+          <a:xfrm>
+            <a:off x="12395880" y="5940128"/>
+            <a:ext cx="2393010" cy="879561"/>
+          </a:xfrm>
+          <a:prstGeom prst="roundRect">
+            <a:avLst>
+              <a:gd name="adj" fmla="val 16667"/>
+            </a:avLst>
+          </a:prstGeom>
+          <a:solidFill>
+            <a:srgbClr val="D9EAD3"/>
+          </a:solidFill>
+          <a:ln w="28575">
+            <a:solidFill>
+              <a:srgbClr val="274E13"/>
+            </a:solidFill>
+            <a:round/>
+          </a:ln>
+        </p:spPr>
+        <p:style>
+          <a:lnRef idx="0">
+            <a:scrgbClr r="0" g="0" b="0"/>
+          </a:lnRef>
+          <a:fillRef idx="0">
+            <a:scrgbClr r="0" g="0" b="0"/>
+          </a:fillRef>
+          <a:effectRef idx="0">
+            <a:scrgbClr r="0" g="0" b="0"/>
+          </a:effectRef>
+          <a:fontRef idx="minor"/>
+        </p:style>
+        <p:txBody>
+          <a:bodyPr lIns="90000" tIns="91440" rIns="90000" bIns="91440" anchor="t">
+            <a:noAutofit/>
+          </a:bodyPr>
+          <a:lstStyle/>
+          <a:p>
+            <a:pPr>
+              <a:lnSpc>
+                <a:spcPct val="100000"/>
+              </a:lnSpc>
+            </a:pPr>
+            <a:r>
+              <a:rPr lang="pt-PT" sz="1400" dirty="0">
+                <a:solidFill>
+                  <a:srgbClr val="000000"/>
+                </a:solidFill>
+                <a:latin typeface="Arial"/>
+              </a:rPr>
+              <a:t>US2</a:t>
+            </a:r>
+            <a:r>
+              <a:rPr lang="en-US" sz="1400" dirty="0">
+                <a:solidFill>
+                  <a:srgbClr val="000000"/>
+                </a:solidFill>
+                <a:latin typeface="Arial"/>
+              </a:rPr>
+              <a:t>: implementing</a:t>
+            </a:r>
+          </a:p>
+          <a:p>
+            <a:pPr>
+              <a:lnSpc>
+                <a:spcPct val="100000"/>
+              </a:lnSpc>
+            </a:pPr>
+            <a:endParaRPr lang="pt-PT" sz="1400" b="0" u="none" strike="noStrike" dirty="0">
+              <a:solidFill>
+                <a:srgbClr val="000000"/>
+              </a:solidFill>
+              <a:effectLst/>
+              <a:uFillTx/>
+              <a:latin typeface="Arial"/>
+            </a:endParaRPr>
+          </a:p>
+        </p:txBody>
+      </p:sp>
+      <p:sp>
+        <p:nvSpPr>
+          <p:cNvPr id="4" name="Google Shape;86;p15">
+            <a:extLst>
+              <a:ext uri="{FF2B5EF4-FFF2-40B4-BE49-F238E27FC236}">
+                <a16:creationId xmlns:a16="http://schemas.microsoft.com/office/drawing/2014/main" id="{5757B0F9-E62B-9C63-CCEA-87F0FE43BE99}"/>
+              </a:ext>
+            </a:extLst>
+          </p:cNvPr>
+          <p:cNvSpPr/>
+          <p:nvPr/>
+        </p:nvSpPr>
+        <p:spPr>
+          <a:xfrm>
+            <a:off x="12424500" y="2775604"/>
+            <a:ext cx="2409840" cy="879561"/>
+          </a:xfrm>
+          <a:prstGeom prst="roundRect">
+            <a:avLst>
+              <a:gd name="adj" fmla="val 16667"/>
+            </a:avLst>
+          </a:prstGeom>
+          <a:solidFill>
+            <a:srgbClr val="D9EAD3"/>
+          </a:solidFill>
+          <a:ln w="28575">
+            <a:solidFill>
+              <a:srgbClr val="274E13"/>
+            </a:solidFill>
+            <a:round/>
+          </a:ln>
+        </p:spPr>
+        <p:style>
+          <a:lnRef idx="0">
+            <a:scrgbClr r="0" g="0" b="0"/>
+          </a:lnRef>
+          <a:fillRef idx="0">
+            <a:scrgbClr r="0" g="0" b="0"/>
+          </a:fillRef>
+          <a:effectRef idx="0">
+            <a:scrgbClr r="0" g="0" b="0"/>
+          </a:effectRef>
+          <a:fontRef idx="minor"/>
+        </p:style>
+        <p:txBody>
+          <a:bodyPr lIns="90000" tIns="91440" rIns="90000" bIns="91440" anchor="t">
+            <a:noAutofit/>
+          </a:bodyPr>
+          <a:lstStyle/>
+          <a:p>
+            <a:pPr>
+              <a:lnSpc>
+                <a:spcPct val="100000"/>
+              </a:lnSpc>
+            </a:pPr>
+            <a:r>
+              <a:rPr lang="pt-PT" sz="1400" dirty="0">
+                <a:solidFill>
+                  <a:srgbClr val="000000"/>
+                </a:solidFill>
+                <a:latin typeface="Arial"/>
+              </a:rPr>
+              <a:t>US1</a:t>
+            </a:r>
+            <a:r>
+              <a:rPr lang="en-US" sz="1400" dirty="0">
+                <a:solidFill>
+                  <a:srgbClr val="000000"/>
+                </a:solidFill>
+                <a:latin typeface="Arial"/>
+              </a:rPr>
+              <a:t>: implementing</a:t>
+            </a:r>
+          </a:p>
+          <a:p>
+            <a:pPr>
+              <a:lnSpc>
+                <a:spcPct val="100000"/>
+              </a:lnSpc>
+            </a:pPr>
+            <a:endParaRPr lang="pt-PT" sz="1400" b="0" u="none" strike="noStrike" dirty="0">
+              <a:solidFill>
+                <a:srgbClr val="000000"/>
+              </a:solidFill>
+              <a:effectLst/>
+              <a:uFillTx/>
+              <a:latin typeface="Arial"/>
+            </a:endParaRPr>
+          </a:p>
+        </p:txBody>
+      </p:sp>
+      <p:sp>
+        <p:nvSpPr>
+          <p:cNvPr id="7" name="Google Shape;86;p15">
+            <a:extLst>
+              <a:ext uri="{FF2B5EF4-FFF2-40B4-BE49-F238E27FC236}">
+                <a16:creationId xmlns:a16="http://schemas.microsoft.com/office/drawing/2014/main" id="{5CF0B81E-A683-EA4D-D850-9682EFE8D6DB}"/>
+              </a:ext>
+            </a:extLst>
+          </p:cNvPr>
+          <p:cNvSpPr/>
+          <p:nvPr/>
+        </p:nvSpPr>
+        <p:spPr>
+          <a:xfrm>
+            <a:off x="12395880" y="4329211"/>
+            <a:ext cx="2409840" cy="879561"/>
+          </a:xfrm>
+          <a:prstGeom prst="roundRect">
+            <a:avLst>
+              <a:gd name="adj" fmla="val 16667"/>
+            </a:avLst>
+          </a:prstGeom>
+          <a:solidFill>
+            <a:srgbClr val="D9EAD3"/>
+          </a:solidFill>
+          <a:ln w="28575">
+            <a:solidFill>
+              <a:srgbClr val="274E13"/>
+            </a:solidFill>
+            <a:round/>
+          </a:ln>
+        </p:spPr>
+        <p:style>
+          <a:lnRef idx="0">
+            <a:scrgbClr r="0" g="0" b="0"/>
+          </a:lnRef>
+          <a:fillRef idx="0">
+            <a:scrgbClr r="0" g="0" b="0"/>
+          </a:fillRef>
+          <a:effectRef idx="0">
+            <a:scrgbClr r="0" g="0" b="0"/>
+          </a:effectRef>
+          <a:fontRef idx="minor"/>
+        </p:style>
+        <p:txBody>
+          <a:bodyPr lIns="90000" tIns="91440" rIns="90000" bIns="91440" anchor="t">
+            <a:noAutofit/>
+          </a:bodyPr>
+          <a:lstStyle/>
+          <a:p>
+            <a:pPr>
+              <a:lnSpc>
+                <a:spcPct val="100000"/>
+              </a:lnSpc>
+            </a:pPr>
+            <a:r>
+              <a:rPr lang="pt-PT" sz="1400" dirty="0">
+                <a:solidFill>
+                  <a:srgbClr val="000000"/>
+                </a:solidFill>
+                <a:latin typeface="Arial"/>
+              </a:rPr>
+              <a:t>US1</a:t>
+            </a:r>
+            <a:r>
+              <a:rPr lang="en-US" sz="1400" dirty="0">
+                <a:solidFill>
+                  <a:srgbClr val="000000"/>
+                </a:solidFill>
+                <a:latin typeface="Arial"/>
+              </a:rPr>
+              <a:t>: implementing</a:t>
+            </a:r>
+          </a:p>
+          <a:p>
+            <a:pPr>
+              <a:lnSpc>
+                <a:spcPct val="100000"/>
+              </a:lnSpc>
+            </a:pPr>
+            <a:endParaRPr lang="pt-PT" sz="1400" b="0" u="none" strike="noStrike" dirty="0">
+              <a:solidFill>
+                <a:srgbClr val="000000"/>
+              </a:solidFill>
+              <a:effectLst/>
+              <a:uFillTx/>
+              <a:latin typeface="Arial"/>
+            </a:endParaRPr>
+          </a:p>
+        </p:txBody>
+      </p:sp>
+      <p:sp>
+        <p:nvSpPr>
+          <p:cNvPr id="14" name="Google Shape;86;p15">
+            <a:extLst>
+              <a:ext uri="{FF2B5EF4-FFF2-40B4-BE49-F238E27FC236}">
+                <a16:creationId xmlns:a16="http://schemas.microsoft.com/office/drawing/2014/main" id="{5D9ABB46-445D-2846-9DF9-AF41EB61458A}"/>
+              </a:ext>
+            </a:extLst>
+          </p:cNvPr>
+          <p:cNvSpPr/>
+          <p:nvPr/>
+        </p:nvSpPr>
+        <p:spPr>
+          <a:xfrm>
+            <a:off x="12395880" y="9079172"/>
+            <a:ext cx="2393010" cy="879561"/>
+          </a:xfrm>
+          <a:prstGeom prst="roundRect">
+            <a:avLst>
+              <a:gd name="adj" fmla="val 16667"/>
+            </a:avLst>
+          </a:prstGeom>
+          <a:solidFill>
+            <a:srgbClr val="D9EAD3"/>
+          </a:solidFill>
+          <a:ln w="28575">
+            <a:solidFill>
+              <a:srgbClr val="274E13"/>
+            </a:solidFill>
+            <a:round/>
+          </a:ln>
+        </p:spPr>
+        <p:style>
+          <a:lnRef idx="0">
+            <a:scrgbClr r="0" g="0" b="0"/>
+          </a:lnRef>
+          <a:fillRef idx="0">
+            <a:scrgbClr r="0" g="0" b="0"/>
+          </a:fillRef>
+          <a:effectRef idx="0">
+            <a:scrgbClr r="0" g="0" b="0"/>
+          </a:effectRef>
+          <a:fontRef idx="minor"/>
+        </p:style>
+        <p:txBody>
+          <a:bodyPr lIns="90000" tIns="91440" rIns="90000" bIns="91440" anchor="t">
+            <a:noAutofit/>
+          </a:bodyPr>
+          <a:lstStyle/>
+          <a:p>
+            <a:pPr>
+              <a:lnSpc>
+                <a:spcPct val="100000"/>
+              </a:lnSpc>
+            </a:pPr>
+            <a:r>
+              <a:rPr lang="pt-PT" sz="1400" dirty="0">
+                <a:solidFill>
+                  <a:srgbClr val="000000"/>
+                </a:solidFill>
+                <a:latin typeface="Arial"/>
+              </a:rPr>
+              <a:t>US2</a:t>
+            </a:r>
+            <a:r>
+              <a:rPr lang="en-US" sz="1400" dirty="0">
+                <a:solidFill>
+                  <a:srgbClr val="000000"/>
+                </a:solidFill>
+                <a:latin typeface="Arial"/>
+              </a:rPr>
+              <a:t>: implementing</a:t>
+            </a:r>
+          </a:p>
+          <a:p>
+            <a:pPr>
+              <a:lnSpc>
+                <a:spcPct val="100000"/>
+              </a:lnSpc>
+            </a:pPr>
+            <a:endParaRPr lang="pt-PT" sz="1400" b="0" u="none" strike="noStrike" dirty="0">
+              <a:solidFill>
+                <a:srgbClr val="000000"/>
+              </a:solidFill>
+              <a:effectLst/>
+              <a:uFillTx/>
+              <a:latin typeface="Arial"/>
+            </a:endParaRPr>
+          </a:p>
+        </p:txBody>
+      </p:sp>
+      <p:sp>
+        <p:nvSpPr>
+          <p:cNvPr id="15" name="Google Shape;86;p15">
+            <a:extLst>
+              <a:ext uri="{FF2B5EF4-FFF2-40B4-BE49-F238E27FC236}">
+                <a16:creationId xmlns:a16="http://schemas.microsoft.com/office/drawing/2014/main" id="{D10A08A2-C74B-536F-7A4C-1C968E1849AA}"/>
+              </a:ext>
+            </a:extLst>
+          </p:cNvPr>
+          <p:cNvSpPr/>
+          <p:nvPr/>
+        </p:nvSpPr>
+        <p:spPr>
+          <a:xfrm>
+            <a:off x="12424500" y="7385601"/>
+            <a:ext cx="2393010" cy="879561"/>
+          </a:xfrm>
+          <a:prstGeom prst="roundRect">
+            <a:avLst>
+              <a:gd name="adj" fmla="val 16667"/>
+            </a:avLst>
+          </a:prstGeom>
+          <a:solidFill>
+            <a:srgbClr val="D9EAD3"/>
+          </a:solidFill>
+          <a:ln w="28575">
+            <a:solidFill>
+              <a:srgbClr val="274E13"/>
+            </a:solidFill>
+            <a:round/>
+          </a:ln>
+        </p:spPr>
+        <p:style>
+          <a:lnRef idx="0">
+            <a:scrgbClr r="0" g="0" b="0"/>
+          </a:lnRef>
+          <a:fillRef idx="0">
+            <a:scrgbClr r="0" g="0" b="0"/>
+          </a:fillRef>
+          <a:effectRef idx="0">
+            <a:scrgbClr r="0" g="0" b="0"/>
+          </a:effectRef>
+          <a:fontRef idx="minor"/>
+        </p:style>
+        <p:txBody>
+          <a:bodyPr lIns="90000" tIns="91440" rIns="90000" bIns="91440" anchor="t">
+            <a:noAutofit/>
+          </a:bodyPr>
+          <a:lstStyle/>
+          <a:p>
+            <a:pPr>
+              <a:lnSpc>
+                <a:spcPct val="100000"/>
+              </a:lnSpc>
+            </a:pPr>
+            <a:r>
+              <a:rPr lang="pt-PT" sz="1400" dirty="0">
+                <a:solidFill>
+                  <a:srgbClr val="000000"/>
+                </a:solidFill>
+                <a:latin typeface="Arial"/>
+              </a:rPr>
+              <a:t>US2</a:t>
+            </a:r>
+            <a:r>
+              <a:rPr lang="en-US" sz="1400" dirty="0">
+                <a:solidFill>
+                  <a:srgbClr val="000000"/>
+                </a:solidFill>
+                <a:latin typeface="Arial"/>
+              </a:rPr>
+              <a:t>: implementing</a:t>
+            </a:r>
+          </a:p>
+          <a:p>
+            <a:pPr>
+              <a:lnSpc>
+                <a:spcPct val="100000"/>
+              </a:lnSpc>
+            </a:pPr>
+            <a:endParaRPr lang="pt-PT" sz="1400" b="0" u="none" strike="noStrike" dirty="0">
+              <a:solidFill>
+                <a:srgbClr val="000000"/>
+              </a:solidFill>
+              <a:effectLst/>
+              <a:uFillTx/>
+              <a:latin typeface="Arial"/>
+            </a:endParaRPr>
+          </a:p>
+        </p:txBody>
+      </p:sp>
+    </p:spTree>
+    <p:extLst>
+      <p:ext uri="{BB962C8B-B14F-4D97-AF65-F5344CB8AC3E}">
+        <p14:creationId xmlns:p14="http://schemas.microsoft.com/office/powerpoint/2010/main" val="3933779894"/>
       </p:ext>
     </p:extLst>
   </p:cSld>

--- a/SE202526/Management/Scrum Board.pptx
+++ b/SE202526/Management/Scrum Board.pptx
@@ -23,6 +23,7 @@
     <p:sldId id="271" r:id="rId17"/>
     <p:sldId id="272" r:id="rId18"/>
     <p:sldId id="273" r:id="rId19"/>
+    <p:sldId id="274" r:id="rId20"/>
   </p:sldIdLst>
   <p:sldSz cx="21599525" cy="10799763"/>
   <p:notesSz cx="7559675" cy="10691813"/>
@@ -20788,6 +20789,2683 @@
     <p:extLst>
       <p:ext uri="{BB962C8B-B14F-4D97-AF65-F5344CB8AC3E}">
         <p14:creationId xmlns:p14="http://schemas.microsoft.com/office/powerpoint/2010/main" val="3933779894"/>
+      </p:ext>
+    </p:extLst>
+  </p:cSld>
+  <p:clrMapOvr>
+    <a:masterClrMapping/>
+  </p:clrMapOvr>
+</p:sld>
+</file>
+
+<file path=ppt/slides/slide19.xml><?xml version="1.0" encoding="utf-8"?>
+<p:sld xmlns:a="http://schemas.openxmlformats.org/drawingml/2006/main" xmlns:r="http://schemas.openxmlformats.org/officeDocument/2006/relationships" xmlns:p="http://schemas.openxmlformats.org/presentationml/2006/main">
+  <p:cSld>
+    <p:spTree>
+      <p:nvGrpSpPr>
+        <p:cNvPr id="1" name="">
+          <a:extLst>
+            <a:ext uri="{FF2B5EF4-FFF2-40B4-BE49-F238E27FC236}">
+              <a16:creationId xmlns:a16="http://schemas.microsoft.com/office/drawing/2014/main" id="{1D06A9F8-57ED-18F9-4BA0-35BDB3DD43B6}"/>
+            </a:ext>
+          </a:extLst>
+        </p:cNvPr>
+        <p:cNvGrpSpPr/>
+        <p:nvPr/>
+      </p:nvGrpSpPr>
+      <p:grpSpPr>
+        <a:xfrm>
+          <a:off x="0" y="0"/>
+          <a:ext cx="0" cy="0"/>
+          <a:chOff x="0" y="0"/>
+          <a:chExt cx="0" cy="0"/>
+        </a:xfrm>
+      </p:grpSpPr>
+      <p:cxnSp>
+        <p:nvCxnSpPr>
+          <p:cNvPr id="33" name="Google Shape;66;p15">
+            <a:extLst>
+              <a:ext uri="{FF2B5EF4-FFF2-40B4-BE49-F238E27FC236}">
+                <a16:creationId xmlns:a16="http://schemas.microsoft.com/office/drawing/2014/main" id="{D9C9D0FD-2945-1266-2E78-354B8FC3E878}"/>
+              </a:ext>
+            </a:extLst>
+          </p:cNvPr>
+          <p:cNvCxnSpPr/>
+          <p:nvPr/>
+        </p:nvCxnSpPr>
+        <p:spPr>
+          <a:xfrm>
+            <a:off x="5944680" y="-31320"/>
+            <a:ext cx="1080" cy="10857600"/>
+          </a:xfrm>
+          <a:prstGeom prst="straightConnector1">
+            <a:avLst/>
+          </a:prstGeom>
+          <a:ln w="38100">
+            <a:solidFill>
+              <a:srgbClr val="5B0F00"/>
+            </a:solidFill>
+            <a:round/>
+          </a:ln>
+        </p:spPr>
+      </p:cxnSp>
+      <p:sp>
+        <p:nvSpPr>
+          <p:cNvPr id="34" name="Google Shape;67;p15">
+            <a:extLst>
+              <a:ext uri="{FF2B5EF4-FFF2-40B4-BE49-F238E27FC236}">
+                <a16:creationId xmlns:a16="http://schemas.microsoft.com/office/drawing/2014/main" id="{3A8CD87B-6F20-BB6E-97BF-6055D88C363E}"/>
+              </a:ext>
+            </a:extLst>
+          </p:cNvPr>
+          <p:cNvSpPr/>
+          <p:nvPr/>
+        </p:nvSpPr>
+        <p:spPr>
+          <a:xfrm>
+            <a:off x="3197160" y="84240"/>
+            <a:ext cx="2409840" cy="479880"/>
+          </a:xfrm>
+          <a:prstGeom prst="roundRect">
+            <a:avLst>
+              <a:gd name="adj" fmla="val 16667"/>
+            </a:avLst>
+          </a:prstGeom>
+          <a:solidFill>
+            <a:srgbClr val="F9CB9C"/>
+          </a:solidFill>
+          <a:ln w="28575">
+            <a:solidFill>
+              <a:srgbClr val="B45F06"/>
+            </a:solidFill>
+            <a:round/>
+          </a:ln>
+        </p:spPr>
+        <p:style>
+          <a:lnRef idx="0">
+            <a:scrgbClr r="0" g="0" b="0"/>
+          </a:lnRef>
+          <a:fillRef idx="0">
+            <a:scrgbClr r="0" g="0" b="0"/>
+          </a:fillRef>
+          <a:effectRef idx="0">
+            <a:scrgbClr r="0" g="0" b="0"/>
+          </a:effectRef>
+          <a:fontRef idx="minor"/>
+        </p:style>
+        <p:txBody>
+          <a:bodyPr lIns="90000" tIns="91440" rIns="90000" bIns="91440" anchor="ctr">
+            <a:noAutofit/>
+          </a:bodyPr>
+          <a:lstStyle/>
+          <a:p>
+            <a:pPr algn="ctr">
+              <a:lnSpc>
+                <a:spcPct val="100000"/>
+              </a:lnSpc>
+              <a:tabLst>
+                <a:tab pos="0" algn="l"/>
+              </a:tabLst>
+            </a:pPr>
+            <a:r>
+              <a:rPr lang="en-GB" sz="1800" b="1" u="none" strike="noStrike">
+                <a:solidFill>
+                  <a:srgbClr val="000000"/>
+                </a:solidFill>
+                <a:effectLst/>
+                <a:uFillTx/>
+                <a:latin typeface="Consolas"/>
+                <a:ea typeface="Consolas"/>
+              </a:rPr>
+              <a:t>Student ID</a:t>
+            </a:r>
+            <a:endParaRPr lang="pt-PT" sz="1800" b="0" u="none" strike="noStrike">
+              <a:solidFill>
+                <a:srgbClr val="000000"/>
+              </a:solidFill>
+              <a:effectLst/>
+              <a:uFillTx/>
+              <a:latin typeface="Arial"/>
+            </a:endParaRPr>
+          </a:p>
+        </p:txBody>
+      </p:sp>
+      <p:sp>
+        <p:nvSpPr>
+          <p:cNvPr id="35" name="Google Shape;68;p15">
+            <a:extLst>
+              <a:ext uri="{FF2B5EF4-FFF2-40B4-BE49-F238E27FC236}">
+                <a16:creationId xmlns:a16="http://schemas.microsoft.com/office/drawing/2014/main" id="{C18FBEF4-00A5-6FA4-9F7E-7BC524C7A2A3}"/>
+              </a:ext>
+            </a:extLst>
+          </p:cNvPr>
+          <p:cNvSpPr/>
+          <p:nvPr/>
+        </p:nvSpPr>
+        <p:spPr>
+          <a:xfrm>
+            <a:off x="6281640" y="84240"/>
+            <a:ext cx="2409840" cy="479880"/>
+          </a:xfrm>
+          <a:prstGeom prst="roundRect">
+            <a:avLst>
+              <a:gd name="adj" fmla="val 16667"/>
+            </a:avLst>
+          </a:prstGeom>
+          <a:solidFill>
+            <a:srgbClr val="F9CB9C"/>
+          </a:solidFill>
+          <a:ln w="28575">
+            <a:solidFill>
+              <a:srgbClr val="B45F06"/>
+            </a:solidFill>
+            <a:round/>
+          </a:ln>
+        </p:spPr>
+        <p:style>
+          <a:lnRef idx="0">
+            <a:scrgbClr r="0" g="0" b="0"/>
+          </a:lnRef>
+          <a:fillRef idx="0">
+            <a:scrgbClr r="0" g="0" b="0"/>
+          </a:fillRef>
+          <a:effectRef idx="0">
+            <a:scrgbClr r="0" g="0" b="0"/>
+          </a:effectRef>
+          <a:fontRef idx="minor"/>
+        </p:style>
+        <p:txBody>
+          <a:bodyPr lIns="90000" tIns="91440" rIns="90000" bIns="91440" anchor="ctr">
+            <a:noAutofit/>
+          </a:bodyPr>
+          <a:lstStyle/>
+          <a:p>
+            <a:pPr algn="ctr">
+              <a:lnSpc>
+                <a:spcPct val="100000"/>
+              </a:lnSpc>
+              <a:tabLst>
+                <a:tab pos="0" algn="l"/>
+              </a:tabLst>
+            </a:pPr>
+            <a:r>
+              <a:rPr lang="en-GB" sz="1800" b="1" u="none" strike="noStrike">
+                <a:solidFill>
+                  <a:srgbClr val="000000"/>
+                </a:solidFill>
+                <a:effectLst/>
+                <a:uFillTx/>
+                <a:latin typeface="Consolas"/>
+                <a:ea typeface="Consolas"/>
+              </a:rPr>
+              <a:t>Story</a:t>
+            </a:r>
+            <a:endParaRPr lang="pt-PT" sz="1800" b="0" u="none" strike="noStrike">
+              <a:solidFill>
+                <a:srgbClr val="000000"/>
+              </a:solidFill>
+              <a:effectLst/>
+              <a:uFillTx/>
+              <a:latin typeface="Arial"/>
+            </a:endParaRPr>
+          </a:p>
+        </p:txBody>
+      </p:sp>
+      <p:sp>
+        <p:nvSpPr>
+          <p:cNvPr id="36" name="Google Shape;69;p15">
+            <a:extLst>
+              <a:ext uri="{FF2B5EF4-FFF2-40B4-BE49-F238E27FC236}">
+                <a16:creationId xmlns:a16="http://schemas.microsoft.com/office/drawing/2014/main" id="{BBEB81C7-9B48-61AB-A931-FCEF17015F5C}"/>
+              </a:ext>
+            </a:extLst>
+          </p:cNvPr>
+          <p:cNvSpPr/>
+          <p:nvPr/>
+        </p:nvSpPr>
+        <p:spPr>
+          <a:xfrm>
+            <a:off x="9366120" y="84240"/>
+            <a:ext cx="2409840" cy="479880"/>
+          </a:xfrm>
+          <a:prstGeom prst="roundRect">
+            <a:avLst>
+              <a:gd name="adj" fmla="val 16667"/>
+            </a:avLst>
+          </a:prstGeom>
+          <a:solidFill>
+            <a:srgbClr val="F9CB9C"/>
+          </a:solidFill>
+          <a:ln w="28575">
+            <a:solidFill>
+              <a:srgbClr val="B45F06"/>
+            </a:solidFill>
+            <a:round/>
+          </a:ln>
+        </p:spPr>
+        <p:style>
+          <a:lnRef idx="0">
+            <a:scrgbClr r="0" g="0" b="0"/>
+          </a:lnRef>
+          <a:fillRef idx="0">
+            <a:scrgbClr r="0" g="0" b="0"/>
+          </a:fillRef>
+          <a:effectRef idx="0">
+            <a:scrgbClr r="0" g="0" b="0"/>
+          </a:effectRef>
+          <a:fontRef idx="minor"/>
+        </p:style>
+        <p:txBody>
+          <a:bodyPr lIns="90000" tIns="91440" rIns="90000" bIns="91440" anchor="ctr">
+            <a:noAutofit/>
+          </a:bodyPr>
+          <a:lstStyle/>
+          <a:p>
+            <a:pPr algn="ctr">
+              <a:lnSpc>
+                <a:spcPct val="100000"/>
+              </a:lnSpc>
+              <a:tabLst>
+                <a:tab pos="0" algn="l"/>
+              </a:tabLst>
+            </a:pPr>
+            <a:r>
+              <a:rPr lang="en-GB" sz="1800" b="1" u="none" strike="noStrike">
+                <a:solidFill>
+                  <a:srgbClr val="000000"/>
+                </a:solidFill>
+                <a:effectLst/>
+                <a:uFillTx/>
+                <a:latin typeface="Consolas"/>
+                <a:ea typeface="Consolas"/>
+              </a:rPr>
+              <a:t>To Do</a:t>
+            </a:r>
+            <a:endParaRPr lang="pt-PT" sz="1800" b="0" u="none" strike="noStrike">
+              <a:solidFill>
+                <a:srgbClr val="000000"/>
+              </a:solidFill>
+              <a:effectLst/>
+              <a:uFillTx/>
+              <a:latin typeface="Arial"/>
+            </a:endParaRPr>
+          </a:p>
+        </p:txBody>
+      </p:sp>
+      <p:sp>
+        <p:nvSpPr>
+          <p:cNvPr id="37" name="Google Shape;70;p15">
+            <a:extLst>
+              <a:ext uri="{FF2B5EF4-FFF2-40B4-BE49-F238E27FC236}">
+                <a16:creationId xmlns:a16="http://schemas.microsoft.com/office/drawing/2014/main" id="{3531F911-4422-57C0-FA7A-BF6844E0A9FC}"/>
+              </a:ext>
+            </a:extLst>
+          </p:cNvPr>
+          <p:cNvSpPr/>
+          <p:nvPr/>
+        </p:nvSpPr>
+        <p:spPr>
+          <a:xfrm>
+            <a:off x="12395880" y="84240"/>
+            <a:ext cx="2409840" cy="479880"/>
+          </a:xfrm>
+          <a:prstGeom prst="roundRect">
+            <a:avLst>
+              <a:gd name="adj" fmla="val 16667"/>
+            </a:avLst>
+          </a:prstGeom>
+          <a:solidFill>
+            <a:srgbClr val="F9CB9C"/>
+          </a:solidFill>
+          <a:ln w="28575">
+            <a:solidFill>
+              <a:srgbClr val="B45F06"/>
+            </a:solidFill>
+            <a:round/>
+          </a:ln>
+        </p:spPr>
+        <p:style>
+          <a:lnRef idx="0">
+            <a:scrgbClr r="0" g="0" b="0"/>
+          </a:lnRef>
+          <a:fillRef idx="0">
+            <a:scrgbClr r="0" g="0" b="0"/>
+          </a:fillRef>
+          <a:effectRef idx="0">
+            <a:scrgbClr r="0" g="0" b="0"/>
+          </a:effectRef>
+          <a:fontRef idx="minor"/>
+        </p:style>
+        <p:txBody>
+          <a:bodyPr lIns="90000" tIns="91440" rIns="90000" bIns="91440" anchor="ctr">
+            <a:noAutofit/>
+          </a:bodyPr>
+          <a:lstStyle/>
+          <a:p>
+            <a:pPr algn="ctr">
+              <a:lnSpc>
+                <a:spcPct val="100000"/>
+              </a:lnSpc>
+              <a:tabLst>
+                <a:tab pos="0" algn="l"/>
+              </a:tabLst>
+            </a:pPr>
+            <a:r>
+              <a:rPr lang="en-GB" sz="1800" b="1" u="none" strike="noStrike">
+                <a:solidFill>
+                  <a:srgbClr val="000000"/>
+                </a:solidFill>
+                <a:effectLst/>
+                <a:uFillTx/>
+                <a:latin typeface="Consolas"/>
+                <a:ea typeface="Consolas"/>
+              </a:rPr>
+              <a:t>Doing</a:t>
+            </a:r>
+            <a:endParaRPr lang="pt-PT" sz="1800" b="0" u="none" strike="noStrike">
+              <a:solidFill>
+                <a:srgbClr val="000000"/>
+              </a:solidFill>
+              <a:effectLst/>
+              <a:uFillTx/>
+              <a:latin typeface="Arial"/>
+            </a:endParaRPr>
+          </a:p>
+        </p:txBody>
+      </p:sp>
+      <p:sp>
+        <p:nvSpPr>
+          <p:cNvPr id="38" name="Google Shape;71;p15">
+            <a:extLst>
+              <a:ext uri="{FF2B5EF4-FFF2-40B4-BE49-F238E27FC236}">
+                <a16:creationId xmlns:a16="http://schemas.microsoft.com/office/drawing/2014/main" id="{27B37BF0-7636-D106-DEC3-BE5380F3B6F1}"/>
+              </a:ext>
+            </a:extLst>
+          </p:cNvPr>
+          <p:cNvSpPr/>
+          <p:nvPr/>
+        </p:nvSpPr>
+        <p:spPr>
+          <a:xfrm>
+            <a:off x="15532560" y="84240"/>
+            <a:ext cx="2409840" cy="479880"/>
+          </a:xfrm>
+          <a:prstGeom prst="roundRect">
+            <a:avLst>
+              <a:gd name="adj" fmla="val 16667"/>
+            </a:avLst>
+          </a:prstGeom>
+          <a:solidFill>
+            <a:srgbClr val="F9CB9C"/>
+          </a:solidFill>
+          <a:ln w="28575">
+            <a:solidFill>
+              <a:srgbClr val="B45F06"/>
+            </a:solidFill>
+            <a:round/>
+          </a:ln>
+        </p:spPr>
+        <p:style>
+          <a:lnRef idx="0">
+            <a:scrgbClr r="0" g="0" b="0"/>
+          </a:lnRef>
+          <a:fillRef idx="0">
+            <a:scrgbClr r="0" g="0" b="0"/>
+          </a:fillRef>
+          <a:effectRef idx="0">
+            <a:scrgbClr r="0" g="0" b="0"/>
+          </a:effectRef>
+          <a:fontRef idx="minor"/>
+        </p:style>
+        <p:txBody>
+          <a:bodyPr lIns="90000" tIns="91440" rIns="90000" bIns="91440" anchor="ctr">
+            <a:noAutofit/>
+          </a:bodyPr>
+          <a:lstStyle/>
+          <a:p>
+            <a:pPr algn="ctr">
+              <a:lnSpc>
+                <a:spcPct val="100000"/>
+              </a:lnSpc>
+              <a:tabLst>
+                <a:tab pos="0" algn="l"/>
+              </a:tabLst>
+            </a:pPr>
+            <a:r>
+              <a:rPr lang="en-GB" sz="1800" b="1" u="none" strike="noStrike">
+                <a:solidFill>
+                  <a:srgbClr val="000000"/>
+                </a:solidFill>
+                <a:effectLst/>
+                <a:uFillTx/>
+                <a:latin typeface="Consolas"/>
+                <a:ea typeface="Consolas"/>
+              </a:rPr>
+              <a:t>Review</a:t>
+            </a:r>
+            <a:endParaRPr lang="pt-PT" sz="1800" b="0" u="none" strike="noStrike">
+              <a:solidFill>
+                <a:srgbClr val="000000"/>
+              </a:solidFill>
+              <a:effectLst/>
+              <a:uFillTx/>
+              <a:latin typeface="Arial"/>
+            </a:endParaRPr>
+          </a:p>
+        </p:txBody>
+      </p:sp>
+      <p:sp>
+        <p:nvSpPr>
+          <p:cNvPr id="39" name="Google Shape;72;p15">
+            <a:extLst>
+              <a:ext uri="{FF2B5EF4-FFF2-40B4-BE49-F238E27FC236}">
+                <a16:creationId xmlns:a16="http://schemas.microsoft.com/office/drawing/2014/main" id="{21283855-2F5B-0DA4-093F-1CEE1AE77C30}"/>
+              </a:ext>
+            </a:extLst>
+          </p:cNvPr>
+          <p:cNvSpPr/>
+          <p:nvPr/>
+        </p:nvSpPr>
+        <p:spPr>
+          <a:xfrm>
+            <a:off x="18668880" y="84240"/>
+            <a:ext cx="2409840" cy="479880"/>
+          </a:xfrm>
+          <a:prstGeom prst="roundRect">
+            <a:avLst>
+              <a:gd name="adj" fmla="val 16667"/>
+            </a:avLst>
+          </a:prstGeom>
+          <a:solidFill>
+            <a:srgbClr val="F9CB9C"/>
+          </a:solidFill>
+          <a:ln w="28575">
+            <a:solidFill>
+              <a:srgbClr val="B45F06"/>
+            </a:solidFill>
+            <a:round/>
+          </a:ln>
+        </p:spPr>
+        <p:style>
+          <a:lnRef idx="0">
+            <a:scrgbClr r="0" g="0" b="0"/>
+          </a:lnRef>
+          <a:fillRef idx="0">
+            <a:scrgbClr r="0" g="0" b="0"/>
+          </a:fillRef>
+          <a:effectRef idx="0">
+            <a:scrgbClr r="0" g="0" b="0"/>
+          </a:effectRef>
+          <a:fontRef idx="minor"/>
+        </p:style>
+        <p:txBody>
+          <a:bodyPr lIns="90000" tIns="91440" rIns="90000" bIns="91440" anchor="ctr">
+            <a:noAutofit/>
+          </a:bodyPr>
+          <a:lstStyle/>
+          <a:p>
+            <a:pPr algn="ctr">
+              <a:lnSpc>
+                <a:spcPct val="100000"/>
+              </a:lnSpc>
+              <a:tabLst>
+                <a:tab pos="0" algn="l"/>
+              </a:tabLst>
+            </a:pPr>
+            <a:r>
+              <a:rPr lang="en-GB" sz="1800" b="1" u="none" strike="noStrike">
+                <a:solidFill>
+                  <a:srgbClr val="000000"/>
+                </a:solidFill>
+                <a:effectLst/>
+                <a:uFillTx/>
+                <a:latin typeface="Consolas"/>
+                <a:ea typeface="Consolas"/>
+              </a:rPr>
+              <a:t>Done</a:t>
+            </a:r>
+            <a:endParaRPr lang="pt-PT" sz="1800" b="0" u="none" strike="noStrike">
+              <a:solidFill>
+                <a:srgbClr val="000000"/>
+              </a:solidFill>
+              <a:effectLst/>
+              <a:uFillTx/>
+              <a:latin typeface="Arial"/>
+            </a:endParaRPr>
+          </a:p>
+        </p:txBody>
+      </p:sp>
+      <p:sp>
+        <p:nvSpPr>
+          <p:cNvPr id="40" name="Google Shape;73;p15">
+            <a:extLst>
+              <a:ext uri="{FF2B5EF4-FFF2-40B4-BE49-F238E27FC236}">
+                <a16:creationId xmlns:a16="http://schemas.microsoft.com/office/drawing/2014/main" id="{EB7F3498-906F-68EA-7972-5CA374352A44}"/>
+              </a:ext>
+            </a:extLst>
+          </p:cNvPr>
+          <p:cNvSpPr/>
+          <p:nvPr/>
+        </p:nvSpPr>
+        <p:spPr>
+          <a:xfrm>
+            <a:off x="167400" y="84240"/>
+            <a:ext cx="2409840" cy="479880"/>
+          </a:xfrm>
+          <a:prstGeom prst="roundRect">
+            <a:avLst>
+              <a:gd name="adj" fmla="val 16667"/>
+            </a:avLst>
+          </a:prstGeom>
+          <a:solidFill>
+            <a:srgbClr val="F9CB9C"/>
+          </a:solidFill>
+          <a:ln w="28575">
+            <a:solidFill>
+              <a:srgbClr val="B45F06"/>
+            </a:solidFill>
+            <a:round/>
+          </a:ln>
+        </p:spPr>
+        <p:style>
+          <a:lnRef idx="0">
+            <a:scrgbClr r="0" g="0" b="0"/>
+          </a:lnRef>
+          <a:fillRef idx="0">
+            <a:scrgbClr r="0" g="0" b="0"/>
+          </a:fillRef>
+          <a:effectRef idx="0">
+            <a:scrgbClr r="0" g="0" b="0"/>
+          </a:effectRef>
+          <a:fontRef idx="minor"/>
+        </p:style>
+        <p:txBody>
+          <a:bodyPr lIns="90000" tIns="91440" rIns="90000" bIns="91440" anchor="ctr">
+            <a:noAutofit/>
+          </a:bodyPr>
+          <a:lstStyle/>
+          <a:p>
+            <a:pPr algn="ctr">
+              <a:lnSpc>
+                <a:spcPct val="100000"/>
+              </a:lnSpc>
+              <a:tabLst>
+                <a:tab pos="0" algn="l"/>
+              </a:tabLst>
+            </a:pPr>
+            <a:r>
+              <a:rPr lang="en-GB" sz="1800" b="1" u="none" strike="noStrike">
+                <a:solidFill>
+                  <a:srgbClr val="000000"/>
+                </a:solidFill>
+                <a:effectLst/>
+                <a:uFillTx/>
+                <a:latin typeface="Consolas"/>
+                <a:ea typeface="Consolas"/>
+              </a:rPr>
+              <a:t>Backlog</a:t>
+            </a:r>
+            <a:endParaRPr lang="pt-PT" sz="1800" b="0" u="none" strike="noStrike">
+              <a:solidFill>
+                <a:srgbClr val="000000"/>
+              </a:solidFill>
+              <a:effectLst/>
+              <a:uFillTx/>
+              <a:latin typeface="Arial"/>
+            </a:endParaRPr>
+          </a:p>
+        </p:txBody>
+      </p:sp>
+      <p:sp>
+        <p:nvSpPr>
+          <p:cNvPr id="41" name="Google Shape;74;p15">
+            <a:extLst>
+              <a:ext uri="{FF2B5EF4-FFF2-40B4-BE49-F238E27FC236}">
+                <a16:creationId xmlns:a16="http://schemas.microsoft.com/office/drawing/2014/main" id="{A528DA52-4C98-8EAE-82F2-CF18D84D42EF}"/>
+              </a:ext>
+            </a:extLst>
+          </p:cNvPr>
+          <p:cNvSpPr/>
+          <p:nvPr/>
+        </p:nvSpPr>
+        <p:spPr>
+          <a:xfrm>
+            <a:off x="3197160" y="1385640"/>
+            <a:ext cx="2409840" cy="479880"/>
+          </a:xfrm>
+          <a:prstGeom prst="roundRect">
+            <a:avLst>
+              <a:gd name="adj" fmla="val 16667"/>
+            </a:avLst>
+          </a:prstGeom>
+          <a:solidFill>
+            <a:srgbClr val="E6B8AF"/>
+          </a:solidFill>
+          <a:ln w="28575">
+            <a:solidFill>
+              <a:srgbClr val="5B0F00"/>
+            </a:solidFill>
+            <a:round/>
+          </a:ln>
+        </p:spPr>
+        <p:style>
+          <a:lnRef idx="0">
+            <a:scrgbClr r="0" g="0" b="0"/>
+          </a:lnRef>
+          <a:fillRef idx="0">
+            <a:scrgbClr r="0" g="0" b="0"/>
+          </a:fillRef>
+          <a:effectRef idx="0">
+            <a:scrgbClr r="0" g="0" b="0"/>
+          </a:effectRef>
+          <a:fontRef idx="minor"/>
+        </p:style>
+        <p:txBody>
+          <a:bodyPr lIns="90000" tIns="91440" rIns="90000" bIns="91440" anchor="ctr">
+            <a:noAutofit/>
+          </a:bodyPr>
+          <a:lstStyle/>
+          <a:p>
+            <a:pPr algn="ctr">
+              <a:lnSpc>
+                <a:spcPct val="100000"/>
+              </a:lnSpc>
+              <a:tabLst>
+                <a:tab pos="0" algn="l"/>
+              </a:tabLst>
+            </a:pPr>
+            <a:r>
+              <a:rPr lang="en-GB" sz="1800" b="1" u="none" strike="noStrike">
+                <a:solidFill>
+                  <a:srgbClr val="000000"/>
+                </a:solidFill>
+                <a:effectLst/>
+                <a:uFillTx/>
+                <a:latin typeface="Consolas"/>
+                <a:ea typeface="Consolas"/>
+              </a:rPr>
+              <a:t>66565</a:t>
+            </a:r>
+            <a:endParaRPr lang="pt-PT" sz="1800" b="0" u="none" strike="noStrike">
+              <a:solidFill>
+                <a:srgbClr val="000000"/>
+              </a:solidFill>
+              <a:effectLst/>
+              <a:uFillTx/>
+              <a:latin typeface="Arial"/>
+            </a:endParaRPr>
+          </a:p>
+        </p:txBody>
+      </p:sp>
+      <p:sp>
+        <p:nvSpPr>
+          <p:cNvPr id="42" name="Google Shape;75;p15">
+            <a:extLst>
+              <a:ext uri="{FF2B5EF4-FFF2-40B4-BE49-F238E27FC236}">
+                <a16:creationId xmlns:a16="http://schemas.microsoft.com/office/drawing/2014/main" id="{F0EF2A9A-F424-F0EE-CE46-51431AEA799F}"/>
+              </a:ext>
+            </a:extLst>
+          </p:cNvPr>
+          <p:cNvSpPr/>
+          <p:nvPr/>
+        </p:nvSpPr>
+        <p:spPr>
+          <a:xfrm>
+            <a:off x="3197160" y="6126258"/>
+            <a:ext cx="2409840" cy="479880"/>
+          </a:xfrm>
+          <a:prstGeom prst="roundRect">
+            <a:avLst>
+              <a:gd name="adj" fmla="val 16667"/>
+            </a:avLst>
+          </a:prstGeom>
+          <a:solidFill>
+            <a:srgbClr val="E6B8AF"/>
+          </a:solidFill>
+          <a:ln w="28575">
+            <a:solidFill>
+              <a:srgbClr val="5B0F00"/>
+            </a:solidFill>
+            <a:round/>
+          </a:ln>
+        </p:spPr>
+        <p:style>
+          <a:lnRef idx="0">
+            <a:scrgbClr r="0" g="0" b="0"/>
+          </a:lnRef>
+          <a:fillRef idx="0">
+            <a:scrgbClr r="0" g="0" b="0"/>
+          </a:fillRef>
+          <a:effectRef idx="0">
+            <a:scrgbClr r="0" g="0" b="0"/>
+          </a:effectRef>
+          <a:fontRef idx="minor"/>
+        </p:style>
+        <p:txBody>
+          <a:bodyPr lIns="90000" tIns="91440" rIns="90000" bIns="91440" anchor="ctr">
+            <a:noAutofit/>
+          </a:bodyPr>
+          <a:lstStyle/>
+          <a:p>
+            <a:pPr algn="ctr">
+              <a:lnSpc>
+                <a:spcPct val="100000"/>
+              </a:lnSpc>
+              <a:tabLst>
+                <a:tab pos="0" algn="l"/>
+              </a:tabLst>
+            </a:pPr>
+            <a:r>
+              <a:rPr lang="en-GB" sz="1800" b="1" u="none" strike="noStrike">
+                <a:solidFill>
+                  <a:srgbClr val="000000"/>
+                </a:solidFill>
+                <a:effectLst/>
+                <a:uFillTx/>
+                <a:latin typeface="Consolas"/>
+                <a:ea typeface="Consolas"/>
+              </a:rPr>
+              <a:t>67196</a:t>
+            </a:r>
+            <a:endParaRPr lang="pt-PT" sz="1800" b="0" u="none" strike="noStrike">
+              <a:solidFill>
+                <a:srgbClr val="000000"/>
+              </a:solidFill>
+              <a:effectLst/>
+              <a:uFillTx/>
+              <a:latin typeface="Arial"/>
+            </a:endParaRPr>
+          </a:p>
+        </p:txBody>
+      </p:sp>
+      <p:sp>
+        <p:nvSpPr>
+          <p:cNvPr id="43" name="Google Shape;76;p15">
+            <a:extLst>
+              <a:ext uri="{FF2B5EF4-FFF2-40B4-BE49-F238E27FC236}">
+                <a16:creationId xmlns:a16="http://schemas.microsoft.com/office/drawing/2014/main" id="{BD1B1485-975B-31DE-1178-9EB35A67F5EE}"/>
+              </a:ext>
+            </a:extLst>
+          </p:cNvPr>
+          <p:cNvSpPr/>
+          <p:nvPr/>
+        </p:nvSpPr>
+        <p:spPr>
+          <a:xfrm>
+            <a:off x="3197160" y="2990658"/>
+            <a:ext cx="2409840" cy="479880"/>
+          </a:xfrm>
+          <a:prstGeom prst="roundRect">
+            <a:avLst>
+              <a:gd name="adj" fmla="val 16667"/>
+            </a:avLst>
+          </a:prstGeom>
+          <a:solidFill>
+            <a:srgbClr val="E6B8AF"/>
+          </a:solidFill>
+          <a:ln w="28575">
+            <a:solidFill>
+              <a:srgbClr val="5B0F00"/>
+            </a:solidFill>
+            <a:round/>
+          </a:ln>
+        </p:spPr>
+        <p:style>
+          <a:lnRef idx="0">
+            <a:scrgbClr r="0" g="0" b="0"/>
+          </a:lnRef>
+          <a:fillRef idx="0">
+            <a:scrgbClr r="0" g="0" b="0"/>
+          </a:fillRef>
+          <a:effectRef idx="0">
+            <a:scrgbClr r="0" g="0" b="0"/>
+          </a:effectRef>
+          <a:fontRef idx="minor"/>
+        </p:style>
+        <p:txBody>
+          <a:bodyPr lIns="90000" tIns="91440" rIns="90000" bIns="91440" anchor="ctr">
+            <a:noAutofit/>
+          </a:bodyPr>
+          <a:lstStyle/>
+          <a:p>
+            <a:pPr algn="ctr">
+              <a:lnSpc>
+                <a:spcPct val="100000"/>
+              </a:lnSpc>
+              <a:tabLst>
+                <a:tab pos="0" algn="l"/>
+              </a:tabLst>
+            </a:pPr>
+            <a:r>
+              <a:rPr lang="en-GB" sz="1800" b="1" u="none" strike="noStrike">
+                <a:solidFill>
+                  <a:srgbClr val="000000"/>
+                </a:solidFill>
+                <a:effectLst/>
+                <a:uFillTx/>
+                <a:latin typeface="Consolas"/>
+                <a:ea typeface="Consolas"/>
+              </a:rPr>
+              <a:t>67215</a:t>
+            </a:r>
+            <a:endParaRPr lang="pt-PT" sz="1800" b="0" u="none" strike="noStrike">
+              <a:solidFill>
+                <a:srgbClr val="000000"/>
+              </a:solidFill>
+              <a:effectLst/>
+              <a:uFillTx/>
+              <a:latin typeface="Arial"/>
+            </a:endParaRPr>
+          </a:p>
+        </p:txBody>
+      </p:sp>
+      <p:sp>
+        <p:nvSpPr>
+          <p:cNvPr id="44" name="Google Shape;77;p15">
+            <a:extLst>
+              <a:ext uri="{FF2B5EF4-FFF2-40B4-BE49-F238E27FC236}">
+                <a16:creationId xmlns:a16="http://schemas.microsoft.com/office/drawing/2014/main" id="{A53BD2EB-BE0B-C6D0-52CE-8FBF92F85D7D}"/>
+              </a:ext>
+            </a:extLst>
+          </p:cNvPr>
+          <p:cNvSpPr/>
+          <p:nvPr/>
+        </p:nvSpPr>
+        <p:spPr>
+          <a:xfrm>
+            <a:off x="3212280" y="4550178"/>
+            <a:ext cx="2409840" cy="479880"/>
+          </a:xfrm>
+          <a:prstGeom prst="roundRect">
+            <a:avLst>
+              <a:gd name="adj" fmla="val 16667"/>
+            </a:avLst>
+          </a:prstGeom>
+          <a:solidFill>
+            <a:srgbClr val="E6B8AF"/>
+          </a:solidFill>
+          <a:ln w="28575">
+            <a:solidFill>
+              <a:srgbClr val="5B0F00"/>
+            </a:solidFill>
+            <a:round/>
+          </a:ln>
+        </p:spPr>
+        <p:style>
+          <a:lnRef idx="0">
+            <a:scrgbClr r="0" g="0" b="0"/>
+          </a:lnRef>
+          <a:fillRef idx="0">
+            <a:scrgbClr r="0" g="0" b="0"/>
+          </a:fillRef>
+          <a:effectRef idx="0">
+            <a:scrgbClr r="0" g="0" b="0"/>
+          </a:effectRef>
+          <a:fontRef idx="minor"/>
+        </p:style>
+        <p:txBody>
+          <a:bodyPr lIns="90000" tIns="91440" rIns="90000" bIns="91440" anchor="ctr">
+            <a:noAutofit/>
+          </a:bodyPr>
+          <a:lstStyle/>
+          <a:p>
+            <a:pPr algn="ctr">
+              <a:lnSpc>
+                <a:spcPct val="100000"/>
+              </a:lnSpc>
+              <a:tabLst>
+                <a:tab pos="0" algn="l"/>
+              </a:tabLst>
+            </a:pPr>
+            <a:r>
+              <a:rPr lang="pt-PT" sz="1800" b="1" u="none" strike="noStrike">
+                <a:solidFill>
+                  <a:srgbClr val="000000"/>
+                </a:solidFill>
+                <a:effectLst/>
+                <a:uFillTx/>
+                <a:latin typeface="Consolas"/>
+                <a:ea typeface="Consolas"/>
+              </a:rPr>
+              <a:t>68509</a:t>
+            </a:r>
+            <a:endParaRPr lang="pt-PT" sz="1800" b="0" u="none" strike="noStrike">
+              <a:solidFill>
+                <a:srgbClr val="000000"/>
+              </a:solidFill>
+              <a:effectLst/>
+              <a:uFillTx/>
+              <a:latin typeface="Arial"/>
+            </a:endParaRPr>
+          </a:p>
+        </p:txBody>
+      </p:sp>
+      <p:sp>
+        <p:nvSpPr>
+          <p:cNvPr id="45" name="Google Shape;78;p15">
+            <a:extLst>
+              <a:ext uri="{FF2B5EF4-FFF2-40B4-BE49-F238E27FC236}">
+                <a16:creationId xmlns:a16="http://schemas.microsoft.com/office/drawing/2014/main" id="{A082888F-8675-6A1E-207C-468D08FF21DD}"/>
+              </a:ext>
+            </a:extLst>
+          </p:cNvPr>
+          <p:cNvSpPr/>
+          <p:nvPr/>
+        </p:nvSpPr>
+        <p:spPr>
+          <a:xfrm>
+            <a:off x="3197160" y="7685778"/>
+            <a:ext cx="2409840" cy="479880"/>
+          </a:xfrm>
+          <a:prstGeom prst="roundRect">
+            <a:avLst>
+              <a:gd name="adj" fmla="val 16667"/>
+            </a:avLst>
+          </a:prstGeom>
+          <a:solidFill>
+            <a:srgbClr val="E6B8AF"/>
+          </a:solidFill>
+          <a:ln w="28575">
+            <a:solidFill>
+              <a:srgbClr val="5B0F00"/>
+            </a:solidFill>
+            <a:round/>
+          </a:ln>
+        </p:spPr>
+        <p:style>
+          <a:lnRef idx="0">
+            <a:scrgbClr r="0" g="0" b="0"/>
+          </a:lnRef>
+          <a:fillRef idx="0">
+            <a:scrgbClr r="0" g="0" b="0"/>
+          </a:fillRef>
+          <a:effectRef idx="0">
+            <a:scrgbClr r="0" g="0" b="0"/>
+          </a:effectRef>
+          <a:fontRef idx="minor"/>
+        </p:style>
+        <p:txBody>
+          <a:bodyPr lIns="90000" tIns="91440" rIns="90000" bIns="91440" anchor="ctr">
+            <a:noAutofit/>
+          </a:bodyPr>
+          <a:lstStyle/>
+          <a:p>
+            <a:pPr algn="ctr">
+              <a:lnSpc>
+                <a:spcPct val="100000"/>
+              </a:lnSpc>
+              <a:tabLst>
+                <a:tab pos="0" algn="l"/>
+              </a:tabLst>
+            </a:pPr>
+            <a:r>
+              <a:rPr lang="en-GB" sz="1800" b="1" u="none" strike="noStrike">
+                <a:solidFill>
+                  <a:srgbClr val="000000"/>
+                </a:solidFill>
+                <a:effectLst/>
+                <a:uFillTx/>
+                <a:latin typeface="Consolas"/>
+                <a:ea typeface="Consolas"/>
+              </a:rPr>
+              <a:t>68663</a:t>
+            </a:r>
+            <a:endParaRPr lang="pt-PT" sz="1800" b="0" u="none" strike="noStrike">
+              <a:solidFill>
+                <a:srgbClr val="000000"/>
+              </a:solidFill>
+              <a:effectLst/>
+              <a:uFillTx/>
+              <a:latin typeface="Arial"/>
+            </a:endParaRPr>
+          </a:p>
+        </p:txBody>
+      </p:sp>
+      <p:sp>
+        <p:nvSpPr>
+          <p:cNvPr id="46" name="Google Shape;79;p15">
+            <a:extLst>
+              <a:ext uri="{FF2B5EF4-FFF2-40B4-BE49-F238E27FC236}">
+                <a16:creationId xmlns:a16="http://schemas.microsoft.com/office/drawing/2014/main" id="{0D982CF8-936F-28FD-D91E-74F21F51AE55}"/>
+              </a:ext>
+            </a:extLst>
+          </p:cNvPr>
+          <p:cNvSpPr/>
+          <p:nvPr/>
+        </p:nvSpPr>
+        <p:spPr>
+          <a:xfrm>
+            <a:off x="3197160" y="9264960"/>
+            <a:ext cx="2409840" cy="479880"/>
+          </a:xfrm>
+          <a:prstGeom prst="roundRect">
+            <a:avLst>
+              <a:gd name="adj" fmla="val 16667"/>
+            </a:avLst>
+          </a:prstGeom>
+          <a:solidFill>
+            <a:srgbClr val="E6B8AF"/>
+          </a:solidFill>
+          <a:ln w="28575">
+            <a:solidFill>
+              <a:srgbClr val="5B0F00"/>
+            </a:solidFill>
+            <a:round/>
+          </a:ln>
+        </p:spPr>
+        <p:style>
+          <a:lnRef idx="0">
+            <a:scrgbClr r="0" g="0" b="0"/>
+          </a:lnRef>
+          <a:fillRef idx="0">
+            <a:scrgbClr r="0" g="0" b="0"/>
+          </a:fillRef>
+          <a:effectRef idx="0">
+            <a:scrgbClr r="0" g="0" b="0"/>
+          </a:effectRef>
+          <a:fontRef idx="minor"/>
+        </p:style>
+        <p:txBody>
+          <a:bodyPr lIns="90000" tIns="91440" rIns="90000" bIns="91440" anchor="ctr">
+            <a:noAutofit/>
+          </a:bodyPr>
+          <a:lstStyle/>
+          <a:p>
+            <a:pPr algn="ctr">
+              <a:lnSpc>
+                <a:spcPct val="100000"/>
+              </a:lnSpc>
+              <a:tabLst>
+                <a:tab pos="0" algn="l"/>
+              </a:tabLst>
+            </a:pPr>
+            <a:r>
+              <a:rPr lang="en-GB" sz="1800" b="1" u="none" strike="noStrike">
+                <a:solidFill>
+                  <a:srgbClr val="000000"/>
+                </a:solidFill>
+                <a:effectLst/>
+                <a:uFillTx/>
+                <a:latin typeface="Consolas"/>
+                <a:ea typeface="Consolas"/>
+              </a:rPr>
+              <a:t>70116</a:t>
+            </a:r>
+            <a:endParaRPr lang="pt-PT" sz="1800" b="0" u="none" strike="noStrike">
+              <a:solidFill>
+                <a:srgbClr val="000000"/>
+              </a:solidFill>
+              <a:effectLst/>
+              <a:uFillTx/>
+              <a:latin typeface="Arial"/>
+            </a:endParaRPr>
+          </a:p>
+        </p:txBody>
+      </p:sp>
+      <p:cxnSp>
+        <p:nvCxnSpPr>
+          <p:cNvPr id="47" name="Google Shape;80;p15">
+            <a:extLst>
+              <a:ext uri="{FF2B5EF4-FFF2-40B4-BE49-F238E27FC236}">
+                <a16:creationId xmlns:a16="http://schemas.microsoft.com/office/drawing/2014/main" id="{B115D71A-6A8E-ECB2-17C0-0F0891E9B81E}"/>
+              </a:ext>
+            </a:extLst>
+          </p:cNvPr>
+          <p:cNvCxnSpPr/>
+          <p:nvPr/>
+        </p:nvCxnSpPr>
+        <p:spPr>
+          <a:xfrm>
+            <a:off x="5607720" y="1625760"/>
+            <a:ext cx="16043400" cy="1080"/>
+          </a:xfrm>
+          <a:prstGeom prst="straightConnector1">
+            <a:avLst/>
+          </a:prstGeom>
+          <a:ln w="28575">
+            <a:solidFill>
+              <a:srgbClr val="999999"/>
+            </a:solidFill>
+            <a:prstDash val="dash"/>
+            <a:round/>
+          </a:ln>
+        </p:spPr>
+      </p:cxnSp>
+      <p:cxnSp>
+        <p:nvCxnSpPr>
+          <p:cNvPr id="48" name="Google Shape;81;p15">
+            <a:extLst>
+              <a:ext uri="{FF2B5EF4-FFF2-40B4-BE49-F238E27FC236}">
+                <a16:creationId xmlns:a16="http://schemas.microsoft.com/office/drawing/2014/main" id="{4C536CBD-7F24-1443-9AA3-CCA3491B06E1}"/>
+              </a:ext>
+            </a:extLst>
+          </p:cNvPr>
+          <p:cNvCxnSpPr/>
+          <p:nvPr/>
+        </p:nvCxnSpPr>
+        <p:spPr>
+          <a:xfrm>
+            <a:off x="5607720" y="3201840"/>
+            <a:ext cx="16043400" cy="1080"/>
+          </a:xfrm>
+          <a:prstGeom prst="straightConnector1">
+            <a:avLst/>
+          </a:prstGeom>
+          <a:ln w="28575">
+            <a:solidFill>
+              <a:srgbClr val="999999"/>
+            </a:solidFill>
+            <a:prstDash val="dash"/>
+            <a:round/>
+          </a:ln>
+        </p:spPr>
+      </p:cxnSp>
+      <p:cxnSp>
+        <p:nvCxnSpPr>
+          <p:cNvPr id="49" name="Google Shape;82;p15">
+            <a:extLst>
+              <a:ext uri="{FF2B5EF4-FFF2-40B4-BE49-F238E27FC236}">
+                <a16:creationId xmlns:a16="http://schemas.microsoft.com/office/drawing/2014/main" id="{A6D77680-4F35-5CB5-D00B-1E683B869FA6}"/>
+              </a:ext>
+            </a:extLst>
+          </p:cNvPr>
+          <p:cNvCxnSpPr/>
+          <p:nvPr/>
+        </p:nvCxnSpPr>
+        <p:spPr>
+          <a:xfrm>
+            <a:off x="5607720" y="4777560"/>
+            <a:ext cx="16043400" cy="1080"/>
+          </a:xfrm>
+          <a:prstGeom prst="straightConnector1">
+            <a:avLst/>
+          </a:prstGeom>
+          <a:ln w="28575">
+            <a:solidFill>
+              <a:srgbClr val="999999"/>
+            </a:solidFill>
+            <a:prstDash val="dash"/>
+            <a:round/>
+          </a:ln>
+        </p:spPr>
+      </p:cxnSp>
+      <p:cxnSp>
+        <p:nvCxnSpPr>
+          <p:cNvPr id="50" name="Google Shape;83;p15">
+            <a:extLst>
+              <a:ext uri="{FF2B5EF4-FFF2-40B4-BE49-F238E27FC236}">
+                <a16:creationId xmlns:a16="http://schemas.microsoft.com/office/drawing/2014/main" id="{E0719DA2-73FF-7FA7-F580-ABFFD5A39C29}"/>
+              </a:ext>
+            </a:extLst>
+          </p:cNvPr>
+          <p:cNvCxnSpPr/>
+          <p:nvPr/>
+        </p:nvCxnSpPr>
+        <p:spPr>
+          <a:xfrm>
+            <a:off x="5607720" y="6353640"/>
+            <a:ext cx="16043400" cy="1080"/>
+          </a:xfrm>
+          <a:prstGeom prst="straightConnector1">
+            <a:avLst/>
+          </a:prstGeom>
+          <a:ln w="28575">
+            <a:solidFill>
+              <a:srgbClr val="999999"/>
+            </a:solidFill>
+            <a:prstDash val="dash"/>
+            <a:round/>
+          </a:ln>
+        </p:spPr>
+      </p:cxnSp>
+      <p:cxnSp>
+        <p:nvCxnSpPr>
+          <p:cNvPr id="51" name="Google Shape;84;p15">
+            <a:extLst>
+              <a:ext uri="{FF2B5EF4-FFF2-40B4-BE49-F238E27FC236}">
+                <a16:creationId xmlns:a16="http://schemas.microsoft.com/office/drawing/2014/main" id="{2728881C-58CB-BD91-3CD7-535BA478B2B8}"/>
+              </a:ext>
+            </a:extLst>
+          </p:cNvPr>
+          <p:cNvCxnSpPr/>
+          <p:nvPr/>
+        </p:nvCxnSpPr>
+        <p:spPr>
+          <a:xfrm>
+            <a:off x="5607720" y="7929360"/>
+            <a:ext cx="16043400" cy="1080"/>
+          </a:xfrm>
+          <a:prstGeom prst="straightConnector1">
+            <a:avLst/>
+          </a:prstGeom>
+          <a:ln w="28575">
+            <a:solidFill>
+              <a:srgbClr val="999999"/>
+            </a:solidFill>
+            <a:prstDash val="dash"/>
+            <a:round/>
+          </a:ln>
+        </p:spPr>
+      </p:cxnSp>
+      <p:cxnSp>
+        <p:nvCxnSpPr>
+          <p:cNvPr id="52" name="Google Shape;85;p15">
+            <a:extLst>
+              <a:ext uri="{FF2B5EF4-FFF2-40B4-BE49-F238E27FC236}">
+                <a16:creationId xmlns:a16="http://schemas.microsoft.com/office/drawing/2014/main" id="{91B7C2B1-2155-925B-6D06-E9FC842D82CA}"/>
+              </a:ext>
+            </a:extLst>
+          </p:cNvPr>
+          <p:cNvCxnSpPr/>
+          <p:nvPr/>
+        </p:nvCxnSpPr>
+        <p:spPr>
+          <a:xfrm>
+            <a:off x="5607720" y="9505440"/>
+            <a:ext cx="16043400" cy="1080"/>
+          </a:xfrm>
+          <a:prstGeom prst="straightConnector1">
+            <a:avLst/>
+          </a:prstGeom>
+          <a:ln w="28575">
+            <a:solidFill>
+              <a:srgbClr val="999999"/>
+            </a:solidFill>
+            <a:prstDash val="dash"/>
+            <a:round/>
+          </a:ln>
+        </p:spPr>
+      </p:cxnSp>
+      <p:sp>
+        <p:nvSpPr>
+          <p:cNvPr id="53" name="Google Shape;86;p15">
+            <a:extLst>
+              <a:ext uri="{FF2B5EF4-FFF2-40B4-BE49-F238E27FC236}">
+                <a16:creationId xmlns:a16="http://schemas.microsoft.com/office/drawing/2014/main" id="{ECE400C2-C8CE-DFA2-0102-C55842BF3EB0}"/>
+              </a:ext>
+            </a:extLst>
+          </p:cNvPr>
+          <p:cNvSpPr/>
+          <p:nvPr/>
+        </p:nvSpPr>
+        <p:spPr>
+          <a:xfrm>
+            <a:off x="6395940" y="1257039"/>
+            <a:ext cx="2436120" cy="3838374"/>
+          </a:xfrm>
+          <a:prstGeom prst="roundRect">
+            <a:avLst>
+              <a:gd name="adj" fmla="val 16667"/>
+            </a:avLst>
+          </a:prstGeom>
+          <a:solidFill>
+            <a:srgbClr val="D9EAD3"/>
+          </a:solidFill>
+          <a:ln w="28575">
+            <a:solidFill>
+              <a:srgbClr val="274E13"/>
+            </a:solidFill>
+            <a:round/>
+          </a:ln>
+        </p:spPr>
+        <p:style>
+          <a:lnRef idx="0">
+            <a:scrgbClr r="0" g="0" b="0"/>
+          </a:lnRef>
+          <a:fillRef idx="0">
+            <a:scrgbClr r="0" g="0" b="0"/>
+          </a:fillRef>
+          <a:effectRef idx="0">
+            <a:scrgbClr r="0" g="0" b="0"/>
+          </a:effectRef>
+          <a:fontRef idx="minor"/>
+        </p:style>
+        <p:txBody>
+          <a:bodyPr lIns="90000" tIns="91440" rIns="90000" bIns="91440" anchor="t">
+            <a:noAutofit/>
+          </a:bodyPr>
+          <a:lstStyle/>
+          <a:p>
+            <a:pPr>
+              <a:lnSpc>
+                <a:spcPct val="100000"/>
+              </a:lnSpc>
+            </a:pPr>
+            <a:r>
+              <a:rPr lang="en-GB" sz="1400" b="0" u="none" strike="noStrike" dirty="0">
+                <a:solidFill>
+                  <a:srgbClr val="000000"/>
+                </a:solidFill>
+                <a:effectLst/>
+                <a:uFillTx/>
+                <a:latin typeface="Consolas"/>
+                <a:ea typeface="Consolas"/>
+              </a:rPr>
+              <a:t>US1: </a:t>
+            </a:r>
+            <a:r>
+              <a:rPr lang="en-US" sz="1400" dirty="0">
+                <a:solidFill>
+                  <a:srgbClr val="000000"/>
+                </a:solidFill>
+                <a:ea typeface="Arial"/>
+              </a:rPr>
+              <a:t>As a Mindustry player, I want to upgrade machines with efficiency levels, so that I can create more resources per time unit in case of drills and other resource generators, and have better defences in case of weapons.</a:t>
+            </a:r>
+            <a:endParaRPr lang="pt-PT" sz="1400" b="0" u="none" strike="noStrike" dirty="0">
+              <a:solidFill>
+                <a:srgbClr val="000000"/>
+              </a:solidFill>
+              <a:effectLst/>
+              <a:uFillTx/>
+              <a:latin typeface="Arial"/>
+            </a:endParaRPr>
+          </a:p>
+        </p:txBody>
+      </p:sp>
+      <p:sp>
+        <p:nvSpPr>
+          <p:cNvPr id="54" name="Google Shape;87;p15">
+            <a:extLst>
+              <a:ext uri="{FF2B5EF4-FFF2-40B4-BE49-F238E27FC236}">
+                <a16:creationId xmlns:a16="http://schemas.microsoft.com/office/drawing/2014/main" id="{E8D24EA4-8320-E329-7A6E-5AA8C93C8865}"/>
+              </a:ext>
+            </a:extLst>
+          </p:cNvPr>
+          <p:cNvSpPr/>
+          <p:nvPr/>
+        </p:nvSpPr>
+        <p:spPr>
+          <a:xfrm>
+            <a:off x="167400" y="6967080"/>
+            <a:ext cx="2436120" cy="2775600"/>
+          </a:xfrm>
+          <a:prstGeom prst="roundRect">
+            <a:avLst>
+              <a:gd name="adj" fmla="val 16667"/>
+            </a:avLst>
+          </a:prstGeom>
+          <a:solidFill>
+            <a:srgbClr val="D9EAD3"/>
+          </a:solidFill>
+          <a:ln w="28575">
+            <a:solidFill>
+              <a:srgbClr val="274E13"/>
+            </a:solidFill>
+            <a:round/>
+          </a:ln>
+        </p:spPr>
+        <p:style>
+          <a:lnRef idx="0">
+            <a:scrgbClr r="0" g="0" b="0"/>
+          </a:lnRef>
+          <a:fillRef idx="0">
+            <a:scrgbClr r="0" g="0" b="0"/>
+          </a:fillRef>
+          <a:effectRef idx="0">
+            <a:scrgbClr r="0" g="0" b="0"/>
+          </a:effectRef>
+          <a:fontRef idx="minor"/>
+        </p:style>
+        <p:txBody>
+          <a:bodyPr lIns="90000" tIns="91440" rIns="90000" bIns="91440" anchor="t">
+            <a:noAutofit/>
+          </a:bodyPr>
+          <a:lstStyle/>
+          <a:p>
+            <a:pPr>
+              <a:lnSpc>
+                <a:spcPct val="100000"/>
+              </a:lnSpc>
+            </a:pPr>
+            <a:r>
+              <a:rPr lang="en-GB" sz="1400" b="0" u="none" strike="noStrike" dirty="0">
+                <a:solidFill>
+                  <a:srgbClr val="000000"/>
+                </a:solidFill>
+                <a:effectLst/>
+                <a:uFillTx/>
+                <a:latin typeface="Consolas"/>
+                <a:ea typeface="Consolas"/>
+              </a:rPr>
+              <a:t>US3: </a:t>
+            </a:r>
+            <a:r>
+              <a:rPr lang="en-US" sz="1400" dirty="0">
+                <a:solidFill>
+                  <a:srgbClr val="000000"/>
+                </a:solidFill>
+                <a:ea typeface="Arial"/>
+              </a:rPr>
+              <a:t>As a veteran player, I want to orchestrate a new defensive strategy by pulling enemy air units to the ground, so that I can play the game in a more creative way.</a:t>
+            </a:r>
+            <a:endParaRPr lang="pt-PT" sz="1400" b="0" u="none" strike="noStrike" dirty="0">
+              <a:solidFill>
+                <a:srgbClr val="000000"/>
+              </a:solidFill>
+              <a:effectLst/>
+              <a:uFillTx/>
+              <a:latin typeface="Arial"/>
+            </a:endParaRPr>
+          </a:p>
+        </p:txBody>
+      </p:sp>
+      <p:cxnSp>
+        <p:nvCxnSpPr>
+          <p:cNvPr id="55" name="Google Shape;91;p15">
+            <a:extLst>
+              <a:ext uri="{FF2B5EF4-FFF2-40B4-BE49-F238E27FC236}">
+                <a16:creationId xmlns:a16="http://schemas.microsoft.com/office/drawing/2014/main" id="{09201D3C-ABF7-87AB-8C9D-DFE98B97CD1D}"/>
+              </a:ext>
+            </a:extLst>
+          </p:cNvPr>
+          <p:cNvCxnSpPr/>
+          <p:nvPr/>
+        </p:nvCxnSpPr>
+        <p:spPr>
+          <a:xfrm>
+            <a:off x="2874240" y="-28440"/>
+            <a:ext cx="1080" cy="10857960"/>
+          </a:xfrm>
+          <a:prstGeom prst="straightConnector1">
+            <a:avLst/>
+          </a:prstGeom>
+          <a:ln w="38100">
+            <a:solidFill>
+              <a:srgbClr val="5B0F00"/>
+            </a:solidFill>
+            <a:round/>
+          </a:ln>
+        </p:spPr>
+      </p:cxnSp>
+      <p:sp>
+        <p:nvSpPr>
+          <p:cNvPr id="56" name="Google Shape;92;p15">
+            <a:extLst>
+              <a:ext uri="{FF2B5EF4-FFF2-40B4-BE49-F238E27FC236}">
+                <a16:creationId xmlns:a16="http://schemas.microsoft.com/office/drawing/2014/main" id="{B84D6F46-FD5F-9EA0-5014-523554199AD9}"/>
+              </a:ext>
+            </a:extLst>
+          </p:cNvPr>
+          <p:cNvSpPr/>
+          <p:nvPr/>
+        </p:nvSpPr>
+        <p:spPr>
+          <a:xfrm>
+            <a:off x="6422220" y="6126258"/>
+            <a:ext cx="2436120" cy="3616422"/>
+          </a:xfrm>
+          <a:prstGeom prst="roundRect">
+            <a:avLst>
+              <a:gd name="adj" fmla="val 16667"/>
+            </a:avLst>
+          </a:prstGeom>
+          <a:solidFill>
+            <a:srgbClr val="D9EAD3"/>
+          </a:solidFill>
+          <a:ln w="28575">
+            <a:solidFill>
+              <a:srgbClr val="274E13"/>
+            </a:solidFill>
+            <a:round/>
+          </a:ln>
+        </p:spPr>
+        <p:style>
+          <a:lnRef idx="0">
+            <a:scrgbClr r="0" g="0" b="0"/>
+          </a:lnRef>
+          <a:fillRef idx="0">
+            <a:scrgbClr r="0" g="0" b="0"/>
+          </a:fillRef>
+          <a:effectRef idx="0">
+            <a:scrgbClr r="0" g="0" b="0"/>
+          </a:effectRef>
+          <a:fontRef idx="minor"/>
+        </p:style>
+        <p:txBody>
+          <a:bodyPr lIns="90000" tIns="91440" rIns="90000" bIns="91440" anchor="t">
+            <a:noAutofit/>
+          </a:bodyPr>
+          <a:lstStyle/>
+          <a:p>
+            <a:pPr>
+              <a:lnSpc>
+                <a:spcPct val="100000"/>
+              </a:lnSpc>
+            </a:pPr>
+            <a:r>
+              <a:rPr lang="en-GB" sz="1400" b="0" u="none" strike="noStrike" dirty="0">
+                <a:solidFill>
+                  <a:srgbClr val="000000"/>
+                </a:solidFill>
+                <a:effectLst/>
+                <a:uFillTx/>
+                <a:latin typeface="Consolas"/>
+                <a:ea typeface="Consolas"/>
+              </a:rPr>
+              <a:t>US2: </a:t>
+            </a:r>
+            <a:r>
+              <a:rPr lang="en-US" sz="1400" dirty="0">
+                <a:solidFill>
+                  <a:srgbClr val="000000"/>
+                </a:solidFill>
+                <a:ea typeface="Arial"/>
+              </a:rPr>
+              <a:t>As a player that likes to keep track of everything, I want to receive a text warning everytime I misplace a conveyor for whatever reason and obtain possible fixes, so that I can have everything under my watch and build solid structures quickly.</a:t>
+            </a:r>
+            <a:endParaRPr lang="pt-PT" sz="1400" b="0" u="none" strike="noStrike" dirty="0">
+              <a:solidFill>
+                <a:srgbClr val="000000"/>
+              </a:solidFill>
+              <a:effectLst/>
+              <a:uFillTx/>
+              <a:latin typeface="Arial"/>
+            </a:endParaRPr>
+          </a:p>
+        </p:txBody>
+      </p:sp>
+      <p:sp>
+        <p:nvSpPr>
+          <p:cNvPr id="5" name="Google Shape;86;p15">
+            <a:extLst>
+              <a:ext uri="{FF2B5EF4-FFF2-40B4-BE49-F238E27FC236}">
+                <a16:creationId xmlns:a16="http://schemas.microsoft.com/office/drawing/2014/main" id="{3A5CE281-BE4D-242A-4F79-B346969F2926}"/>
+              </a:ext>
+            </a:extLst>
+          </p:cNvPr>
+          <p:cNvSpPr/>
+          <p:nvPr/>
+        </p:nvSpPr>
+        <p:spPr>
+          <a:xfrm>
+            <a:off x="18668880" y="1203865"/>
+            <a:ext cx="2436120" cy="879561"/>
+          </a:xfrm>
+          <a:prstGeom prst="roundRect">
+            <a:avLst>
+              <a:gd name="adj" fmla="val 16667"/>
+            </a:avLst>
+          </a:prstGeom>
+          <a:solidFill>
+            <a:srgbClr val="D9EAD3"/>
+          </a:solidFill>
+          <a:ln w="28575">
+            <a:solidFill>
+              <a:srgbClr val="274E13"/>
+            </a:solidFill>
+            <a:round/>
+          </a:ln>
+        </p:spPr>
+        <p:style>
+          <a:lnRef idx="0">
+            <a:scrgbClr r="0" g="0" b="0"/>
+          </a:lnRef>
+          <a:fillRef idx="0">
+            <a:scrgbClr r="0" g="0" b="0"/>
+          </a:fillRef>
+          <a:effectRef idx="0">
+            <a:scrgbClr r="0" g="0" b="0"/>
+          </a:effectRef>
+          <a:fontRef idx="minor"/>
+        </p:style>
+        <p:txBody>
+          <a:bodyPr lIns="90000" tIns="91440" rIns="90000" bIns="91440" anchor="t">
+            <a:noAutofit/>
+          </a:bodyPr>
+          <a:lstStyle/>
+          <a:p>
+            <a:pPr>
+              <a:lnSpc>
+                <a:spcPct val="100000"/>
+              </a:lnSpc>
+            </a:pPr>
+            <a:r>
+              <a:rPr lang="pt-PT" sz="1400" b="0" u="none" strike="noStrike" dirty="0">
+                <a:solidFill>
+                  <a:srgbClr val="000000"/>
+                </a:solidFill>
+                <a:effectLst/>
+                <a:uFillTx/>
+                <a:latin typeface="Arial"/>
+              </a:rPr>
+              <a:t>Review and map the existing code related to machines.</a:t>
+            </a:r>
+          </a:p>
+        </p:txBody>
+      </p:sp>
+      <p:sp>
+        <p:nvSpPr>
+          <p:cNvPr id="6" name="Rectangle 1">
+            <a:extLst>
+              <a:ext uri="{FF2B5EF4-FFF2-40B4-BE49-F238E27FC236}">
+                <a16:creationId xmlns:a16="http://schemas.microsoft.com/office/drawing/2014/main" id="{339F6378-7111-9DCB-23F0-94A7D8FD181A}"/>
+              </a:ext>
+            </a:extLst>
+          </p:cNvPr>
+          <p:cNvSpPr>
+            <a:spLocks noChangeArrowheads="1"/>
+          </p:cNvSpPr>
+          <p:nvPr/>
+        </p:nvSpPr>
+        <p:spPr bwMode="auto">
+          <a:xfrm>
+            <a:off x="0" y="0"/>
+            <a:ext cx="21599525" cy="0"/>
+          </a:xfrm>
+          <a:prstGeom prst="rect">
+            <a:avLst/>
+          </a:prstGeom>
+          <a:noFill/>
+          <a:ln>
+            <a:noFill/>
+          </a:ln>
+          <a:effectLst/>
+          <a:extLst>
+            <a:ext uri="{909E8E84-426E-40DD-AFC4-6F175D3DCCD1}">
+              <a14:hiddenFill xmlns:a14="http://schemas.microsoft.com/office/drawing/2010/main">
+                <a:solidFill>
+                  <a:schemeClr val="accent1"/>
+                </a:solidFill>
+              </a14:hiddenFill>
+            </a:ext>
+            <a:ext uri="{91240B29-F687-4F45-9708-019B960494DF}">
+              <a14:hiddenLine xmlns:a14="http://schemas.microsoft.com/office/drawing/2010/main" w="9525">
+                <a:solidFill>
+                  <a:schemeClr val="tx1"/>
+                </a:solidFill>
+                <a:miter lim="800000"/>
+                <a:headEnd/>
+                <a:tailEnd/>
+              </a14:hiddenLine>
+            </a:ext>
+            <a:ext uri="{AF507438-7753-43E0-B8FC-AC1667EBCBE1}">
+              <a14:hiddenEffects xmlns:a14="http://schemas.microsoft.com/office/drawing/2010/main">
+                <a:effectLst>
+                  <a:outerShdw dist="35921" dir="2700000" algn="ctr" rotWithShape="0">
+                    <a:schemeClr val="bg2"/>
+                  </a:outerShdw>
+                </a:effectLst>
+              </a14:hiddenEffects>
+            </a:ext>
+          </a:extLst>
+        </p:spPr>
+        <p:txBody>
+          <a:bodyPr vert="horz" wrap="none" lIns="91440" tIns="45720" rIns="91440" bIns="45720" numCol="1" anchor="ctr" anchorCtr="0" compatLnSpc="1">
+            <a:prstTxWarp prst="textNoShape">
+              <a:avLst/>
+            </a:prstTxWarp>
+            <a:spAutoFit/>
+          </a:bodyPr>
+          <a:lstStyle/>
+          <a:p>
+            <a:pPr marL="0" marR="0" lvl="0" indent="0" algn="l" defTabSz="914400" rtl="0" eaLnBrk="0" fontAlgn="base" latinLnBrk="0" hangingPunct="0">
+              <a:lnSpc>
+                <a:spcPct val="100000"/>
+              </a:lnSpc>
+              <a:spcBef>
+                <a:spcPct val="0"/>
+              </a:spcBef>
+              <a:spcAft>
+                <a:spcPct val="0"/>
+              </a:spcAft>
+              <a:buClrTx/>
+              <a:buSzTx/>
+              <a:buFontTx/>
+              <a:buChar char="•"/>
+              <a:tabLst/>
+            </a:pPr>
+            <a:r>
+              <a:rPr kumimoji="0" lang="en-US" altLang="en-US" sz="1800" b="0" i="0" u="none" strike="noStrike" cap="none" normalizeH="0" baseline="0">
+                <a:ln>
+                  <a:noFill/>
+                </a:ln>
+                <a:solidFill>
+                  <a:schemeClr val="tx1"/>
+                </a:solidFill>
+                <a:effectLst/>
+                <a:latin typeface="Arial" panose="020B0604020202020204" pitchFamily="34" charset="0"/>
+              </a:rPr>
+              <a:t>Review and map the existing code related to machine efficiency and stats.</a:t>
+            </a:r>
+          </a:p>
+          <a:p>
+            <a:pPr marL="0" marR="0" lvl="0" indent="0" algn="l" defTabSz="914400" rtl="0" eaLnBrk="0" fontAlgn="base" latinLnBrk="0" hangingPunct="0">
+              <a:lnSpc>
+                <a:spcPct val="100000"/>
+              </a:lnSpc>
+              <a:spcBef>
+                <a:spcPct val="0"/>
+              </a:spcBef>
+              <a:spcAft>
+                <a:spcPct val="0"/>
+              </a:spcAft>
+              <a:buClrTx/>
+              <a:buSzTx/>
+              <a:buFontTx/>
+              <a:buChar char="•"/>
+              <a:tabLst/>
+            </a:pPr>
+            <a:endParaRPr kumimoji="0" lang="en-US" altLang="en-US" sz="1800" b="0" i="0" u="none" strike="noStrike" cap="none" normalizeH="0" baseline="0">
+              <a:ln>
+                <a:noFill/>
+              </a:ln>
+              <a:solidFill>
+                <a:schemeClr val="tx1"/>
+              </a:solidFill>
+              <a:effectLst/>
+              <a:latin typeface="Arial" panose="020B0604020202020204" pitchFamily="34" charset="0"/>
+            </a:endParaRPr>
+          </a:p>
+        </p:txBody>
+      </p:sp>
+      <p:sp>
+        <p:nvSpPr>
+          <p:cNvPr id="8" name="Google Shape;86;p15">
+            <a:extLst>
+              <a:ext uri="{FF2B5EF4-FFF2-40B4-BE49-F238E27FC236}">
+                <a16:creationId xmlns:a16="http://schemas.microsoft.com/office/drawing/2014/main" id="{081446FE-83FE-D60C-750A-4AE4157D064E}"/>
+              </a:ext>
+            </a:extLst>
+          </p:cNvPr>
+          <p:cNvSpPr/>
+          <p:nvPr/>
+        </p:nvSpPr>
+        <p:spPr>
+          <a:xfrm>
+            <a:off x="18668880" y="2623098"/>
+            <a:ext cx="2436120" cy="1158203"/>
+          </a:xfrm>
+          <a:prstGeom prst="roundRect">
+            <a:avLst>
+              <a:gd name="adj" fmla="val 16667"/>
+            </a:avLst>
+          </a:prstGeom>
+          <a:solidFill>
+            <a:srgbClr val="D9EAD3"/>
+          </a:solidFill>
+          <a:ln w="28575">
+            <a:solidFill>
+              <a:srgbClr val="274E13"/>
+            </a:solidFill>
+            <a:round/>
+          </a:ln>
+        </p:spPr>
+        <p:style>
+          <a:lnRef idx="0">
+            <a:scrgbClr r="0" g="0" b="0"/>
+          </a:lnRef>
+          <a:fillRef idx="0">
+            <a:scrgbClr r="0" g="0" b="0"/>
+          </a:fillRef>
+          <a:effectRef idx="0">
+            <a:scrgbClr r="0" g="0" b="0"/>
+          </a:effectRef>
+          <a:fontRef idx="minor"/>
+        </p:style>
+        <p:txBody>
+          <a:bodyPr lIns="90000" tIns="91440" rIns="90000" bIns="91440" anchor="t">
+            <a:noAutofit/>
+          </a:bodyPr>
+          <a:lstStyle/>
+          <a:p>
+            <a:pPr>
+              <a:lnSpc>
+                <a:spcPct val="100000"/>
+              </a:lnSpc>
+            </a:pPr>
+            <a:r>
+              <a:rPr lang="pt-PT" sz="1400" b="0" u="none" strike="noStrike" dirty="0">
+                <a:solidFill>
+                  <a:srgbClr val="000000"/>
+                </a:solidFill>
+                <a:effectLst/>
+                <a:uFillTx/>
+                <a:latin typeface="Arial"/>
+              </a:rPr>
+              <a:t>Identify the classes that could support upgrade levels or if there’s a need to create new ones.</a:t>
+            </a:r>
+          </a:p>
+        </p:txBody>
+      </p:sp>
+      <p:sp>
+        <p:nvSpPr>
+          <p:cNvPr id="9" name="Google Shape;86;p15">
+            <a:extLst>
+              <a:ext uri="{FF2B5EF4-FFF2-40B4-BE49-F238E27FC236}">
+                <a16:creationId xmlns:a16="http://schemas.microsoft.com/office/drawing/2014/main" id="{73862BF2-25D0-9A7C-9161-6E1572BAA46F}"/>
+              </a:ext>
+            </a:extLst>
+          </p:cNvPr>
+          <p:cNvSpPr/>
+          <p:nvPr/>
+        </p:nvSpPr>
+        <p:spPr>
+          <a:xfrm>
+            <a:off x="18668880" y="4265364"/>
+            <a:ext cx="2436120" cy="1158203"/>
+          </a:xfrm>
+          <a:prstGeom prst="roundRect">
+            <a:avLst>
+              <a:gd name="adj" fmla="val 16667"/>
+            </a:avLst>
+          </a:prstGeom>
+          <a:solidFill>
+            <a:srgbClr val="D9EAD3"/>
+          </a:solidFill>
+          <a:ln w="28575">
+            <a:solidFill>
+              <a:srgbClr val="274E13"/>
+            </a:solidFill>
+            <a:round/>
+          </a:ln>
+        </p:spPr>
+        <p:style>
+          <a:lnRef idx="0">
+            <a:scrgbClr r="0" g="0" b="0"/>
+          </a:lnRef>
+          <a:fillRef idx="0">
+            <a:scrgbClr r="0" g="0" b="0"/>
+          </a:fillRef>
+          <a:effectRef idx="0">
+            <a:scrgbClr r="0" g="0" b="0"/>
+          </a:effectRef>
+          <a:fontRef idx="minor"/>
+        </p:style>
+        <p:txBody>
+          <a:bodyPr lIns="90000" tIns="91440" rIns="90000" bIns="91440" anchor="t">
+            <a:noAutofit/>
+          </a:bodyPr>
+          <a:lstStyle/>
+          <a:p>
+            <a:pPr>
+              <a:lnSpc>
+                <a:spcPct val="100000"/>
+              </a:lnSpc>
+            </a:pPr>
+            <a:r>
+              <a:rPr lang="pt-PT" sz="1400" dirty="0">
+                <a:solidFill>
+                  <a:srgbClr val="000000"/>
+                </a:solidFill>
+                <a:latin typeface="Arial"/>
+              </a:rPr>
+              <a:t>Draft possible methods needed for implementing efficieny upgrades.</a:t>
+            </a:r>
+            <a:endParaRPr lang="pt-PT" sz="1400" b="0" u="none" strike="noStrike" dirty="0">
+              <a:solidFill>
+                <a:srgbClr val="000000"/>
+              </a:solidFill>
+              <a:effectLst/>
+              <a:uFillTx/>
+              <a:latin typeface="Arial"/>
+            </a:endParaRPr>
+          </a:p>
+        </p:txBody>
+      </p:sp>
+      <p:sp>
+        <p:nvSpPr>
+          <p:cNvPr id="10" name="Google Shape;86;p15">
+            <a:extLst>
+              <a:ext uri="{FF2B5EF4-FFF2-40B4-BE49-F238E27FC236}">
+                <a16:creationId xmlns:a16="http://schemas.microsoft.com/office/drawing/2014/main" id="{2B552442-DDE8-6053-C34A-CE20C303A9B2}"/>
+              </a:ext>
+            </a:extLst>
+          </p:cNvPr>
+          <p:cNvSpPr/>
+          <p:nvPr/>
+        </p:nvSpPr>
+        <p:spPr>
+          <a:xfrm>
+            <a:off x="18668880" y="5849835"/>
+            <a:ext cx="2436120" cy="1158203"/>
+          </a:xfrm>
+          <a:prstGeom prst="roundRect">
+            <a:avLst>
+              <a:gd name="adj" fmla="val 16667"/>
+            </a:avLst>
+          </a:prstGeom>
+          <a:solidFill>
+            <a:srgbClr val="D9EAD3"/>
+          </a:solidFill>
+          <a:ln w="28575">
+            <a:solidFill>
+              <a:srgbClr val="274E13"/>
+            </a:solidFill>
+            <a:round/>
+          </a:ln>
+        </p:spPr>
+        <p:style>
+          <a:lnRef idx="0">
+            <a:scrgbClr r="0" g="0" b="0"/>
+          </a:lnRef>
+          <a:fillRef idx="0">
+            <a:scrgbClr r="0" g="0" b="0"/>
+          </a:fillRef>
+          <a:effectRef idx="0">
+            <a:scrgbClr r="0" g="0" b="0"/>
+          </a:effectRef>
+          <a:fontRef idx="minor"/>
+        </p:style>
+        <p:txBody>
+          <a:bodyPr lIns="90000" tIns="91440" rIns="90000" bIns="91440" anchor="t">
+            <a:noAutofit/>
+          </a:bodyPr>
+          <a:lstStyle/>
+          <a:p>
+            <a:pPr>
+              <a:lnSpc>
+                <a:spcPct val="100000"/>
+              </a:lnSpc>
+            </a:pPr>
+            <a:r>
+              <a:rPr lang="pt-PT" sz="1400" b="0" u="none" strike="noStrike" dirty="0">
+                <a:solidFill>
+                  <a:srgbClr val="000000"/>
+                </a:solidFill>
+                <a:effectLst/>
+                <a:uFillTx/>
+                <a:latin typeface="Arial"/>
+              </a:rPr>
+              <a:t>Review and map converyor related code, such as error detection.</a:t>
+            </a:r>
+          </a:p>
+        </p:txBody>
+      </p:sp>
+      <p:sp>
+        <p:nvSpPr>
+          <p:cNvPr id="11" name="Google Shape;86;p15">
+            <a:extLst>
+              <a:ext uri="{FF2B5EF4-FFF2-40B4-BE49-F238E27FC236}">
+                <a16:creationId xmlns:a16="http://schemas.microsoft.com/office/drawing/2014/main" id="{BBAC9B1A-3682-236C-8017-7FEE9E535CD7}"/>
+              </a:ext>
+            </a:extLst>
+          </p:cNvPr>
+          <p:cNvSpPr/>
+          <p:nvPr/>
+        </p:nvSpPr>
+        <p:spPr>
+          <a:xfrm>
+            <a:off x="18668880" y="8890106"/>
+            <a:ext cx="2436120" cy="1158203"/>
+          </a:xfrm>
+          <a:prstGeom prst="roundRect">
+            <a:avLst>
+              <a:gd name="adj" fmla="val 16667"/>
+            </a:avLst>
+          </a:prstGeom>
+          <a:solidFill>
+            <a:srgbClr val="D9EAD3"/>
+          </a:solidFill>
+          <a:ln w="28575">
+            <a:solidFill>
+              <a:srgbClr val="274E13"/>
+            </a:solidFill>
+            <a:round/>
+          </a:ln>
+        </p:spPr>
+        <p:style>
+          <a:lnRef idx="0">
+            <a:scrgbClr r="0" g="0" b="0"/>
+          </a:lnRef>
+          <a:fillRef idx="0">
+            <a:scrgbClr r="0" g="0" b="0"/>
+          </a:fillRef>
+          <a:effectRef idx="0">
+            <a:scrgbClr r="0" g="0" b="0"/>
+          </a:effectRef>
+          <a:fontRef idx="minor"/>
+        </p:style>
+        <p:txBody>
+          <a:bodyPr lIns="90000" tIns="91440" rIns="90000" bIns="91440" anchor="t">
+            <a:noAutofit/>
+          </a:bodyPr>
+          <a:lstStyle/>
+          <a:p>
+            <a:pPr>
+              <a:lnSpc>
+                <a:spcPct val="100000"/>
+              </a:lnSpc>
+            </a:pPr>
+            <a:r>
+              <a:rPr lang="pt-PT" sz="1400" b="0" u="none" strike="noStrike" dirty="0">
+                <a:solidFill>
+                  <a:srgbClr val="000000"/>
+                </a:solidFill>
+                <a:effectLst/>
+                <a:uFillTx/>
+                <a:latin typeface="Arial"/>
+              </a:rPr>
+              <a:t>Locate where warnings and destination checks are currently handled</a:t>
+            </a:r>
+          </a:p>
+        </p:txBody>
+      </p:sp>
+      <p:sp>
+        <p:nvSpPr>
+          <p:cNvPr id="12" name="Google Shape;86;p15">
+            <a:extLst>
+              <a:ext uri="{FF2B5EF4-FFF2-40B4-BE49-F238E27FC236}">
+                <a16:creationId xmlns:a16="http://schemas.microsoft.com/office/drawing/2014/main" id="{1AD6C094-7226-241E-6DB2-42C55C804D5E}"/>
+              </a:ext>
+            </a:extLst>
+          </p:cNvPr>
+          <p:cNvSpPr/>
+          <p:nvPr/>
+        </p:nvSpPr>
+        <p:spPr>
+          <a:xfrm>
+            <a:off x="18668880" y="7389683"/>
+            <a:ext cx="2436120" cy="1158203"/>
+          </a:xfrm>
+          <a:prstGeom prst="roundRect">
+            <a:avLst>
+              <a:gd name="adj" fmla="val 16667"/>
+            </a:avLst>
+          </a:prstGeom>
+          <a:solidFill>
+            <a:srgbClr val="D9EAD3"/>
+          </a:solidFill>
+          <a:ln w="28575">
+            <a:solidFill>
+              <a:srgbClr val="274E13"/>
+            </a:solidFill>
+            <a:round/>
+          </a:ln>
+        </p:spPr>
+        <p:style>
+          <a:lnRef idx="0">
+            <a:scrgbClr r="0" g="0" b="0"/>
+          </a:lnRef>
+          <a:fillRef idx="0">
+            <a:scrgbClr r="0" g="0" b="0"/>
+          </a:fillRef>
+          <a:effectRef idx="0">
+            <a:scrgbClr r="0" g="0" b="0"/>
+          </a:effectRef>
+          <a:fontRef idx="minor"/>
+        </p:style>
+        <p:txBody>
+          <a:bodyPr lIns="90000" tIns="91440" rIns="90000" bIns="91440" anchor="t">
+            <a:noAutofit/>
+          </a:bodyPr>
+          <a:lstStyle/>
+          <a:p>
+            <a:pPr>
+              <a:lnSpc>
+                <a:spcPct val="100000"/>
+              </a:lnSpc>
+            </a:pPr>
+            <a:r>
+              <a:rPr lang="pt-PT" sz="1400" dirty="0">
+                <a:solidFill>
+                  <a:srgbClr val="000000"/>
+                </a:solidFill>
+                <a:latin typeface="Arial"/>
+              </a:rPr>
+              <a:t>Define the structure and behavior of the new warning messages</a:t>
+            </a:r>
+            <a:endParaRPr lang="pt-PT" sz="1400" b="0" u="none" strike="noStrike" dirty="0">
+              <a:solidFill>
+                <a:srgbClr val="000000"/>
+              </a:solidFill>
+              <a:effectLst/>
+              <a:uFillTx/>
+              <a:latin typeface="Arial"/>
+            </a:endParaRPr>
+          </a:p>
+        </p:txBody>
+      </p:sp>
+      <p:sp>
+        <p:nvSpPr>
+          <p:cNvPr id="2" name="Google Shape;86;p15">
+            <a:extLst>
+              <a:ext uri="{FF2B5EF4-FFF2-40B4-BE49-F238E27FC236}">
+                <a16:creationId xmlns:a16="http://schemas.microsoft.com/office/drawing/2014/main" id="{27697F4F-64C0-511E-B9E3-8A837346B691}"/>
+              </a:ext>
+            </a:extLst>
+          </p:cNvPr>
+          <p:cNvSpPr/>
+          <p:nvPr/>
+        </p:nvSpPr>
+        <p:spPr>
+          <a:xfrm>
+            <a:off x="12424500" y="1382566"/>
+            <a:ext cx="2409840" cy="879561"/>
+          </a:xfrm>
+          <a:prstGeom prst="roundRect">
+            <a:avLst>
+              <a:gd name="adj" fmla="val 16667"/>
+            </a:avLst>
+          </a:prstGeom>
+          <a:solidFill>
+            <a:srgbClr val="D9EAD3"/>
+          </a:solidFill>
+          <a:ln w="28575">
+            <a:solidFill>
+              <a:srgbClr val="274E13"/>
+            </a:solidFill>
+            <a:round/>
+          </a:ln>
+        </p:spPr>
+        <p:style>
+          <a:lnRef idx="0">
+            <a:scrgbClr r="0" g="0" b="0"/>
+          </a:lnRef>
+          <a:fillRef idx="0">
+            <a:scrgbClr r="0" g="0" b="0"/>
+          </a:fillRef>
+          <a:effectRef idx="0">
+            <a:scrgbClr r="0" g="0" b="0"/>
+          </a:effectRef>
+          <a:fontRef idx="minor"/>
+        </p:style>
+        <p:txBody>
+          <a:bodyPr lIns="90000" tIns="91440" rIns="90000" bIns="91440" anchor="t">
+            <a:noAutofit/>
+          </a:bodyPr>
+          <a:lstStyle/>
+          <a:p>
+            <a:pPr>
+              <a:lnSpc>
+                <a:spcPct val="100000"/>
+              </a:lnSpc>
+            </a:pPr>
+            <a:r>
+              <a:rPr lang="pt-PT" sz="1400" dirty="0">
+                <a:solidFill>
+                  <a:srgbClr val="000000"/>
+                </a:solidFill>
+                <a:latin typeface="Arial"/>
+              </a:rPr>
+              <a:t>US1</a:t>
+            </a:r>
+            <a:r>
+              <a:rPr lang="en-US" sz="1400" dirty="0">
+                <a:solidFill>
+                  <a:srgbClr val="000000"/>
+                </a:solidFill>
+                <a:latin typeface="Arial"/>
+              </a:rPr>
+              <a:t>: implementing</a:t>
+            </a:r>
+          </a:p>
+          <a:p>
+            <a:pPr>
+              <a:lnSpc>
+                <a:spcPct val="100000"/>
+              </a:lnSpc>
+            </a:pPr>
+            <a:endParaRPr lang="pt-PT" sz="1400" b="0" u="none" strike="noStrike" dirty="0">
+              <a:solidFill>
+                <a:srgbClr val="000000"/>
+              </a:solidFill>
+              <a:effectLst/>
+              <a:uFillTx/>
+              <a:latin typeface="Arial"/>
+            </a:endParaRPr>
+          </a:p>
+        </p:txBody>
+      </p:sp>
+      <p:sp>
+        <p:nvSpPr>
+          <p:cNvPr id="3" name="Google Shape;86;p15">
+            <a:extLst>
+              <a:ext uri="{FF2B5EF4-FFF2-40B4-BE49-F238E27FC236}">
+                <a16:creationId xmlns:a16="http://schemas.microsoft.com/office/drawing/2014/main" id="{B01D7A90-0FAD-D5A6-F526-414F260045E9}"/>
+              </a:ext>
+            </a:extLst>
+          </p:cNvPr>
+          <p:cNvSpPr/>
+          <p:nvPr/>
+        </p:nvSpPr>
+        <p:spPr>
+          <a:xfrm>
+            <a:off x="12395880" y="5940128"/>
+            <a:ext cx="2393010" cy="879561"/>
+          </a:xfrm>
+          <a:prstGeom prst="roundRect">
+            <a:avLst>
+              <a:gd name="adj" fmla="val 16667"/>
+            </a:avLst>
+          </a:prstGeom>
+          <a:solidFill>
+            <a:srgbClr val="D9EAD3"/>
+          </a:solidFill>
+          <a:ln w="28575">
+            <a:solidFill>
+              <a:srgbClr val="274E13"/>
+            </a:solidFill>
+            <a:round/>
+          </a:ln>
+        </p:spPr>
+        <p:style>
+          <a:lnRef idx="0">
+            <a:scrgbClr r="0" g="0" b="0"/>
+          </a:lnRef>
+          <a:fillRef idx="0">
+            <a:scrgbClr r="0" g="0" b="0"/>
+          </a:fillRef>
+          <a:effectRef idx="0">
+            <a:scrgbClr r="0" g="0" b="0"/>
+          </a:effectRef>
+          <a:fontRef idx="minor"/>
+        </p:style>
+        <p:txBody>
+          <a:bodyPr lIns="90000" tIns="91440" rIns="90000" bIns="91440" anchor="t">
+            <a:noAutofit/>
+          </a:bodyPr>
+          <a:lstStyle/>
+          <a:p>
+            <a:pPr>
+              <a:lnSpc>
+                <a:spcPct val="100000"/>
+              </a:lnSpc>
+            </a:pPr>
+            <a:r>
+              <a:rPr lang="pt-PT" sz="1400" dirty="0">
+                <a:solidFill>
+                  <a:srgbClr val="000000"/>
+                </a:solidFill>
+                <a:latin typeface="Arial"/>
+              </a:rPr>
+              <a:t>US2</a:t>
+            </a:r>
+            <a:r>
+              <a:rPr lang="en-US" sz="1400" dirty="0">
+                <a:solidFill>
+                  <a:srgbClr val="000000"/>
+                </a:solidFill>
+                <a:latin typeface="Arial"/>
+              </a:rPr>
+              <a:t>: implementing</a:t>
+            </a:r>
+          </a:p>
+          <a:p>
+            <a:pPr>
+              <a:lnSpc>
+                <a:spcPct val="100000"/>
+              </a:lnSpc>
+            </a:pPr>
+            <a:endParaRPr lang="pt-PT" sz="1400" b="0" u="none" strike="noStrike" dirty="0">
+              <a:solidFill>
+                <a:srgbClr val="000000"/>
+              </a:solidFill>
+              <a:effectLst/>
+              <a:uFillTx/>
+              <a:latin typeface="Arial"/>
+            </a:endParaRPr>
+          </a:p>
+        </p:txBody>
+      </p:sp>
+      <p:sp>
+        <p:nvSpPr>
+          <p:cNvPr id="4" name="Google Shape;86;p15">
+            <a:extLst>
+              <a:ext uri="{FF2B5EF4-FFF2-40B4-BE49-F238E27FC236}">
+                <a16:creationId xmlns:a16="http://schemas.microsoft.com/office/drawing/2014/main" id="{1AC69F1E-2231-B90F-6D33-E931C11569AA}"/>
+              </a:ext>
+            </a:extLst>
+          </p:cNvPr>
+          <p:cNvSpPr/>
+          <p:nvPr/>
+        </p:nvSpPr>
+        <p:spPr>
+          <a:xfrm>
+            <a:off x="12424500" y="2775604"/>
+            <a:ext cx="2409840" cy="879561"/>
+          </a:xfrm>
+          <a:prstGeom prst="roundRect">
+            <a:avLst>
+              <a:gd name="adj" fmla="val 16667"/>
+            </a:avLst>
+          </a:prstGeom>
+          <a:solidFill>
+            <a:srgbClr val="D9EAD3"/>
+          </a:solidFill>
+          <a:ln w="28575">
+            <a:solidFill>
+              <a:srgbClr val="274E13"/>
+            </a:solidFill>
+            <a:round/>
+          </a:ln>
+        </p:spPr>
+        <p:style>
+          <a:lnRef idx="0">
+            <a:scrgbClr r="0" g="0" b="0"/>
+          </a:lnRef>
+          <a:fillRef idx="0">
+            <a:scrgbClr r="0" g="0" b="0"/>
+          </a:fillRef>
+          <a:effectRef idx="0">
+            <a:scrgbClr r="0" g="0" b="0"/>
+          </a:effectRef>
+          <a:fontRef idx="minor"/>
+        </p:style>
+        <p:txBody>
+          <a:bodyPr lIns="90000" tIns="91440" rIns="90000" bIns="91440" anchor="t">
+            <a:noAutofit/>
+          </a:bodyPr>
+          <a:lstStyle/>
+          <a:p>
+            <a:pPr>
+              <a:lnSpc>
+                <a:spcPct val="100000"/>
+              </a:lnSpc>
+            </a:pPr>
+            <a:r>
+              <a:rPr lang="pt-PT" sz="1400" dirty="0">
+                <a:solidFill>
+                  <a:srgbClr val="000000"/>
+                </a:solidFill>
+                <a:latin typeface="Arial"/>
+              </a:rPr>
+              <a:t>US1</a:t>
+            </a:r>
+            <a:r>
+              <a:rPr lang="en-US" sz="1400" dirty="0">
+                <a:solidFill>
+                  <a:srgbClr val="000000"/>
+                </a:solidFill>
+                <a:latin typeface="Arial"/>
+              </a:rPr>
+              <a:t>: implementing</a:t>
+            </a:r>
+          </a:p>
+          <a:p>
+            <a:pPr>
+              <a:lnSpc>
+                <a:spcPct val="100000"/>
+              </a:lnSpc>
+            </a:pPr>
+            <a:endParaRPr lang="pt-PT" sz="1400" b="0" u="none" strike="noStrike" dirty="0">
+              <a:solidFill>
+                <a:srgbClr val="000000"/>
+              </a:solidFill>
+              <a:effectLst/>
+              <a:uFillTx/>
+              <a:latin typeface="Arial"/>
+            </a:endParaRPr>
+          </a:p>
+        </p:txBody>
+      </p:sp>
+      <p:sp>
+        <p:nvSpPr>
+          <p:cNvPr id="7" name="Google Shape;86;p15">
+            <a:extLst>
+              <a:ext uri="{FF2B5EF4-FFF2-40B4-BE49-F238E27FC236}">
+                <a16:creationId xmlns:a16="http://schemas.microsoft.com/office/drawing/2014/main" id="{D959B60C-9E5C-1B51-CC1C-CA750F9BEA94}"/>
+              </a:ext>
+            </a:extLst>
+          </p:cNvPr>
+          <p:cNvSpPr/>
+          <p:nvPr/>
+        </p:nvSpPr>
+        <p:spPr>
+          <a:xfrm>
+            <a:off x="12395880" y="4329211"/>
+            <a:ext cx="2409840" cy="879561"/>
+          </a:xfrm>
+          <a:prstGeom prst="roundRect">
+            <a:avLst>
+              <a:gd name="adj" fmla="val 16667"/>
+            </a:avLst>
+          </a:prstGeom>
+          <a:solidFill>
+            <a:srgbClr val="D9EAD3"/>
+          </a:solidFill>
+          <a:ln w="28575">
+            <a:solidFill>
+              <a:srgbClr val="274E13"/>
+            </a:solidFill>
+            <a:round/>
+          </a:ln>
+        </p:spPr>
+        <p:style>
+          <a:lnRef idx="0">
+            <a:scrgbClr r="0" g="0" b="0"/>
+          </a:lnRef>
+          <a:fillRef idx="0">
+            <a:scrgbClr r="0" g="0" b="0"/>
+          </a:fillRef>
+          <a:effectRef idx="0">
+            <a:scrgbClr r="0" g="0" b="0"/>
+          </a:effectRef>
+          <a:fontRef idx="minor"/>
+        </p:style>
+        <p:txBody>
+          <a:bodyPr lIns="90000" tIns="91440" rIns="90000" bIns="91440" anchor="t">
+            <a:noAutofit/>
+          </a:bodyPr>
+          <a:lstStyle/>
+          <a:p>
+            <a:pPr>
+              <a:lnSpc>
+                <a:spcPct val="100000"/>
+              </a:lnSpc>
+            </a:pPr>
+            <a:r>
+              <a:rPr lang="pt-PT" sz="1400" dirty="0">
+                <a:solidFill>
+                  <a:srgbClr val="000000"/>
+                </a:solidFill>
+                <a:latin typeface="Arial"/>
+              </a:rPr>
+              <a:t>US1</a:t>
+            </a:r>
+            <a:r>
+              <a:rPr lang="en-US" sz="1400" dirty="0">
+                <a:solidFill>
+                  <a:srgbClr val="000000"/>
+                </a:solidFill>
+                <a:latin typeface="Arial"/>
+              </a:rPr>
+              <a:t>: implementing</a:t>
+            </a:r>
+          </a:p>
+          <a:p>
+            <a:pPr>
+              <a:lnSpc>
+                <a:spcPct val="100000"/>
+              </a:lnSpc>
+            </a:pPr>
+            <a:endParaRPr lang="pt-PT" sz="1400" b="0" u="none" strike="noStrike" dirty="0">
+              <a:solidFill>
+                <a:srgbClr val="000000"/>
+              </a:solidFill>
+              <a:effectLst/>
+              <a:uFillTx/>
+              <a:latin typeface="Arial"/>
+            </a:endParaRPr>
+          </a:p>
+        </p:txBody>
+      </p:sp>
+      <p:sp>
+        <p:nvSpPr>
+          <p:cNvPr id="14" name="Google Shape;86;p15">
+            <a:extLst>
+              <a:ext uri="{FF2B5EF4-FFF2-40B4-BE49-F238E27FC236}">
+                <a16:creationId xmlns:a16="http://schemas.microsoft.com/office/drawing/2014/main" id="{E17E7993-E2F3-995B-C2AD-361026EE112C}"/>
+              </a:ext>
+            </a:extLst>
+          </p:cNvPr>
+          <p:cNvSpPr/>
+          <p:nvPr/>
+        </p:nvSpPr>
+        <p:spPr>
+          <a:xfrm>
+            <a:off x="12395880" y="9079172"/>
+            <a:ext cx="2393010" cy="879561"/>
+          </a:xfrm>
+          <a:prstGeom prst="roundRect">
+            <a:avLst>
+              <a:gd name="adj" fmla="val 16667"/>
+            </a:avLst>
+          </a:prstGeom>
+          <a:solidFill>
+            <a:srgbClr val="D9EAD3"/>
+          </a:solidFill>
+          <a:ln w="28575">
+            <a:solidFill>
+              <a:srgbClr val="274E13"/>
+            </a:solidFill>
+            <a:round/>
+          </a:ln>
+        </p:spPr>
+        <p:style>
+          <a:lnRef idx="0">
+            <a:scrgbClr r="0" g="0" b="0"/>
+          </a:lnRef>
+          <a:fillRef idx="0">
+            <a:scrgbClr r="0" g="0" b="0"/>
+          </a:fillRef>
+          <a:effectRef idx="0">
+            <a:scrgbClr r="0" g="0" b="0"/>
+          </a:effectRef>
+          <a:fontRef idx="minor"/>
+        </p:style>
+        <p:txBody>
+          <a:bodyPr lIns="90000" tIns="91440" rIns="90000" bIns="91440" anchor="t">
+            <a:noAutofit/>
+          </a:bodyPr>
+          <a:lstStyle/>
+          <a:p>
+            <a:pPr>
+              <a:lnSpc>
+                <a:spcPct val="100000"/>
+              </a:lnSpc>
+            </a:pPr>
+            <a:r>
+              <a:rPr lang="pt-PT" sz="1400" dirty="0">
+                <a:solidFill>
+                  <a:srgbClr val="000000"/>
+                </a:solidFill>
+                <a:latin typeface="Arial"/>
+              </a:rPr>
+              <a:t>US2</a:t>
+            </a:r>
+            <a:r>
+              <a:rPr lang="en-US" sz="1400" dirty="0">
+                <a:solidFill>
+                  <a:srgbClr val="000000"/>
+                </a:solidFill>
+                <a:latin typeface="Arial"/>
+              </a:rPr>
+              <a:t>: implementing</a:t>
+            </a:r>
+          </a:p>
+          <a:p>
+            <a:pPr>
+              <a:lnSpc>
+                <a:spcPct val="100000"/>
+              </a:lnSpc>
+            </a:pPr>
+            <a:endParaRPr lang="pt-PT" sz="1400" b="0" u="none" strike="noStrike" dirty="0">
+              <a:solidFill>
+                <a:srgbClr val="000000"/>
+              </a:solidFill>
+              <a:effectLst/>
+              <a:uFillTx/>
+              <a:latin typeface="Arial"/>
+            </a:endParaRPr>
+          </a:p>
+        </p:txBody>
+      </p:sp>
+      <p:sp>
+        <p:nvSpPr>
+          <p:cNvPr id="15" name="Google Shape;86;p15">
+            <a:extLst>
+              <a:ext uri="{FF2B5EF4-FFF2-40B4-BE49-F238E27FC236}">
+                <a16:creationId xmlns:a16="http://schemas.microsoft.com/office/drawing/2014/main" id="{B95E067B-FFF7-EE91-437F-9D4B5805B73D}"/>
+              </a:ext>
+            </a:extLst>
+          </p:cNvPr>
+          <p:cNvSpPr/>
+          <p:nvPr/>
+        </p:nvSpPr>
+        <p:spPr>
+          <a:xfrm>
+            <a:off x="12424500" y="7385601"/>
+            <a:ext cx="2393010" cy="879561"/>
+          </a:xfrm>
+          <a:prstGeom prst="roundRect">
+            <a:avLst>
+              <a:gd name="adj" fmla="val 16667"/>
+            </a:avLst>
+          </a:prstGeom>
+          <a:solidFill>
+            <a:srgbClr val="D9EAD3"/>
+          </a:solidFill>
+          <a:ln w="28575">
+            <a:solidFill>
+              <a:srgbClr val="274E13"/>
+            </a:solidFill>
+            <a:round/>
+          </a:ln>
+        </p:spPr>
+        <p:style>
+          <a:lnRef idx="0">
+            <a:scrgbClr r="0" g="0" b="0"/>
+          </a:lnRef>
+          <a:fillRef idx="0">
+            <a:scrgbClr r="0" g="0" b="0"/>
+          </a:fillRef>
+          <a:effectRef idx="0">
+            <a:scrgbClr r="0" g="0" b="0"/>
+          </a:effectRef>
+          <a:fontRef idx="minor"/>
+        </p:style>
+        <p:txBody>
+          <a:bodyPr lIns="90000" tIns="91440" rIns="90000" bIns="91440" anchor="t">
+            <a:noAutofit/>
+          </a:bodyPr>
+          <a:lstStyle/>
+          <a:p>
+            <a:pPr>
+              <a:lnSpc>
+                <a:spcPct val="100000"/>
+              </a:lnSpc>
+            </a:pPr>
+            <a:r>
+              <a:rPr lang="pt-PT" sz="1400" dirty="0">
+                <a:solidFill>
+                  <a:srgbClr val="000000"/>
+                </a:solidFill>
+                <a:latin typeface="Arial"/>
+              </a:rPr>
+              <a:t>US2</a:t>
+            </a:r>
+            <a:r>
+              <a:rPr lang="en-US" sz="1400" dirty="0">
+                <a:solidFill>
+                  <a:srgbClr val="000000"/>
+                </a:solidFill>
+                <a:latin typeface="Arial"/>
+              </a:rPr>
+              <a:t>: implementing</a:t>
+            </a:r>
+          </a:p>
+          <a:p>
+            <a:pPr>
+              <a:lnSpc>
+                <a:spcPct val="100000"/>
+              </a:lnSpc>
+            </a:pPr>
+            <a:endParaRPr lang="pt-PT" sz="1400" b="0" u="none" strike="noStrike" dirty="0">
+              <a:solidFill>
+                <a:srgbClr val="000000"/>
+              </a:solidFill>
+              <a:effectLst/>
+              <a:uFillTx/>
+              <a:latin typeface="Arial"/>
+            </a:endParaRPr>
+          </a:p>
+        </p:txBody>
+      </p:sp>
+    </p:spTree>
+    <p:extLst>
+      <p:ext uri="{BB962C8B-B14F-4D97-AF65-F5344CB8AC3E}">
+        <p14:creationId xmlns:p14="http://schemas.microsoft.com/office/powerpoint/2010/main" val="114089205"/>
       </p:ext>
     </p:extLst>
   </p:cSld>
